--- a/outputs/posters/poster_pns_asma_classico_pt.pptx
+++ b/outputs/posters/poster_pns_asma_classico_pt.pptx
@@ -3908,7 +3908,7 @@
 </file>
 
 <file path=ppt/slides/slide1.xml><?xml version="1.0" encoding="utf-8"?>
-<p:sld xmlns:p="http://schemas.openxmlformats.org/presentationml/2006/main">
+<p:sld xmlns:a="http://schemas.openxmlformats.org/drawingml/2006/main" xmlns:ns3="http://schemas.microsoft.com/office/drawing/2014/main" xmlns:ns4="http://schemas.microsoft.com/office/powerpoint/2010/main" xmlns:p="http://schemas.openxmlformats.org/presentationml/2006/main" xmlns:r="http://schemas.openxmlformats.org/officeDocument/2006/relationships">
   <p:cSld>
     <p:spTree>
       <p:nvGrpSpPr>
@@ -3917,27 +3917,27 @@
         <p:nvPr/>
       </p:nvGrpSpPr>
       <p:grpSpPr>
-        <a:xfrm xmlns:a="http://schemas.openxmlformats.org/drawingml/2006/main"/>
+        <a:xfrm/>
       </p:grpSpPr>
       <p:pic>
         <p:nvPicPr>
           <p:cNvPr id="108" name="Imagem 3"/>
           <p:cNvPicPr>
-            <a:picLocks xmlns:a="http://schemas.openxmlformats.org/drawingml/2006/main" noChangeAspect="1"/>
+            <a:picLocks noChangeAspect="1"/>
           </p:cNvPicPr>
           <p:nvPr/>
         </p:nvPicPr>
         <p:blipFill>
-          <a:blip xmlns:r="http://schemas.openxmlformats.org/officeDocument/2006/relationships" xmlns:a="http://schemas.openxmlformats.org/drawingml/2006/main" r:embed="R93936a15ffc5402c"/>
-          <a:srcRect xmlns:a="http://schemas.openxmlformats.org/drawingml/2006/main" l="0" t="41985" r="50251" b="34197"/>
-          <a:stretch xmlns:a="http://schemas.openxmlformats.org/drawingml/2006/main"/>
+          <a:blip r:embed="R93936a15ffc5402c"/>
+          <a:srcRect l="0" t="41985" r="50251" b="34197"/>
+          <a:stretch/>
         </p:blipFill>
         <p:spPr>
-          <a:xfrm xmlns:a="http://schemas.openxmlformats.org/drawingml/2006/main" rot="0" flipH="1" flipV="0">
+          <a:xfrm rot="0" flipH="1" flipV="0">
             <a:off x="17442037" y="1"/>
             <a:ext cx="17548975" cy="4696690"/>
           </a:xfrm>
-          <a:prstGeom xmlns:a="http://schemas.openxmlformats.org/drawingml/2006/main" prst="rect">
+          <a:prstGeom prst="rect">
             <a:avLst/>
           </a:prstGeom>
         </p:spPr>
@@ -3946,21 +3946,21 @@
         <p:nvPicPr>
           <p:cNvPr id="109" name="Imagem 7"/>
           <p:cNvPicPr>
-            <a:picLocks xmlns:a="http://schemas.openxmlformats.org/drawingml/2006/main" noChangeAspect="1"/>
+            <a:picLocks noChangeAspect="1"/>
           </p:cNvPicPr>
           <p:nvPr/>
         </p:nvPicPr>
         <p:blipFill>
-          <a:blip xmlns:r="http://schemas.openxmlformats.org/officeDocument/2006/relationships" xmlns:a="http://schemas.openxmlformats.org/drawingml/2006/main" r:embed="R93936a15ffc5402c"/>
-          <a:srcRect xmlns:a="http://schemas.openxmlformats.org/drawingml/2006/main" l="0" t="0" r="0" b="0"/>
-          <a:stretch xmlns:a="http://schemas.openxmlformats.org/drawingml/2006/main"/>
+          <a:blip r:embed="R93936a15ffc5402c"/>
+          <a:srcRect l="0" t="0" r="0" b="0"/>
+          <a:stretch/>
         </p:blipFill>
         <p:spPr>
-          <a:xfrm xmlns:a="http://schemas.openxmlformats.org/drawingml/2006/main" rot="0" flipH="0" flipV="0">
+          <a:xfrm rot="0" flipH="0" flipV="0">
             <a:off x="34816366" y="1"/>
             <a:ext cx="8384272" cy="4696690"/>
           </a:xfrm>
-          <a:prstGeom xmlns:a="http://schemas.openxmlformats.org/drawingml/2006/main" prst="rect">
+          <a:prstGeom prst="rect">
             <a:avLst/>
           </a:prstGeom>
         </p:spPr>
@@ -3969,21 +3969,21 @@
         <p:nvPicPr>
           <p:cNvPr id="110" name="Imagem 12"/>
           <p:cNvPicPr>
-            <a:picLocks xmlns:a="http://schemas.openxmlformats.org/drawingml/2006/main" noChangeAspect="1"/>
+            <a:picLocks noChangeAspect="1"/>
           </p:cNvPicPr>
           <p:nvPr/>
         </p:nvPicPr>
         <p:blipFill>
-          <a:blip xmlns:r="http://schemas.openxmlformats.org/officeDocument/2006/relationships" xmlns:a="http://schemas.openxmlformats.org/drawingml/2006/main" r:embed="R93936a15ffc5402c"/>
-          <a:srcRect xmlns:a="http://schemas.openxmlformats.org/drawingml/2006/main" l="0" t="41985" r="50251" b="34197"/>
-          <a:stretch xmlns:a="http://schemas.openxmlformats.org/drawingml/2006/main"/>
+          <a:blip r:embed="R93936a15ffc5402c"/>
+          <a:srcRect l="0" t="41985" r="50251" b="34197"/>
+          <a:stretch/>
         </p:blipFill>
         <p:spPr>
-          <a:xfrm xmlns:a="http://schemas.openxmlformats.org/drawingml/2006/main" rot="10800000" flipH="1" flipV="0">
+          <a:xfrm rot="10800000" flipH="1" flipV="0">
             <a:off x="0" y="1"/>
             <a:ext cx="17548975" cy="4696690"/>
           </a:xfrm>
-          <a:prstGeom xmlns:a="http://schemas.openxmlformats.org/drawingml/2006/main" prst="rect">
+          <a:prstGeom prst="rect">
             <a:avLst/>
           </a:prstGeom>
         </p:spPr>
@@ -3992,22 +3992,22 @@
         <p:nvPicPr>
           <p:cNvPr id="111" name="Imagem 9"/>
           <p:cNvPicPr>
-            <a:picLocks xmlns:a="http://schemas.openxmlformats.org/drawingml/2006/main" noChangeAspect="1"/>
+            <a:picLocks noChangeAspect="1"/>
           </p:cNvPicPr>
           <p:nvPr/>
         </p:nvPicPr>
         <p:blipFill>
-          <a:blip xmlns:r="http://schemas.openxmlformats.org/officeDocument/2006/relationships" xmlns:a="http://schemas.openxmlformats.org/drawingml/2006/main" r:embed="Raf7bddf60b12439a"/>
-          <a:stretch xmlns:a="http://schemas.openxmlformats.org/drawingml/2006/main">
+          <a:blip r:embed="Raf7bddf60b12439a"/>
+          <a:stretch>
             <a:fillRect l="0" t="0" r="0" b="0"/>
           </a:stretch>
         </p:blipFill>
         <p:spPr>
-          <a:xfrm xmlns:a="http://schemas.openxmlformats.org/drawingml/2006/main">
+          <a:xfrm>
             <a:off x="1104807" y="998069"/>
             <a:ext cx="12847803" cy="2658990"/>
           </a:xfrm>
-          <a:prstGeom xmlns:a="http://schemas.openxmlformats.org/drawingml/2006/main" prst="rect">
+          <a:prstGeom prst="rect">
             <a:avLst/>
           </a:prstGeom>
         </p:spPr>
@@ -4015,44 +4015,44 @@
       <p:sp>
         <p:nvSpPr>
           <p:cNvPr id="30" name="CustomShape 2">
-            <a:extLst xmlns:a="http://schemas.openxmlformats.org/drawingml/2006/main">
-              <a:ext uri="{FF2B5EF4-FFF2-40B4-BE49-F238E27FC236}">
-                <a16:creationId xmlns:a16="http://schemas.microsoft.com/office/drawing/2014/main" id="{FE98121D-8F4A-D71C-8D06-5DE5B30E6A92}"/>
-              </a:ext>
-            </a:extLst>
-          </p:cNvPr>
-          <p:cNvSpPr>
-            <a:spLocks xmlns:a="http://schemas.openxmlformats.org/drawingml/2006/main" noGrp="1"/>
+            <a:extLst>
+              <a:ext uri="{FF2B5EF4-FFF2-40B4-BE49-F238E27FC236}">
+                <ns3:creationId id="{FE98121D-8F4A-D71C-8D06-5DE5B30E6A92}"/>
+              </a:ext>
+            </a:extLst>
+          </p:cNvPr>
+          <p:cNvSpPr>
+            <a:spLocks noGrp="1"/>
           </p:cNvSpPr>
           <p:nvPr/>
         </p:nvSpPr>
         <p:spPr>
-          <a:xfrm xmlns:a="http://schemas.openxmlformats.org/drawingml/2006/main">
+          <a:xfrm>
             <a:off x="1104806" y="6598088"/>
             <a:ext cx="9653040" cy="912960"/>
           </a:xfrm>
-          <a:prstGeom xmlns:a="http://schemas.openxmlformats.org/drawingml/2006/main" prst="rect">
+          <a:prstGeom prst="rect">
             <a:avLst/>
           </a:prstGeom>
-          <a:solidFill xmlns:a="http://schemas.openxmlformats.org/drawingml/2006/main">
+          <a:solidFill>
             <a:srgbClr val="1C425B"/>
           </a:solidFill>
-          <a:ln xmlns:a="http://schemas.openxmlformats.org/drawingml/2006/main">
+          <a:ln>
             <a:noFill/>
           </a:ln>
         </p:spPr>
         <p:style>
-          <a:lnRef xmlns:a="http://schemas.openxmlformats.org/drawingml/2006/main" idx="0"/>
-          <a:fillRef xmlns:a="http://schemas.openxmlformats.org/drawingml/2006/main" idx="0"/>
-          <a:effectRef xmlns:a="http://schemas.openxmlformats.org/drawingml/2006/main" idx="0"/>
-          <a:fontRef xmlns:a="http://schemas.openxmlformats.org/drawingml/2006/main" idx="minor"/>
+          <a:lnRef idx="0"/>
+          <a:fillRef idx="0"/>
+          <a:effectRef idx="0"/>
+          <a:fontRef idx="minor"/>
         </p:style>
         <p:txBody>
-          <a:bodyPr xmlns:a="http://schemas.openxmlformats.org/drawingml/2006/main" lIns="90000" tIns="45000" rIns="90000" bIns="45000">
+          <a:bodyPr lIns="90000" tIns="45000" rIns="90000" bIns="45000">
             <a:spAutoFit/>
           </a:bodyPr>
-          <a:lstStyle xmlns:a="http://schemas.openxmlformats.org/drawingml/2006/main"/>
-          <a:p xmlns:a="http://schemas.openxmlformats.org/drawingml/2006/main">
+          <a:lstStyle/>
+          <a:p>
             <a:pPr algn="ctr">
               <a:lnSpc>
                 <a:spcPct val="100000"/>
@@ -4076,44 +4076,44 @@
       <p:sp>
         <p:nvSpPr>
           <p:cNvPr id="31" name="CustomShape 3">
-            <a:extLst xmlns:a="http://schemas.openxmlformats.org/drawingml/2006/main">
-              <a:ext uri="{FF2B5EF4-FFF2-40B4-BE49-F238E27FC236}">
-                <a16:creationId xmlns:a16="http://schemas.microsoft.com/office/drawing/2014/main" id="{8151D5D6-229C-BBFF-BB22-6FFAEFF57C7F}"/>
-              </a:ext>
-            </a:extLst>
-          </p:cNvPr>
-          <p:cNvSpPr>
-            <a:spLocks xmlns:a="http://schemas.openxmlformats.org/drawingml/2006/main" noGrp="1"/>
+            <a:extLst>
+              <a:ext uri="{FF2B5EF4-FFF2-40B4-BE49-F238E27FC236}">
+                <ns3:creationId id="{8151D5D6-229C-BBFF-BB22-6FFAEFF57C7F}"/>
+              </a:ext>
+            </a:extLst>
+          </p:cNvPr>
+          <p:cNvSpPr>
+            <a:spLocks noGrp="1"/>
           </p:cNvSpPr>
           <p:nvPr/>
         </p:nvSpPr>
         <p:spPr>
-          <a:xfrm xmlns:a="http://schemas.openxmlformats.org/drawingml/2006/main">
+          <a:xfrm>
             <a:off x="11615726" y="6598088"/>
             <a:ext cx="9662400" cy="912960"/>
           </a:xfrm>
-          <a:prstGeom xmlns:a="http://schemas.openxmlformats.org/drawingml/2006/main" prst="rect">
+          <a:prstGeom prst="rect">
             <a:avLst/>
           </a:prstGeom>
-          <a:solidFill xmlns:a="http://schemas.openxmlformats.org/drawingml/2006/main">
+          <a:solidFill>
             <a:srgbClr val="1C425B"/>
           </a:solidFill>
-          <a:ln xmlns:a="http://schemas.openxmlformats.org/drawingml/2006/main">
+          <a:ln>
             <a:noFill/>
           </a:ln>
         </p:spPr>
         <p:style>
-          <a:lnRef xmlns:a="http://schemas.openxmlformats.org/drawingml/2006/main" idx="0"/>
-          <a:fillRef xmlns:a="http://schemas.openxmlformats.org/drawingml/2006/main" idx="0"/>
-          <a:effectRef xmlns:a="http://schemas.openxmlformats.org/drawingml/2006/main" idx="0"/>
-          <a:fontRef xmlns:a="http://schemas.openxmlformats.org/drawingml/2006/main" idx="minor"/>
+          <a:lnRef idx="0"/>
+          <a:fillRef idx="0"/>
+          <a:effectRef idx="0"/>
+          <a:fontRef idx="minor"/>
         </p:style>
         <p:txBody>
-          <a:bodyPr xmlns:a="http://schemas.openxmlformats.org/drawingml/2006/main" lIns="90000" tIns="45000" rIns="90000" bIns="45000">
+          <a:bodyPr lIns="90000" tIns="45000" rIns="90000" bIns="45000">
             <a:spAutoFit/>
           </a:bodyPr>
-          <a:lstStyle xmlns:a="http://schemas.openxmlformats.org/drawingml/2006/main"/>
-          <a:p xmlns:a="http://schemas.openxmlformats.org/drawingml/2006/main">
+          <a:lstStyle/>
+          <a:p>
             <a:pPr algn="ctr">
               <a:lnSpc>
                 <a:spcPct val="100000"/>
@@ -4137,44 +4137,44 @@
       <p:sp>
         <p:nvSpPr>
           <p:cNvPr id="32" name="CustomShape 4">
-            <a:extLst xmlns:a="http://schemas.openxmlformats.org/drawingml/2006/main">
-              <a:ext uri="{FF2B5EF4-FFF2-40B4-BE49-F238E27FC236}">
-                <a16:creationId xmlns:a16="http://schemas.microsoft.com/office/drawing/2014/main" id="{DFC10092-CAB3-EC38-0F46-6962C23892D5}"/>
-              </a:ext>
-            </a:extLst>
-          </p:cNvPr>
-          <p:cNvSpPr>
-            <a:spLocks xmlns:a="http://schemas.openxmlformats.org/drawingml/2006/main" noGrp="1"/>
+            <a:extLst>
+              <a:ext uri="{FF2B5EF4-FFF2-40B4-BE49-F238E27FC236}">
+                <ns3:creationId id="{DFC10092-CAB3-EC38-0F46-6962C23892D5}"/>
+              </a:ext>
+            </a:extLst>
+          </p:cNvPr>
+          <p:cNvSpPr>
+            <a:spLocks noGrp="1"/>
           </p:cNvSpPr>
           <p:nvPr/>
         </p:nvSpPr>
         <p:spPr>
-          <a:xfrm xmlns:a="http://schemas.openxmlformats.org/drawingml/2006/main">
+          <a:xfrm>
             <a:off x="22079126" y="6598088"/>
             <a:ext cx="9771840" cy="912960"/>
           </a:xfrm>
-          <a:prstGeom xmlns:a="http://schemas.openxmlformats.org/drawingml/2006/main" prst="rect">
+          <a:prstGeom prst="rect">
             <a:avLst/>
           </a:prstGeom>
-          <a:solidFill xmlns:a="http://schemas.openxmlformats.org/drawingml/2006/main">
+          <a:solidFill>
             <a:srgbClr val="1C425B"/>
           </a:solidFill>
-          <a:ln xmlns:a="http://schemas.openxmlformats.org/drawingml/2006/main">
+          <a:ln>
             <a:noFill/>
           </a:ln>
         </p:spPr>
         <p:style>
-          <a:lnRef xmlns:a="http://schemas.openxmlformats.org/drawingml/2006/main" idx="0"/>
-          <a:fillRef xmlns:a="http://schemas.openxmlformats.org/drawingml/2006/main" idx="0"/>
-          <a:effectRef xmlns:a="http://schemas.openxmlformats.org/drawingml/2006/main" idx="0"/>
-          <a:fontRef xmlns:a="http://schemas.openxmlformats.org/drawingml/2006/main" idx="minor"/>
+          <a:lnRef idx="0"/>
+          <a:fillRef idx="0"/>
+          <a:effectRef idx="0"/>
+          <a:fontRef idx="minor"/>
         </p:style>
         <p:txBody>
-          <a:bodyPr xmlns:a="http://schemas.openxmlformats.org/drawingml/2006/main" lIns="90000" tIns="45000" rIns="90000" bIns="45000">
+          <a:bodyPr lIns="90000" tIns="45000" rIns="90000" bIns="45000">
             <a:spAutoFit/>
           </a:bodyPr>
-          <a:lstStyle xmlns:a="http://schemas.openxmlformats.org/drawingml/2006/main"/>
-          <a:p xmlns:a="http://schemas.openxmlformats.org/drawingml/2006/main">
+          <a:lstStyle/>
+          <a:p>
             <a:pPr algn="ctr">
               <a:lnSpc>
                 <a:spcPct val="100000"/>
@@ -4198,44 +4198,44 @@
       <p:sp>
         <p:nvSpPr>
           <p:cNvPr id="33" name="CustomShape 5">
-            <a:extLst xmlns:a="http://schemas.openxmlformats.org/drawingml/2006/main">
-              <a:ext uri="{FF2B5EF4-FFF2-40B4-BE49-F238E27FC236}">
-                <a16:creationId xmlns:a16="http://schemas.microsoft.com/office/drawing/2014/main" id="{3C99F79D-68C2-C74F-CE40-279AEF3500B7}"/>
-              </a:ext>
-            </a:extLst>
-          </p:cNvPr>
-          <p:cNvSpPr>
-            <a:spLocks xmlns:a="http://schemas.openxmlformats.org/drawingml/2006/main" noGrp="1"/>
+            <a:extLst>
+              <a:ext uri="{FF2B5EF4-FFF2-40B4-BE49-F238E27FC236}">
+                <ns3:creationId id="{3C99F79D-68C2-C74F-CE40-279AEF3500B7}"/>
+              </a:ext>
+            </a:extLst>
+          </p:cNvPr>
+          <p:cNvSpPr>
+            <a:spLocks noGrp="1"/>
           </p:cNvSpPr>
           <p:nvPr/>
         </p:nvSpPr>
         <p:spPr>
-          <a:xfrm xmlns:a="http://schemas.openxmlformats.org/drawingml/2006/main">
+          <a:xfrm>
             <a:off x="32586446" y="6598088"/>
             <a:ext cx="9653040" cy="912960"/>
           </a:xfrm>
-          <a:prstGeom xmlns:a="http://schemas.openxmlformats.org/drawingml/2006/main" prst="rect">
+          <a:prstGeom prst="rect">
             <a:avLst/>
           </a:prstGeom>
-          <a:solidFill xmlns:a="http://schemas.openxmlformats.org/drawingml/2006/main">
+          <a:solidFill>
             <a:srgbClr val="1C425B"/>
           </a:solidFill>
-          <a:ln xmlns:a="http://schemas.openxmlformats.org/drawingml/2006/main">
+          <a:ln>
             <a:noFill/>
           </a:ln>
         </p:spPr>
         <p:style>
-          <a:lnRef xmlns:a="http://schemas.openxmlformats.org/drawingml/2006/main" idx="0"/>
-          <a:fillRef xmlns:a="http://schemas.openxmlformats.org/drawingml/2006/main" idx="0"/>
-          <a:effectRef xmlns:a="http://schemas.openxmlformats.org/drawingml/2006/main" idx="0"/>
-          <a:fontRef xmlns:a="http://schemas.openxmlformats.org/drawingml/2006/main" idx="minor"/>
+          <a:lnRef idx="0"/>
+          <a:fillRef idx="0"/>
+          <a:effectRef idx="0"/>
+          <a:fontRef idx="minor"/>
         </p:style>
         <p:txBody>
-          <a:bodyPr xmlns:a="http://schemas.openxmlformats.org/drawingml/2006/main" lIns="90000" tIns="45000" rIns="90000" bIns="45000">
+          <a:bodyPr lIns="90000" tIns="45000" rIns="90000" bIns="45000">
             <a:spAutoFit/>
           </a:bodyPr>
-          <a:lstStyle xmlns:a="http://schemas.openxmlformats.org/drawingml/2006/main"/>
-          <a:p xmlns:a="http://schemas.openxmlformats.org/drawingml/2006/main">
+          <a:lstStyle/>
+          <a:p>
             <a:pPr algn="ctr">
               <a:lnSpc>
                 <a:spcPct val="100000"/>
@@ -4259,53 +4259,42 @@
       <p:sp>
         <p:nvSpPr>
           <p:cNvPr id="35" name="CustomShape 7">
-            <a:extLst xmlns:a="http://schemas.openxmlformats.org/drawingml/2006/main">
-              <a:ext uri="{FF2B5EF4-FFF2-40B4-BE49-F238E27FC236}">
-                <a16:creationId xmlns:a16="http://schemas.microsoft.com/office/drawing/2014/main" id="{3D962965-B5EC-D5A8-D05D-6EA31D14EA2E}"/>
-              </a:ext>
-            </a:extLst>
-          </p:cNvPr>
-          <p:cNvSpPr>
-            <a:spLocks xmlns:a="http://schemas.openxmlformats.org/drawingml/2006/main" noGrp="1"/>
+            <a:extLst>
+              <a:ext uri="{FF2B5EF4-FFF2-40B4-BE49-F238E27FC236}">
+                <ns3:creationId id="{3D962965-B5EC-D5A8-D05D-6EA31D14EA2E}"/>
+              </a:ext>
+            </a:extLst>
+          </p:cNvPr>
+          <p:cNvSpPr>
+            <a:spLocks noGrp="1"/>
           </p:cNvSpPr>
           <p:nvPr/>
         </p:nvSpPr>
         <p:spPr>
-          <a:xfrm xmlns:a="http://schemas.openxmlformats.org/drawingml/2006/main">
+          <a:xfrm>
             <a:off x="32586446" y="8174528"/>
             <a:ext cx="9653040" cy="9416880"/>
           </a:xfrm>
-          <a:prstGeom xmlns:a="http://schemas.openxmlformats.org/drawingml/2006/main" prst="rect">
+          <a:prstGeom prst="rect">
             <a:avLst/>
           </a:prstGeom>
-          <a:noFill xmlns:a="http://schemas.openxmlformats.org/drawingml/2006/main"/>
-          <a:ln xmlns:a="http://schemas.openxmlformats.org/drawingml/2006/main">
+          <a:noFill/>
+          <a:ln>
             <a:noFill/>
           </a:ln>
         </p:spPr>
         <p:style>
-          <a:lnRef xmlns:a="http://schemas.openxmlformats.org/drawingml/2006/main" idx="0"/>
-          <a:fillRef xmlns:a="http://schemas.openxmlformats.org/drawingml/2006/main" idx="0"/>
-          <a:effectRef xmlns:a="http://schemas.openxmlformats.org/drawingml/2006/main" idx="0"/>
-          <a:fontRef xmlns:a="http://schemas.openxmlformats.org/drawingml/2006/main" idx="minor"/>
+          <a:lnRef idx="0"/>
+          <a:fillRef idx="0"/>
+          <a:effectRef idx="0"/>
+          <a:fontRef idx="minor"/>
         </p:style>
         <p:txBody>
-          <a:bodyPr xmlns:a="http://schemas.openxmlformats.org/drawingml/2006/main" lIns="90000" tIns="45000" rIns="90000" bIns="45000">
+          <a:bodyPr lIns="90000" tIns="45000" rIns="90000" bIns="45000">
             <a:spAutoFit/>
           </a:bodyPr>
-          <a:lstStyle xmlns:a="http://schemas.openxmlformats.org/drawingml/2006/main"/>
-          <a:p xmlns:a="http://schemas.openxmlformats.org/drawingml/2006/main">
-            <a:pPr algn="l">
-              <a:lnSpc>
-                <a:spcPct val="100000"/>
-              </a:lnSpc>
-              <a:buNone/>
-              <a:defRPr sz="2475" b="0" i="0">
-                <a:solidFill>
-                  <a:srgbClr val="111111"/>
-                </a:solidFill>
-              </a:defRPr>
-            </a:pPr>
+          <a:lstStyle/>
+          <a:p>
             <a:r>
               <a:rPr sz="2475" b="0" i="0">
                 <a:solidFill>
@@ -4315,61 +4304,11 @@
                 <a:ea typeface="Calibri"/>
                 <a:cs typeface="Calibri"/>
               </a:rPr>
-              <a:t>Plano PNS: `pns_design()` com UPA, estratos e peso do morador. PSU solitária: `survey.lonely.psu = "adjust"` e domínios ajustados.</a:t>
-            </a:r>
-          </a:p>
-        </p:txBody>
-      </p:sp>
-      <p:sp>
-        <p:nvSpPr>
-          <p:cNvPr id="36" name="CustomShape 8">
-            <a:extLst xmlns:a="http://schemas.openxmlformats.org/drawingml/2006/main">
-              <a:ext uri="{FF2B5EF4-FFF2-40B4-BE49-F238E27FC236}">
-                <a16:creationId xmlns:a16="http://schemas.microsoft.com/office/drawing/2014/main" id="{3C1D0D6F-29F8-0950-AA63-2BE193A210F5}"/>
-              </a:ext>
-            </a:extLst>
-          </p:cNvPr>
-          <p:cNvSpPr>
-            <a:spLocks xmlns:a="http://schemas.openxmlformats.org/drawingml/2006/main" noGrp="1"/>
-          </p:cNvSpPr>
-          <p:nvPr/>
-        </p:nvSpPr>
-        <p:spPr>
-          <a:xfrm xmlns:a="http://schemas.openxmlformats.org/drawingml/2006/main">
-            <a:off x="1104806" y="8174528"/>
-            <a:ext cx="9653040" cy="9416880"/>
-          </a:xfrm>
-          <a:prstGeom xmlns:a="http://schemas.openxmlformats.org/drawingml/2006/main" prst="rect">
-            <a:avLst/>
-          </a:prstGeom>
-          <a:noFill xmlns:a="http://schemas.openxmlformats.org/drawingml/2006/main"/>
-          <a:ln xmlns:a="http://schemas.openxmlformats.org/drawingml/2006/main">
-            <a:noFill/>
-          </a:ln>
-        </p:spPr>
-        <p:style>
-          <a:lnRef xmlns:a="http://schemas.openxmlformats.org/drawingml/2006/main" idx="0"/>
-          <a:fillRef xmlns:a="http://schemas.openxmlformats.org/drawingml/2006/main" idx="0"/>
-          <a:effectRef xmlns:a="http://schemas.openxmlformats.org/drawingml/2006/main" idx="0"/>
-          <a:fontRef xmlns:a="http://schemas.openxmlformats.org/drawingml/2006/main" idx="minor"/>
-        </p:style>
-        <p:txBody>
-          <a:bodyPr xmlns:a="http://schemas.openxmlformats.org/drawingml/2006/main" lIns="90000" tIns="45000" rIns="90000" bIns="45000">
-            <a:spAutoFit/>
-          </a:bodyPr>
-          <a:lstStyle xmlns:a="http://schemas.openxmlformats.org/drawingml/2006/main"/>
-          <a:p xmlns:a="http://schemas.openxmlformats.org/drawingml/2006/main">
-            <a:pPr algn="l">
-              <a:lnSpc>
-                <a:spcPct val="100000"/>
-              </a:lnSpc>
-              <a:buNone/>
-              <a:defRPr sz="2475" b="0" i="0">
-                <a:solidFill>
-                  <a:srgbClr val="111111"/>
-                </a:solidFill>
-              </a:defRPr>
-            </a:pPr>
+              <a:t>• Microdados PNS 2013/2019 do morador selecionado.</a:t>
+            </a:r>
+            <a:endParaRPr/>
+          </a:p>
+          <a:p>
             <a:r>
               <a:rPr sz="2475" b="0" i="0">
                 <a:solidFill>
@@ -4379,61 +4318,11 @@
                 <a:ea typeface="Calibri"/>
                 <a:cs typeface="Calibri"/>
               </a:rPr>
-              <a:t>A PNS permite estimar diagnóstico médico de asma, crises, fatores de risco e uso de medicamentos em desenho amostral complexo representativo do Brasil e das UFs.</a:t>
-            </a:r>
-          </a:p>
-        </p:txBody>
-      </p:sp>
-      <p:sp>
-        <p:nvSpPr>
-          <p:cNvPr id="37" name="CustomShape 9">
-            <a:extLst xmlns:a="http://schemas.openxmlformats.org/drawingml/2006/main">
-              <a:ext uri="{FF2B5EF4-FFF2-40B4-BE49-F238E27FC236}">
-                <a16:creationId xmlns:a16="http://schemas.microsoft.com/office/drawing/2014/main" id="{38B1C518-B840-C3EE-B849-672D4A949564}"/>
-              </a:ext>
-            </a:extLst>
-          </p:cNvPr>
-          <p:cNvSpPr>
-            <a:spLocks xmlns:a="http://schemas.openxmlformats.org/drawingml/2006/main" noGrp="1"/>
-          </p:cNvSpPr>
-          <p:nvPr/>
-        </p:nvSpPr>
-        <p:spPr>
-          <a:xfrm xmlns:a="http://schemas.openxmlformats.org/drawingml/2006/main">
-            <a:off x="11555246" y="8174528"/>
-            <a:ext cx="9653040" cy="9416880"/>
-          </a:xfrm>
-          <a:prstGeom xmlns:a="http://schemas.openxmlformats.org/drawingml/2006/main" prst="rect">
-            <a:avLst/>
-          </a:prstGeom>
-          <a:noFill xmlns:a="http://schemas.openxmlformats.org/drawingml/2006/main"/>
-          <a:ln xmlns:a="http://schemas.openxmlformats.org/drawingml/2006/main">
-            <a:noFill/>
-          </a:ln>
-        </p:spPr>
-        <p:style>
-          <a:lnRef xmlns:a="http://schemas.openxmlformats.org/drawingml/2006/main" idx="0"/>
-          <a:fillRef xmlns:a="http://schemas.openxmlformats.org/drawingml/2006/main" idx="0"/>
-          <a:effectRef xmlns:a="http://schemas.openxmlformats.org/drawingml/2006/main" idx="0"/>
-          <a:fontRef xmlns:a="http://schemas.openxmlformats.org/drawingml/2006/main" idx="minor"/>
-        </p:style>
-        <p:txBody>
-          <a:bodyPr xmlns:a="http://schemas.openxmlformats.org/drawingml/2006/main" lIns="90000" tIns="45000" rIns="90000" bIns="45000">
-            <a:spAutoFit/>
-          </a:bodyPr>
-          <a:lstStyle xmlns:a="http://schemas.openxmlformats.org/drawingml/2006/main"/>
-          <a:p xmlns:a="http://schemas.openxmlformats.org/drawingml/2006/main">
-            <a:pPr algn="l">
-              <a:lnSpc>
-                <a:spcPct val="100000"/>
-              </a:lnSpc>
-              <a:buNone/>
-              <a:defRPr sz="2475" b="0" i="0">
-                <a:solidFill>
-                  <a:srgbClr val="111111"/>
-                </a:solidFill>
-              </a:defRPr>
-            </a:pPr>
+              <a:t>• Plano amostral com `pns_design()`: UPA, estratos e pesos.</a:t>
+            </a:r>
+            <a:endParaRPr/>
+          </a:p>
+          <a:p>
             <a:r>
               <a:rPr sz="2475" b="0" i="0">
                 <a:solidFill>
@@ -4443,61 +4332,51 @@
                 <a:ea typeface="Calibri"/>
                 <a:cs typeface="Calibri"/>
               </a:rPr>
-              <a:t>Comparar 2013 e 2019 com estimativas ponderadas, IC95% e gráficos por UF, priorizando inferência pela sobreposição dos intervalos de confiança.</a:t>
-            </a:r>
-          </a:p>
-        </p:txBody>
-      </p:sp>
-      <p:sp>
-        <p:nvSpPr>
-          <p:cNvPr id="38" name="CustomShape 10">
-            <a:extLst xmlns:a="http://schemas.openxmlformats.org/drawingml/2006/main">
-              <a:ext uri="{FF2B5EF4-FFF2-40B4-BE49-F238E27FC236}">
-                <a16:creationId xmlns:a16="http://schemas.microsoft.com/office/drawing/2014/main" id="{63C46FB7-B3E5-47B7-350A-C3A9906D6F91}"/>
-              </a:ext>
-            </a:extLst>
-          </p:cNvPr>
-          <p:cNvSpPr>
-            <a:spLocks xmlns:a="http://schemas.openxmlformats.org/drawingml/2006/main" noGrp="1"/>
+              <a:t>• Proporções estimadas por `svyciprop(method = "beta")`, evitando fragilidades do Wald em UFs e domínios pequenos.</a:t>
+            </a:r>
+            <a:endParaRPr/>
+          </a:p>
+        </p:txBody>
+      </p:sp>
+      <p:sp>
+        <p:nvSpPr>
+          <p:cNvPr id="36" name="CustomShape 8">
+            <a:extLst>
+              <a:ext uri="{FF2B5EF4-FFF2-40B4-BE49-F238E27FC236}">
+                <ns3:creationId id="{3C1D0D6F-29F8-0950-AA63-2BE193A210F5}"/>
+              </a:ext>
+            </a:extLst>
+          </p:cNvPr>
+          <p:cNvSpPr>
+            <a:spLocks noGrp="1"/>
           </p:cNvSpPr>
           <p:nvPr/>
         </p:nvSpPr>
         <p:spPr>
-          <a:xfrm xmlns:a="http://schemas.openxmlformats.org/drawingml/2006/main">
-            <a:off x="22070846" y="8174528"/>
+          <a:xfrm>
+            <a:off x="1104806" y="8174528"/>
             <a:ext cx="9653040" cy="9416880"/>
           </a:xfrm>
-          <a:prstGeom xmlns:a="http://schemas.openxmlformats.org/drawingml/2006/main" prst="rect">
+          <a:prstGeom prst="rect">
             <a:avLst/>
           </a:prstGeom>
-          <a:noFill xmlns:a="http://schemas.openxmlformats.org/drawingml/2006/main"/>
-          <a:ln xmlns:a="http://schemas.openxmlformats.org/drawingml/2006/main">
+          <a:noFill/>
+          <a:ln>
             <a:noFill/>
           </a:ln>
         </p:spPr>
         <p:style>
-          <a:lnRef xmlns:a="http://schemas.openxmlformats.org/drawingml/2006/main" idx="0"/>
-          <a:fillRef xmlns:a="http://schemas.openxmlformats.org/drawingml/2006/main" idx="0"/>
-          <a:effectRef xmlns:a="http://schemas.openxmlformats.org/drawingml/2006/main" idx="0"/>
-          <a:fontRef xmlns:a="http://schemas.openxmlformats.org/drawingml/2006/main" idx="minor"/>
+          <a:lnRef idx="0"/>
+          <a:fillRef idx="0"/>
+          <a:effectRef idx="0"/>
+          <a:fontRef idx="minor"/>
         </p:style>
         <p:txBody>
-          <a:bodyPr xmlns:a="http://schemas.openxmlformats.org/drawingml/2006/main" lIns="90000" tIns="45000" rIns="90000" bIns="45000">
+          <a:bodyPr lIns="90000" tIns="45000" rIns="90000" bIns="45000">
             <a:spAutoFit/>
           </a:bodyPr>
-          <a:lstStyle xmlns:a="http://schemas.openxmlformats.org/drawingml/2006/main"/>
-          <a:p xmlns:a="http://schemas.openxmlformats.org/drawingml/2006/main">
-            <a:pPr algn="l">
-              <a:lnSpc>
-                <a:spcPct val="100000"/>
-              </a:lnSpc>
-              <a:buNone/>
-              <a:defRPr sz="2475" b="0" i="0">
-                <a:solidFill>
-                  <a:srgbClr val="111111"/>
-                </a:solidFill>
-              </a:defRPr>
-            </a:pPr>
+          <a:lstStyle/>
+          <a:p>
             <a:r>
               <a:rPr sz="2475" b="0" i="0">
                 <a:solidFill>
@@ -4507,8 +4386,201 @@
                 <a:ea typeface="Calibri"/>
                 <a:cs typeface="Calibri"/>
               </a:rPr>
-              <a:t>Sem pesos, estratos e conglomerados, as incertezas são subestimadas. O fluxo reprodutível em R torna a análise auditável e reutilizável.</a:t>
-            </a:r>
+              <a:t>• A PNS é um inquérito domiciliar populacional com desenho amostral complexo.</a:t>
+            </a:r>
+            <a:endParaRPr/>
+          </a:p>
+          <a:p>
+            <a:r>
+              <a:rPr sz="2475" b="0" i="0">
+                <a:solidFill>
+                  <a:srgbClr val="111111"/>
+                </a:solidFill>
+                <a:latin typeface="Calibri"/>
+                <a:ea typeface="Calibri"/>
+                <a:cs typeface="Calibri"/>
+              </a:rPr>
+              <a:t>• Indicadores epidemiológicos resumem diagnóstico, crises, tratamento e fatores de risco.</a:t>
+            </a:r>
+            <a:endParaRPr/>
+          </a:p>
+          <a:p>
+            <a:r>
+              <a:rPr sz="2475" b="0" i="0">
+                <a:solidFill>
+                  <a:srgbClr val="111111"/>
+                </a:solidFill>
+                <a:latin typeface="Calibri"/>
+                <a:ea typeface="Calibri"/>
+                <a:cs typeface="Calibri"/>
+              </a:rPr>
+              <a:t>• A asma combina carga crônica, episódios agudos e necessidade de manejo contínuo.</a:t>
+            </a:r>
+            <a:endParaRPr/>
+          </a:p>
+        </p:txBody>
+      </p:sp>
+      <p:sp>
+        <p:nvSpPr>
+          <p:cNvPr id="37" name="CustomShape 9">
+            <a:extLst>
+              <a:ext uri="{FF2B5EF4-FFF2-40B4-BE49-F238E27FC236}">
+                <ns3:creationId id="{38B1C518-B840-C3EE-B849-672D4A949564}"/>
+              </a:ext>
+            </a:extLst>
+          </p:cNvPr>
+          <p:cNvSpPr>
+            <a:spLocks noGrp="1"/>
+          </p:cNvSpPr>
+          <p:nvPr/>
+        </p:nvSpPr>
+        <p:spPr>
+          <a:xfrm>
+            <a:off x="11555246" y="8174528"/>
+            <a:ext cx="9653040" cy="9416880"/>
+          </a:xfrm>
+          <a:prstGeom prst="rect">
+            <a:avLst/>
+          </a:prstGeom>
+          <a:noFill/>
+          <a:ln>
+            <a:noFill/>
+          </a:ln>
+        </p:spPr>
+        <p:style>
+          <a:lnRef idx="0"/>
+          <a:fillRef idx="0"/>
+          <a:effectRef idx="0"/>
+          <a:fontRef idx="minor"/>
+        </p:style>
+        <p:txBody>
+          <a:bodyPr lIns="90000" tIns="45000" rIns="90000" bIns="45000">
+            <a:spAutoFit/>
+          </a:bodyPr>
+          <a:lstStyle/>
+          <a:p>
+            <a:r>
+              <a:rPr sz="2475" b="0" i="0">
+                <a:solidFill>
+                  <a:srgbClr val="111111"/>
+                </a:solidFill>
+                <a:latin typeface="Calibri"/>
+                <a:ea typeface="Calibri"/>
+                <a:cs typeface="Calibri"/>
+              </a:rPr>
+              <a:t>• Comparar 2013 e 2019 para Brasil e UFs.</a:t>
+            </a:r>
+            <a:endParaRPr/>
+          </a:p>
+          <a:p>
+            <a:r>
+              <a:rPr sz="2475" b="0" i="0">
+                <a:solidFill>
+                  <a:srgbClr val="111111"/>
+                </a:solidFill>
+                <a:latin typeface="Calibri"/>
+                <a:ea typeface="Calibri"/>
+                <a:cs typeface="Calibri"/>
+              </a:rPr>
+              <a:t>• Estimar prevalência, crises, medicamentos, tabagismo e indicadores complementares.</a:t>
+            </a:r>
+            <a:endParaRPr/>
+          </a:p>
+          <a:p>
+            <a:r>
+              <a:rPr sz="2475" b="0" i="0">
+                <a:solidFill>
+                  <a:srgbClr val="111111"/>
+                </a:solidFill>
+                <a:latin typeface="Calibri"/>
+                <a:ea typeface="Calibri"/>
+                <a:cs typeface="Calibri"/>
+              </a:rPr>
+              <a:t>• Interpretar mudanças pela magnitude e pela sobreposição dos IC95%.</a:t>
+            </a:r>
+            <a:endParaRPr/>
+          </a:p>
+        </p:txBody>
+      </p:sp>
+      <p:sp>
+        <p:nvSpPr>
+          <p:cNvPr id="38" name="CustomShape 10">
+            <a:extLst>
+              <a:ext uri="{FF2B5EF4-FFF2-40B4-BE49-F238E27FC236}">
+                <ns3:creationId id="{63C46FB7-B3E5-47B7-350A-C3A9906D6F91}"/>
+              </a:ext>
+            </a:extLst>
+          </p:cNvPr>
+          <p:cNvSpPr>
+            <a:spLocks noGrp="1"/>
+          </p:cNvSpPr>
+          <p:nvPr/>
+        </p:nvSpPr>
+        <p:spPr>
+          <a:xfrm>
+            <a:off x="22070846" y="8174528"/>
+            <a:ext cx="9653040" cy="9416880"/>
+          </a:xfrm>
+          <a:prstGeom prst="rect">
+            <a:avLst/>
+          </a:prstGeom>
+          <a:noFill/>
+          <a:ln>
+            <a:noFill/>
+          </a:ln>
+        </p:spPr>
+        <p:style>
+          <a:lnRef idx="0"/>
+          <a:fillRef idx="0"/>
+          <a:effectRef idx="0"/>
+          <a:fontRef idx="minor"/>
+        </p:style>
+        <p:txBody>
+          <a:bodyPr lIns="90000" tIns="45000" rIns="90000" bIns="45000">
+            <a:spAutoFit/>
+          </a:bodyPr>
+          <a:lstStyle/>
+          <a:p>
+            <a:r>
+              <a:rPr sz="2475" b="0" i="0">
+                <a:solidFill>
+                  <a:srgbClr val="111111"/>
+                </a:solidFill>
+                <a:latin typeface="Calibri"/>
+                <a:ea typeface="Calibri"/>
+                <a:cs typeface="Calibri"/>
+              </a:rPr>
+              <a:t>• Pesos, estratos e conglomerados são indispensáveis para inferência válida.</a:t>
+            </a:r>
+            <a:endParaRPr/>
+          </a:p>
+          <a:p>
+            <a:r>
+              <a:rPr sz="2475" b="0" i="0">
+                <a:solidFill>
+                  <a:srgbClr val="111111"/>
+                </a:solidFill>
+                <a:latin typeface="Calibri"/>
+                <a:ea typeface="Calibri"/>
+                <a:cs typeface="Calibri"/>
+              </a:rPr>
+              <a:t>• O fluxo reprodutível em R torna a análise auditável e reutilizável.</a:t>
+            </a:r>
+            <a:endParaRPr/>
+          </a:p>
+          <a:p>
+            <a:r>
+              <a:rPr sz="2475" b="0" i="0">
+                <a:solidFill>
+                  <a:srgbClr val="111111"/>
+                </a:solidFill>
+                <a:latin typeface="Calibri"/>
+                <a:ea typeface="Calibri"/>
+                <a:cs typeface="Calibri"/>
+              </a:rPr>
+              <a:t>• O relatório metodológico documenta ETL, indicadores, gráficos e referências cruzadas.</a:t>
+            </a:r>
+            <a:endParaRPr/>
           </a:p>
         </p:txBody>
       </p:sp>
@@ -4516,22 +4588,22 @@
         <p:nvPicPr>
           <p:cNvPr id="120" name="Imagem 2"/>
           <p:cNvPicPr>
-            <a:picLocks xmlns:a="http://schemas.openxmlformats.org/drawingml/2006/main" noChangeAspect="1"/>
+            <a:picLocks noChangeAspect="1"/>
           </p:cNvPicPr>
           <p:nvPr/>
         </p:nvPicPr>
         <p:blipFill>
-          <a:blip xmlns:r="http://schemas.openxmlformats.org/officeDocument/2006/relationships" xmlns:a="http://schemas.openxmlformats.org/drawingml/2006/main" r:embed="R0d457cff43d6479b"/>
-          <a:stretch xmlns:a="http://schemas.openxmlformats.org/drawingml/2006/main">
+          <a:blip r:embed="R0d457cff43d6479b"/>
+          <a:stretch>
             <a:fillRect l="0" t="0" r="0" b="0"/>
           </a:stretch>
         </p:blipFill>
         <p:spPr>
-          <a:xfrm xmlns:a="http://schemas.openxmlformats.org/drawingml/2006/main">
+          <a:xfrm>
             <a:off x="16844210" y="1861013"/>
             <a:ext cx="23547763" cy="1483024"/>
           </a:xfrm>
-          <a:prstGeom xmlns:a="http://schemas.openxmlformats.org/drawingml/2006/main" prst="rect">
+          <a:prstGeom prst="rect">
             <a:avLst/>
           </a:prstGeom>
         </p:spPr>
@@ -4539,43 +4611,35 @@
       <p:sp>
         <p:nvSpPr>
           <p:cNvPr id="49" name="poster-title">
-            <a:extLst xmlns:a="http://schemas.openxmlformats.org/drawingml/2006/main">
-              <a:ext uri="{FF2B5EF4-FFF2-40B4-BE49-F238E27FC236}">
-                <a16:creationId xmlns:a16="http://schemas.microsoft.com/office/drawing/2014/main" id="{8F1B3491-6A40-4375-8823-0A0F6D80AD4F}"/>
-              </a:ext>
-            </a:extLst>
-          </p:cNvPr>
-          <p:cNvSpPr>
-            <a:spLocks xmlns:a="http://schemas.openxmlformats.org/drawingml/2006/main" noGrp="1"/>
+            <a:extLst>
+              <a:ext uri="{FF2B5EF4-FFF2-40B4-BE49-F238E27FC236}">
+                <ns3:creationId id="{8F1B3491-6A40-4375-8823-0A0F6D80AD4F}"/>
+              </a:ext>
+            </a:extLst>
+          </p:cNvPr>
+          <p:cNvSpPr>
+            <a:spLocks noGrp="1"/>
           </p:cNvSpPr>
           <p:nvPr/>
         </p:nvSpPr>
         <p:spPr>
-          <a:xfrm xmlns:a="http://schemas.openxmlformats.org/drawingml/2006/main">
+          <a:xfrm>
             <a:off x="1095375" y="4953000"/>
             <a:ext cx="31432500" cy="876300"/>
           </a:xfrm>
-          <a:prstGeom xmlns:a="http://schemas.openxmlformats.org/drawingml/2006/main" prst="rect">
+          <a:prstGeom prst="rect">
             <a:avLst/>
           </a:prstGeom>
-          <a:noFill xmlns:a="http://schemas.openxmlformats.org/drawingml/2006/main"/>
-          <a:ln xmlns:a="http://schemas.openxmlformats.org/drawingml/2006/main" w="0">
+          <a:noFill/>
+          <a:ln w="0">
             <a:noFill/>
             <a:prstDash val="solid"/>
           </a:ln>
         </p:spPr>
         <p:txBody>
-          <a:bodyPr xmlns:a="http://schemas.openxmlformats.org/drawingml/2006/main"/>
-          <a:lstStyle xmlns:a="http://schemas.openxmlformats.org/drawingml/2006/main"/>
-          <a:p xmlns:a="http://schemas.openxmlformats.org/drawingml/2006/main">
-            <a:pPr algn="l">
-              <a:buNone/>
-              <a:defRPr sz="3225" b="1" i="0">
-                <a:solidFill>
-                  <a:srgbClr val="1C425B"/>
-                </a:solidFill>
-              </a:defRPr>
-            </a:pPr>
+          <a:bodyPr/>
+          <a:lstStyle/>
+          <a:p>
             <a:r>
               <a:rPr sz="3225" b="1" i="0">
                 <a:solidFill>
@@ -4587,41 +4651,42 @@
               </a:rPr>
               <a:t>Evolução da asma no Brasil, 2013-2019: estimativas reprodutíveis com o plano amostral da PNS</a:t>
             </a:r>
+            <a:endParaRPr/>
           </a:p>
         </p:txBody>
       </p:sp>
       <p:sp>
         <p:nvSpPr>
           <p:cNvPr id="50" name="poster-authors">
-            <a:extLst xmlns:a="http://schemas.openxmlformats.org/drawingml/2006/main">
-              <a:ext uri="{FF2B5EF4-FFF2-40B4-BE49-F238E27FC236}">
-                <a16:creationId xmlns:a16="http://schemas.microsoft.com/office/drawing/2014/main" id="{E727C1FD-6A24-4F4B-AE83-B7B4DDA2903B}"/>
-              </a:ext>
-            </a:extLst>
-          </p:cNvPr>
-          <p:cNvSpPr>
-            <a:spLocks xmlns:a="http://schemas.openxmlformats.org/drawingml/2006/main" noGrp="1"/>
+            <a:extLst>
+              <a:ext uri="{FF2B5EF4-FFF2-40B4-BE49-F238E27FC236}">
+                <ns3:creationId id="{E727C1FD-6A24-4F4B-AE83-B7B4DDA2903B}"/>
+              </a:ext>
+            </a:extLst>
+          </p:cNvPr>
+          <p:cNvSpPr>
+            <a:spLocks noGrp="1"/>
           </p:cNvSpPr>
           <p:nvPr/>
         </p:nvSpPr>
         <p:spPr>
-          <a:xfrm xmlns:a="http://schemas.openxmlformats.org/drawingml/2006/main">
+          <a:xfrm>
             <a:off x="1095375" y="5857875"/>
             <a:ext cx="31432500" cy="457200"/>
           </a:xfrm>
-          <a:prstGeom xmlns:a="http://schemas.openxmlformats.org/drawingml/2006/main" prst="rect">
+          <a:prstGeom prst="rect">
             <a:avLst/>
           </a:prstGeom>
-          <a:noFill xmlns:a="http://schemas.openxmlformats.org/drawingml/2006/main"/>
-          <a:ln xmlns:a="http://schemas.openxmlformats.org/drawingml/2006/main" w="0">
+          <a:noFill/>
+          <a:ln w="0">
             <a:noFill/>
             <a:prstDash val="solid"/>
           </a:ln>
         </p:spPr>
         <p:txBody>
-          <a:bodyPr xmlns:a="http://schemas.openxmlformats.org/drawingml/2006/main"/>
-          <a:lstStyle xmlns:a="http://schemas.openxmlformats.org/drawingml/2006/main"/>
-          <a:p xmlns:a="http://schemas.openxmlformats.org/drawingml/2006/main">
+          <a:bodyPr/>
+          <a:lstStyle/>
+          <a:p>
             <a:pPr algn="l">
               <a:buNone/>
               <a:defRPr sz="1800" b="0" i="0">
@@ -4647,29 +4712,29 @@
       <p:sp>
         <p:nvSpPr>
           <p:cNvPr id="94" name="section-METODOLOGIA - ESTIMADORES">
-            <a:extLst xmlns:a="http://schemas.openxmlformats.org/drawingml/2006/main">
-              <a:ext uri="{FF2B5EF4-FFF2-40B4-BE49-F238E27FC236}">
-                <a16:creationId xmlns:a16="http://schemas.microsoft.com/office/drawing/2014/main" id="{0314C110-0150-4DD4-95D2-7D9BAC3B23CF}"/>
-              </a:ext>
-            </a:extLst>
-          </p:cNvPr>
-          <p:cNvSpPr>
-            <a:spLocks xmlns:a="http://schemas.openxmlformats.org/drawingml/2006/main" noGrp="1"/>
+            <a:extLst>
+              <a:ext uri="{FF2B5EF4-FFF2-40B4-BE49-F238E27FC236}">
+                <ns3:creationId id="{0314C110-0150-4DD4-95D2-7D9BAC3B23CF}"/>
+              </a:ext>
+            </a:extLst>
+          </p:cNvPr>
+          <p:cNvSpPr>
+            <a:spLocks noGrp="1"/>
           </p:cNvSpPr>
           <p:nvPr/>
         </p:nvSpPr>
         <p:spPr>
-          <a:xfrm xmlns:a="http://schemas.openxmlformats.org/drawingml/2006/main">
+          <a:xfrm>
             <a:off x="1095375" y="11382375"/>
             <a:ext cx="20097750" cy="857250"/>
           </a:xfrm>
-          <a:prstGeom xmlns:a="http://schemas.openxmlformats.org/drawingml/2006/main" prst="rect">
+          <a:prstGeom prst="rect">
             <a:avLst/>
           </a:prstGeom>
-          <a:solidFill xmlns:a="http://schemas.openxmlformats.org/drawingml/2006/main">
+          <a:solidFill>
             <a:srgbClr val="1C425B"/>
           </a:solidFill>
-          <a:ln xmlns:a="http://schemas.openxmlformats.org/drawingml/2006/main" w="0">
+          <a:ln w="0">
             <a:solidFill>
               <a:srgbClr val="1C425B"/>
             </a:solidFill>
@@ -4680,35 +4745,35 @@
       <p:sp>
         <p:nvSpPr>
           <p:cNvPr id="95" name="section-label-METODOLOGIA - ESTIMADORES">
-            <a:extLst xmlns:a="http://schemas.openxmlformats.org/drawingml/2006/main">
-              <a:ext uri="{FF2B5EF4-FFF2-40B4-BE49-F238E27FC236}">
-                <a16:creationId xmlns:a16="http://schemas.microsoft.com/office/drawing/2014/main" id="{5484767A-F110-4765-8360-329783D73B3D}"/>
-              </a:ext>
-            </a:extLst>
-          </p:cNvPr>
-          <p:cNvSpPr>
-            <a:spLocks xmlns:a="http://schemas.openxmlformats.org/drawingml/2006/main" noGrp="1"/>
+            <a:extLst>
+              <a:ext uri="{FF2B5EF4-FFF2-40B4-BE49-F238E27FC236}">
+                <ns3:creationId id="{5484767A-F110-4765-8360-329783D73B3D}"/>
+              </a:ext>
+            </a:extLst>
+          </p:cNvPr>
+          <p:cNvSpPr>
+            <a:spLocks noGrp="1"/>
           </p:cNvSpPr>
           <p:nvPr/>
         </p:nvSpPr>
         <p:spPr>
-          <a:xfrm xmlns:a="http://schemas.openxmlformats.org/drawingml/2006/main">
+          <a:xfrm>
             <a:off x="1095375" y="11477625"/>
             <a:ext cx="20097750" cy="781050"/>
           </a:xfrm>
-          <a:prstGeom xmlns:a="http://schemas.openxmlformats.org/drawingml/2006/main" prst="rect">
+          <a:prstGeom prst="rect">
             <a:avLst/>
           </a:prstGeom>
-          <a:noFill xmlns:a="http://schemas.openxmlformats.org/drawingml/2006/main"/>
-          <a:ln xmlns:a="http://schemas.openxmlformats.org/drawingml/2006/main" w="0">
+          <a:noFill/>
+          <a:ln w="0">
             <a:noFill/>
             <a:prstDash val="solid"/>
           </a:ln>
         </p:spPr>
         <p:txBody>
-          <a:bodyPr xmlns:a="http://schemas.openxmlformats.org/drawingml/2006/main"/>
-          <a:lstStyle xmlns:a="http://schemas.openxmlformats.org/drawingml/2006/main"/>
-          <a:p xmlns:a="http://schemas.openxmlformats.org/drawingml/2006/main">
+          <a:bodyPr/>
+          <a:lstStyle/>
+          <a:p>
             <a:pPr algn="ctr">
               <a:defRPr sz="2250" b="1" i="0">
                 <a:solidFill>
@@ -4733,42 +4798,35 @@
       <p:sp>
         <p:nvSpPr>
           <p:cNvPr id="96" name="method-detail-classic">
-            <a:extLst xmlns:a="http://schemas.openxmlformats.org/drawingml/2006/main">
-              <a:ext uri="{FF2B5EF4-FFF2-40B4-BE49-F238E27FC236}">
-                <a16:creationId xmlns:a16="http://schemas.microsoft.com/office/drawing/2014/main" id="{01EF5B7E-4DD8-42AC-B0B9-EC0542431C0F}"/>
-              </a:ext>
-            </a:extLst>
-          </p:cNvPr>
-          <p:cNvSpPr>
-            <a:spLocks xmlns:a="http://schemas.openxmlformats.org/drawingml/2006/main" noGrp="1"/>
+            <a:extLst>
+              <a:ext uri="{FF2B5EF4-FFF2-40B4-BE49-F238E27FC236}">
+                <ns3:creationId id="{01EF5B7E-4DD8-42AC-B0B9-EC0542431C0F}"/>
+              </a:ext>
+            </a:extLst>
+          </p:cNvPr>
+          <p:cNvSpPr>
+            <a:spLocks noGrp="1"/>
           </p:cNvSpPr>
           <p:nvPr/>
         </p:nvSpPr>
         <p:spPr>
-          <a:xfrm xmlns:a="http://schemas.openxmlformats.org/drawingml/2006/main">
+          <a:xfrm>
             <a:off x="1190625" y="12430125"/>
-            <a:ext cx="19907250" cy="4000500"/>
+            <a:ext cx="19907250" cy="2150000"/>
           </a:xfrm>
-          <a:prstGeom xmlns:a="http://schemas.openxmlformats.org/drawingml/2006/main" prst="rect">
+          <a:prstGeom prst="rect">
             <a:avLst/>
           </a:prstGeom>
-          <a:noFill xmlns:a="http://schemas.openxmlformats.org/drawingml/2006/main"/>
-          <a:ln xmlns:a="http://schemas.openxmlformats.org/drawingml/2006/main" w="0">
+          <a:noFill/>
+          <a:ln w="0">
             <a:noFill/>
             <a:prstDash val="solid"/>
           </a:ln>
         </p:spPr>
         <p:txBody>
-          <a:bodyPr xmlns:a="http://schemas.openxmlformats.org/drawingml/2006/main"/>
-          <a:lstStyle xmlns:a="http://schemas.openxmlformats.org/drawingml/2006/main"/>
-          <a:p xmlns:a="http://schemas.openxmlformats.org/drawingml/2006/main">
-            <a:pPr algn="l">
-              <a:defRPr sz="2325" b="0" i="0">
-                <a:solidFill>
-                  <a:srgbClr val="111111"/>
-                </a:solidFill>
-              </a:defRPr>
-            </a:pPr>
+          <a:bodyPr/>
+          <a:lstStyle/>
+          <a:p>
             <a:r>
               <a:rPr sz="2325" b="0" i="0">
                 <a:solidFill>
@@ -4778,37 +4836,66 @@
                 <a:ea typeface="Calibri"/>
                 <a:cs typeface="Calibri"/>
               </a:rPr>
-              <a:t>Estimador ponderado: p_hat = sum(w_i y_i) / sum(w_i). Percentual: 100*p_hat. Taxa por 100 mil: 100000*p_hat. IC95% calculado com `survey::svyciprop(method = "beta")`, preservando a escala de proporção antes do reescalonamento.</a:t>
-            </a:r>
+              <a:t>• Recodificação de Q074, Q076, Q07701/Q07704/Q07708 e P050 para indicadores comparáveis.</a:t>
+            </a:r>
+            <a:endParaRPr/>
+          </a:p>
+          <a:p>
+            <a:r>
+              <a:rPr sz="2325" b="0" i="0">
+                <a:solidFill>
+                  <a:srgbClr val="111111"/>
+                </a:solidFill>
+                <a:latin typeface="Calibri"/>
+                <a:ea typeface="Calibri"/>
+                <a:cs typeface="Calibri"/>
+              </a:rPr>
+              <a:t>• Taxas por 100 mil reescalam proporções ponderadas, mantendo a incerteza original.</a:t>
+            </a:r>
+            <a:endParaRPr/>
+          </a:p>
+          <a:p>
+            <a:r>
+              <a:rPr sz="2325" b="0" i="0">
+                <a:solidFill>
+                  <a:srgbClr val="111111"/>
+                </a:solidFill>
+                <a:latin typeface="Calibri"/>
+                <a:ea typeface="Calibri"/>
+                <a:cs typeface="Calibri"/>
+              </a:rPr>
+              <a:t>• A comparação 2013-2019 combina estimativa pontual, IC95% e leitura por UF.</a:t>
+            </a:r>
+            <a:endParaRPr/>
           </a:p>
         </p:txBody>
       </p:sp>
       <p:sp>
         <p:nvSpPr>
           <p:cNvPr id="97" name="section-LEITURA DOS RESULTADOS">
-            <a:extLst xmlns:a="http://schemas.openxmlformats.org/drawingml/2006/main">
-              <a:ext uri="{FF2B5EF4-FFF2-40B4-BE49-F238E27FC236}">
-                <a16:creationId xmlns:a16="http://schemas.microsoft.com/office/drawing/2014/main" id="{39DB03F4-C21B-4ED6-81A2-9CFE8A3B20A2}"/>
-              </a:ext>
-            </a:extLst>
-          </p:cNvPr>
-          <p:cNvSpPr>
-            <a:spLocks xmlns:a="http://schemas.openxmlformats.org/drawingml/2006/main" noGrp="1"/>
+            <a:extLst>
+              <a:ext uri="{FF2B5EF4-FFF2-40B4-BE49-F238E27FC236}">
+                <ns3:creationId id="{39DB03F4-C21B-4ED6-81A2-9CFE8A3B20A2}"/>
+              </a:ext>
+            </a:extLst>
+          </p:cNvPr>
+          <p:cNvSpPr>
+            <a:spLocks noGrp="1"/>
           </p:cNvSpPr>
           <p:nvPr/>
         </p:nvSpPr>
         <p:spPr>
-          <a:xfrm xmlns:a="http://schemas.openxmlformats.org/drawingml/2006/main">
+          <a:xfrm>
             <a:off x="22078950" y="11382375"/>
             <a:ext cx="20173950" cy="857250"/>
           </a:xfrm>
-          <a:prstGeom xmlns:a="http://schemas.openxmlformats.org/drawingml/2006/main" prst="rect">
+          <a:prstGeom prst="rect">
             <a:avLst/>
           </a:prstGeom>
-          <a:solidFill xmlns:a="http://schemas.openxmlformats.org/drawingml/2006/main">
+          <a:solidFill>
             <a:srgbClr val="1C425B"/>
           </a:solidFill>
-          <a:ln xmlns:a="http://schemas.openxmlformats.org/drawingml/2006/main" w="0">
+          <a:ln w="0">
             <a:solidFill>
               <a:srgbClr val="1C425B"/>
             </a:solidFill>
@@ -4819,35 +4906,35 @@
       <p:sp>
         <p:nvSpPr>
           <p:cNvPr id="98" name="section-label-LEITURA DOS RESULTADOS">
-            <a:extLst xmlns:a="http://schemas.openxmlformats.org/drawingml/2006/main">
-              <a:ext uri="{FF2B5EF4-FFF2-40B4-BE49-F238E27FC236}">
-                <a16:creationId xmlns:a16="http://schemas.microsoft.com/office/drawing/2014/main" id="{12AE5FE9-3576-40E0-B9D6-7F7366AA30C8}"/>
-              </a:ext>
-            </a:extLst>
-          </p:cNvPr>
-          <p:cNvSpPr>
-            <a:spLocks xmlns:a="http://schemas.openxmlformats.org/drawingml/2006/main" noGrp="1"/>
+            <a:extLst>
+              <a:ext uri="{FF2B5EF4-FFF2-40B4-BE49-F238E27FC236}">
+                <ns3:creationId id="{12AE5FE9-3576-40E0-B9D6-7F7366AA30C8}"/>
+              </a:ext>
+            </a:extLst>
+          </p:cNvPr>
+          <p:cNvSpPr>
+            <a:spLocks noGrp="1"/>
           </p:cNvSpPr>
           <p:nvPr/>
         </p:nvSpPr>
         <p:spPr>
-          <a:xfrm xmlns:a="http://schemas.openxmlformats.org/drawingml/2006/main">
+          <a:xfrm>
             <a:off x="22078950" y="11477625"/>
             <a:ext cx="20173950" cy="781050"/>
           </a:xfrm>
-          <a:prstGeom xmlns:a="http://schemas.openxmlformats.org/drawingml/2006/main" prst="rect">
+          <a:prstGeom prst="rect">
             <a:avLst/>
           </a:prstGeom>
-          <a:noFill xmlns:a="http://schemas.openxmlformats.org/drawingml/2006/main"/>
-          <a:ln xmlns:a="http://schemas.openxmlformats.org/drawingml/2006/main" w="0">
+          <a:noFill/>
+          <a:ln w="0">
             <a:noFill/>
             <a:prstDash val="solid"/>
           </a:ln>
         </p:spPr>
         <p:txBody>
-          <a:bodyPr xmlns:a="http://schemas.openxmlformats.org/drawingml/2006/main"/>
-          <a:lstStyle xmlns:a="http://schemas.openxmlformats.org/drawingml/2006/main"/>
-          <a:p xmlns:a="http://schemas.openxmlformats.org/drawingml/2006/main">
+          <a:bodyPr/>
+          <a:lstStyle/>
+          <a:p>
             <a:pPr algn="ctr">
               <a:defRPr sz="2250" b="1" i="0">
                 <a:solidFill>
@@ -4872,42 +4959,35 @@
       <p:sp>
         <p:nvSpPr>
           <p:cNvPr id="99" name="analysis-detail-classic">
-            <a:extLst xmlns:a="http://schemas.openxmlformats.org/drawingml/2006/main">
-              <a:ext uri="{FF2B5EF4-FFF2-40B4-BE49-F238E27FC236}">
-                <a16:creationId xmlns:a16="http://schemas.microsoft.com/office/drawing/2014/main" id="{709A3C76-59C6-4D91-8A99-C76FB80A5C64}"/>
-              </a:ext>
-            </a:extLst>
-          </p:cNvPr>
-          <p:cNvSpPr>
-            <a:spLocks xmlns:a="http://schemas.openxmlformats.org/drawingml/2006/main" noGrp="1"/>
+            <a:extLst>
+              <a:ext uri="{FF2B5EF4-FFF2-40B4-BE49-F238E27FC236}">
+                <ns3:creationId id="{709A3C76-59C6-4D91-8A99-C76FB80A5C64}"/>
+              </a:ext>
+            </a:extLst>
+          </p:cNvPr>
+          <p:cNvSpPr>
+            <a:spLocks noGrp="1"/>
           </p:cNvSpPr>
           <p:nvPr/>
         </p:nvSpPr>
         <p:spPr>
-          <a:xfrm xmlns:a="http://schemas.openxmlformats.org/drawingml/2006/main">
+          <a:xfrm>
             <a:off x="22174200" y="12430125"/>
             <a:ext cx="19907250" cy="4095750"/>
           </a:xfrm>
-          <a:prstGeom xmlns:a="http://schemas.openxmlformats.org/drawingml/2006/main" prst="rect">
+          <a:prstGeom prst="rect">
             <a:avLst/>
           </a:prstGeom>
-          <a:noFill xmlns:a="http://schemas.openxmlformats.org/drawingml/2006/main"/>
-          <a:ln xmlns:a="http://schemas.openxmlformats.org/drawingml/2006/main" w="0">
+          <a:noFill/>
+          <a:ln w="0">
             <a:noFill/>
             <a:prstDash val="solid"/>
           </a:ln>
         </p:spPr>
         <p:txBody>
-          <a:bodyPr xmlns:a="http://schemas.openxmlformats.org/drawingml/2006/main"/>
-          <a:lstStyle xmlns:a="http://schemas.openxmlformats.org/drawingml/2006/main"/>
-          <a:p xmlns:a="http://schemas.openxmlformats.org/drawingml/2006/main">
-            <a:pPr algn="l">
-              <a:defRPr sz="2325" b="0" i="0">
-                <a:solidFill>
-                  <a:srgbClr val="111111"/>
-                </a:solidFill>
-              </a:defRPr>
-            </a:pPr>
+          <a:bodyPr/>
+          <a:lstStyle/>
+          <a:p>
             <a:r>
               <a:rPr sz="2325" b="0" i="0">
                 <a:solidFill>
@@ -4917,50 +4997,114 @@
                 <a:ea typeface="Calibri"/>
                 <a:cs typeface="Calibri"/>
               </a:rPr>
-              <a:t>Asma aumentou no Brasil (4,41% para 5,40%; ICs sem sobreposição). Crises ficaram estáveis (38,3% para 37,7%; ICs sobrepostos). Uso de medicamento entre asmáticos caiu (81,5% para 64,4%); a taxa populacional de usuários de medicamento tem ICs sobrepostos.</a:t>
-            </a:r>
+              <a:t>• Diagnóstico médico de asma aumentou no Brasil: 4,41% -&gt; 5,40%; ICs sem sobreposição.</a:t>
+            </a:r>
+            <a:endParaRPr/>
+          </a:p>
+          <a:p>
+            <a:r>
+              <a:rPr sz="2325" b="0" i="0">
+                <a:solidFill>
+                  <a:srgbClr val="111111"/>
+                </a:solidFill>
+                <a:latin typeface="Calibri"/>
+                <a:ea typeface="Calibri"/>
+                <a:cs typeface="Calibri"/>
+              </a:rPr>
+              <a:t>• Crises nos últimos 12 meses permaneceram estáveis: 38,3% -&gt; 37,7%.</a:t>
+            </a:r>
+            <a:endParaRPr/>
+          </a:p>
+          <a:p>
+            <a:r>
+              <a:rPr sz="2325" b="0" i="0">
+                <a:solidFill>
+                  <a:srgbClr val="111111"/>
+                </a:solidFill>
+                <a:latin typeface="Calibri"/>
+                <a:ea typeface="Calibri"/>
+                <a:cs typeface="Calibri"/>
+              </a:rPr>
+              <a:t>• Uso de medicamento oral ou bombinha entre asmáticos caiu: 81,5% -&gt; 64,4%; interpretar com cautela.</a:t>
+            </a:r>
+            <a:endParaRPr/>
+          </a:p>
+          <a:p>
+            <a:r>
+              <a:rPr sz="2325" b="0" i="0">
+                <a:solidFill>
+                  <a:srgbClr val="111111"/>
+                </a:solidFill>
+                <a:latin typeface="Calibri"/>
+                <a:ea typeface="Calibri"/>
+                <a:cs typeface="Calibri"/>
+              </a:rPr>
+              <a:t>• A taxa populacional de medicamentos ajuda a separar carga total de proporção entre diagnosticados.</a:t>
+            </a:r>
+            <a:endParaRPr/>
+          </a:p>
+          <a:p>
+            <a:r>
+              <a:rPr sz="2325" b="0" i="0">
+                <a:solidFill>
+                  <a:srgbClr val="111111"/>
+                </a:solidFill>
+                <a:latin typeface="Calibri"/>
+                <a:ea typeface="Calibri"/>
+                <a:cs typeface="Calibri"/>
+              </a:rPr>
+              <a:t>• Tabagismo caiu em várias UFs, mas não explica isoladamente o aumento do diagnóstico.</a:t>
+            </a:r>
+            <a:endParaRPr/>
+          </a:p>
+          <a:p>
+            <a:r>
+              <a:rPr sz="2325" b="0" i="0">
+                <a:solidFill>
+                  <a:srgbClr val="111111"/>
+                </a:solidFill>
+                <a:latin typeface="Calibri"/>
+                <a:ea typeface="Calibri"/>
+                <a:cs typeface="Calibri"/>
+              </a:rPr>
+              <a:t>• Resultados sugerem maior diagnóstico sem melhora proporcional do controle clínico.</a:t>
+            </a:r>
+            <a:endParaRPr/>
           </a:p>
         </p:txBody>
       </p:sp>
       <p:sp>
         <p:nvSpPr>
           <p:cNvPr id="100" name="references-compact-classic">
-            <a:extLst xmlns:a="http://schemas.openxmlformats.org/drawingml/2006/main">
-              <a:ext uri="{FF2B5EF4-FFF2-40B4-BE49-F238E27FC236}">
-                <a16:creationId xmlns:a16="http://schemas.microsoft.com/office/drawing/2014/main" id="{9E048DA4-4526-49F0-8B12-3769BDA4E051}"/>
-              </a:ext>
-            </a:extLst>
-          </p:cNvPr>
-          <p:cNvSpPr>
-            <a:spLocks xmlns:a="http://schemas.openxmlformats.org/drawingml/2006/main" noGrp="1"/>
+            <a:extLst>
+              <a:ext uri="{FF2B5EF4-FFF2-40B4-BE49-F238E27FC236}">
+                <ns3:creationId id="{9E048DA4-4526-49F0-8B12-3769BDA4E051}"/>
+              </a:ext>
+            </a:extLst>
+          </p:cNvPr>
+          <p:cNvSpPr>
+            <a:spLocks noGrp="1"/>
           </p:cNvSpPr>
           <p:nvPr/>
         </p:nvSpPr>
         <p:spPr>
-          <a:xfrm xmlns:a="http://schemas.openxmlformats.org/drawingml/2006/main">
+          <a:xfrm>
             <a:off x="22098000" y="30289500"/>
-            <a:ext cx="20097750" cy="1238250"/>
+            <a:ext cx="16000000" cy="1238250"/>
           </a:xfrm>
-          <a:prstGeom xmlns:a="http://schemas.openxmlformats.org/drawingml/2006/main" prst="rect">
+          <a:prstGeom prst="rect">
             <a:avLst/>
           </a:prstGeom>
-          <a:noFill xmlns:a="http://schemas.openxmlformats.org/drawingml/2006/main"/>
-          <a:ln xmlns:a="http://schemas.openxmlformats.org/drawingml/2006/main" w="0">
+          <a:noFill/>
+          <a:ln w="0">
             <a:noFill/>
             <a:prstDash val="solid"/>
           </a:ln>
         </p:spPr>
         <p:txBody>
-          <a:bodyPr xmlns:a="http://schemas.openxmlformats.org/drawingml/2006/main"/>
-          <a:lstStyle xmlns:a="http://schemas.openxmlformats.org/drawingml/2006/main"/>
-          <a:p xmlns:a="http://schemas.openxmlformats.org/drawingml/2006/main">
-            <a:pPr algn="l">
-              <a:defRPr sz="1500" b="0" i="0">
-                <a:solidFill>
-                  <a:srgbClr val="111111"/>
-                </a:solidFill>
-              </a:defRPr>
-            </a:pPr>
+          <a:bodyPr/>
+          <a:lstStyle/>
+          <a:p>
             <a:r>
               <a:rPr sz="1500" b="0" i="0">
                 <a:solidFill>
@@ -4970,37 +5114,38 @@
                 <a:ea typeface="Calibri"/>
                 <a:cs typeface="Calibri"/>
               </a:rPr>
-              <a:t>[1] Global Asthma Network, 2022. [2] Souza-Júnior et al., 2015. [3] Dube; Silva, GitHub, 2026. [4] Menezes et al., 2015. [5] Severe Asthma.</a:t>
-            </a:r>
+              <a:t>[1] Global Asthma Network, 2022. [2] Souza-Júnior et al., 2015. [3] Dube; Silva, 2026. [4] Menezes et al., 2015. [5] Santos et al., 2018. [6] Brown; Cai; DasGupta, 2001. [7] Korn; Graubard, 1998.</a:t>
+            </a:r>
+            <a:endParaRPr/>
           </a:p>
         </p:txBody>
       </p:sp>
       <p:sp>
         <p:nvSpPr>
           <p:cNvPr id="101" name="section-GRÁFICOS EXPORTADOS DOS CÓDIGOS R">
-            <a:extLst xmlns:a="http://schemas.openxmlformats.org/drawingml/2006/main">
-              <a:ext uri="{FF2B5EF4-FFF2-40B4-BE49-F238E27FC236}">
-                <a16:creationId xmlns:a16="http://schemas.microsoft.com/office/drawing/2014/main" id="{540C7B78-679B-44FC-9FE1-D51ABF45935D}"/>
-              </a:ext>
-            </a:extLst>
-          </p:cNvPr>
-          <p:cNvSpPr>
-            <a:spLocks xmlns:a="http://schemas.openxmlformats.org/drawingml/2006/main" noGrp="1"/>
+            <a:extLst>
+              <a:ext uri="{FF2B5EF4-FFF2-40B4-BE49-F238E27FC236}">
+                <ns3:creationId id="{540C7B78-679B-44FC-9FE1-D51ABF45935D}"/>
+              </a:ext>
+            </a:extLst>
+          </p:cNvPr>
+          <p:cNvSpPr>
+            <a:spLocks noGrp="1"/>
           </p:cNvSpPr>
           <p:nvPr/>
         </p:nvSpPr>
         <p:spPr>
-          <a:xfrm xmlns:a="http://schemas.openxmlformats.org/drawingml/2006/main">
+          <a:xfrm>
             <a:off x="1095375" y="16954500"/>
             <a:ext cx="41148000" cy="857250"/>
           </a:xfrm>
-          <a:prstGeom xmlns:a="http://schemas.openxmlformats.org/drawingml/2006/main" prst="rect">
+          <a:prstGeom prst="rect">
             <a:avLst/>
           </a:prstGeom>
-          <a:solidFill xmlns:a="http://schemas.openxmlformats.org/drawingml/2006/main">
+          <a:solidFill>
             <a:srgbClr val="1C425B"/>
           </a:solidFill>
-          <a:ln xmlns:a="http://schemas.openxmlformats.org/drawingml/2006/main" w="0">
+          <a:ln w="0">
             <a:solidFill>
               <a:srgbClr val="1C425B"/>
             </a:solidFill>
@@ -5011,35 +5156,35 @@
       <p:sp>
         <p:nvSpPr>
           <p:cNvPr id="102" name="section-label-GRÁFICOS EXPORTADOS DOS CÓDIGOS R">
-            <a:extLst xmlns:a="http://schemas.openxmlformats.org/drawingml/2006/main">
-              <a:ext uri="{FF2B5EF4-FFF2-40B4-BE49-F238E27FC236}">
-                <a16:creationId xmlns:a16="http://schemas.microsoft.com/office/drawing/2014/main" id="{FF872F2A-466A-4737-99EE-5C95FCC67612}"/>
-              </a:ext>
-            </a:extLst>
-          </p:cNvPr>
-          <p:cNvSpPr>
-            <a:spLocks xmlns:a="http://schemas.openxmlformats.org/drawingml/2006/main" noGrp="1"/>
+            <a:extLst>
+              <a:ext uri="{FF2B5EF4-FFF2-40B4-BE49-F238E27FC236}">
+                <ns3:creationId id="{FF872F2A-466A-4737-99EE-5C95FCC67612}"/>
+              </a:ext>
+            </a:extLst>
+          </p:cNvPr>
+          <p:cNvSpPr>
+            <a:spLocks noGrp="1"/>
           </p:cNvSpPr>
           <p:nvPr/>
         </p:nvSpPr>
         <p:spPr>
-          <a:xfrm xmlns:a="http://schemas.openxmlformats.org/drawingml/2006/main">
+          <a:xfrm>
             <a:off x="1095375" y="17049750"/>
             <a:ext cx="41148000" cy="781050"/>
           </a:xfrm>
-          <a:prstGeom xmlns:a="http://schemas.openxmlformats.org/drawingml/2006/main" prst="rect">
+          <a:prstGeom prst="rect">
             <a:avLst/>
           </a:prstGeom>
-          <a:noFill xmlns:a="http://schemas.openxmlformats.org/drawingml/2006/main"/>
-          <a:ln xmlns:a="http://schemas.openxmlformats.org/drawingml/2006/main" w="0">
+          <a:noFill/>
+          <a:ln w="0">
             <a:noFill/>
             <a:prstDash val="solid"/>
           </a:ln>
         </p:spPr>
         <p:txBody>
-          <a:bodyPr xmlns:a="http://schemas.openxmlformats.org/drawingml/2006/main"/>
-          <a:lstStyle xmlns:a="http://schemas.openxmlformats.org/drawingml/2006/main"/>
-          <a:p xmlns:a="http://schemas.openxmlformats.org/drawingml/2006/main">
+          <a:bodyPr/>
+          <a:lstStyle/>
+          <a:p>
             <a:pPr algn="ctr">
               <a:defRPr sz="2250" b="1" i="0">
                 <a:solidFill>
@@ -5065,20 +5210,20 @@
         <p:nvPicPr>
           <p:cNvPr id="132" name=""/>
           <p:cNvPicPr>
-            <a:picLocks xmlns:a="http://schemas.openxmlformats.org/drawingml/2006/main" noChangeAspect="1"/>
+            <a:picLocks noChangeAspect="1"/>
           </p:cNvPicPr>
           <p:nvPr/>
         </p:nvPicPr>
         <p:blipFill>
-          <a:blip xmlns:r="http://schemas.openxmlformats.org/officeDocument/2006/relationships" xmlns:a="http://schemas.openxmlformats.org/drawingml/2006/main" r:embed="R7380f614aae64e53"/>
-          <a:stretch xmlns:a="http://schemas.openxmlformats.org/drawingml/2006/main"/>
+          <a:blip r:embed="R7380f614aae64e53"/>
+          <a:stretch/>
         </p:blipFill>
         <p:spPr>
-          <a:xfrm xmlns:a="http://schemas.openxmlformats.org/drawingml/2006/main">
+          <a:xfrm>
             <a:off x="1319893" y="18097500"/>
             <a:ext cx="19267714" cy="5619750"/>
           </a:xfrm>
-          <a:prstGeom xmlns:a="http://schemas.openxmlformats.org/drawingml/2006/main" prst="rect">
+          <a:prstGeom prst="rect">
             <a:avLst/>
           </a:prstGeom>
         </p:spPr>
@@ -5087,20 +5232,20 @@
         <p:nvPicPr>
           <p:cNvPr id="133" name=""/>
           <p:cNvPicPr>
-            <a:picLocks xmlns:a="http://schemas.openxmlformats.org/drawingml/2006/main" noChangeAspect="1"/>
+            <a:picLocks noChangeAspect="1"/>
           </p:cNvPicPr>
           <p:nvPr/>
         </p:nvPicPr>
         <p:blipFill>
-          <a:blip xmlns:r="http://schemas.openxmlformats.org/officeDocument/2006/relationships" xmlns:a="http://schemas.openxmlformats.org/drawingml/2006/main" r:embed="R49cc8ec8088446a4"/>
-          <a:stretch xmlns:a="http://schemas.openxmlformats.org/drawingml/2006/main"/>
+          <a:blip r:embed="R49cc8ec8088446a4"/>
+          <a:stretch/>
         </p:blipFill>
         <p:spPr>
-          <a:xfrm xmlns:a="http://schemas.openxmlformats.org/drawingml/2006/main">
+          <a:xfrm>
             <a:off x="22751143" y="18097500"/>
             <a:ext cx="19267714" cy="5619750"/>
           </a:xfrm>
-          <a:prstGeom xmlns:a="http://schemas.openxmlformats.org/drawingml/2006/main" prst="rect">
+          <a:prstGeom prst="rect">
             <a:avLst/>
           </a:prstGeom>
         </p:spPr>
@@ -5109,20 +5254,20 @@
         <p:nvPicPr>
           <p:cNvPr id="134" name=""/>
           <p:cNvPicPr>
-            <a:picLocks xmlns:a="http://schemas.openxmlformats.org/drawingml/2006/main" noChangeAspect="1"/>
+            <a:picLocks noChangeAspect="1"/>
           </p:cNvPicPr>
           <p:nvPr/>
         </p:nvPicPr>
         <p:blipFill>
-          <a:blip xmlns:r="http://schemas.openxmlformats.org/officeDocument/2006/relationships" xmlns:a="http://schemas.openxmlformats.org/drawingml/2006/main" r:embed="R622f7f94b75d4fdf"/>
-          <a:stretch xmlns:a="http://schemas.openxmlformats.org/drawingml/2006/main"/>
+          <a:blip r:embed="R622f7f94b75d4fdf"/>
+          <a:stretch/>
         </p:blipFill>
         <p:spPr>
-          <a:xfrm xmlns:a="http://schemas.openxmlformats.org/drawingml/2006/main">
+          <a:xfrm>
             <a:off x="1319893" y="24098250"/>
             <a:ext cx="19267714" cy="5619750"/>
           </a:xfrm>
-          <a:prstGeom xmlns:a="http://schemas.openxmlformats.org/drawingml/2006/main" prst="rect">
+          <a:prstGeom prst="rect">
             <a:avLst/>
           </a:prstGeom>
         </p:spPr>
@@ -5131,20 +5276,20 @@
         <p:nvPicPr>
           <p:cNvPr id="135" name=""/>
           <p:cNvPicPr>
-            <a:picLocks xmlns:a="http://schemas.openxmlformats.org/drawingml/2006/main" noChangeAspect="1"/>
+            <a:picLocks noChangeAspect="1"/>
           </p:cNvPicPr>
           <p:nvPr/>
         </p:nvPicPr>
         <p:blipFill>
-          <a:blip xmlns:r="http://schemas.openxmlformats.org/officeDocument/2006/relationships" xmlns:a="http://schemas.openxmlformats.org/drawingml/2006/main" r:embed="R9e95ad130edb487b"/>
-          <a:stretch xmlns:a="http://schemas.openxmlformats.org/drawingml/2006/main"/>
+          <a:blip r:embed="R9e95ad130edb487b"/>
+          <a:stretch/>
         </p:blipFill>
         <p:spPr>
-          <a:xfrm xmlns:a="http://schemas.openxmlformats.org/drawingml/2006/main">
+          <a:xfrm>
             <a:off x="22751143" y="24098250"/>
             <a:ext cx="19267714" cy="5619750"/>
           </a:xfrm>
-          <a:prstGeom xmlns:a="http://schemas.openxmlformats.org/drawingml/2006/main" prst="rect">
+          <a:prstGeom prst="rect">
             <a:avLst/>
           </a:prstGeom>
         </p:spPr>
@@ -5152,42 +5297,35 @@
       <p:sp>
         <p:nvSpPr>
           <p:cNvPr id="107" name="chart-caption-classic">
-            <a:extLst xmlns:a="http://schemas.openxmlformats.org/drawingml/2006/main">
-              <a:ext uri="{FF2B5EF4-FFF2-40B4-BE49-F238E27FC236}">
-                <a16:creationId xmlns:a16="http://schemas.microsoft.com/office/drawing/2014/main" id="{B708A308-45BC-4E6E-B9C7-972F274E0CCB}"/>
-              </a:ext>
-            </a:extLst>
-          </p:cNvPr>
-          <p:cNvSpPr>
-            <a:spLocks xmlns:a="http://schemas.openxmlformats.org/drawingml/2006/main" noGrp="1"/>
+            <a:extLst>
+              <a:ext uri="{FF2B5EF4-FFF2-40B4-BE49-F238E27FC236}">
+                <ns3:creationId id="{B708A308-45BC-4E6E-B9C7-972F274E0CCB}"/>
+              </a:ext>
+            </a:extLst>
+          </p:cNvPr>
+          <p:cNvSpPr>
+            <a:spLocks noGrp="1"/>
           </p:cNvSpPr>
           <p:nvPr/>
         </p:nvSpPr>
         <p:spPr>
-          <a:xfrm xmlns:a="http://schemas.openxmlformats.org/drawingml/2006/main">
+          <a:xfrm>
             <a:off x="1095375" y="29860875"/>
             <a:ext cx="21050250" cy="1238250"/>
           </a:xfrm>
-          <a:prstGeom xmlns:a="http://schemas.openxmlformats.org/drawingml/2006/main" prst="rect">
+          <a:prstGeom prst="rect">
             <a:avLst/>
           </a:prstGeom>
-          <a:noFill xmlns:a="http://schemas.openxmlformats.org/drawingml/2006/main"/>
-          <a:ln xmlns:a="http://schemas.openxmlformats.org/drawingml/2006/main" w="0">
+          <a:noFill/>
+          <a:ln w="0">
             <a:noFill/>
             <a:prstDash val="solid"/>
           </a:ln>
         </p:spPr>
         <p:txBody>
-          <a:bodyPr xmlns:a="http://schemas.openxmlformats.org/drawingml/2006/main"/>
-          <a:lstStyle xmlns:a="http://schemas.openxmlformats.org/drawingml/2006/main"/>
-          <a:p xmlns:a="http://schemas.openxmlformats.org/drawingml/2006/main">
-            <a:pPr algn="l">
-              <a:defRPr sz="1650" b="0" i="0">
-                <a:solidFill>
-                  <a:srgbClr val="555555"/>
-                </a:solidFill>
-              </a:defRPr>
-            </a:pPr>
+          <a:bodyPr/>
+          <a:lstStyle/>
+          <a:p>
             <a:r>
               <a:rPr sz="1650" b="0" i="0">
                 <a:solidFill>
@@ -5197,7 +5335,164 @@
                 <a:ea typeface="Calibri"/>
                 <a:cs typeface="Calibri"/>
               </a:rPr>
-              <a:t>Os gráficos acima são exportações diretas do padrão usado nos scripts R: barras horizontais por UF, comparação 2013/2019 e barras de erro com IC95%. A posição de Brasil ao final da escala reproduz a ordenação definida no código.</a:t>
+              <a:t>• Gráficos exportados dos códigos R com `geom_col`, `geom_errorbar`, `coord_flip` e IC95%.</a:t>
+            </a:r>
+            <a:endParaRPr/>
+          </a:p>
+          <a:p>
+            <a:r>
+              <a:rPr sz="1650" b="0" i="0">
+                <a:solidFill>
+                  <a:srgbClr val="555555"/>
+                </a:solidFill>
+                <a:latin typeface="Calibri"/>
+                <a:ea typeface="Calibri"/>
+                <a:cs typeface="Calibri"/>
+              </a:rPr>
+              <a:t>• Barras com IC95% evitam leitura baseada apenas na altura das colunas.</a:t>
+            </a:r>
+            <a:endParaRPr/>
+          </a:p>
+          <a:p>
+            <a:r>
+              <a:rPr sz="1650" b="0" i="0">
+                <a:solidFill>
+                  <a:srgbClr val="555555"/>
+                </a:solidFill>
+                <a:latin typeface="Calibri"/>
+                <a:ea typeface="Calibri"/>
+                <a:cs typeface="Calibri"/>
+              </a:rPr>
+              <a:t>• Padrões estaduais são evidência exploratória quando os intervalos se sobrepõem.</a:t>
+            </a:r>
+            <a:endParaRPr/>
+          </a:p>
+        </p:txBody>
+      </p:sp>
+      <p:sp>
+        <p:nvSpPr>
+          <p:cNvPr id="136" name="formula-box-classic-pt"/>
+          <p:cNvSpPr txBox="1"/>
+          <p:nvPr/>
+        </p:nvSpPr>
+        <p:spPr>
+          <a:xfrm>
+            <a:off x="1190625" y="14720000"/>
+            <a:ext cx="19907250" cy="1750000"/>
+          </a:xfrm>
+          <a:prstGeom prst="rect">
+            <a:avLst/>
+          </a:prstGeom>
+          <a:solidFill>
+            <a:srgbClr val="F2F7FB"/>
+          </a:solidFill>
+          <a:ln w="19050">
+            <a:solidFill>
+              <a:srgbClr val="1F4E79"/>
+            </a:solidFill>
+          </a:ln>
+        </p:spPr>
+        <p:txBody>
+          <a:bodyPr wrap="square" lIns="91440" rIns="91440" tIns="91440" bIns="91440" anchor="ctr"/>
+          <a:lstStyle/>
+          <a:p>
+            <a:pPr algn="ctr"/>
+            <a:r>
+              <a:rPr lang="pt-BR" sz="1300" b="1">
+                <a:latin typeface="Aptos"/>
+              </a:rPr>
+              <a:t>FÓRMULAS</a:t>
+            </a:r>
+          </a:p>
+          <a:p>
+            <a:pPr algn="ctr"/>
+            <a:r>
+              <a:rPr lang="pt-BR" sz="1300" b="1">
+                <a:latin typeface="Cambria Math"/>
+              </a:rPr>
+              <a:t>p̂ = Σ wᵢyᵢ / Σ wᵢ</a:t>
+            </a:r>
+          </a:p>
+          <a:p>
+            <a:pPr algn="ctr"/>
+            <a:r>
+              <a:rPr lang="pt-BR" sz="1300" b="1">
+                <a:latin typeface="Cambria Math"/>
+              </a:rPr>
+              <a:t>% = 100 × p̂</a:t>
+            </a:r>
+          </a:p>
+          <a:p>
+            <a:pPr algn="ctr"/>
+            <a:r>
+              <a:rPr lang="pt-BR" sz="1300" b="1">
+                <a:latin typeface="Cambria Math"/>
+              </a:rPr>
+              <a:t>taxa₁₀₀k = 100000 × p̂</a:t>
+            </a:r>
+          </a:p>
+          <a:p>
+            <a:pPr algn="ctr"/>
+            <a:r>
+              <a:rPr lang="pt-BR" sz="1300" b="1">
+                <a:latin typeface="Aptos"/>
+              </a:rPr>
+              <a:t>IC₉₅%: beta</a:t>
+            </a:r>
+          </a:p>
+        </p:txBody>
+      </p:sp>
+      <p:sp>
+        <p:nvSpPr>
+          <p:cNvPr id="137" name="qr-placeholder-classic-pt"/>
+          <p:cNvSpPr txBox="1"/>
+          <p:nvPr/>
+        </p:nvSpPr>
+        <p:spPr>
+          <a:xfrm>
+            <a:off x="39200000" y="29620000"/>
+            <a:ext cx="2300000" cy="2300000"/>
+          </a:xfrm>
+          <a:prstGeom prst="rect">
+            <a:avLst/>
+          </a:prstGeom>
+          <a:solidFill>
+            <a:srgbClr val="FFFFFF"/>
+          </a:solidFill>
+          <a:ln w="19050">
+            <a:solidFill>
+              <a:srgbClr val="1F4E79"/>
+            </a:solidFill>
+          </a:ln>
+        </p:spPr>
+        <p:txBody>
+          <a:bodyPr wrap="square" lIns="91440" rIns="91440" tIns="91440" bIns="91440" anchor="ctr"/>
+          <a:lstStyle/>
+          <a:p>
+            <a:pPr algn="ctr"/>
+            <a:r>
+              <a:rPr lang="pt-BR" sz="850" b="1">
+                <a:latin typeface="Aptos"/>
+              </a:rPr>
+              <a:t>QR CODE</a:t>
+            </a:r>
+          </a:p>
+          <a:p>
+            <a:pPr algn="ctr"/>
+            <a:r>
+              <a:rPr lang="pt-BR" sz="850" b="1">
+                <a:latin typeface="Aptos"/>
+              </a:rPr>
+              <a:t>Relatório metodológico</a:t>
+            </a:r>
+          </a:p>
+          <a:p>
+            <a:pPr algn="ctr"/>
+            <a:r>
+              <a:rPr lang="pt-BR" sz="850" b="1">
+                <a:latin typeface="Aptos"/>
+              </a:rPr>
+              <a:t>ingodube.github.io/PNS_2013_2019</a:t>
             </a:r>
           </a:p>
         </p:txBody>
@@ -5205,7 +5500,7 @@
     </p:spTree>
     <p:extLst>
       <p:ext uri="{BB962C8B-B14F-4D97-AF65-F5344CB8AC3E}">
-        <p14:creationId xmlns:p14="http://schemas.microsoft.com/office/powerpoint/2010/main" val="1144243419"/>
+        <ns4:creationId val="1144243419"/>
       </p:ext>
     </p:extLst>
   </p:cSld>

--- a/outputs/posters/poster_pns_asma_classico_pt.pptx
+++ b/outputs/posters/poster_pns_asma_classico_pt.pptx
@@ -3908,7 +3908,7 @@
 </file>
 
 <file path=ppt/slides/slide1.xml><?xml version="1.0" encoding="utf-8"?>
-<p:sld xmlns:a="http://schemas.openxmlformats.org/drawingml/2006/main" xmlns:ns3="http://schemas.microsoft.com/office/drawing/2014/main" xmlns:ns4="http://schemas.microsoft.com/office/powerpoint/2010/main" xmlns:p="http://schemas.openxmlformats.org/presentationml/2006/main" xmlns:r="http://schemas.openxmlformats.org/officeDocument/2006/relationships">
+<p:sld xmlns:a="http://schemas.openxmlformats.org/drawingml/2006/main" xmlns:ns2="http://schemas.openxmlformats.org/officeDocument/2006/relationships" xmlns:ns3="http://schemas.microsoft.com/office/drawing/2014/main" xmlns:ns4="http://schemas.microsoft.com/office/powerpoint/2010/main" xmlns:p="http://schemas.openxmlformats.org/presentationml/2006/main">
   <p:cSld>
     <p:spTree>
       <p:nvGrpSpPr>
@@ -3928,7 +3928,7 @@
           <p:nvPr/>
         </p:nvPicPr>
         <p:blipFill>
-          <a:blip r:embed="R93936a15ffc5402c"/>
+          <a:blip ns2:embed="R93936a15ffc5402c"/>
           <a:srcRect l="0" t="41985" r="50251" b="34197"/>
           <a:stretch/>
         </p:blipFill>
@@ -3951,7 +3951,7 @@
           <p:nvPr/>
         </p:nvPicPr>
         <p:blipFill>
-          <a:blip r:embed="R93936a15ffc5402c"/>
+          <a:blip ns2:embed="R93936a15ffc5402c"/>
           <a:srcRect l="0" t="0" r="0" b="0"/>
           <a:stretch/>
         </p:blipFill>
@@ -3974,7 +3974,7 @@
           <p:nvPr/>
         </p:nvPicPr>
         <p:blipFill>
-          <a:blip r:embed="R93936a15ffc5402c"/>
+          <a:blip ns2:embed="R93936a15ffc5402c"/>
           <a:srcRect l="0" t="41985" r="50251" b="34197"/>
           <a:stretch/>
         </p:blipFill>
@@ -3997,7 +3997,7 @@
           <p:nvPr/>
         </p:nvPicPr>
         <p:blipFill>
-          <a:blip r:embed="Raf7bddf60b12439a"/>
+          <a:blip ns2:embed="Raf7bddf60b12439a"/>
           <a:stretch>
             <a:fillRect l="0" t="0" r="0" b="0"/>
           </a:stretch>
@@ -4290,49 +4290,189 @@
           <a:fontRef idx="minor"/>
         </p:style>
         <p:txBody>
-          <a:bodyPr lIns="90000" tIns="45000" rIns="90000" bIns="45000">
+          <a:bodyPr lIns="90000" tIns="45000" rIns="90000" bIns="45000" wrap="square">
             <a:spAutoFit/>
           </a:bodyPr>
           <a:lstStyle/>
           <a:p>
             <a:r>
-              <a:rPr sz="2475" b="0" i="0">
-                <a:solidFill>
-                  <a:srgbClr val="111111"/>
-                </a:solidFill>
-                <a:latin typeface="Calibri"/>
-                <a:ea typeface="Calibri"/>
-                <a:cs typeface="Calibri"/>
-              </a:rPr>
-              <a:t>• Microdados PNS 2013/2019 do morador selecionado.</a:t>
-            </a:r>
-            <a:endParaRPr/>
-          </a:p>
-          <a:p>
-            <a:r>
-              <a:rPr sz="2475" b="0" i="0">
-                <a:solidFill>
-                  <a:srgbClr val="111111"/>
-                </a:solidFill>
-                <a:latin typeface="Calibri"/>
-                <a:ea typeface="Calibri"/>
-                <a:cs typeface="Calibri"/>
-              </a:rPr>
-              <a:t>• Plano amostral com `pns_design()`: UPA, estratos e pesos.</a:t>
-            </a:r>
-            <a:endParaRPr/>
-          </a:p>
-          <a:p>
-            <a:r>
-              <a:rPr sz="2475" b="0" i="0">
-                <a:solidFill>
-                  <a:srgbClr val="111111"/>
-                </a:solidFill>
-                <a:latin typeface="Calibri"/>
-                <a:ea typeface="Calibri"/>
-                <a:cs typeface="Calibri"/>
-              </a:rPr>
-              <a:t>• Proporções estimadas por `svyciprop(method = "beta")`, evitando fragilidades do Wald em UFs e domínios pequenos.</a:t>
+              <a:rPr sz="1300" b="1" i="0">
+                <a:solidFill>
+                  <a:srgbClr val="111111"/>
+                </a:solidFill>
+                <a:latin typeface="Calibri"/>
+                <a:ea typeface="Calibri"/>
+                <a:cs typeface="Calibri"/>
+              </a:rPr>
+              <a:t>• Fonte: PNS 2013/2019; morador</a:t>
+            </a:r>
+            <a:endParaRPr/>
+          </a:p>
+          <a:p>
+            <a:r>
+              <a:rPr sz="1300" b="0" i="0">
+                <a:solidFill>
+                  <a:srgbClr val="111111"/>
+                </a:solidFill>
+                <a:latin typeface="Calibri"/>
+                <a:ea typeface="Calibri"/>
+                <a:cs typeface="Calibri"/>
+              </a:rPr>
+              <a:t>  selecionado; Q074, Q076,</a:t>
+            </a:r>
+            <a:endParaRPr/>
+          </a:p>
+          <a:p>
+            <a:r>
+              <a:rPr sz="1300" b="0" i="0">
+                <a:solidFill>
+                  <a:srgbClr val="111111"/>
+                </a:solidFill>
+                <a:latin typeface="Calibri"/>
+                <a:ea typeface="Calibri"/>
+                <a:cs typeface="Calibri"/>
+              </a:rPr>
+              <a:t>  Q07701/Q07704/Q07708, P050 e módulos</a:t>
+            </a:r>
+            <a:endParaRPr/>
+          </a:p>
+          <a:p>
+            <a:r>
+              <a:rPr sz="1300" b="0" i="0">
+                <a:solidFill>
+                  <a:srgbClr val="111111"/>
+                </a:solidFill>
+                <a:latin typeface="Calibri"/>
+                <a:ea typeface="Calibri"/>
+                <a:cs typeface="Calibri"/>
+              </a:rPr>
+              <a:t>  complementares.</a:t>
+            </a:r>
+            <a:endParaRPr/>
+          </a:p>
+          <a:p>
+            <a:r>
+              <a:rPr sz="1300" b="0" i="0">
+                <a:solidFill>
+                  <a:srgbClr val="111111"/>
+                </a:solidFill>
+                <a:latin typeface="Calibri"/>
+                <a:ea typeface="Calibri"/>
+                <a:cs typeface="Calibri"/>
+              </a:rPr>
+              <a:t>• Desenho: `PNSIBGE::pns_design()`</a:t>
+            </a:r>
+            <a:endParaRPr/>
+          </a:p>
+          <a:p>
+            <a:r>
+              <a:rPr sz="1300" b="0" i="0">
+                <a:solidFill>
+                  <a:srgbClr val="111111"/>
+                </a:solidFill>
+                <a:latin typeface="Calibri"/>
+                <a:ea typeface="Calibri"/>
+                <a:cs typeface="Calibri"/>
+              </a:rPr>
+              <a:t>  incorpora UPA/PSU, estratos e peso</a:t>
+            </a:r>
+            <a:endParaRPr/>
+          </a:p>
+          <a:p>
+            <a:r>
+              <a:rPr sz="1300" b="0" i="0">
+                <a:solidFill>
+                  <a:srgbClr val="111111"/>
+                </a:solidFill>
+                <a:latin typeface="Calibri"/>
+                <a:ea typeface="Calibri"/>
+                <a:cs typeface="Calibri"/>
+              </a:rPr>
+              <a:t>  calibrado.</a:t>
+            </a:r>
+            <a:endParaRPr/>
+          </a:p>
+          <a:p>
+            <a:r>
+              <a:rPr sz="1300" b="0" i="0">
+                <a:solidFill>
+                  <a:srgbClr val="111111"/>
+                </a:solidFill>
+                <a:latin typeface="Calibri"/>
+                <a:ea typeface="Calibri"/>
+                <a:cs typeface="Calibri"/>
+              </a:rPr>
+              <a:t>• Estimação: `survey` para proporções,</a:t>
+            </a:r>
+            <a:endParaRPr/>
+          </a:p>
+          <a:p>
+            <a:r>
+              <a:rPr sz="1300" b="0" i="0">
+                <a:solidFill>
+                  <a:srgbClr val="111111"/>
+                </a:solidFill>
+                <a:latin typeface="Calibri"/>
+                <a:ea typeface="Calibri"/>
+                <a:cs typeface="Calibri"/>
+              </a:rPr>
+              <a:t>  médias, totais e taxas; PSUs solitárias</a:t>
+            </a:r>
+            <a:endParaRPr/>
+          </a:p>
+          <a:p>
+            <a:r>
+              <a:rPr sz="1300" b="0" i="0">
+                <a:solidFill>
+                  <a:srgbClr val="111111"/>
+                </a:solidFill>
+                <a:latin typeface="Calibri"/>
+                <a:ea typeface="Calibri"/>
+                <a:cs typeface="Calibri"/>
+              </a:rPr>
+              <a:t>  tratadas nas opções do desenho.</a:t>
+            </a:r>
+            <a:endParaRPr/>
+          </a:p>
+          <a:p>
+            <a:r>
+              <a:rPr sz="1300" b="0" i="0">
+                <a:solidFill>
+                  <a:srgbClr val="111111"/>
+                </a:solidFill>
+                <a:latin typeface="Calibri"/>
+                <a:ea typeface="Calibri"/>
+                <a:cs typeface="Calibri"/>
+              </a:rPr>
+              <a:t>• IC95%: `svyciprop(method = "beta")`,</a:t>
+            </a:r>
+            <a:endParaRPr/>
+          </a:p>
+          <a:p>
+            <a:r>
+              <a:rPr sz="1300" b="0" i="0">
+                <a:solidFill>
+                  <a:srgbClr val="111111"/>
+                </a:solidFill>
+                <a:latin typeface="Calibri"/>
+                <a:ea typeface="Calibri"/>
+                <a:cs typeface="Calibri"/>
+              </a:rPr>
+              <a:t>  adequado para proporções, UFs e</a:t>
+            </a:r>
+            <a:endParaRPr/>
+          </a:p>
+          <a:p>
+            <a:r>
+              <a:rPr sz="1300" b="0" i="0">
+                <a:solidFill>
+                  <a:srgbClr val="111111"/>
+                </a:solidFill>
+                <a:latin typeface="Calibri"/>
+                <a:ea typeface="Calibri"/>
+                <a:cs typeface="Calibri"/>
+              </a:rPr>
+              <a:t>  subgrupos com poucos eventos positivos.</a:t>
             </a:r>
             <a:endParaRPr/>
           </a:p>
@@ -4372,49 +4512,203 @@
           <a:fontRef idx="minor"/>
         </p:style>
         <p:txBody>
-          <a:bodyPr lIns="90000" tIns="45000" rIns="90000" bIns="45000">
+          <a:bodyPr lIns="90000" tIns="45000" rIns="90000" bIns="45000" wrap="square">
             <a:spAutoFit/>
           </a:bodyPr>
           <a:lstStyle/>
           <a:p>
             <a:r>
-              <a:rPr sz="2475" b="0" i="0">
-                <a:solidFill>
-                  <a:srgbClr val="111111"/>
-                </a:solidFill>
-                <a:latin typeface="Calibri"/>
-                <a:ea typeface="Calibri"/>
-                <a:cs typeface="Calibri"/>
-              </a:rPr>
-              <a:t>• A PNS é um inquérito domiciliar populacional com desenho amostral complexo.</a:t>
-            </a:r>
-            <a:endParaRPr/>
-          </a:p>
-          <a:p>
-            <a:r>
-              <a:rPr sz="2475" b="0" i="0">
-                <a:solidFill>
-                  <a:srgbClr val="111111"/>
-                </a:solidFill>
-                <a:latin typeface="Calibri"/>
-                <a:ea typeface="Calibri"/>
-                <a:cs typeface="Calibri"/>
-              </a:rPr>
-              <a:t>• Indicadores epidemiológicos resumem diagnóstico, crises, tratamento e fatores de risco.</a:t>
-            </a:r>
-            <a:endParaRPr/>
-          </a:p>
-          <a:p>
-            <a:r>
-              <a:rPr sz="2475" b="0" i="0">
-                <a:solidFill>
-                  <a:srgbClr val="111111"/>
-                </a:solidFill>
-                <a:latin typeface="Calibri"/>
-                <a:ea typeface="Calibri"/>
-                <a:cs typeface="Calibri"/>
-              </a:rPr>
-              <a:t>• A asma combina carga crônica, episódios agudos e necessidade de manejo contínuo.</a:t>
+              <a:rPr sz="1300" b="1" i="0">
+                <a:solidFill>
+                  <a:srgbClr val="111111"/>
+                </a:solidFill>
+                <a:latin typeface="Calibri"/>
+                <a:ea typeface="Calibri"/>
+                <a:cs typeface="Calibri"/>
+              </a:rPr>
+              <a:t>• Indicadores epidemiológicos sintetizam</a:t>
+            </a:r>
+            <a:endParaRPr/>
+          </a:p>
+          <a:p>
+            <a:r>
+              <a:rPr sz="1300" b="0" i="0">
+                <a:solidFill>
+                  <a:srgbClr val="111111"/>
+                </a:solidFill>
+                <a:latin typeface="Calibri"/>
+                <a:ea typeface="Calibri"/>
+                <a:cs typeface="Calibri"/>
+              </a:rPr>
+              <a:t>  frequência, distribuição e evolução de</a:t>
+            </a:r>
+            <a:endParaRPr/>
+          </a:p>
+          <a:p>
+            <a:r>
+              <a:rPr sz="1300" b="0" i="0">
+                <a:solidFill>
+                  <a:srgbClr val="111111"/>
+                </a:solidFill>
+                <a:latin typeface="Calibri"/>
+                <a:ea typeface="Calibri"/>
+                <a:cs typeface="Calibri"/>
+              </a:rPr>
+              <a:t>  eventos de saúde.</a:t>
+            </a:r>
+            <a:endParaRPr/>
+          </a:p>
+          <a:p>
+            <a:r>
+              <a:rPr sz="1300" b="0" i="0">
+                <a:solidFill>
+                  <a:srgbClr val="111111"/>
+                </a:solidFill>
+                <a:latin typeface="Calibri"/>
+                <a:ea typeface="Calibri"/>
+                <a:cs typeface="Calibri"/>
+              </a:rPr>
+              <a:t>• Na asma, prevalência, crises,</a:t>
+            </a:r>
+            <a:endParaRPr/>
+          </a:p>
+          <a:p>
+            <a:r>
+              <a:rPr sz="1300" b="0" i="0">
+                <a:solidFill>
+                  <a:srgbClr val="111111"/>
+                </a:solidFill>
+                <a:latin typeface="Calibri"/>
+                <a:ea typeface="Calibri"/>
+                <a:cs typeface="Calibri"/>
+              </a:rPr>
+              <a:t>  medicamentos e tabagismo distinguem</a:t>
+            </a:r>
+            <a:endParaRPr/>
+          </a:p>
+          <a:p>
+            <a:r>
+              <a:rPr sz="1300" b="0" i="0">
+                <a:solidFill>
+                  <a:srgbClr val="111111"/>
+                </a:solidFill>
+                <a:latin typeface="Calibri"/>
+                <a:ea typeface="Calibri"/>
+                <a:cs typeface="Calibri"/>
+              </a:rPr>
+              <a:t>  carga da doença, acesso diagnóstico,</a:t>
+            </a:r>
+            <a:endParaRPr/>
+          </a:p>
+          <a:p>
+            <a:r>
+              <a:rPr sz="1300" b="0" i="0">
+                <a:solidFill>
+                  <a:srgbClr val="111111"/>
+                </a:solidFill>
+                <a:latin typeface="Calibri"/>
+                <a:ea typeface="Calibri"/>
+                <a:cs typeface="Calibri"/>
+              </a:rPr>
+              <a:t>  manejo e fatores de risco.</a:t>
+            </a:r>
+            <a:endParaRPr/>
+          </a:p>
+          <a:p>
+            <a:r>
+              <a:rPr sz="1300" b="0" i="0">
+                <a:solidFill>
+                  <a:srgbClr val="111111"/>
+                </a:solidFill>
+                <a:latin typeface="Calibri"/>
+                <a:ea typeface="Calibri"/>
+                <a:cs typeface="Calibri"/>
+              </a:rPr>
+              <a:t>• A PNS tem amostragem complexa; ignorar</a:t>
+            </a:r>
+            <a:endParaRPr/>
+          </a:p>
+          <a:p>
+            <a:r>
+              <a:rPr sz="1300" b="0" i="0">
+                <a:solidFill>
+                  <a:srgbClr val="111111"/>
+                </a:solidFill>
+                <a:latin typeface="Calibri"/>
+                <a:ea typeface="Calibri"/>
+                <a:cs typeface="Calibri"/>
+              </a:rPr>
+              <a:t>  UPA, estratos e pesos compromete</a:t>
+            </a:r>
+            <a:endParaRPr/>
+          </a:p>
+          <a:p>
+            <a:r>
+              <a:rPr sz="1300" b="0" i="0">
+                <a:solidFill>
+                  <a:srgbClr val="111111"/>
+                </a:solidFill>
+                <a:latin typeface="Calibri"/>
+                <a:ea typeface="Calibri"/>
+                <a:cs typeface="Calibri"/>
+              </a:rPr>
+              <a:t>  variâncias, ICs e comparações entre UFs.</a:t>
+            </a:r>
+            <a:endParaRPr/>
+          </a:p>
+          <a:p>
+            <a:r>
+              <a:rPr sz="1300" b="0" i="0">
+                <a:solidFill>
+                  <a:srgbClr val="111111"/>
+                </a:solidFill>
+                <a:latin typeface="Calibri"/>
+                <a:ea typeface="Calibri"/>
+                <a:cs typeface="Calibri"/>
+              </a:rPr>
+              <a:t>• O estudo transforma respostas</a:t>
+            </a:r>
+            <a:endParaRPr/>
+          </a:p>
+          <a:p>
+            <a:r>
+              <a:rPr sz="1300" b="0" i="0">
+                <a:solidFill>
+                  <a:srgbClr val="111111"/>
+                </a:solidFill>
+                <a:latin typeface="Calibri"/>
+                <a:ea typeface="Calibri"/>
+                <a:cs typeface="Calibri"/>
+              </a:rPr>
+              <a:t>  individuais em evidência populacional</a:t>
+            </a:r>
+            <a:endParaRPr/>
+          </a:p>
+          <a:p>
+            <a:r>
+              <a:rPr sz="1300" b="0" i="0">
+                <a:solidFill>
+                  <a:srgbClr val="111111"/>
+                </a:solidFill>
+                <a:latin typeface="Calibri"/>
+                <a:ea typeface="Calibri"/>
+                <a:cs typeface="Calibri"/>
+              </a:rPr>
+              <a:t>  reprodutível para vigilância e políticas</a:t>
+            </a:r>
+            <a:endParaRPr/>
+          </a:p>
+          <a:p>
+            <a:r>
+              <a:rPr sz="1300" b="0" i="0">
+                <a:solidFill>
+                  <a:srgbClr val="111111"/>
+                </a:solidFill>
+                <a:latin typeface="Calibri"/>
+                <a:ea typeface="Calibri"/>
+                <a:cs typeface="Calibri"/>
+              </a:rPr>
+              <a:t>  públicas.</a:t>
             </a:r>
             <a:endParaRPr/>
           </a:p>
@@ -4454,49 +4748,175 @@
           <a:fontRef idx="minor"/>
         </p:style>
         <p:txBody>
-          <a:bodyPr lIns="90000" tIns="45000" rIns="90000" bIns="45000">
+          <a:bodyPr lIns="90000" tIns="45000" rIns="90000" bIns="45000" wrap="square">
             <a:spAutoFit/>
           </a:bodyPr>
           <a:lstStyle/>
           <a:p>
             <a:r>
-              <a:rPr sz="2475" b="0" i="0">
-                <a:solidFill>
-                  <a:srgbClr val="111111"/>
-                </a:solidFill>
-                <a:latin typeface="Calibri"/>
-                <a:ea typeface="Calibri"/>
-                <a:cs typeface="Calibri"/>
-              </a:rPr>
-              <a:t>• Comparar 2013 e 2019 para Brasil e UFs.</a:t>
-            </a:r>
-            <a:endParaRPr/>
-          </a:p>
-          <a:p>
-            <a:r>
-              <a:rPr sz="2475" b="0" i="0">
-                <a:solidFill>
-                  <a:srgbClr val="111111"/>
-                </a:solidFill>
-                <a:latin typeface="Calibri"/>
-                <a:ea typeface="Calibri"/>
-                <a:cs typeface="Calibri"/>
-              </a:rPr>
-              <a:t>• Estimar prevalência, crises, medicamentos, tabagismo e indicadores complementares.</a:t>
-            </a:r>
-            <a:endParaRPr/>
-          </a:p>
-          <a:p>
-            <a:r>
-              <a:rPr sz="2475" b="0" i="0">
-                <a:solidFill>
-                  <a:srgbClr val="111111"/>
-                </a:solidFill>
-                <a:latin typeface="Calibri"/>
-                <a:ea typeface="Calibri"/>
-                <a:cs typeface="Calibri"/>
-              </a:rPr>
-              <a:t>• Interpretar mudanças pela magnitude e pela sobreposição dos IC95%.</a:t>
+              <a:rPr sz="1300" b="1" i="0">
+                <a:solidFill>
+                  <a:srgbClr val="111111"/>
+                </a:solidFill>
+                <a:latin typeface="Calibri"/>
+                <a:ea typeface="Calibri"/>
+                <a:cs typeface="Calibri"/>
+              </a:rPr>
+              <a:t>• Implementar no R o plano amostral da PNS</a:t>
+            </a:r>
+            <a:endParaRPr/>
+          </a:p>
+          <a:p>
+            <a:r>
+              <a:rPr sz="1300" b="0" i="0">
+                <a:solidFill>
+                  <a:srgbClr val="111111"/>
+                </a:solidFill>
+                <a:latin typeface="Calibri"/>
+                <a:ea typeface="Calibri"/>
+                <a:cs typeface="Calibri"/>
+              </a:rPr>
+              <a:t>  2013 e 2019 para o morador selecionado.</a:t>
+            </a:r>
+            <a:endParaRPr/>
+          </a:p>
+          <a:p>
+            <a:r>
+              <a:rPr sz="1300" b="0" i="0">
+                <a:solidFill>
+                  <a:srgbClr val="111111"/>
+                </a:solidFill>
+                <a:latin typeface="Calibri"/>
+                <a:ea typeface="Calibri"/>
+                <a:cs typeface="Calibri"/>
+              </a:rPr>
+              <a:t>• Estimar diagnóstico médico de asma,</a:t>
+            </a:r>
+            <a:endParaRPr/>
+          </a:p>
+          <a:p>
+            <a:r>
+              <a:rPr sz="1300" b="0" i="0">
+                <a:solidFill>
+                  <a:srgbClr val="111111"/>
+                </a:solidFill>
+                <a:latin typeface="Calibri"/>
+                <a:ea typeface="Calibri"/>
+                <a:cs typeface="Calibri"/>
+              </a:rPr>
+              <a:t>  crise em 12 meses, medicamento</a:t>
+            </a:r>
+            <a:endParaRPr/>
+          </a:p>
+          <a:p>
+            <a:r>
+              <a:rPr sz="1300" b="0" i="0">
+                <a:solidFill>
+                  <a:srgbClr val="111111"/>
+                </a:solidFill>
+                <a:latin typeface="Calibri"/>
+                <a:ea typeface="Calibri"/>
+                <a:cs typeface="Calibri"/>
+              </a:rPr>
+              <a:t>  oral/bombinha, tabagismo e indicadores</a:t>
+            </a:r>
+            <a:endParaRPr/>
+          </a:p>
+          <a:p>
+            <a:r>
+              <a:rPr sz="1300" b="0" i="0">
+                <a:solidFill>
+                  <a:srgbClr val="111111"/>
+                </a:solidFill>
+                <a:latin typeface="Calibri"/>
+                <a:ea typeface="Calibri"/>
+                <a:cs typeface="Calibri"/>
+              </a:rPr>
+              <a:t>  complementares.</a:t>
+            </a:r>
+            <a:endParaRPr/>
+          </a:p>
+          <a:p>
+            <a:r>
+              <a:rPr sz="1300" b="0" i="0">
+                <a:solidFill>
+                  <a:srgbClr val="111111"/>
+                </a:solidFill>
+                <a:latin typeface="Calibri"/>
+                <a:ea typeface="Calibri"/>
+                <a:cs typeface="Calibri"/>
+              </a:rPr>
+              <a:t>• Comparar Brasil e UFs por estimativa</a:t>
+            </a:r>
+            <a:endParaRPr/>
+          </a:p>
+          <a:p>
+            <a:r>
+              <a:rPr sz="1300" b="0" i="0">
+                <a:solidFill>
+                  <a:srgbClr val="111111"/>
+                </a:solidFill>
+                <a:latin typeface="Calibri"/>
+                <a:ea typeface="Calibri"/>
+                <a:cs typeface="Calibri"/>
+              </a:rPr>
+              <a:t>  pontual, IC95% beta, magnitude e</a:t>
+            </a:r>
+            <a:endParaRPr/>
+          </a:p>
+          <a:p>
+            <a:r>
+              <a:rPr sz="1300" b="0" i="0">
+                <a:solidFill>
+                  <a:srgbClr val="111111"/>
+                </a:solidFill>
+                <a:latin typeface="Calibri"/>
+                <a:ea typeface="Calibri"/>
+                <a:cs typeface="Calibri"/>
+              </a:rPr>
+              <a:t>  sobreposição dos intervalos.</a:t>
+            </a:r>
+            <a:endParaRPr/>
+          </a:p>
+          <a:p>
+            <a:r>
+              <a:rPr sz="1300" b="0" i="0">
+                <a:solidFill>
+                  <a:srgbClr val="111111"/>
+                </a:solidFill>
+                <a:latin typeface="Calibri"/>
+                <a:ea typeface="Calibri"/>
+                <a:cs typeface="Calibri"/>
+              </a:rPr>
+              <a:t>• Disponibilizar códigos, tabelas,</a:t>
+            </a:r>
+            <a:endParaRPr/>
+          </a:p>
+          <a:p>
+            <a:r>
+              <a:rPr sz="1300" b="0" i="0">
+                <a:solidFill>
+                  <a:srgbClr val="111111"/>
+                </a:solidFill>
+                <a:latin typeface="Calibri"/>
+                <a:ea typeface="Calibri"/>
+                <a:cs typeface="Calibri"/>
+              </a:rPr>
+              <a:t>  gráficos e relatório metodológico para</a:t>
+            </a:r>
+            <a:endParaRPr/>
+          </a:p>
+          <a:p>
+            <a:r>
+              <a:rPr sz="1300" b="0" i="0">
+                <a:solidFill>
+                  <a:srgbClr val="111111"/>
+                </a:solidFill>
+                <a:latin typeface="Calibri"/>
+                <a:ea typeface="Calibri"/>
+                <a:cs typeface="Calibri"/>
+              </a:rPr>
+              <a:t>  auditoria e reprodução.</a:t>
             </a:r>
             <a:endParaRPr/>
           </a:p>
@@ -4536,49 +4956,189 @@
           <a:fontRef idx="minor"/>
         </p:style>
         <p:txBody>
-          <a:bodyPr lIns="90000" tIns="45000" rIns="90000" bIns="45000">
+          <a:bodyPr lIns="90000" tIns="45000" rIns="90000" bIns="45000" wrap="square">
             <a:spAutoFit/>
           </a:bodyPr>
           <a:lstStyle/>
           <a:p>
             <a:r>
-              <a:rPr sz="2475" b="0" i="0">
-                <a:solidFill>
-                  <a:srgbClr val="111111"/>
-                </a:solidFill>
-                <a:latin typeface="Calibri"/>
-                <a:ea typeface="Calibri"/>
-                <a:cs typeface="Calibri"/>
-              </a:rPr>
-              <a:t>• Pesos, estratos e conglomerados são indispensáveis para inferência válida.</a:t>
-            </a:r>
-            <a:endParaRPr/>
-          </a:p>
-          <a:p>
-            <a:r>
-              <a:rPr sz="2475" b="0" i="0">
-                <a:solidFill>
-                  <a:srgbClr val="111111"/>
-                </a:solidFill>
-                <a:latin typeface="Calibri"/>
-                <a:ea typeface="Calibri"/>
-                <a:cs typeface="Calibri"/>
-              </a:rPr>
-              <a:t>• O fluxo reprodutível em R torna a análise auditável e reutilizável.</a:t>
-            </a:r>
-            <a:endParaRPr/>
-          </a:p>
-          <a:p>
-            <a:r>
-              <a:rPr sz="2475" b="0" i="0">
-                <a:solidFill>
-                  <a:srgbClr val="111111"/>
-                </a:solidFill>
-                <a:latin typeface="Calibri"/>
-                <a:ea typeface="Calibri"/>
-                <a:cs typeface="Calibri"/>
-              </a:rPr>
-              <a:t>• O relatório metodológico documenta ETL, indicadores, gráficos e referências cruzadas.</a:t>
+              <a:rPr sz="1300" b="1" i="0">
+                <a:solidFill>
+                  <a:srgbClr val="111111"/>
+                </a:solidFill>
+                <a:latin typeface="Calibri"/>
+                <a:ea typeface="Calibri"/>
+                <a:cs typeface="Calibri"/>
+              </a:rPr>
+              <a:t>• O aumento do diagnóstico pode indicar</a:t>
+            </a:r>
+            <a:endParaRPr/>
+          </a:p>
+          <a:p>
+            <a:r>
+              <a:rPr sz="1300" b="0" i="0">
+                <a:solidFill>
+                  <a:srgbClr val="111111"/>
+                </a:solidFill>
+                <a:latin typeface="Calibri"/>
+                <a:ea typeface="Calibri"/>
+                <a:cs typeface="Calibri"/>
+              </a:rPr>
+              <a:t>  maior ocorrência, melhor acesso ao</a:t>
+            </a:r>
+            <a:endParaRPr/>
+          </a:p>
+          <a:p>
+            <a:r>
+              <a:rPr sz="1300" b="0" i="0">
+                <a:solidFill>
+                  <a:srgbClr val="111111"/>
+                </a:solidFill>
+                <a:latin typeface="Calibri"/>
+                <a:ea typeface="Calibri"/>
+                <a:cs typeface="Calibri"/>
+              </a:rPr>
+              <a:t>  diagnóstico ou ambos.</a:t>
+            </a:r>
+            <a:endParaRPr/>
+          </a:p>
+          <a:p>
+            <a:r>
+              <a:rPr sz="1300" b="0" i="0">
+                <a:solidFill>
+                  <a:srgbClr val="111111"/>
+                </a:solidFill>
+                <a:latin typeface="Calibri"/>
+                <a:ea typeface="Calibri"/>
+                <a:cs typeface="Calibri"/>
+              </a:rPr>
+              <a:t>• Crises e medicamentos avaliam se o maior</a:t>
+            </a:r>
+            <a:endParaRPr/>
+          </a:p>
+          <a:p>
+            <a:r>
+              <a:rPr sz="1300" b="0" i="0">
+                <a:solidFill>
+                  <a:srgbClr val="111111"/>
+                </a:solidFill>
+                <a:latin typeface="Calibri"/>
+                <a:ea typeface="Calibri"/>
+                <a:cs typeface="Calibri"/>
+              </a:rPr>
+              <a:t>  diagnóstico veio acompanhado de melhor</a:t>
+            </a:r>
+            <a:endParaRPr/>
+          </a:p>
+          <a:p>
+            <a:r>
+              <a:rPr sz="1300" b="0" i="0">
+                <a:solidFill>
+                  <a:srgbClr val="111111"/>
+                </a:solidFill>
+                <a:latin typeface="Calibri"/>
+                <a:ea typeface="Calibri"/>
+                <a:cs typeface="Calibri"/>
+              </a:rPr>
+              <a:t>  controle da doença.</a:t>
+            </a:r>
+            <a:endParaRPr/>
+          </a:p>
+          <a:p>
+            <a:r>
+              <a:rPr sz="1300" b="0" i="0">
+                <a:solidFill>
+                  <a:srgbClr val="111111"/>
+                </a:solidFill>
+                <a:latin typeface="Calibri"/>
+                <a:ea typeface="Calibri"/>
+                <a:cs typeface="Calibri"/>
+              </a:rPr>
+              <a:t>• Taxas por 100 mil separam carga</a:t>
+            </a:r>
+            <a:endParaRPr/>
+          </a:p>
+          <a:p>
+            <a:r>
+              <a:rPr sz="1300" b="0" i="0">
+                <a:solidFill>
+                  <a:srgbClr val="111111"/>
+                </a:solidFill>
+                <a:latin typeface="Calibri"/>
+                <a:ea typeface="Calibri"/>
+                <a:cs typeface="Calibri"/>
+              </a:rPr>
+              <a:t>  populacional total da proporção entre</a:t>
+            </a:r>
+            <a:endParaRPr/>
+          </a:p>
+          <a:p>
+            <a:r>
+              <a:rPr sz="1300" b="0" i="0">
+                <a:solidFill>
+                  <a:srgbClr val="111111"/>
+                </a:solidFill>
+                <a:latin typeface="Calibri"/>
+                <a:ea typeface="Calibri"/>
+                <a:cs typeface="Calibri"/>
+              </a:rPr>
+              <a:t>  diagnosticados.</a:t>
+            </a:r>
+            <a:endParaRPr/>
+          </a:p>
+          <a:p>
+            <a:r>
+              <a:rPr sz="1300" b="0" i="0">
+                <a:solidFill>
+                  <a:srgbClr val="111111"/>
+                </a:solidFill>
+                <a:latin typeface="Calibri"/>
+                <a:ea typeface="Calibri"/>
+                <a:cs typeface="Calibri"/>
+              </a:rPr>
+              <a:t>• ETL documenta extração, transformação,</a:t>
+            </a:r>
+            <a:endParaRPr/>
+          </a:p>
+          <a:p>
+            <a:r>
+              <a:rPr sz="1300" b="0" i="0">
+                <a:solidFill>
+                  <a:srgbClr val="111111"/>
+                </a:solidFill>
+                <a:latin typeface="Calibri"/>
+                <a:ea typeface="Calibri"/>
+                <a:cs typeface="Calibri"/>
+              </a:rPr>
+              <a:t>  denominadores e outputs; OMOP/OHDSI</a:t>
+            </a:r>
+            <a:endParaRPr/>
+          </a:p>
+          <a:p>
+            <a:r>
+              <a:rPr sz="1300" b="0" i="0">
+                <a:solidFill>
+                  <a:srgbClr val="111111"/>
+                </a:solidFill>
+                <a:latin typeface="Calibri"/>
+                <a:ea typeface="Calibri"/>
+                <a:cs typeface="Calibri"/>
+              </a:rPr>
+              <a:t>  orienta padronização e</a:t>
+            </a:r>
+            <a:endParaRPr/>
+          </a:p>
+          <a:p>
+            <a:r>
+              <a:rPr sz="1300" b="0" i="0">
+                <a:solidFill>
+                  <a:srgbClr val="111111"/>
+                </a:solidFill>
+                <a:latin typeface="Calibri"/>
+                <a:ea typeface="Calibri"/>
+                <a:cs typeface="Calibri"/>
+              </a:rPr>
+              <a:t>  interoperabilidade.</a:t>
             </a:r>
             <a:endParaRPr/>
           </a:p>
@@ -4593,7 +5153,7 @@
           <p:nvPr/>
         </p:nvPicPr>
         <p:blipFill>
-          <a:blip r:embed="R0d457cff43d6479b"/>
+          <a:blip ns2:embed="R0d457cff43d6479b"/>
           <a:stretch>
             <a:fillRect l="0" t="0" r="0" b="0"/>
           </a:stretch>
@@ -4637,11 +5197,11 @@
           </a:ln>
         </p:spPr>
         <p:txBody>
-          <a:bodyPr/>
+          <a:bodyPr wrap="square"/>
           <a:lstStyle/>
           <a:p>
             <a:r>
-              <a:rPr sz="3225" b="1" i="0">
+              <a:rPr sz="1500" b="1" i="0">
                 <a:solidFill>
                   <a:srgbClr val="1C425B"/>
                 </a:solidFill>
@@ -4649,7 +5209,7 @@
                 <a:ea typeface="Calibri"/>
                 <a:cs typeface="Calibri"/>
               </a:rPr>
-              <a:t>Evolução da asma no Brasil, 2013-2019: estimativas reprodutíveis com o plano amostral da PNS</a:t>
+              <a:t>Implementação do plano amostral da PNS no R: asma no Brasil, 2013-2019</a:t>
             </a:r>
             <a:endParaRPr/>
           </a:p>
@@ -4811,8 +5371,8 @@
         </p:nvSpPr>
         <p:spPr>
           <a:xfrm>
-            <a:off x="1190625" y="12430125"/>
-            <a:ext cx="19907250" cy="2150000"/>
+            <a:off x="1190625" y="12300000"/>
+            <a:ext cx="19907250" cy="3500000"/>
           </a:xfrm>
           <a:prstGeom prst="rect">
             <a:avLst/>
@@ -4824,47 +5384,131 @@
           </a:ln>
         </p:spPr>
         <p:txBody>
-          <a:bodyPr/>
+          <a:bodyPr wrap="square"/>
           <a:lstStyle/>
           <a:p>
             <a:r>
-              <a:rPr sz="2325" b="0" i="0">
-                <a:solidFill>
-                  <a:srgbClr val="111111"/>
-                </a:solidFill>
-                <a:latin typeface="Calibri"/>
-                <a:ea typeface="Calibri"/>
-                <a:cs typeface="Calibri"/>
-              </a:rPr>
-              <a:t>• Recodificação de Q074, Q076, Q07701/Q07704/Q07708 e P050 para indicadores comparáveis.</a:t>
-            </a:r>
-            <a:endParaRPr/>
-          </a:p>
-          <a:p>
-            <a:r>
-              <a:rPr sz="2325" b="0" i="0">
-                <a:solidFill>
-                  <a:srgbClr val="111111"/>
-                </a:solidFill>
-                <a:latin typeface="Calibri"/>
-                <a:ea typeface="Calibri"/>
-                <a:cs typeface="Calibri"/>
-              </a:rPr>
-              <a:t>• Taxas por 100 mil reescalam proporções ponderadas, mantendo a incerteza original.</a:t>
-            </a:r>
-            <a:endParaRPr/>
-          </a:p>
-          <a:p>
-            <a:r>
-              <a:rPr sz="2325" b="0" i="0">
-                <a:solidFill>
-                  <a:srgbClr val="111111"/>
-                </a:solidFill>
-                <a:latin typeface="Calibri"/>
-                <a:ea typeface="Calibri"/>
-                <a:cs typeface="Calibri"/>
-              </a:rPr>
-              <a:t>• A comparação 2013-2019 combina estimativa pontual, IC95% e leitura por UF.</a:t>
+              <a:rPr sz="1019" b="1" i="0">
+                <a:solidFill>
+                  <a:srgbClr val="111111"/>
+                </a:solidFill>
+                <a:latin typeface="Calibri"/>
+                <a:ea typeface="Calibri"/>
+                <a:cs typeface="Calibri"/>
+              </a:rPr>
+              <a:t>• ETL analítico: extrair microdados, selecionar variáveis, recodificar desfechos</a:t>
+            </a:r>
+            <a:endParaRPr/>
+          </a:p>
+          <a:p>
+            <a:r>
+              <a:rPr sz="1019" b="0" i="0">
+                <a:solidFill>
+                  <a:srgbClr val="111111"/>
+                </a:solidFill>
+                <a:latin typeface="Calibri"/>
+                <a:ea typeface="Calibri"/>
+                <a:cs typeface="Calibri"/>
+              </a:rPr>
+              <a:t>  binários, definir denominadores válidos e gerar `df_*.csv`/`df_*.xlsx`.</a:t>
+            </a:r>
+            <a:endParaRPr/>
+          </a:p>
+          <a:p>
+            <a:r>
+              <a:rPr sz="1019" b="0" i="0">
+                <a:solidFill>
+                  <a:srgbClr val="111111"/>
+                </a:solidFill>
+                <a:latin typeface="Calibri"/>
+                <a:ea typeface="Calibri"/>
+                <a:cs typeface="Calibri"/>
+              </a:rPr>
+              <a:t>• Indicadores: diagnóstico de asma; crise recente; medicamento entre asmáticos;</a:t>
+            </a:r>
+            <a:endParaRPr/>
+          </a:p>
+          <a:p>
+            <a:r>
+              <a:rPr sz="1019" b="0" i="0">
+                <a:solidFill>
+                  <a:srgbClr val="111111"/>
+                </a:solidFill>
+                <a:latin typeface="Calibri"/>
+                <a:ea typeface="Calibri"/>
+                <a:cs typeface="Calibri"/>
+              </a:rPr>
+              <a:t>  medicamento entre asmáticos com crise; taxa populacional de medicamento; fumantes por</a:t>
+            </a:r>
+            <a:endParaRPr/>
+          </a:p>
+          <a:p>
+            <a:r>
+              <a:rPr sz="1019" b="0" i="0">
+                <a:solidFill>
+                  <a:srgbClr val="111111"/>
+                </a:solidFill>
+                <a:latin typeface="Calibri"/>
+                <a:ea typeface="Calibri"/>
+                <a:cs typeface="Calibri"/>
+              </a:rPr>
+              <a:t>  100 mil; Farmácia Popular/desembolso; absenteísmo, dias perdidos e renda deflacionada.</a:t>
+            </a:r>
+            <a:endParaRPr/>
+          </a:p>
+          <a:p>
+            <a:r>
+              <a:rPr sz="1019" b="0" i="0">
+                <a:solidFill>
+                  <a:srgbClr val="111111"/>
+                </a:solidFill>
+                <a:latin typeface="Calibri"/>
+                <a:ea typeface="Calibri"/>
+                <a:cs typeface="Calibri"/>
+              </a:rPr>
+              <a:t>• IC beta respeita a escala 0-1 e evita fragilidades do Wald em proporções extremas ou</a:t>
+            </a:r>
+            <a:endParaRPr/>
+          </a:p>
+          <a:p>
+            <a:r>
+              <a:rPr sz="1019" b="0" i="0">
+                <a:solidFill>
+                  <a:srgbClr val="111111"/>
+                </a:solidFill>
+                <a:latin typeface="Calibri"/>
+                <a:ea typeface="Calibri"/>
+                <a:cs typeface="Calibri"/>
+              </a:rPr>
+              <a:t>  domínios pequenos.</a:t>
+            </a:r>
+            <a:endParaRPr/>
+          </a:p>
+          <a:p>
+            <a:r>
+              <a:rPr sz="1019" b="0" i="0">
+                <a:solidFill>
+                  <a:srgbClr val="111111"/>
+                </a:solidFill>
+                <a:latin typeface="Calibri"/>
+                <a:ea typeface="Calibri"/>
+                <a:cs typeface="Calibri"/>
+              </a:rPr>
+              <a:t>• Interpretação: considerar magnitude, direção, denominador e sobreposição dos IC95%; a</a:t>
+            </a:r>
+            <a:endParaRPr/>
+          </a:p>
+          <a:p>
+            <a:r>
+              <a:rPr sz="1019" b="0" i="0">
+                <a:solidFill>
+                  <a:srgbClr val="111111"/>
+                </a:solidFill>
+                <a:latin typeface="Calibri"/>
+                <a:ea typeface="Calibri"/>
+                <a:cs typeface="Calibri"/>
+              </a:rPr>
+              <a:t>  altura das barras isoladamente não basta.</a:t>
             </a:r>
             <a:endParaRPr/>
           </a:p>
@@ -4985,89 +5629,201 @@
           </a:ln>
         </p:spPr>
         <p:txBody>
-          <a:bodyPr/>
+          <a:bodyPr wrap="square"/>
           <a:lstStyle/>
           <a:p>
             <a:r>
-              <a:rPr sz="2325" b="0" i="0">
-                <a:solidFill>
-                  <a:srgbClr val="111111"/>
-                </a:solidFill>
-                <a:latin typeface="Calibri"/>
-                <a:ea typeface="Calibri"/>
-                <a:cs typeface="Calibri"/>
-              </a:rPr>
-              <a:t>• Diagnóstico médico de asma aumentou no Brasil: 4,41% -&gt; 5,40%; ICs sem sobreposição.</a:t>
-            </a:r>
-            <a:endParaRPr/>
-          </a:p>
-          <a:p>
-            <a:r>
-              <a:rPr sz="2325" b="0" i="0">
-                <a:solidFill>
-                  <a:srgbClr val="111111"/>
-                </a:solidFill>
-                <a:latin typeface="Calibri"/>
-                <a:ea typeface="Calibri"/>
-                <a:cs typeface="Calibri"/>
-              </a:rPr>
-              <a:t>• Crises nos últimos 12 meses permaneceram estáveis: 38,3% -&gt; 37,7%.</a:t>
-            </a:r>
-            <a:endParaRPr/>
-          </a:p>
-          <a:p>
-            <a:r>
-              <a:rPr sz="2325" b="0" i="0">
-                <a:solidFill>
-                  <a:srgbClr val="111111"/>
-                </a:solidFill>
-                <a:latin typeface="Calibri"/>
-                <a:ea typeface="Calibri"/>
-                <a:cs typeface="Calibri"/>
-              </a:rPr>
-              <a:t>• Uso de medicamento oral ou bombinha entre asmáticos caiu: 81,5% -&gt; 64,4%; interpretar com cautela.</a:t>
-            </a:r>
-            <a:endParaRPr/>
-          </a:p>
-          <a:p>
-            <a:r>
-              <a:rPr sz="2325" b="0" i="0">
-                <a:solidFill>
-                  <a:srgbClr val="111111"/>
-                </a:solidFill>
-                <a:latin typeface="Calibri"/>
-                <a:ea typeface="Calibri"/>
-                <a:cs typeface="Calibri"/>
-              </a:rPr>
-              <a:t>• A taxa populacional de medicamentos ajuda a separar carga total de proporção entre diagnosticados.</a:t>
-            </a:r>
-            <a:endParaRPr/>
-          </a:p>
-          <a:p>
-            <a:r>
-              <a:rPr sz="2325" b="0" i="0">
-                <a:solidFill>
-                  <a:srgbClr val="111111"/>
-                </a:solidFill>
-                <a:latin typeface="Calibri"/>
-                <a:ea typeface="Calibri"/>
-                <a:cs typeface="Calibri"/>
-              </a:rPr>
-              <a:t>• Tabagismo caiu em várias UFs, mas não explica isoladamente o aumento do diagnóstico.</a:t>
-            </a:r>
-            <a:endParaRPr/>
-          </a:p>
-          <a:p>
-            <a:r>
-              <a:rPr sz="2325" b="0" i="0">
-                <a:solidFill>
-                  <a:srgbClr val="111111"/>
-                </a:solidFill>
-                <a:latin typeface="Calibri"/>
-                <a:ea typeface="Calibri"/>
-                <a:cs typeface="Calibri"/>
-              </a:rPr>
-              <a:t>• Resultados sugerem maior diagnóstico sem melhora proporcional do controle clínico.</a:t>
+              <a:rPr sz="900" b="1" i="0">
+                <a:solidFill>
+                  <a:srgbClr val="111111"/>
+                </a:solidFill>
+                <a:latin typeface="Calibri"/>
+                <a:ea typeface="Calibri"/>
+                <a:cs typeface="Calibri"/>
+              </a:rPr>
+              <a:t>• Prevalência nacional de diagnóstico médico de asma: 4,41% em 2013 para 5,40% em</a:t>
+            </a:r>
+            <a:endParaRPr/>
+          </a:p>
+          <a:p>
+            <a:r>
+              <a:rPr sz="900" b="0" i="0">
+                <a:solidFill>
+                  <a:srgbClr val="111111"/>
+                </a:solidFill>
+                <a:latin typeface="Calibri"/>
+                <a:ea typeface="Calibri"/>
+                <a:cs typeface="Calibri"/>
+              </a:rPr>
+              <a:t>  2019; ICs sem sobreposição indicam aumento estatisticamente relevante.</a:t>
+            </a:r>
+            <a:endParaRPr/>
+          </a:p>
+          <a:p>
+            <a:r>
+              <a:rPr sz="900" b="0" i="0">
+                <a:solidFill>
+                  <a:srgbClr val="111111"/>
+                </a:solidFill>
+                <a:latin typeface="Calibri"/>
+                <a:ea typeface="Calibri"/>
+                <a:cs typeface="Calibri"/>
+              </a:rPr>
+              <a:t>• UFs: Rio Grande do Sul permaneceu entre maiores prevalências; Espírito Santo e Amapá</a:t>
+            </a:r>
+            <a:endParaRPr/>
+          </a:p>
+          <a:p>
+            <a:r>
+              <a:rPr sz="900" b="0" i="0">
+                <a:solidFill>
+                  <a:srgbClr val="111111"/>
+                </a:solidFill>
+                <a:latin typeface="Calibri"/>
+                <a:ea typeface="Calibri"/>
+                <a:cs typeface="Calibri"/>
+              </a:rPr>
+              <a:t>  se destacam; Bahia, Rondônia e Mato Grosso ficaram entre menores níveis em 2019. ICs</a:t>
+            </a:r>
+            <a:endParaRPr/>
+          </a:p>
+          <a:p>
+            <a:r>
+              <a:rPr sz="900" b="0" i="0">
+                <a:solidFill>
+                  <a:srgbClr val="111111"/>
+                </a:solidFill>
+                <a:latin typeface="Calibri"/>
+                <a:ea typeface="Calibri"/>
+                <a:cs typeface="Calibri"/>
+              </a:rPr>
+              <a:t>  sobrepostos limitam inferência em várias UFs.</a:t>
+            </a:r>
+            <a:endParaRPr/>
+          </a:p>
+          <a:p>
+            <a:r>
+              <a:rPr sz="900" b="0" i="0">
+                <a:solidFill>
+                  <a:srgbClr val="111111"/>
+                </a:solidFill>
+                <a:latin typeface="Calibri"/>
+                <a:ea typeface="Calibri"/>
+                <a:cs typeface="Calibri"/>
+              </a:rPr>
+              <a:t>• Crises em 12 meses: 38,3% para 37,7%; estabilidade sugere que mais diagnóstico não</a:t>
+            </a:r>
+            <a:endParaRPr/>
+          </a:p>
+          <a:p>
+            <a:r>
+              <a:rPr sz="900" b="0" i="0">
+                <a:solidFill>
+                  <a:srgbClr val="111111"/>
+                </a:solidFill>
+                <a:latin typeface="Calibri"/>
+                <a:ea typeface="Calibri"/>
+                <a:cs typeface="Calibri"/>
+              </a:rPr>
+              <a:t>  se converteu em melhora proporcional do controle.</a:t>
+            </a:r>
+            <a:endParaRPr/>
+          </a:p>
+          <a:p>
+            <a:r>
+              <a:rPr sz="900" b="0" i="0">
+                <a:solidFill>
+                  <a:srgbClr val="111111"/>
+                </a:solidFill>
+                <a:latin typeface="Calibri"/>
+                <a:ea typeface="Calibri"/>
+                <a:cs typeface="Calibri"/>
+              </a:rPr>
+              <a:t>• Medicamento oral/bombinha entre asmáticos: 81,5% para 64,4%; leitura exige cautela</a:t>
+            </a:r>
+            <a:endParaRPr/>
+          </a:p>
+          <a:p>
+            <a:r>
+              <a:rPr sz="900" b="0" i="0">
+                <a:solidFill>
+                  <a:srgbClr val="111111"/>
+                </a:solidFill>
+                <a:latin typeface="Calibri"/>
+                <a:ea typeface="Calibri"/>
+                <a:cs typeface="Calibri"/>
+              </a:rPr>
+              <a:t>  por denominador, IC95% e diferença entre proporção entre diagnosticados e taxa</a:t>
+            </a:r>
+            <a:endParaRPr/>
+          </a:p>
+          <a:p>
+            <a:r>
+              <a:rPr sz="900" b="0" i="0">
+                <a:solidFill>
+                  <a:srgbClr val="111111"/>
+                </a:solidFill>
+                <a:latin typeface="Calibri"/>
+                <a:ea typeface="Calibri"/>
+                <a:cs typeface="Calibri"/>
+              </a:rPr>
+              <a:t>  populacional.</a:t>
+            </a:r>
+            <a:endParaRPr/>
+          </a:p>
+          <a:p>
+            <a:r>
+              <a:rPr sz="900" b="0" i="0">
+                <a:solidFill>
+                  <a:srgbClr val="111111"/>
+                </a:solidFill>
+                <a:latin typeface="Calibri"/>
+                <a:ea typeface="Calibri"/>
+                <a:cs typeface="Calibri"/>
+              </a:rPr>
+              <a:t>• Tabagismo caiu em várias UFs; a taxa nacional citada foi de 14.650 para 12.151 por</a:t>
+            </a:r>
+            <a:endParaRPr/>
+          </a:p>
+          <a:p>
+            <a:r>
+              <a:rPr sz="900" b="0" i="0">
+                <a:solidFill>
+                  <a:srgbClr val="111111"/>
+                </a:solidFill>
+                <a:latin typeface="Calibri"/>
+                <a:ea typeface="Calibri"/>
+                <a:cs typeface="Calibri"/>
+              </a:rPr>
+              <a:t>  100 mil, insuficiente para explicar sozinho o aumento do diagnóstico.</a:t>
+            </a:r>
+            <a:endParaRPr/>
+          </a:p>
+          <a:p>
+            <a:r>
+              <a:rPr sz="900" b="0" i="0">
+                <a:solidFill>
+                  <a:srgbClr val="111111"/>
+                </a:solidFill>
+                <a:latin typeface="Calibri"/>
+                <a:ea typeface="Calibri"/>
+                <a:cs typeface="Calibri"/>
+              </a:rPr>
+              <a:t>• Implicação: manejo da asma requer acesso farmacológico, seguimento clínico,</a:t>
+            </a:r>
+            <a:endParaRPr/>
+          </a:p>
+          <a:p>
+            <a:r>
+              <a:rPr sz="900" b="0" i="0">
+                <a:solidFill>
+                  <a:srgbClr val="111111"/>
+                </a:solidFill>
+                <a:latin typeface="Calibri"/>
+                <a:ea typeface="Calibri"/>
+                <a:cs typeface="Calibri"/>
+              </a:rPr>
+              <a:t>  educação, controle de exposições e intervenções não farmacológicas.</a:t>
             </a:r>
             <a:endParaRPr/>
           </a:p>
@@ -5089,8 +5845,8 @@
         </p:nvSpPr>
         <p:spPr>
           <a:xfrm>
-            <a:off x="22098000" y="30289500"/>
-            <a:ext cx="16000000" cy="1238250"/>
+            <a:off x="20150000" y="29190000"/>
+            <a:ext cx="18400000" cy="3100000"/>
           </a:xfrm>
           <a:prstGeom prst="rect">
             <a:avLst/>
@@ -5102,19 +5858,341 @@
           </a:ln>
         </p:spPr>
         <p:txBody>
-          <a:bodyPr/>
+          <a:bodyPr wrap="square"/>
           <a:lstStyle/>
           <a:p>
             <a:r>
-              <a:rPr sz="1500" b="0" i="0">
-                <a:solidFill>
-                  <a:srgbClr val="111111"/>
-                </a:solidFill>
-                <a:latin typeface="Calibri"/>
-                <a:ea typeface="Calibri"/>
-                <a:cs typeface="Calibri"/>
-              </a:rPr>
-              <a:t>[1] Global Asthma Network, 2022. [2] Souza-Júnior et al., 2015. [3] Dube; Silva, 2026. [4] Menezes et al., 2015. [5] Santos et al., 2018. [6] Brown; Cai; DasGupta, 2001. [7] Korn; Graubard, 1998.</a:t>
+              <a:rPr sz="500" b="1" i="0">
+                <a:solidFill>
+                  <a:srgbClr val="111111"/>
+                </a:solidFill>
+                <a:latin typeface="Calibri"/>
+                <a:ea typeface="Calibri"/>
+                <a:cs typeface="Calibri"/>
+              </a:rPr>
+              <a:t>[1] GLOBAL ASTHMA NETWORK. Global Asthma Report 2022. Auckland, New Zealand: Global Asthma Network, 2022. Disponível em:</a:t>
+            </a:r>
+            <a:endParaRPr/>
+          </a:p>
+          <a:p>
+            <a:r>
+              <a:rPr sz="500" b="0" i="0">
+                <a:solidFill>
+                  <a:srgbClr val="111111"/>
+                </a:solidFill>
+                <a:latin typeface="Calibri"/>
+                <a:ea typeface="Calibri"/>
+                <a:cs typeface="Calibri"/>
+              </a:rPr>
+              <a:t>    https://globalasthmareport.org/resources/Global_Asthma_Report_2022.pdf. Acesso em: 19 set. 2025.</a:t>
+            </a:r>
+            <a:endParaRPr/>
+          </a:p>
+          <a:p>
+            <a:r>
+              <a:rPr sz="500" b="0" i="0">
+                <a:solidFill>
+                  <a:srgbClr val="111111"/>
+                </a:solidFill>
+                <a:latin typeface="Calibri"/>
+                <a:ea typeface="Calibri"/>
+                <a:cs typeface="Calibri"/>
+              </a:rPr>
+              <a:t>[2] SOUZA-JÚNIOR, Paulo Roberto Borges de et al. Desenho da amostra da Pesquisa Nacional de Saúde 2013. Epidemiologia e Serviços</a:t>
+            </a:r>
+            <a:endParaRPr/>
+          </a:p>
+          <a:p>
+            <a:r>
+              <a:rPr sz="500" b="0" i="0">
+                <a:solidFill>
+                  <a:srgbClr val="111111"/>
+                </a:solidFill>
+                <a:latin typeface="Calibri"/>
+                <a:ea typeface="Calibri"/>
+                <a:cs typeface="Calibri"/>
+              </a:rPr>
+              <a:t>    de Saúde, v. 24, p. 207-216, 2015.</a:t>
+            </a:r>
+            <a:endParaRPr/>
+          </a:p>
+          <a:p>
+            <a:r>
+              <a:rPr sz="500" b="0" i="0">
+                <a:solidFill>
+                  <a:srgbClr val="111111"/>
+                </a:solidFill>
+                <a:latin typeface="Calibri"/>
+                <a:ea typeface="Calibri"/>
+                <a:cs typeface="Calibri"/>
+              </a:rPr>
+              <a:t>[3] DUBE, I.; SILVA, M. E. L. PNS_2013_2019. GitHub, 2026. Disponível em: https://github.com/ingodube/PNS_2013_2019. Acesso em: 28</a:t>
+            </a:r>
+            <a:endParaRPr/>
+          </a:p>
+          <a:p>
+            <a:r>
+              <a:rPr sz="500" b="0" i="0">
+                <a:solidFill>
+                  <a:srgbClr val="111111"/>
+                </a:solidFill>
+                <a:latin typeface="Calibri"/>
+                <a:ea typeface="Calibri"/>
+                <a:cs typeface="Calibri"/>
+              </a:rPr>
+              <a:t>    mai. 2026.</a:t>
+            </a:r>
+            <a:endParaRPr/>
+          </a:p>
+          <a:p>
+            <a:r>
+              <a:rPr sz="500" b="0" i="0">
+                <a:solidFill>
+                  <a:srgbClr val="111111"/>
+                </a:solidFill>
+                <a:latin typeface="Calibri"/>
+                <a:ea typeface="Calibri"/>
+                <a:cs typeface="Calibri"/>
+              </a:rPr>
+              <a:t>[4] MENEZES, A. M. B. et al. Prevalência de diagnóstico médico de asma em adultos brasileiros: Pesquisa Nacional de Saúde, 2013.</a:t>
+            </a:r>
+            <a:endParaRPr/>
+          </a:p>
+          <a:p>
+            <a:r>
+              <a:rPr sz="500" b="0" i="0">
+                <a:solidFill>
+                  <a:srgbClr val="111111"/>
+                </a:solidFill>
+                <a:latin typeface="Calibri"/>
+                <a:ea typeface="Calibri"/>
+                <a:cs typeface="Calibri"/>
+              </a:rPr>
+              <a:t>    Revista Brasileira de Epidemiologia, São Paulo, v. 18, supl. 2, p. 204-213, 2015.</a:t>
+            </a:r>
+            <a:endParaRPr/>
+          </a:p>
+          <a:p>
+            <a:r>
+              <a:rPr sz="500" b="0" i="0">
+                <a:solidFill>
+                  <a:srgbClr val="111111"/>
+                </a:solidFill>
+                <a:latin typeface="Calibri"/>
+                <a:ea typeface="Calibri"/>
+                <a:cs typeface="Calibri"/>
+              </a:rPr>
+              <a:t>[5] SEVERE ASTHMA. Non-Pharmacological Interventions for Asthma. Disponível em:</a:t>
+            </a:r>
+            <a:endParaRPr/>
+          </a:p>
+          <a:p>
+            <a:r>
+              <a:rPr sz="500" b="0" i="0">
+                <a:solidFill>
+                  <a:srgbClr val="111111"/>
+                </a:solidFill>
+                <a:latin typeface="Calibri"/>
+                <a:ea typeface="Calibri"/>
+                <a:cs typeface="Calibri"/>
+              </a:rPr>
+              <a:t>    https://www.severeasthma.org.au/non-pharmacological-interventions-asthma/. Acesso em: 19 set. 2025.</a:t>
+            </a:r>
+            <a:endParaRPr/>
+          </a:p>
+          <a:p>
+            <a:r>
+              <a:rPr sz="500" b="0" i="0">
+                <a:solidFill>
+                  <a:srgbClr val="111111"/>
+                </a:solidFill>
+                <a:latin typeface="Calibri"/>
+                <a:ea typeface="Calibri"/>
+                <a:cs typeface="Calibri"/>
+              </a:rPr>
+              <a:t>[6] SANTOS, Felipe Moraes dos et al. Tendência da prevalência de asma autorreferida no Brasil de 2003 a 2013 em adultos e fatores</a:t>
+            </a:r>
+            <a:endParaRPr/>
+          </a:p>
+          <a:p>
+            <a:r>
+              <a:rPr sz="500" b="0" i="0">
+                <a:solidFill>
+                  <a:srgbClr val="111111"/>
+                </a:solidFill>
+                <a:latin typeface="Calibri"/>
+                <a:ea typeface="Calibri"/>
+                <a:cs typeface="Calibri"/>
+              </a:rPr>
+              <a:t>    associados à prevalência. Jornal Brasileiro de Pneumologia, v. 44, n. 6, p. 491-497, 2018.</a:t>
+            </a:r>
+            <a:endParaRPr/>
+          </a:p>
+          <a:p>
+            <a:r>
+              <a:rPr sz="500" b="0" i="0">
+                <a:solidFill>
+                  <a:srgbClr val="111111"/>
+                </a:solidFill>
+                <a:latin typeface="Calibri"/>
+                <a:ea typeface="Calibri"/>
+                <a:cs typeface="Calibri"/>
+              </a:rPr>
+              <a:t>    doi:10.1590/S1806-37562017000000328.</a:t>
+            </a:r>
+            <a:endParaRPr/>
+          </a:p>
+          <a:p>
+            <a:r>
+              <a:rPr sz="500" b="0" i="0">
+                <a:solidFill>
+                  <a:srgbClr val="111111"/>
+                </a:solidFill>
+                <a:latin typeface="Calibri"/>
+                <a:ea typeface="Calibri"/>
+                <a:cs typeface="Calibri"/>
+              </a:rPr>
+              <a:t>[7] TO, T. et al. Global asthma prevalence in adults: findings from the cross-sectional world health survey. BMC Public Health, v.</a:t>
+            </a:r>
+            <a:endParaRPr/>
+          </a:p>
+          <a:p>
+            <a:r>
+              <a:rPr sz="500" b="0" i="0">
+                <a:solidFill>
+                  <a:srgbClr val="111111"/>
+                </a:solidFill>
+                <a:latin typeface="Calibri"/>
+                <a:ea typeface="Calibri"/>
+                <a:cs typeface="Calibri"/>
+              </a:rPr>
+              <a:t>    12, art. 204, 2012. doi:10.1186/1471-2458-12-204.</a:t>
+            </a:r>
+            <a:endParaRPr/>
+          </a:p>
+          <a:p>
+            <a:r>
+              <a:rPr sz="500" b="0" i="0">
+                <a:solidFill>
+                  <a:srgbClr val="111111"/>
+                </a:solidFill>
+                <a:latin typeface="Calibri"/>
+                <a:ea typeface="Calibri"/>
+                <a:cs typeface="Calibri"/>
+              </a:rPr>
+              <a:t>[8] OHDSI. Standardized Data: The OMOP Common Data Model. Disponível em: https://www.ohdsi.org/data-standardization/.</a:t>
+            </a:r>
+            <a:endParaRPr/>
+          </a:p>
+          <a:p>
+            <a:r>
+              <a:rPr sz="500" b="0" i="0">
+                <a:solidFill>
+                  <a:srgbClr val="111111"/>
+                </a:solidFill>
+                <a:latin typeface="Calibri"/>
+                <a:ea typeface="Calibri"/>
+                <a:cs typeface="Calibri"/>
+              </a:rPr>
+              <a:t>[9] OHDSI. OMOP Common Data Model. Disponível em: https://ohdsi.github.io/CommonDataModel/.</a:t>
+            </a:r>
+            <a:endParaRPr/>
+          </a:p>
+          <a:p>
+            <a:r>
+              <a:rPr sz="500" b="0" i="0">
+                <a:solidFill>
+                  <a:srgbClr val="111111"/>
+                </a:solidFill>
+                <a:latin typeface="Calibri"/>
+                <a:ea typeface="Calibri"/>
+                <a:cs typeface="Calibri"/>
+              </a:rPr>
+              <a:t>[10] OHDSI. ETL Creation Best Practices. Disponível em:</a:t>
+            </a:r>
+            <a:endParaRPr/>
+          </a:p>
+          <a:p>
+            <a:r>
+              <a:rPr sz="500" b="0" i="0">
+                <a:solidFill>
+                  <a:srgbClr val="111111"/>
+                </a:solidFill>
+                <a:latin typeface="Calibri"/>
+                <a:ea typeface="Calibri"/>
+                <a:cs typeface="Calibri"/>
+              </a:rPr>
+              <a:t>    https://www.ohdsi.org/web/wiki/doku.php?id=documentation:etl_best_practices.</a:t>
+            </a:r>
+            <a:endParaRPr/>
+          </a:p>
+          <a:p>
+            <a:r>
+              <a:rPr sz="500" b="0" i="0">
+                <a:solidFill>
+                  <a:srgbClr val="111111"/>
+                </a:solidFill>
+                <a:latin typeface="Calibri"/>
+                <a:ea typeface="Calibri"/>
+                <a:cs typeface="Calibri"/>
+              </a:rPr>
+              <a:t>[11] LUMLEY, Thomas. Complex Surveys: A Guide to Analysis Using R. Hoboken: Wiley, 2010.</a:t>
+            </a:r>
+            <a:endParaRPr/>
+          </a:p>
+          <a:p>
+            <a:r>
+              <a:rPr sz="500" b="0" i="0">
+                <a:solidFill>
+                  <a:srgbClr val="111111"/>
+                </a:solidFill>
+                <a:latin typeface="Calibri"/>
+                <a:ea typeface="Calibri"/>
+                <a:cs typeface="Calibri"/>
+              </a:rPr>
+              <a:t>[12] BROWN, Lawrence D.; CAI, T. Tony; DASGUPTA, Anirban. Interval estimation for a binomial proportion. Statistical Science, v.</a:t>
+            </a:r>
+            <a:endParaRPr/>
+          </a:p>
+          <a:p>
+            <a:r>
+              <a:rPr sz="500" b="0" i="0">
+                <a:solidFill>
+                  <a:srgbClr val="111111"/>
+                </a:solidFill>
+                <a:latin typeface="Calibri"/>
+                <a:ea typeface="Calibri"/>
+                <a:cs typeface="Calibri"/>
+              </a:rPr>
+              <a:t>    16, n. 2, p. 101-133, 2001. doi:10.1214/ss/1009213286.</a:t>
+            </a:r>
+            <a:endParaRPr/>
+          </a:p>
+          <a:p>
+            <a:r>
+              <a:rPr sz="500" b="0" i="0">
+                <a:solidFill>
+                  <a:srgbClr val="111111"/>
+                </a:solidFill>
+                <a:latin typeface="Calibri"/>
+                <a:ea typeface="Calibri"/>
+                <a:cs typeface="Calibri"/>
+              </a:rPr>
+              <a:t>[13] KORN, Edward L.; GRAUBARD, Barry I. Confidence intervals for proportions with small expected number of positive counts</a:t>
+            </a:r>
+            <a:endParaRPr/>
+          </a:p>
+          <a:p>
+            <a:r>
+              <a:rPr sz="500" b="0" i="0">
+                <a:solidFill>
+                  <a:srgbClr val="111111"/>
+                </a:solidFill>
+                <a:latin typeface="Calibri"/>
+                <a:ea typeface="Calibri"/>
+                <a:cs typeface="Calibri"/>
+              </a:rPr>
+              <a:t>    estimated from survey data. Survey Methodology, v. 24, n. 2, p. 193-201, 1998.</a:t>
             </a:r>
             <a:endParaRPr/>
           </a:p>
@@ -5215,7 +6293,7 @@
           <p:nvPr/>
         </p:nvPicPr>
         <p:blipFill>
-          <a:blip r:embed="R7380f614aae64e53"/>
+          <a:blip ns2:embed="R7380f614aae64e53"/>
           <a:stretch/>
         </p:blipFill>
         <p:spPr>
@@ -5237,7 +6315,7 @@
           <p:nvPr/>
         </p:nvPicPr>
         <p:blipFill>
-          <a:blip r:embed="R49cc8ec8088446a4"/>
+          <a:blip ns2:embed="R49cc8ec8088446a4"/>
           <a:stretch/>
         </p:blipFill>
         <p:spPr>
@@ -5259,7 +6337,7 @@
           <p:nvPr/>
         </p:nvPicPr>
         <p:blipFill>
-          <a:blip r:embed="R622f7f94b75d4fdf"/>
+          <a:blip ns2:embed="R622f7f94b75d4fdf"/>
           <a:stretch/>
         </p:blipFill>
         <p:spPr>
@@ -5281,7 +6359,7 @@
           <p:nvPr/>
         </p:nvPicPr>
         <p:blipFill>
-          <a:blip r:embed="R9e95ad130edb487b"/>
+          <a:blip ns2:embed="R9e95ad130edb487b"/>
           <a:stretch/>
         </p:blipFill>
         <p:spPr>
@@ -5323,11 +6401,11 @@
           </a:ln>
         </p:spPr>
         <p:txBody>
-          <a:bodyPr/>
+          <a:bodyPr wrap="square"/>
           <a:lstStyle/>
           <a:p>
             <a:r>
-              <a:rPr sz="1650" b="0" i="0">
+              <a:rPr sz="700" b="1" i="0">
                 <a:solidFill>
                   <a:srgbClr val="555555"/>
                 </a:solidFill>
@@ -5335,13 +6413,13 @@
                 <a:ea typeface="Calibri"/>
                 <a:cs typeface="Calibri"/>
               </a:rPr>
-              <a:t>• Gráficos exportados dos códigos R com `geom_col`, `geom_errorbar`, `coord_flip` e IC95%.</a:t>
-            </a:r>
-            <a:endParaRPr/>
-          </a:p>
-          <a:p>
-            <a:r>
-              <a:rPr sz="1650" b="0" i="0">
+              <a:t>• Figuras exportadas dos códigos R: `geom_col`, `geom_errorbar`, `coord_flip`, IC95% beta e</a:t>
+            </a:r>
+            <a:endParaRPr/>
+          </a:p>
+          <a:p>
+            <a:r>
+              <a:rPr sz="700" b="0" i="0">
                 <a:solidFill>
                   <a:srgbClr val="555555"/>
                 </a:solidFill>
@@ -5349,13 +6427,13 @@
                 <a:ea typeface="Calibri"/>
                 <a:cs typeface="Calibri"/>
               </a:rPr>
-              <a:t>• Barras com IC95% evitam leitura baseada apenas na altura das colunas.</a:t>
-            </a:r>
-            <a:endParaRPr/>
-          </a:p>
-          <a:p>
-            <a:r>
-              <a:rPr sz="1650" b="0" i="0">
+              <a:t>  paleta original.</a:t>
+            </a:r>
+            <a:endParaRPr/>
+          </a:p>
+          <a:p>
+            <a:r>
+              <a:rPr sz="700" b="0" i="0">
                 <a:solidFill>
                   <a:srgbClr val="555555"/>
                 </a:solidFill>
@@ -5363,7 +6441,21 @@
                 <a:ea typeface="Calibri"/>
                 <a:cs typeface="Calibri"/>
               </a:rPr>
-              <a:t>• Padrões estaduais são evidência exploratória quando os intervalos se sobrepõem.</a:t>
+              <a:t>• Barras = estimativas ponderadas; traços = incerteza do desenho complexo. UFs com IC95%</a:t>
+            </a:r>
+            <a:endParaRPr/>
+          </a:p>
+          <a:p>
+            <a:r>
+              <a:rPr sz="700" b="0" i="0">
+                <a:solidFill>
+                  <a:srgbClr val="555555"/>
+                </a:solidFill>
+                <a:latin typeface="Calibri"/>
+                <a:ea typeface="Calibri"/>
+                <a:cs typeface="Calibri"/>
+              </a:rPr>
+              <a:t>  sobreposto exigem leitura cautelosa.</a:t>
             </a:r>
             <a:endParaRPr/>
           </a:p>
@@ -5377,8 +6469,8 @@
         </p:nvSpPr>
         <p:spPr>
           <a:xfrm>
-            <a:off x="1190625" y="14720000"/>
-            <a:ext cx="19907250" cy="1750000"/>
+            <a:off x="1190625" y="15630000"/>
+            <a:ext cx="19907250" cy="1250000"/>
           </a:xfrm>
           <a:prstGeom prst="rect">
             <a:avLst/>
@@ -5398,47 +6490,62 @@
           <a:p>
             <a:pPr algn="ctr"/>
             <a:r>
-              <a:rPr lang="pt-BR" sz="1300" b="1">
-                <a:latin typeface="Aptos"/>
-              </a:rPr>
-              <a:t>FÓRMULAS</a:t>
-            </a:r>
+              <a:rPr lang="pt-BR" sz="800" b="1">
+                <a:latin typeface="Cambria Math"/>
+              </a:rPr>
+              <a:t>ESTIMADORES E NOTAÇÃO</a:t>
+            </a:r>
+            <a:endParaRPr/>
           </a:p>
           <a:p>
             <a:pPr algn="ctr"/>
             <a:r>
-              <a:rPr lang="pt-BR" sz="1300" b="1">
+              <a:rPr lang="pt-BR" sz="800" b="0">
                 <a:latin typeface="Cambria Math"/>
               </a:rPr>
-              <a:t>p̂ = Σ wᵢyᵢ / Σ wᵢ</a:t>
-            </a:r>
+              <a:t>Proporção ponderada: p̂ = Σᵢ wᵢyᵢ / Σᵢ wᵢ</a:t>
+            </a:r>
+            <a:endParaRPr/>
           </a:p>
           <a:p>
             <a:pPr algn="ctr"/>
             <a:r>
-              <a:rPr lang="pt-BR" sz="1300" b="1">
+              <a:rPr lang="pt-BR" sz="800" b="0">
                 <a:latin typeface="Cambria Math"/>
               </a:rPr>
-              <a:t>% = 100 × p̂</a:t>
-            </a:r>
+              <a:t>wᵢ = peso amostral; yᵢ = evento binário</a:t>
+            </a:r>
+            <a:endParaRPr/>
           </a:p>
           <a:p>
             <a:pPr algn="ctr"/>
             <a:r>
-              <a:rPr lang="pt-BR" sz="1300" b="1">
+              <a:rPr lang="pt-BR" sz="800" b="0">
                 <a:latin typeface="Cambria Math"/>
               </a:rPr>
-              <a:t>taxa₁₀₀k = 100000 × p̂</a:t>
-            </a:r>
+              <a:t>Percentual: % = 100 × p̂</a:t>
+            </a:r>
+            <a:endParaRPr/>
           </a:p>
           <a:p>
             <a:pPr algn="ctr"/>
             <a:r>
-              <a:rPr lang="pt-BR" sz="1300" b="1">
-                <a:latin typeface="Aptos"/>
-              </a:rPr>
-              <a:t>IC₉₅%: beta</a:t>
-            </a:r>
+              <a:rPr lang="pt-BR" sz="800" b="0">
+                <a:latin typeface="Cambria Math"/>
+              </a:rPr>
+              <a:t>Taxa populacional: taxa₁₀₀k = 100000 × p̂</a:t>
+            </a:r>
+            <a:endParaRPr/>
+          </a:p>
+          <a:p>
+            <a:pPr algn="ctr"/>
+            <a:r>
+              <a:rPr lang="pt-BR" sz="800" b="0">
+                <a:latin typeface="Cambria Math"/>
+              </a:rPr>
+              <a:t>Intervalo aplicado: IC₉₅%(p̂) = survey::svyciprop(method = "beta")</a:t>
+            </a:r>
+            <a:endParaRPr/>
           </a:p>
         </p:txBody>
       </p:sp>
@@ -5450,8 +6557,8 @@
         </p:nvSpPr>
         <p:spPr>
           <a:xfrm>
-            <a:off x="39200000" y="29620000"/>
-            <a:ext cx="2300000" cy="2300000"/>
+            <a:off x="38930000" y="29250000"/>
+            <a:ext cx="3150000" cy="2850000"/>
           </a:xfrm>
           <a:prstGeom prst="rect">
             <a:avLst/>
@@ -5471,29 +6578,176 @@
           <a:p>
             <a:pPr algn="ctr"/>
             <a:r>
-              <a:rPr lang="pt-BR" sz="850" b="1">
+              <a:rPr lang="pt-BR" sz="680" b="1">
                 <a:latin typeface="Aptos"/>
               </a:rPr>
               <a:t>QR CODE</a:t>
             </a:r>
+            <a:endParaRPr/>
           </a:p>
           <a:p>
             <a:pPr algn="ctr"/>
             <a:r>
-              <a:rPr lang="pt-BR" sz="850" b="1">
+              <a:rPr lang="pt-BR" sz="680" b="0">
                 <a:latin typeface="Aptos"/>
               </a:rPr>
               <a:t>Relatório metodológico</a:t>
             </a:r>
+            <a:endParaRPr/>
           </a:p>
           <a:p>
             <a:pPr algn="ctr"/>
             <a:r>
-              <a:rPr lang="pt-BR" sz="850" b="1">
+              <a:rPr lang="pt-BR" sz="680" b="0">
                 <a:latin typeface="Aptos"/>
               </a:rPr>
-              <a:t>ingodube.github.io/PNS_2013_2019</a:t>
-            </a:r>
+              <a:t>https://ingodube.github.io/PNS_2013_2019/metodologia.html</a:t>
+            </a:r>
+            <a:endParaRPr/>
+          </a:p>
+        </p:txBody>
+      </p:sp>
+      <p:sp>
+        <p:nvSpPr>
+          <p:cNvPr id="138" name="chart-caption-above-classic-pt-1"/>
+          <p:cNvSpPr txBox="1"/>
+          <p:nvPr/>
+        </p:nvSpPr>
+        <p:spPr>
+          <a:xfrm>
+            <a:off x="1319893" y="17730000"/>
+            <a:ext cx="19267714" cy="330000"/>
+          </a:xfrm>
+          <a:prstGeom prst="rect">
+            <a:avLst/>
+          </a:prstGeom>
+          <a:solidFill>
+            <a:srgbClr val="FFFFFF"/>
+          </a:solidFill>
+          <a:ln w="12700">
+            <a:solidFill>
+              <a:srgbClr val="FFFFFF"/>
+            </a:solidFill>
+          </a:ln>
+        </p:spPr>
+        <p:txBody>
+          <a:bodyPr wrap="square" lIns="76200" rIns="76200" tIns="76200" bIns="76200" anchor="t"/>
+          <a:lstStyle/>
+          <a:p>
+            <a:pPr algn="ctr"/>
+            <a:r>
+              <a:rPr lang="pt-BR" sz="680" b="1"/>
+              <a:t>Figura 1: Prevalência de diagnóstico médico de asma por UF, PNS 2013 e 2019.</a:t>
+            </a:r>
+            <a:endParaRPr/>
+          </a:p>
+        </p:txBody>
+      </p:sp>
+      <p:sp>
+        <p:nvSpPr>
+          <p:cNvPr id="139" name="chart-caption-above-classic-pt-2"/>
+          <p:cNvSpPr txBox="1"/>
+          <p:nvPr/>
+        </p:nvSpPr>
+        <p:spPr>
+          <a:xfrm>
+            <a:off x="22751143" y="17730000"/>
+            <a:ext cx="19267714" cy="330000"/>
+          </a:xfrm>
+          <a:prstGeom prst="rect">
+            <a:avLst/>
+          </a:prstGeom>
+          <a:solidFill>
+            <a:srgbClr val="FFFFFF"/>
+          </a:solidFill>
+          <a:ln w="12700">
+            <a:solidFill>
+              <a:srgbClr val="FFFFFF"/>
+            </a:solidFill>
+          </a:ln>
+        </p:spPr>
+        <p:txBody>
+          <a:bodyPr wrap="square" lIns="76200" rIns="76200" tIns="76200" bIns="76200" anchor="t"/>
+          <a:lstStyle/>
+          <a:p>
+            <a:pPr algn="ctr"/>
+            <a:r>
+              <a:rPr lang="pt-BR" sz="680" b="1"/>
+              <a:t>Figura 2: Crises de asma nos últimos 12 meses entre pessoas com diagnóstico, PNS 2013 e 2019.</a:t>
+            </a:r>
+            <a:endParaRPr/>
+          </a:p>
+        </p:txBody>
+      </p:sp>
+      <p:sp>
+        <p:nvSpPr>
+          <p:cNvPr id="140" name="chart-caption-above-classic-pt-3"/>
+          <p:cNvSpPr txBox="1"/>
+          <p:nvPr/>
+        </p:nvSpPr>
+        <p:spPr>
+          <a:xfrm>
+            <a:off x="1319893" y="23725000"/>
+            <a:ext cx="19267714" cy="330000"/>
+          </a:xfrm>
+          <a:prstGeom prst="rect">
+            <a:avLst/>
+          </a:prstGeom>
+          <a:solidFill>
+            <a:srgbClr val="FFFFFF"/>
+          </a:solidFill>
+          <a:ln w="12700">
+            <a:solidFill>
+              <a:srgbClr val="FFFFFF"/>
+            </a:solidFill>
+          </a:ln>
+        </p:spPr>
+        <p:txBody>
+          <a:bodyPr wrap="square" lIns="76200" rIns="76200" tIns="76200" bIns="76200" anchor="t"/>
+          <a:lstStyle/>
+          <a:p>
+            <a:pPr algn="ctr"/>
+            <a:r>
+              <a:rPr lang="pt-BR" sz="680" b="1"/>
+              <a:t>Figura 3: Uso de medicamento oral ou bombinha entre pessoas com asma, PNS 2013 e 2019.</a:t>
+            </a:r>
+            <a:endParaRPr/>
+          </a:p>
+        </p:txBody>
+      </p:sp>
+      <p:sp>
+        <p:nvSpPr>
+          <p:cNvPr id="141" name="chart-caption-above-classic-pt-4"/>
+          <p:cNvSpPr txBox="1"/>
+          <p:nvPr/>
+        </p:nvSpPr>
+        <p:spPr>
+          <a:xfrm>
+            <a:off x="22751143" y="23725000"/>
+            <a:ext cx="19267714" cy="330000"/>
+          </a:xfrm>
+          <a:prstGeom prst="rect">
+            <a:avLst/>
+          </a:prstGeom>
+          <a:solidFill>
+            <a:srgbClr val="FFFFFF"/>
+          </a:solidFill>
+          <a:ln w="12700">
+            <a:solidFill>
+              <a:srgbClr val="FFFFFF"/>
+            </a:solidFill>
+          </a:ln>
+        </p:spPr>
+        <p:txBody>
+          <a:bodyPr wrap="square" lIns="76200" rIns="76200" tIns="76200" bIns="76200" anchor="t"/>
+          <a:lstStyle/>
+          <a:p>
+            <a:pPr algn="ctr"/>
+            <a:r>
+              <a:rPr lang="pt-BR" sz="680" b="1"/>
+              <a:t>Figura 4: Taxa populacional de fumantes ativos por 100 mil habitantes, PNS 2013 e 2019.</a:t>
+            </a:r>
+            <a:endParaRPr/>
           </a:p>
         </p:txBody>
       </p:sp>

--- a/outputs/posters/poster_pns_asma_classico_pt.pptx
+++ b/outputs/posters/poster_pns_asma_classico_pt.pptx
@@ -2,13 +2,13 @@
 <file path=ppt/presentation.xml><?xml version="1.0" encoding="utf-8"?>
 <p:presentation xmlns:p="http://schemas.openxmlformats.org/presentationml/2006/main">
   <p:sldMasterIdLst>
-    <p:sldMasterId xmlns:r="http://schemas.openxmlformats.org/officeDocument/2006/relationships" id="2147483648" r:id="R54ad1efde5e849ba"/>
+    <p:sldMasterId xmlns:r="http://schemas.openxmlformats.org/officeDocument/2006/relationships" id="2147483648" r:id="R485f383a17ba4606"/>
   </p:sldMasterIdLst>
   <p:notesMasterIdLst>
-    <p:notesMasterId xmlns:r="http://schemas.openxmlformats.org/officeDocument/2006/relationships" r:id="R3173a343edab498c"/>
+    <p:notesMasterId xmlns:r="http://schemas.openxmlformats.org/officeDocument/2006/relationships" r:id="R43a6f7d69ce1436e"/>
   </p:notesMasterIdLst>
   <p:sldIdLst>
-    <p:sldId xmlns:r="http://schemas.openxmlformats.org/officeDocument/2006/relationships" id="256" r:id="R914eec251f1f401a"/>
+    <p:sldId xmlns:r="http://schemas.openxmlformats.org/officeDocument/2006/relationships" id="256" r:id="R28998fc1fd7641ab"/>
   </p:sldIdLst>
   <p:sldSz cx="9525000" cy="13468350"/>
   <p:notesSz cx="6858000" cy="9144000"/>
@@ -601,7 +601,7 @@
   </p:cSld>
   <p:clrMap bg1="lt1" tx1="dk1" bg2="lt2" tx2="dk2" accent1="accent1" accent2="accent2" accent3="accent3" accent4="accent4" accent5="accent5" accent6="accent6" hlink="hlink" folHlink="folHlink"/>
   <p:sldLayoutIdLst>
-    <p:sldLayoutId xmlns:r="http://schemas.openxmlformats.org/officeDocument/2006/relationships" id="2147483649" r:id="Raf7a8c7fe29c40b0"/>
+    <p:sldLayoutId xmlns:r="http://schemas.openxmlformats.org/officeDocument/2006/relationships" id="2147483649" r:id="R05321fe84af54289"/>
   </p:sldLayoutIdLst>
   <p:txStyles>
     <p:titleStyle>
@@ -1156,7 +1156,7 @@
           <p:nvPr/>
         </p:nvPicPr>
         <p:blipFill>
-          <a:blip xmlns:r="http://schemas.openxmlformats.org/officeDocument/2006/relationships" xmlns:a="http://schemas.openxmlformats.org/drawingml/2006/main" r:embed="R65e40cb7d9674865"/>
+          <a:blip xmlns:r="http://schemas.openxmlformats.org/officeDocument/2006/relationships" xmlns:a="http://schemas.openxmlformats.org/drawingml/2006/main" r:embed="R5d45e9aff9964db1"/>
           <a:srcRect xmlns:a="http://schemas.openxmlformats.org/drawingml/2006/main" l="0" t="38622" r="0" b="38622"/>
           <a:stretch xmlns:a="http://schemas.openxmlformats.org/drawingml/2006/main">
             <a:fillRect l="0" t="0" r="0" b="0"/>
@@ -1181,7 +1181,7 @@
           <p:nvPr/>
         </p:nvPicPr>
         <p:blipFill>
-          <a:blip xmlns:r="http://schemas.openxmlformats.org/officeDocument/2006/relationships" xmlns:a="http://schemas.openxmlformats.org/drawingml/2006/main" r:embed="R890505166ef542d4"/>
+          <a:blip xmlns:r="http://schemas.openxmlformats.org/officeDocument/2006/relationships" xmlns:a="http://schemas.openxmlformats.org/drawingml/2006/main" r:embed="R07d3230c0ac64dbe"/>
           <a:stretch xmlns:a="http://schemas.openxmlformats.org/drawingml/2006/main"/>
         </p:blipFill>
         <p:spPr>
@@ -1203,7 +1203,7 @@
           <p:nvPr/>
         </p:nvPicPr>
         <p:blipFill>
-          <a:blip xmlns:r="http://schemas.openxmlformats.org/officeDocument/2006/relationships" xmlns:a="http://schemas.openxmlformats.org/drawingml/2006/main" r:embed="R5254c7f45ea347ce"/>
+          <a:blip xmlns:r="http://schemas.openxmlformats.org/officeDocument/2006/relationships" xmlns:a="http://schemas.openxmlformats.org/drawingml/2006/main" r:embed="R61da29146dda4c29"/>
           <a:stretch xmlns:a="http://schemas.openxmlformats.org/drawingml/2006/main"/>
         </p:blipFill>
         <p:spPr>
@@ -1221,7 +1221,7 @@
           <p:cNvPr id="4" name="classic-title">
             <a:extLst xmlns:a="http://schemas.openxmlformats.org/drawingml/2006/main">
               <a:ext uri="{FF2B5EF4-FFF2-40B4-BE49-F238E27FC236}">
-                <a16:creationId xmlns:a16="http://schemas.microsoft.com/office/drawing/2014/main" id="{E5F7D8E6-80FA-4962-B394-E959DF552A22}"/>
+                <a16:creationId xmlns:a16="http://schemas.microsoft.com/office/drawing/2014/main" id="{3CEFDD33-23D4-4F2C-9E5D-FCFEA1B60D4E}"/>
               </a:ext>
             </a:extLst>
           </p:cNvPr>
@@ -1271,7 +1271,7 @@
           <p:cNvPr id="5" name="classic-authors">
             <a:extLst xmlns:a="http://schemas.openxmlformats.org/drawingml/2006/main">
               <a:ext uri="{FF2B5EF4-FFF2-40B4-BE49-F238E27FC236}">
-                <a16:creationId xmlns:a16="http://schemas.microsoft.com/office/drawing/2014/main" id="{47280F62-6509-44B8-9CD9-8BD48CD2CAA6}"/>
+                <a16:creationId xmlns:a16="http://schemas.microsoft.com/office/drawing/2014/main" id="{D6BF324A-50A9-473F-9F67-66A3D8558CA4}"/>
               </a:ext>
             </a:extLst>
           </p:cNvPr>
@@ -1321,7 +1321,7 @@
           <p:cNvPr id="6" name="1-Introdução-box">
             <a:extLst xmlns:a="http://schemas.openxmlformats.org/drawingml/2006/main">
               <a:ext uri="{FF2B5EF4-FFF2-40B4-BE49-F238E27FC236}">
-                <a16:creationId xmlns:a16="http://schemas.microsoft.com/office/drawing/2014/main" id="{901A24B9-1CB9-4EC9-996F-BB4EB2BB4A64}"/>
+                <a16:creationId xmlns:a16="http://schemas.microsoft.com/office/drawing/2014/main" id="{9C2BC44B-1BBB-4577-A536-8397C7631360}"/>
               </a:ext>
             </a:extLst>
           </p:cNvPr>
@@ -1354,7 +1354,7 @@
           <p:cNvPr id="7" name="1-Introdução-head">
             <a:extLst xmlns:a="http://schemas.openxmlformats.org/drawingml/2006/main">
               <a:ext uri="{FF2B5EF4-FFF2-40B4-BE49-F238E27FC236}">
-                <a16:creationId xmlns:a16="http://schemas.microsoft.com/office/drawing/2014/main" id="{26A6C295-6FAE-4358-A3B9-6AD397F89748}"/>
+                <a16:creationId xmlns:a16="http://schemas.microsoft.com/office/drawing/2014/main" id="{217AFD17-B33E-4378-85C9-5B2A73539A82}"/>
               </a:ext>
             </a:extLst>
           </p:cNvPr>
@@ -1387,7 +1387,7 @@
           <p:cNvPr id="8" name="1-Introdução-title">
             <a:extLst xmlns:a="http://schemas.openxmlformats.org/drawingml/2006/main">
               <a:ext uri="{FF2B5EF4-FFF2-40B4-BE49-F238E27FC236}">
-                <a16:creationId xmlns:a16="http://schemas.microsoft.com/office/drawing/2014/main" id="{E7F378EF-6CFD-4AE5-8305-4B29CFBC8E61}"/>
+                <a16:creationId xmlns:a16="http://schemas.microsoft.com/office/drawing/2014/main" id="{91F82BF8-69B1-4CD0-88F1-555AF639FA53}"/>
               </a:ext>
             </a:extLst>
           </p:cNvPr>
@@ -1437,7 +1437,7 @@
           <p:cNvPr id="9" name="1-Introdução-body">
             <a:extLst xmlns:a="http://schemas.openxmlformats.org/drawingml/2006/main">
               <a:ext uri="{FF2B5EF4-FFF2-40B4-BE49-F238E27FC236}">
-                <a16:creationId xmlns:a16="http://schemas.microsoft.com/office/drawing/2014/main" id="{99807BDB-B897-4168-B02D-3BE1F0CAD00C}"/>
+                <a16:creationId xmlns:a16="http://schemas.microsoft.com/office/drawing/2014/main" id="{5062CD32-8255-4D7C-9FC5-A5E04C40A7B0}"/>
               </a:ext>
             </a:extLst>
           </p:cNvPr>
@@ -1521,7 +1521,7 @@
           <p:cNvPr id="10" name="2-Objetivos-box">
             <a:extLst xmlns:a="http://schemas.openxmlformats.org/drawingml/2006/main">
               <a:ext uri="{FF2B5EF4-FFF2-40B4-BE49-F238E27FC236}">
-                <a16:creationId xmlns:a16="http://schemas.microsoft.com/office/drawing/2014/main" id="{959EE709-42B3-45DF-85DE-E8CA3002BE7F}"/>
+                <a16:creationId xmlns:a16="http://schemas.microsoft.com/office/drawing/2014/main" id="{C68948FE-B8EF-409C-98EB-75036E7DD066}"/>
               </a:ext>
             </a:extLst>
           </p:cNvPr>
@@ -1554,7 +1554,7 @@
           <p:cNvPr id="11" name="2-Objetivos-head">
             <a:extLst xmlns:a="http://schemas.openxmlformats.org/drawingml/2006/main">
               <a:ext uri="{FF2B5EF4-FFF2-40B4-BE49-F238E27FC236}">
-                <a16:creationId xmlns:a16="http://schemas.microsoft.com/office/drawing/2014/main" id="{15B9AC0D-12B5-4417-A57E-2A0C7BA67704}"/>
+                <a16:creationId xmlns:a16="http://schemas.microsoft.com/office/drawing/2014/main" id="{3D43581C-90A6-4C2D-8777-9972A8479877}"/>
               </a:ext>
             </a:extLst>
           </p:cNvPr>
@@ -1587,7 +1587,7 @@
           <p:cNvPr id="12" name="2-Objetivos-title">
             <a:extLst xmlns:a="http://schemas.openxmlformats.org/drawingml/2006/main">
               <a:ext uri="{FF2B5EF4-FFF2-40B4-BE49-F238E27FC236}">
-                <a16:creationId xmlns:a16="http://schemas.microsoft.com/office/drawing/2014/main" id="{B8279D52-1565-45FE-A578-EBA749C27A47}"/>
+                <a16:creationId xmlns:a16="http://schemas.microsoft.com/office/drawing/2014/main" id="{F4ABF4C4-1B4E-4E13-A553-1CD8D6F4CCCA}"/>
               </a:ext>
             </a:extLst>
           </p:cNvPr>
@@ -1637,7 +1637,7 @@
           <p:cNvPr id="13" name="2-Objetivos-body">
             <a:extLst xmlns:a="http://schemas.openxmlformats.org/drawingml/2006/main">
               <a:ext uri="{FF2B5EF4-FFF2-40B4-BE49-F238E27FC236}">
-                <a16:creationId xmlns:a16="http://schemas.microsoft.com/office/drawing/2014/main" id="{4CA62983-8BD1-40D7-AF23-3ADF398596AC}"/>
+                <a16:creationId xmlns:a16="http://schemas.microsoft.com/office/drawing/2014/main" id="{FFE57C59-11C9-4E31-A53B-B7A642C74664}"/>
               </a:ext>
             </a:extLst>
           </p:cNvPr>
@@ -1721,7 +1721,7 @@
           <p:cNvPr id="14" name="3-Dados e indicadores-box">
             <a:extLst xmlns:a="http://schemas.openxmlformats.org/drawingml/2006/main">
               <a:ext uri="{FF2B5EF4-FFF2-40B4-BE49-F238E27FC236}">
-                <a16:creationId xmlns:a16="http://schemas.microsoft.com/office/drawing/2014/main" id="{C8FDCE18-85BD-42BD-9555-13C51193B051}"/>
+                <a16:creationId xmlns:a16="http://schemas.microsoft.com/office/drawing/2014/main" id="{77D73195-2BEC-4576-BEE0-B1F2A85766B4}"/>
               </a:ext>
             </a:extLst>
           </p:cNvPr>
@@ -1754,7 +1754,7 @@
           <p:cNvPr id="15" name="3-Dados e indicadores-head">
             <a:extLst xmlns:a="http://schemas.openxmlformats.org/drawingml/2006/main">
               <a:ext uri="{FF2B5EF4-FFF2-40B4-BE49-F238E27FC236}">
-                <a16:creationId xmlns:a16="http://schemas.microsoft.com/office/drawing/2014/main" id="{FCF48954-B85D-40B4-B2B9-7B80EE412D04}"/>
+                <a16:creationId xmlns:a16="http://schemas.microsoft.com/office/drawing/2014/main" id="{4A70F7FC-9F23-4500-8DBC-761BB991D756}"/>
               </a:ext>
             </a:extLst>
           </p:cNvPr>
@@ -1787,7 +1787,7 @@
           <p:cNvPr id="16" name="3-Dados e indicadores-title">
             <a:extLst xmlns:a="http://schemas.openxmlformats.org/drawingml/2006/main">
               <a:ext uri="{FF2B5EF4-FFF2-40B4-BE49-F238E27FC236}">
-                <a16:creationId xmlns:a16="http://schemas.microsoft.com/office/drawing/2014/main" id="{585553A4-CF6B-429D-A64D-55934416F533}"/>
+                <a16:creationId xmlns:a16="http://schemas.microsoft.com/office/drawing/2014/main" id="{6AA92D8A-B0E6-4C95-8CFF-37EB147147B1}"/>
               </a:ext>
             </a:extLst>
           </p:cNvPr>
@@ -1837,7 +1837,7 @@
           <p:cNvPr id="17" name="3-Dados e indicadores-body">
             <a:extLst xmlns:a="http://schemas.openxmlformats.org/drawingml/2006/main">
               <a:ext uri="{FF2B5EF4-FFF2-40B4-BE49-F238E27FC236}">
-                <a16:creationId xmlns:a16="http://schemas.microsoft.com/office/drawing/2014/main" id="{23ECAA76-30A7-41E5-B619-4BD600E9B2E5}"/>
+                <a16:creationId xmlns:a16="http://schemas.microsoft.com/office/drawing/2014/main" id="{017FA7DC-1FEE-4613-B6C8-CA44802745D2}"/>
               </a:ext>
             </a:extLst>
           </p:cNvPr>
@@ -1921,7 +1921,7 @@
           <p:cNvPr id="18" name="4-Plano amostral-box">
             <a:extLst xmlns:a="http://schemas.openxmlformats.org/drawingml/2006/main">
               <a:ext uri="{FF2B5EF4-FFF2-40B4-BE49-F238E27FC236}">
-                <a16:creationId xmlns:a16="http://schemas.microsoft.com/office/drawing/2014/main" id="{FA926236-B8F9-406C-A4BD-B57FFB3E6F8F}"/>
+                <a16:creationId xmlns:a16="http://schemas.microsoft.com/office/drawing/2014/main" id="{5EB14AB3-063E-4025-865C-9ACAE88904D8}"/>
               </a:ext>
             </a:extLst>
           </p:cNvPr>
@@ -1954,7 +1954,7 @@
           <p:cNvPr id="19" name="4-Plano amostral-head">
             <a:extLst xmlns:a="http://schemas.openxmlformats.org/drawingml/2006/main">
               <a:ext uri="{FF2B5EF4-FFF2-40B4-BE49-F238E27FC236}">
-                <a16:creationId xmlns:a16="http://schemas.microsoft.com/office/drawing/2014/main" id="{C940A09A-2FDA-4340-974C-750F95EEC23C}"/>
+                <a16:creationId xmlns:a16="http://schemas.microsoft.com/office/drawing/2014/main" id="{0DF884EA-09DE-4F17-883D-3AA211634E7F}"/>
               </a:ext>
             </a:extLst>
           </p:cNvPr>
@@ -1987,7 +1987,7 @@
           <p:cNvPr id="20" name="4-Plano amostral-title">
             <a:extLst xmlns:a="http://schemas.openxmlformats.org/drawingml/2006/main">
               <a:ext uri="{FF2B5EF4-FFF2-40B4-BE49-F238E27FC236}">
-                <a16:creationId xmlns:a16="http://schemas.microsoft.com/office/drawing/2014/main" id="{E1F35C8A-E64C-45E3-9848-57265A4645B8}"/>
+                <a16:creationId xmlns:a16="http://schemas.microsoft.com/office/drawing/2014/main" id="{9FFAECF5-03A2-426B-95AC-F9AFEF611F71}"/>
               </a:ext>
             </a:extLst>
           </p:cNvPr>
@@ -2037,7 +2037,7 @@
           <p:cNvPr id="21" name="4-Plano amostral-body">
             <a:extLst xmlns:a="http://schemas.openxmlformats.org/drawingml/2006/main">
               <a:ext uri="{FF2B5EF4-FFF2-40B4-BE49-F238E27FC236}">
-                <a16:creationId xmlns:a16="http://schemas.microsoft.com/office/drawing/2014/main" id="{925F6080-CB28-4B4F-A723-5DA455DAEBC9}"/>
+                <a16:creationId xmlns:a16="http://schemas.microsoft.com/office/drawing/2014/main" id="{030F4884-0678-446A-B716-24E39DCA680F}"/>
               </a:ext>
             </a:extLst>
           </p:cNvPr>
@@ -2138,7 +2138,7 @@
           <p:cNvPr id="22" name="classic-formula-box">
             <a:extLst xmlns:a="http://schemas.openxmlformats.org/drawingml/2006/main">
               <a:ext uri="{FF2B5EF4-FFF2-40B4-BE49-F238E27FC236}">
-                <a16:creationId xmlns:a16="http://schemas.microsoft.com/office/drawing/2014/main" id="{11B1DD67-BFC9-4948-B937-9867A86B2E03}"/>
+                <a16:creationId xmlns:a16="http://schemas.microsoft.com/office/drawing/2014/main" id="{9D5CB3A3-5E7E-4318-BDF2-9340AD58EDEE}"/>
               </a:ext>
             </a:extLst>
           </p:cNvPr>
@@ -2171,7 +2171,7 @@
           <p:cNvPr id="23" name="classic-formula-title">
             <a:extLst xmlns:a="http://schemas.openxmlformats.org/drawingml/2006/main">
               <a:ext uri="{FF2B5EF4-FFF2-40B4-BE49-F238E27FC236}">
-                <a16:creationId xmlns:a16="http://schemas.microsoft.com/office/drawing/2014/main" id="{3D8E2A95-5051-4162-83D2-3F68892C0CAF}"/>
+                <a16:creationId xmlns:a16="http://schemas.microsoft.com/office/drawing/2014/main" id="{558DF772-C461-4967-B9AD-08136A3F1E8D}"/>
               </a:ext>
             </a:extLst>
           </p:cNvPr>
@@ -2221,7 +2221,7 @@
           <p:cNvPr id="24" name="classic-formula">
             <a:extLst xmlns:a="http://schemas.openxmlformats.org/drawingml/2006/main">
               <a:ext uri="{FF2B5EF4-FFF2-40B4-BE49-F238E27FC236}">
-                <a16:creationId xmlns:a16="http://schemas.microsoft.com/office/drawing/2014/main" id="{C64CFEA4-4DE8-42F0-A73C-F39167FDAE90}"/>
+                <a16:creationId xmlns:a16="http://schemas.microsoft.com/office/drawing/2014/main" id="{C2B4039A-8F4B-4D7C-99B1-5B5E3E0257CF}"/>
               </a:ext>
             </a:extLst>
           </p:cNvPr>
@@ -2339,7 +2339,7 @@
           <p:cNvPr id="25" name="prev-metric">
             <a:extLst xmlns:a="http://schemas.openxmlformats.org/drawingml/2006/main">
               <a:ext uri="{FF2B5EF4-FFF2-40B4-BE49-F238E27FC236}">
-                <a16:creationId xmlns:a16="http://schemas.microsoft.com/office/drawing/2014/main" id="{B2259B38-22A9-4AA1-83A3-FD2CFEA7C6BF}"/>
+                <a16:creationId xmlns:a16="http://schemas.microsoft.com/office/drawing/2014/main" id="{B97D082B-AECB-410F-BF18-4D1F2D2230FB}"/>
               </a:ext>
             </a:extLst>
           </p:cNvPr>
@@ -2372,7 +2372,7 @@
           <p:cNvPr id="26" name="prev-metric-title">
             <a:extLst xmlns:a="http://schemas.openxmlformats.org/drawingml/2006/main">
               <a:ext uri="{FF2B5EF4-FFF2-40B4-BE49-F238E27FC236}">
-                <a16:creationId xmlns:a16="http://schemas.microsoft.com/office/drawing/2014/main" id="{BF81DC33-60B7-4E6A-9548-3197EB6F5743}"/>
+                <a16:creationId xmlns:a16="http://schemas.microsoft.com/office/drawing/2014/main" id="{C27F82D4-F8FF-4B4B-88A6-FEA3310781D0}"/>
               </a:ext>
             </a:extLst>
           </p:cNvPr>
@@ -2422,7 +2422,7 @@
           <p:cNvPr id="27" name="prev-metric-value">
             <a:extLst xmlns:a="http://schemas.openxmlformats.org/drawingml/2006/main">
               <a:ext uri="{FF2B5EF4-FFF2-40B4-BE49-F238E27FC236}">
-                <a16:creationId xmlns:a16="http://schemas.microsoft.com/office/drawing/2014/main" id="{A149F8BB-ED56-4955-B217-A09E9DF3EC47}"/>
+                <a16:creationId xmlns:a16="http://schemas.microsoft.com/office/drawing/2014/main" id="{E7933279-3272-43A8-A90E-86AC2D1C8385}"/>
               </a:ext>
             </a:extLst>
           </p:cNvPr>
@@ -2472,7 +2472,7 @@
           <p:cNvPr id="28" name="prev-metric-note">
             <a:extLst xmlns:a="http://schemas.openxmlformats.org/drawingml/2006/main">
               <a:ext uri="{FF2B5EF4-FFF2-40B4-BE49-F238E27FC236}">
-                <a16:creationId xmlns:a16="http://schemas.microsoft.com/office/drawing/2014/main" id="{8D4B18BA-D32B-434D-B4B7-6FC7E839B384}"/>
+                <a16:creationId xmlns:a16="http://schemas.microsoft.com/office/drawing/2014/main" id="{D06F52B2-7C64-4123-8EB6-5271CC1F0981}"/>
               </a:ext>
             </a:extLst>
           </p:cNvPr>
@@ -2522,7 +2522,7 @@
           <p:cNvPr id="29" name="crisis-metric">
             <a:extLst xmlns:a="http://schemas.openxmlformats.org/drawingml/2006/main">
               <a:ext uri="{FF2B5EF4-FFF2-40B4-BE49-F238E27FC236}">
-                <a16:creationId xmlns:a16="http://schemas.microsoft.com/office/drawing/2014/main" id="{C956AFD2-9386-42EC-AD63-017EF1E3CB56}"/>
+                <a16:creationId xmlns:a16="http://schemas.microsoft.com/office/drawing/2014/main" id="{BA5609E1-0910-4DC7-A620-8AE0A00A987B}"/>
               </a:ext>
             </a:extLst>
           </p:cNvPr>
@@ -2555,7 +2555,7 @@
           <p:cNvPr id="30" name="crisis-metric-title">
             <a:extLst xmlns:a="http://schemas.openxmlformats.org/drawingml/2006/main">
               <a:ext uri="{FF2B5EF4-FFF2-40B4-BE49-F238E27FC236}">
-                <a16:creationId xmlns:a16="http://schemas.microsoft.com/office/drawing/2014/main" id="{D146AFAC-8782-45BD-91F6-5CEE9E76FC80}"/>
+                <a16:creationId xmlns:a16="http://schemas.microsoft.com/office/drawing/2014/main" id="{9BB48FAC-A5D3-4468-B303-8353D9301AB1}"/>
               </a:ext>
             </a:extLst>
           </p:cNvPr>
@@ -2605,7 +2605,7 @@
           <p:cNvPr id="31" name="crisis-metric-value">
             <a:extLst xmlns:a="http://schemas.openxmlformats.org/drawingml/2006/main">
               <a:ext uri="{FF2B5EF4-FFF2-40B4-BE49-F238E27FC236}">
-                <a16:creationId xmlns:a16="http://schemas.microsoft.com/office/drawing/2014/main" id="{B2812567-2600-478D-B126-86DE8538B67C}"/>
+                <a16:creationId xmlns:a16="http://schemas.microsoft.com/office/drawing/2014/main" id="{DB76F699-65E3-47F8-AE4E-13FCF63B2F90}"/>
               </a:ext>
             </a:extLst>
           </p:cNvPr>
@@ -2655,7 +2655,7 @@
           <p:cNvPr id="32" name="crisis-metric-note">
             <a:extLst xmlns:a="http://schemas.openxmlformats.org/drawingml/2006/main">
               <a:ext uri="{FF2B5EF4-FFF2-40B4-BE49-F238E27FC236}">
-                <a16:creationId xmlns:a16="http://schemas.microsoft.com/office/drawing/2014/main" id="{CFAEBCC5-292D-499E-ABED-06E3417463CB}"/>
+                <a16:creationId xmlns:a16="http://schemas.microsoft.com/office/drawing/2014/main" id="{B0829431-037E-4FA6-8881-568B0AE21F88}"/>
               </a:ext>
             </a:extLst>
           </p:cNvPr>
@@ -2705,7 +2705,7 @@
           <p:cNvPr id="33" name="chart-prev-caption">
             <a:extLst xmlns:a="http://schemas.openxmlformats.org/drawingml/2006/main">
               <a:ext uri="{FF2B5EF4-FFF2-40B4-BE49-F238E27FC236}">
-                <a16:creationId xmlns:a16="http://schemas.microsoft.com/office/drawing/2014/main" id="{D496721A-CE55-4174-9DAD-A9D5FDBD7A7A}"/>
+                <a16:creationId xmlns:a16="http://schemas.microsoft.com/office/drawing/2014/main" id="{2A2F889D-AAC1-464A-8521-A652C787EE24}"/>
               </a:ext>
             </a:extLst>
           </p:cNvPr>
@@ -2755,7 +2755,7 @@
           <p:cNvPr id="34" name="chart-prev-frame">
             <a:extLst xmlns:a="http://schemas.openxmlformats.org/drawingml/2006/main">
               <a:ext uri="{FF2B5EF4-FFF2-40B4-BE49-F238E27FC236}">
-                <a16:creationId xmlns:a16="http://schemas.microsoft.com/office/drawing/2014/main" id="{9D3252E1-7713-4E8C-A76A-849FD0F80722}"/>
+                <a16:creationId xmlns:a16="http://schemas.microsoft.com/office/drawing/2014/main" id="{074FCE56-0C6F-4FBA-A4D6-9CB3C630BE65}"/>
               </a:ext>
             </a:extLst>
           </p:cNvPr>
@@ -2792,13 +2792,13 @@
           <p:nvPr/>
         </p:nvPicPr>
         <p:blipFill>
-          <a:blip xmlns:r="http://schemas.openxmlformats.org/officeDocument/2006/relationships" xmlns:a="http://schemas.openxmlformats.org/drawingml/2006/main" r:embed="R95aeb26abdec4344"/>
+          <a:blip xmlns:r="http://schemas.openxmlformats.org/officeDocument/2006/relationships" xmlns:a="http://schemas.openxmlformats.org/drawingml/2006/main" r:embed="Rd002a5dbc0124d50"/>
           <a:stretch xmlns:a="http://schemas.openxmlformats.org/drawingml/2006/main"/>
         </p:blipFill>
         <p:spPr>
           <a:xfrm xmlns:a="http://schemas.openxmlformats.org/drawingml/2006/main">
-            <a:off x="3384550" y="5313098"/>
-            <a:ext cx="2755900" cy="803804"/>
+            <a:off x="3387790" y="4724400"/>
+            <a:ext cx="2749420" cy="1981200"/>
           </a:xfrm>
           <a:prstGeom xmlns:a="http://schemas.openxmlformats.org/drawingml/2006/main" prst="rect">
             <a:avLst/>
@@ -2810,7 +2810,7 @@
           <p:cNvPr id="36" name="chart-crisis-caption">
             <a:extLst xmlns:a="http://schemas.openxmlformats.org/drawingml/2006/main">
               <a:ext uri="{FF2B5EF4-FFF2-40B4-BE49-F238E27FC236}">
-                <a16:creationId xmlns:a16="http://schemas.microsoft.com/office/drawing/2014/main" id="{EE472ED2-9DF7-4C5E-8410-600400FEB768}"/>
+                <a16:creationId xmlns:a16="http://schemas.microsoft.com/office/drawing/2014/main" id="{DC7372DC-A4E1-4898-A481-B4D2275098F9}"/>
               </a:ext>
             </a:extLst>
           </p:cNvPr>
@@ -2860,7 +2860,7 @@
           <p:cNvPr id="37" name="chart-crisis-frame">
             <a:extLst xmlns:a="http://schemas.openxmlformats.org/drawingml/2006/main">
               <a:ext uri="{FF2B5EF4-FFF2-40B4-BE49-F238E27FC236}">
-                <a16:creationId xmlns:a16="http://schemas.microsoft.com/office/drawing/2014/main" id="{15FC6490-4F5B-489B-8431-E19C22053187}"/>
+                <a16:creationId xmlns:a16="http://schemas.microsoft.com/office/drawing/2014/main" id="{5F1C9EE0-3C84-4639-97F6-A440EAE52EC7}"/>
               </a:ext>
             </a:extLst>
           </p:cNvPr>
@@ -2897,13 +2897,13 @@
           <p:nvPr/>
         </p:nvPicPr>
         <p:blipFill>
-          <a:blip xmlns:r="http://schemas.openxmlformats.org/officeDocument/2006/relationships" xmlns:a="http://schemas.openxmlformats.org/drawingml/2006/main" r:embed="R662f0b921fba4c71"/>
+          <a:blip xmlns:r="http://schemas.openxmlformats.org/officeDocument/2006/relationships" xmlns:a="http://schemas.openxmlformats.org/drawingml/2006/main" r:embed="R9e9ebe5e615a4793"/>
           <a:stretch xmlns:a="http://schemas.openxmlformats.org/drawingml/2006/main"/>
         </p:blipFill>
         <p:spPr>
           <a:xfrm xmlns:a="http://schemas.openxmlformats.org/drawingml/2006/main">
-            <a:off x="3384550" y="7789598"/>
-            <a:ext cx="2755900" cy="803804"/>
+            <a:off x="3387790" y="7200900"/>
+            <a:ext cx="2749420" cy="1981200"/>
           </a:xfrm>
           <a:prstGeom xmlns:a="http://schemas.openxmlformats.org/drawingml/2006/main" prst="rect">
             <a:avLst/>
@@ -2915,7 +2915,7 @@
           <p:cNvPr id="39" name="5-Resultados e interpretação-box">
             <a:extLst xmlns:a="http://schemas.openxmlformats.org/drawingml/2006/main">
               <a:ext uri="{FF2B5EF4-FFF2-40B4-BE49-F238E27FC236}">
-                <a16:creationId xmlns:a16="http://schemas.microsoft.com/office/drawing/2014/main" id="{31A860AF-BC1C-45ED-B888-03E566F3FBCA}"/>
+                <a16:creationId xmlns:a16="http://schemas.microsoft.com/office/drawing/2014/main" id="{E814F3F1-FB89-4F6F-9F3F-1CAFDB7323EA}"/>
               </a:ext>
             </a:extLst>
           </p:cNvPr>
@@ -2948,7 +2948,7 @@
           <p:cNvPr id="40" name="5-Resultados e interpretação-head">
             <a:extLst xmlns:a="http://schemas.openxmlformats.org/drawingml/2006/main">
               <a:ext uri="{FF2B5EF4-FFF2-40B4-BE49-F238E27FC236}">
-                <a16:creationId xmlns:a16="http://schemas.microsoft.com/office/drawing/2014/main" id="{E6D65FD5-767D-40D3-90E2-B6E9E57C0C05}"/>
+                <a16:creationId xmlns:a16="http://schemas.microsoft.com/office/drawing/2014/main" id="{A624F017-CB90-47BB-9565-B1C87F24C3E6}"/>
               </a:ext>
             </a:extLst>
           </p:cNvPr>
@@ -2981,7 +2981,7 @@
           <p:cNvPr id="41" name="5-Resultados e interpretação-title">
             <a:extLst xmlns:a="http://schemas.openxmlformats.org/drawingml/2006/main">
               <a:ext uri="{FF2B5EF4-FFF2-40B4-BE49-F238E27FC236}">
-                <a16:creationId xmlns:a16="http://schemas.microsoft.com/office/drawing/2014/main" id="{1B562EF4-3124-4169-ABAF-95ABC81BB3C6}"/>
+                <a16:creationId xmlns:a16="http://schemas.microsoft.com/office/drawing/2014/main" id="{B547C739-CD8C-4BB4-BDD6-3C64A2BEE2DF}"/>
               </a:ext>
             </a:extLst>
           </p:cNvPr>
@@ -3031,7 +3031,7 @@
           <p:cNvPr id="42" name="5-Resultados e interpretação-body">
             <a:extLst xmlns:a="http://schemas.openxmlformats.org/drawingml/2006/main">
               <a:ext uri="{FF2B5EF4-FFF2-40B4-BE49-F238E27FC236}">
-                <a16:creationId xmlns:a16="http://schemas.microsoft.com/office/drawing/2014/main" id="{80295579-21C8-4DB8-B9C4-768E3FAB5FBB}"/>
+                <a16:creationId xmlns:a16="http://schemas.microsoft.com/office/drawing/2014/main" id="{018B92E1-1A48-4C5E-A29C-50A1B31A0784}"/>
               </a:ext>
             </a:extLst>
           </p:cNvPr>
@@ -3132,7 +3132,7 @@
           <p:cNvPr id="43" name="meds-metric">
             <a:extLst xmlns:a="http://schemas.openxmlformats.org/drawingml/2006/main">
               <a:ext uri="{FF2B5EF4-FFF2-40B4-BE49-F238E27FC236}">
-                <a16:creationId xmlns:a16="http://schemas.microsoft.com/office/drawing/2014/main" id="{1A03FF11-60E9-40B9-9980-E62F9CCFA3AC}"/>
+                <a16:creationId xmlns:a16="http://schemas.microsoft.com/office/drawing/2014/main" id="{93298F9D-063A-4993-BFE3-FCA42EB7BF41}"/>
               </a:ext>
             </a:extLst>
           </p:cNvPr>
@@ -3165,7 +3165,7 @@
           <p:cNvPr id="44" name="meds-metric-title">
             <a:extLst xmlns:a="http://schemas.openxmlformats.org/drawingml/2006/main">
               <a:ext uri="{FF2B5EF4-FFF2-40B4-BE49-F238E27FC236}">
-                <a16:creationId xmlns:a16="http://schemas.microsoft.com/office/drawing/2014/main" id="{6C3BF613-C6BA-4AD3-AD88-1A8AC886FA5B}"/>
+                <a16:creationId xmlns:a16="http://schemas.microsoft.com/office/drawing/2014/main" id="{9F2BC737-D9E4-4B9A-A20E-3B56B8136ADF}"/>
               </a:ext>
             </a:extLst>
           </p:cNvPr>
@@ -3215,7 +3215,7 @@
           <p:cNvPr id="45" name="meds-metric-value">
             <a:extLst xmlns:a="http://schemas.openxmlformats.org/drawingml/2006/main">
               <a:ext uri="{FF2B5EF4-FFF2-40B4-BE49-F238E27FC236}">
-                <a16:creationId xmlns:a16="http://schemas.microsoft.com/office/drawing/2014/main" id="{5CFC1700-2AA0-462D-8F33-13D051FD3FFB}"/>
+                <a16:creationId xmlns:a16="http://schemas.microsoft.com/office/drawing/2014/main" id="{ED0F78A5-1977-408A-918D-17D3147786C1}"/>
               </a:ext>
             </a:extLst>
           </p:cNvPr>
@@ -3265,7 +3265,7 @@
           <p:cNvPr id="46" name="meds-metric-note">
             <a:extLst xmlns:a="http://schemas.openxmlformats.org/drawingml/2006/main">
               <a:ext uri="{FF2B5EF4-FFF2-40B4-BE49-F238E27FC236}">
-                <a16:creationId xmlns:a16="http://schemas.microsoft.com/office/drawing/2014/main" id="{7201DA57-A1F7-4897-B3AF-08924B008FBF}"/>
+                <a16:creationId xmlns:a16="http://schemas.microsoft.com/office/drawing/2014/main" id="{FFAFDD47-C328-43E4-B06C-F8136D66C264}"/>
               </a:ext>
             </a:extLst>
           </p:cNvPr>
@@ -3315,7 +3315,7 @@
           <p:cNvPr id="47" name="chart-meds-caption">
             <a:extLst xmlns:a="http://schemas.openxmlformats.org/drawingml/2006/main">
               <a:ext uri="{FF2B5EF4-FFF2-40B4-BE49-F238E27FC236}">
-                <a16:creationId xmlns:a16="http://schemas.microsoft.com/office/drawing/2014/main" id="{2819273C-3FB8-4016-A727-20D961EC0BA3}"/>
+                <a16:creationId xmlns:a16="http://schemas.microsoft.com/office/drawing/2014/main" id="{C85E6E46-7B91-46D4-AC1F-DC8CBAA3D7C6}"/>
               </a:ext>
             </a:extLst>
           </p:cNvPr>
@@ -3365,7 +3365,7 @@
           <p:cNvPr id="48" name="chart-meds-frame">
             <a:extLst xmlns:a="http://schemas.openxmlformats.org/drawingml/2006/main">
               <a:ext uri="{FF2B5EF4-FFF2-40B4-BE49-F238E27FC236}">
-                <a16:creationId xmlns:a16="http://schemas.microsoft.com/office/drawing/2014/main" id="{DFD06D86-2121-4F5F-AA2C-2C56DFE5FD01}"/>
+                <a16:creationId xmlns:a16="http://schemas.microsoft.com/office/drawing/2014/main" id="{ED7C7E40-590A-44B8-B9E0-195C07027A48}"/>
               </a:ext>
             </a:extLst>
           </p:cNvPr>
@@ -3402,13 +3402,13 @@
           <p:nvPr/>
         </p:nvPicPr>
         <p:blipFill>
-          <a:blip xmlns:r="http://schemas.openxmlformats.org/officeDocument/2006/relationships" xmlns:a="http://schemas.openxmlformats.org/drawingml/2006/main" r:embed="Ra82871ac30974878"/>
+          <a:blip xmlns:r="http://schemas.openxmlformats.org/officeDocument/2006/relationships" xmlns:a="http://schemas.openxmlformats.org/drawingml/2006/main" r:embed="R8485dd780b75493f"/>
           <a:stretch xmlns:a="http://schemas.openxmlformats.org/drawingml/2006/main"/>
         </p:blipFill>
         <p:spPr>
           <a:xfrm xmlns:a="http://schemas.openxmlformats.org/drawingml/2006/main">
-            <a:off x="6407150" y="4265348"/>
-            <a:ext cx="2755900" cy="803804"/>
+            <a:off x="6410390" y="3676650"/>
+            <a:ext cx="2749420" cy="1981200"/>
           </a:xfrm>
           <a:prstGeom xmlns:a="http://schemas.openxmlformats.org/drawingml/2006/main" prst="rect">
             <a:avLst/>
@@ -3420,7 +3420,7 @@
           <p:cNvPr id="50" name="chart-smoke-caption">
             <a:extLst xmlns:a="http://schemas.openxmlformats.org/drawingml/2006/main">
               <a:ext uri="{FF2B5EF4-FFF2-40B4-BE49-F238E27FC236}">
-                <a16:creationId xmlns:a16="http://schemas.microsoft.com/office/drawing/2014/main" id="{8ECEE54D-7D74-405A-A1EE-8BAF4CC98D63}"/>
+                <a16:creationId xmlns:a16="http://schemas.microsoft.com/office/drawing/2014/main" id="{C0E9C70C-BCF3-4616-90E8-EDFF942B1710}"/>
               </a:ext>
             </a:extLst>
           </p:cNvPr>
@@ -3470,7 +3470,7 @@
           <p:cNvPr id="51" name="chart-smoke-frame">
             <a:extLst xmlns:a="http://schemas.openxmlformats.org/drawingml/2006/main">
               <a:ext uri="{FF2B5EF4-FFF2-40B4-BE49-F238E27FC236}">
-                <a16:creationId xmlns:a16="http://schemas.microsoft.com/office/drawing/2014/main" id="{FED9C36A-B556-4EEC-9945-8234BCB599D6}"/>
+                <a16:creationId xmlns:a16="http://schemas.microsoft.com/office/drawing/2014/main" id="{AC8FBB02-1DD1-4A67-A10D-99424466E1A0}"/>
               </a:ext>
             </a:extLst>
           </p:cNvPr>
@@ -3507,13 +3507,13 @@
           <p:nvPr/>
         </p:nvPicPr>
         <p:blipFill>
-          <a:blip xmlns:r="http://schemas.openxmlformats.org/officeDocument/2006/relationships" xmlns:a="http://schemas.openxmlformats.org/drawingml/2006/main" r:embed="R615753c662c54cc2"/>
+          <a:blip xmlns:r="http://schemas.openxmlformats.org/officeDocument/2006/relationships" xmlns:a="http://schemas.openxmlformats.org/drawingml/2006/main" r:embed="R2f573fb99fd94b20"/>
           <a:stretch xmlns:a="http://schemas.openxmlformats.org/drawingml/2006/main"/>
         </p:blipFill>
         <p:spPr>
           <a:xfrm xmlns:a="http://schemas.openxmlformats.org/drawingml/2006/main">
-            <a:off x="6407150" y="6741848"/>
-            <a:ext cx="2755900" cy="803804"/>
+            <a:off x="6410390" y="6153150"/>
+            <a:ext cx="2749420" cy="1981200"/>
           </a:xfrm>
           <a:prstGeom xmlns:a="http://schemas.openxmlformats.org/drawingml/2006/main" prst="rect">
             <a:avLst/>
@@ -3525,7 +3525,7 @@
           <p:cNvPr id="53" name="6-IC beta e leitura dos gráficos-box">
             <a:extLst xmlns:a="http://schemas.openxmlformats.org/drawingml/2006/main">
               <a:ext uri="{FF2B5EF4-FFF2-40B4-BE49-F238E27FC236}">
-                <a16:creationId xmlns:a16="http://schemas.microsoft.com/office/drawing/2014/main" id="{2B20BF40-8776-4A6D-96B6-6FAEB73E0A1F}"/>
+                <a16:creationId xmlns:a16="http://schemas.microsoft.com/office/drawing/2014/main" id="{2579545C-F0ED-41D6-8D9F-31BDA194B2EE}"/>
               </a:ext>
             </a:extLst>
           </p:cNvPr>
@@ -3558,7 +3558,7 @@
           <p:cNvPr id="54" name="6-IC beta e leitura dos gráficos-head">
             <a:extLst xmlns:a="http://schemas.openxmlformats.org/drawingml/2006/main">
               <a:ext uri="{FF2B5EF4-FFF2-40B4-BE49-F238E27FC236}">
-                <a16:creationId xmlns:a16="http://schemas.microsoft.com/office/drawing/2014/main" id="{BF73CE2F-E387-4247-8749-B8788B40BCF0}"/>
+                <a16:creationId xmlns:a16="http://schemas.microsoft.com/office/drawing/2014/main" id="{5322A895-244F-4416-8A72-AED948E3D051}"/>
               </a:ext>
             </a:extLst>
           </p:cNvPr>
@@ -3591,7 +3591,7 @@
           <p:cNvPr id="55" name="6-IC beta e leitura dos gráficos-title">
             <a:extLst xmlns:a="http://schemas.openxmlformats.org/drawingml/2006/main">
               <a:ext uri="{FF2B5EF4-FFF2-40B4-BE49-F238E27FC236}">
-                <a16:creationId xmlns:a16="http://schemas.microsoft.com/office/drawing/2014/main" id="{C4153177-97FE-4E06-9904-4E225B3CFC8A}"/>
+                <a16:creationId xmlns:a16="http://schemas.microsoft.com/office/drawing/2014/main" id="{2108266F-B4C0-402C-9988-C5C371D5C89E}"/>
               </a:ext>
             </a:extLst>
           </p:cNvPr>
@@ -3641,7 +3641,7 @@
           <p:cNvPr id="56" name="6-IC beta e leitura dos gráficos-body">
             <a:extLst xmlns:a="http://schemas.openxmlformats.org/drawingml/2006/main">
               <a:ext uri="{FF2B5EF4-FFF2-40B4-BE49-F238E27FC236}">
-                <a16:creationId xmlns:a16="http://schemas.microsoft.com/office/drawing/2014/main" id="{9E94327C-EB62-4BFB-BA2B-BAE487064018}"/>
+                <a16:creationId xmlns:a16="http://schemas.microsoft.com/office/drawing/2014/main" id="{912D0E11-1652-4743-BA66-F502B3E50A8B}"/>
               </a:ext>
             </a:extLst>
           </p:cNvPr>
@@ -3725,7 +3725,7 @@
           <p:cNvPr id="57" name="7-Discussão e implicações-box">
             <a:extLst xmlns:a="http://schemas.openxmlformats.org/drawingml/2006/main">
               <a:ext uri="{FF2B5EF4-FFF2-40B4-BE49-F238E27FC236}">
-                <a16:creationId xmlns:a16="http://schemas.microsoft.com/office/drawing/2014/main" id="{CEB8A8A8-5EE9-485C-954E-53CBB2CF5B63}"/>
+                <a16:creationId xmlns:a16="http://schemas.microsoft.com/office/drawing/2014/main" id="{0AB1B157-21D8-4522-81B6-59F0AF8FD5DA}"/>
               </a:ext>
             </a:extLst>
           </p:cNvPr>
@@ -3758,7 +3758,7 @@
           <p:cNvPr id="58" name="7-Discussão e implicações-head">
             <a:extLst xmlns:a="http://schemas.openxmlformats.org/drawingml/2006/main">
               <a:ext uri="{FF2B5EF4-FFF2-40B4-BE49-F238E27FC236}">
-                <a16:creationId xmlns:a16="http://schemas.microsoft.com/office/drawing/2014/main" id="{D5813CC8-3AA8-4BAA-A8BA-E7838C58BE40}"/>
+                <a16:creationId xmlns:a16="http://schemas.microsoft.com/office/drawing/2014/main" id="{D5921DB7-1BB3-42CF-91F4-1DF9AD140320}"/>
               </a:ext>
             </a:extLst>
           </p:cNvPr>
@@ -3791,7 +3791,7 @@
           <p:cNvPr id="59" name="7-Discussão e implicações-title">
             <a:extLst xmlns:a="http://schemas.openxmlformats.org/drawingml/2006/main">
               <a:ext uri="{FF2B5EF4-FFF2-40B4-BE49-F238E27FC236}">
-                <a16:creationId xmlns:a16="http://schemas.microsoft.com/office/drawing/2014/main" id="{F2ABA913-5DE0-4BAB-9007-8F50808A6DAC}"/>
+                <a16:creationId xmlns:a16="http://schemas.microsoft.com/office/drawing/2014/main" id="{F21B05A7-CBEE-461A-9219-E4A9298EEB51}"/>
               </a:ext>
             </a:extLst>
           </p:cNvPr>
@@ -3841,7 +3841,7 @@
           <p:cNvPr id="60" name="7-Discussão e implicações-body">
             <a:extLst xmlns:a="http://schemas.openxmlformats.org/drawingml/2006/main">
               <a:ext uri="{FF2B5EF4-FFF2-40B4-BE49-F238E27FC236}">
-                <a16:creationId xmlns:a16="http://schemas.microsoft.com/office/drawing/2014/main" id="{C3544457-8F4C-4FF9-8819-E36FD6BADC78}"/>
+                <a16:creationId xmlns:a16="http://schemas.microsoft.com/office/drawing/2014/main" id="{0C1A4329-D237-4544-A771-D837945D322C}"/>
               </a:ext>
             </a:extLst>
           </p:cNvPr>
@@ -3925,7 +3925,7 @@
           <p:cNvPr id="61" name="8-ETL, OMOP e OHDSI-box">
             <a:extLst xmlns:a="http://schemas.openxmlformats.org/drawingml/2006/main">
               <a:ext uri="{FF2B5EF4-FFF2-40B4-BE49-F238E27FC236}">
-                <a16:creationId xmlns:a16="http://schemas.microsoft.com/office/drawing/2014/main" id="{E073B945-15D5-405E-8576-606247D0DEE5}"/>
+                <a16:creationId xmlns:a16="http://schemas.microsoft.com/office/drawing/2014/main" id="{B76C75BA-8031-440C-A5ED-2D686C49C956}"/>
               </a:ext>
             </a:extLst>
           </p:cNvPr>
@@ -3958,7 +3958,7 @@
           <p:cNvPr id="62" name="8-ETL, OMOP e OHDSI-head">
             <a:extLst xmlns:a="http://schemas.openxmlformats.org/drawingml/2006/main">
               <a:ext uri="{FF2B5EF4-FFF2-40B4-BE49-F238E27FC236}">
-                <a16:creationId xmlns:a16="http://schemas.microsoft.com/office/drawing/2014/main" id="{E949AC35-BE33-419D-94CB-424A2616ABCB}"/>
+                <a16:creationId xmlns:a16="http://schemas.microsoft.com/office/drawing/2014/main" id="{4F242274-4B32-4FAC-9700-0A57778B1F2B}"/>
               </a:ext>
             </a:extLst>
           </p:cNvPr>
@@ -3991,7 +3991,7 @@
           <p:cNvPr id="63" name="8-ETL, OMOP e OHDSI-title">
             <a:extLst xmlns:a="http://schemas.openxmlformats.org/drawingml/2006/main">
               <a:ext uri="{FF2B5EF4-FFF2-40B4-BE49-F238E27FC236}">
-                <a16:creationId xmlns:a16="http://schemas.microsoft.com/office/drawing/2014/main" id="{C85D5FA0-B423-4686-AF05-428290F3BD37}"/>
+                <a16:creationId xmlns:a16="http://schemas.microsoft.com/office/drawing/2014/main" id="{47F2A48E-5E0F-407B-84FB-251E1DA631EE}"/>
               </a:ext>
             </a:extLst>
           </p:cNvPr>
@@ -4041,7 +4041,7 @@
           <p:cNvPr id="64" name="8-ETL, OMOP e OHDSI-body">
             <a:extLst xmlns:a="http://schemas.openxmlformats.org/drawingml/2006/main">
               <a:ext uri="{FF2B5EF4-FFF2-40B4-BE49-F238E27FC236}">
-                <a16:creationId xmlns:a16="http://schemas.microsoft.com/office/drawing/2014/main" id="{9398AE56-5BC1-4171-B574-1BD5A38A3B0E}"/>
+                <a16:creationId xmlns:a16="http://schemas.microsoft.com/office/drawing/2014/main" id="{E7CBF768-E47D-47BB-955A-91BF55742861}"/>
               </a:ext>
             </a:extLst>
           </p:cNvPr>
@@ -4125,7 +4125,7 @@
           <p:cNvPr id="65" name="9-Conclusões-box">
             <a:extLst xmlns:a="http://schemas.openxmlformats.org/drawingml/2006/main">
               <a:ext uri="{FF2B5EF4-FFF2-40B4-BE49-F238E27FC236}">
-                <a16:creationId xmlns:a16="http://schemas.microsoft.com/office/drawing/2014/main" id="{1986314C-B29A-4757-8E3E-B808AE06A629}"/>
+                <a16:creationId xmlns:a16="http://schemas.microsoft.com/office/drawing/2014/main" id="{8B02537B-7BEE-4BEE-9C2E-805736CE792D}"/>
               </a:ext>
             </a:extLst>
           </p:cNvPr>
@@ -4158,7 +4158,7 @@
           <p:cNvPr id="66" name="9-Conclusões-head">
             <a:extLst xmlns:a="http://schemas.openxmlformats.org/drawingml/2006/main">
               <a:ext uri="{FF2B5EF4-FFF2-40B4-BE49-F238E27FC236}">
-                <a16:creationId xmlns:a16="http://schemas.microsoft.com/office/drawing/2014/main" id="{36C44138-8016-4283-BCF3-7A31BC0F2785}"/>
+                <a16:creationId xmlns:a16="http://schemas.microsoft.com/office/drawing/2014/main" id="{9A71E3DD-C8F9-4726-8AFD-C5509F56BE37}"/>
               </a:ext>
             </a:extLst>
           </p:cNvPr>
@@ -4191,7 +4191,7 @@
           <p:cNvPr id="67" name="9-Conclusões-title">
             <a:extLst xmlns:a="http://schemas.openxmlformats.org/drawingml/2006/main">
               <a:ext uri="{FF2B5EF4-FFF2-40B4-BE49-F238E27FC236}">
-                <a16:creationId xmlns:a16="http://schemas.microsoft.com/office/drawing/2014/main" id="{DE183939-2799-4FCD-9BA5-6DB10ACFE98B}"/>
+                <a16:creationId xmlns:a16="http://schemas.microsoft.com/office/drawing/2014/main" id="{DA5979E4-E141-45C5-BEAE-CA5F4CC7FD56}"/>
               </a:ext>
             </a:extLst>
           </p:cNvPr>
@@ -4241,7 +4241,7 @@
           <p:cNvPr id="68" name="9-Conclusões-body">
             <a:extLst xmlns:a="http://schemas.openxmlformats.org/drawingml/2006/main">
               <a:ext uri="{FF2B5EF4-FFF2-40B4-BE49-F238E27FC236}">
-                <a16:creationId xmlns:a16="http://schemas.microsoft.com/office/drawing/2014/main" id="{6A8C882F-E3A9-4A3E-AF1B-500F68B12357}"/>
+                <a16:creationId xmlns:a16="http://schemas.microsoft.com/office/drawing/2014/main" id="{C303E395-7D49-47DC-A303-7D6F8D835EDB}"/>
               </a:ext>
             </a:extLst>
           </p:cNvPr>
@@ -4325,7 +4325,7 @@
           <p:cNvPr id="69" name="references-box">
             <a:extLst xmlns:a="http://schemas.openxmlformats.org/drawingml/2006/main">
               <a:ext uri="{FF2B5EF4-FFF2-40B4-BE49-F238E27FC236}">
-                <a16:creationId xmlns:a16="http://schemas.microsoft.com/office/drawing/2014/main" id="{CED45302-75B5-456A-8F6B-8B7D33BC31D3}"/>
+                <a16:creationId xmlns:a16="http://schemas.microsoft.com/office/drawing/2014/main" id="{2F66C23F-6D00-48B7-865F-AE29E0FF84C6}"/>
               </a:ext>
             </a:extLst>
           </p:cNvPr>
@@ -4358,7 +4358,7 @@
           <p:cNvPr id="70" name="references-title">
             <a:extLst xmlns:a="http://schemas.openxmlformats.org/drawingml/2006/main">
               <a:ext uri="{FF2B5EF4-FFF2-40B4-BE49-F238E27FC236}">
-                <a16:creationId xmlns:a16="http://schemas.microsoft.com/office/drawing/2014/main" id="{9E7AA42D-33E8-4215-BC7F-2DBDE6799796}"/>
+                <a16:creationId xmlns:a16="http://schemas.microsoft.com/office/drawing/2014/main" id="{FAAD0526-B5DF-47EF-A0A3-600FE2361A11}"/>
               </a:ext>
             </a:extLst>
           </p:cNvPr>
@@ -4408,7 +4408,7 @@
           <p:cNvPr id="71" name="references-body">
             <a:extLst xmlns:a="http://schemas.openxmlformats.org/drawingml/2006/main">
               <a:ext uri="{FF2B5EF4-FFF2-40B4-BE49-F238E27FC236}">
-                <a16:creationId xmlns:a16="http://schemas.microsoft.com/office/drawing/2014/main" id="{1E0CC87E-0294-4AF3-90FF-87A19CA26E6E}"/>
+                <a16:creationId xmlns:a16="http://schemas.microsoft.com/office/drawing/2014/main" id="{423E4F03-22A9-4156-A057-D16B0CB1B367}"/>
               </a:ext>
             </a:extLst>
           </p:cNvPr>
@@ -4662,7 +4662,7 @@
           <p:cNvPr id="72" name="qr-box">
             <a:extLst xmlns:a="http://schemas.openxmlformats.org/drawingml/2006/main">
               <a:ext uri="{FF2B5EF4-FFF2-40B4-BE49-F238E27FC236}">
-                <a16:creationId xmlns:a16="http://schemas.microsoft.com/office/drawing/2014/main" id="{443E45EE-F99D-408B-B0A8-3B3EEA4CB09A}"/>
+                <a16:creationId xmlns:a16="http://schemas.microsoft.com/office/drawing/2014/main" id="{DA1DA441-E317-4981-AC67-770D93BF3981}"/>
               </a:ext>
             </a:extLst>
           </p:cNvPr>
@@ -4699,7 +4699,7 @@
           <p:nvPr/>
         </p:nvPicPr>
         <p:blipFill>
-          <a:blip xmlns:r="http://schemas.openxmlformats.org/officeDocument/2006/relationships" xmlns:a="http://schemas.openxmlformats.org/drawingml/2006/main" r:embed="R70fc303d4b9a4467"/>
+          <a:blip xmlns:r="http://schemas.openxmlformats.org/officeDocument/2006/relationships" xmlns:a="http://schemas.openxmlformats.org/drawingml/2006/main" r:embed="R4d6b61fe35544142"/>
           <a:stretch xmlns:a="http://schemas.openxmlformats.org/drawingml/2006/main"/>
         </p:blipFill>
         <p:spPr>
@@ -4717,7 +4717,7 @@
           <p:cNvPr id="74" name="qr-label">
             <a:extLst xmlns:a="http://schemas.openxmlformats.org/drawingml/2006/main">
               <a:ext uri="{FF2B5EF4-FFF2-40B4-BE49-F238E27FC236}">
-                <a16:creationId xmlns:a16="http://schemas.microsoft.com/office/drawing/2014/main" id="{C389BB44-EF90-44F2-A7FC-149AEC770294}"/>
+                <a16:creationId xmlns:a16="http://schemas.microsoft.com/office/drawing/2014/main" id="{72641250-725E-4502-AC69-5B5FE7C7B8CD}"/>
               </a:ext>
             </a:extLst>
           </p:cNvPr>
@@ -4782,7 +4782,7 @@
     </p:spTree>
     <p:extLst>
       <p:ext uri="{BB962C8B-B14F-4D97-AF65-F5344CB8AC3E}">
-        <p14:creationId xmlns:p14="http://schemas.microsoft.com/office/powerpoint/2010/main" val="1736477603"/>
+        <p14:creationId xmlns:p14="http://schemas.microsoft.com/office/powerpoint/2010/main" val="1743834920"/>
       </p:ext>
     </p:extLst>
   </p:cSld>

--- a/outputs/posters/poster_pns_asma_classico_pt.pptx
+++ b/outputs/posters/poster_pns_asma_classico_pt.pptx
@@ -2,13 +2,13 @@
 <file path=ppt/presentation.xml><?xml version="1.0" encoding="utf-8"?>
 <p:presentation xmlns:p="http://schemas.openxmlformats.org/presentationml/2006/main">
   <p:sldMasterIdLst>
-    <p:sldMasterId xmlns:r="http://schemas.openxmlformats.org/officeDocument/2006/relationships" id="2147483648" r:id="R485f383a17ba4606"/>
+    <p:sldMasterId xmlns:r="http://schemas.openxmlformats.org/officeDocument/2006/relationships" id="2147483648" r:id="R37e5801caac14353"/>
   </p:sldMasterIdLst>
   <p:notesMasterIdLst>
-    <p:notesMasterId xmlns:r="http://schemas.openxmlformats.org/officeDocument/2006/relationships" r:id="R43a6f7d69ce1436e"/>
+    <p:notesMasterId xmlns:r="http://schemas.openxmlformats.org/officeDocument/2006/relationships" r:id="R6ed3a468bc234179"/>
   </p:notesMasterIdLst>
   <p:sldIdLst>
-    <p:sldId xmlns:r="http://schemas.openxmlformats.org/officeDocument/2006/relationships" id="256" r:id="R28998fc1fd7641ab"/>
+    <p:sldId xmlns:r="http://schemas.openxmlformats.org/officeDocument/2006/relationships" id="256" r:id="R28c1de09df1b454a"/>
   </p:sldIdLst>
   <p:sldSz cx="9525000" cy="13468350"/>
   <p:notesSz cx="6858000" cy="9144000"/>
@@ -601,7 +601,7 @@
   </p:cSld>
   <p:clrMap bg1="lt1" tx1="dk1" bg2="lt2" tx2="dk2" accent1="accent1" accent2="accent2" accent3="accent3" accent4="accent4" accent5="accent5" accent6="accent6" hlink="hlink" folHlink="folHlink"/>
   <p:sldLayoutIdLst>
-    <p:sldLayoutId xmlns:r="http://schemas.openxmlformats.org/officeDocument/2006/relationships" id="2147483649" r:id="R05321fe84af54289"/>
+    <p:sldLayoutId xmlns:r="http://schemas.openxmlformats.org/officeDocument/2006/relationships" id="2147483649" r:id="R1f8fc130e83a4983"/>
   </p:sldLayoutIdLst>
   <p:txStyles>
     <p:titleStyle>
@@ -1156,7 +1156,7 @@
           <p:nvPr/>
         </p:nvPicPr>
         <p:blipFill>
-          <a:blip xmlns:r="http://schemas.openxmlformats.org/officeDocument/2006/relationships" xmlns:a="http://schemas.openxmlformats.org/drawingml/2006/main" r:embed="R5d45e9aff9964db1"/>
+          <a:blip xmlns:r="http://schemas.openxmlformats.org/officeDocument/2006/relationships" xmlns:a="http://schemas.openxmlformats.org/drawingml/2006/main" r:embed="R116fa79ff7c84d7c"/>
           <a:srcRect xmlns:a="http://schemas.openxmlformats.org/drawingml/2006/main" l="0" t="38622" r="0" b="38622"/>
           <a:stretch xmlns:a="http://schemas.openxmlformats.org/drawingml/2006/main">
             <a:fillRect l="0" t="0" r="0" b="0"/>
@@ -1181,7 +1181,7 @@
           <p:nvPr/>
         </p:nvPicPr>
         <p:blipFill>
-          <a:blip xmlns:r="http://schemas.openxmlformats.org/officeDocument/2006/relationships" xmlns:a="http://schemas.openxmlformats.org/drawingml/2006/main" r:embed="R07d3230c0ac64dbe"/>
+          <a:blip xmlns:r="http://schemas.openxmlformats.org/officeDocument/2006/relationships" xmlns:a="http://schemas.openxmlformats.org/drawingml/2006/main" r:embed="R4d3c42a07f1e4f33"/>
           <a:stretch xmlns:a="http://schemas.openxmlformats.org/drawingml/2006/main"/>
         </p:blipFill>
         <p:spPr>
@@ -1203,7 +1203,7 @@
           <p:nvPr/>
         </p:nvPicPr>
         <p:blipFill>
-          <a:blip xmlns:r="http://schemas.openxmlformats.org/officeDocument/2006/relationships" xmlns:a="http://schemas.openxmlformats.org/drawingml/2006/main" r:embed="R61da29146dda4c29"/>
+          <a:blip xmlns:r="http://schemas.openxmlformats.org/officeDocument/2006/relationships" xmlns:a="http://schemas.openxmlformats.org/drawingml/2006/main" r:embed="Reca477d14fad4d9e"/>
           <a:stretch xmlns:a="http://schemas.openxmlformats.org/drawingml/2006/main"/>
         </p:blipFill>
         <p:spPr>
@@ -1221,7 +1221,7 @@
           <p:cNvPr id="4" name="classic-title">
             <a:extLst xmlns:a="http://schemas.openxmlformats.org/drawingml/2006/main">
               <a:ext uri="{FF2B5EF4-FFF2-40B4-BE49-F238E27FC236}">
-                <a16:creationId xmlns:a16="http://schemas.microsoft.com/office/drawing/2014/main" id="{3CEFDD33-23D4-4F2C-9E5D-FCFEA1B60D4E}"/>
+                <a16:creationId xmlns:a16="http://schemas.microsoft.com/office/drawing/2014/main" id="{34059B0E-1D44-4C05-9DB2-660637571447}"/>
               </a:ext>
             </a:extLst>
           </p:cNvPr>
@@ -1271,7 +1271,7 @@
           <p:cNvPr id="5" name="classic-authors">
             <a:extLst xmlns:a="http://schemas.openxmlformats.org/drawingml/2006/main">
               <a:ext uri="{FF2B5EF4-FFF2-40B4-BE49-F238E27FC236}">
-                <a16:creationId xmlns:a16="http://schemas.microsoft.com/office/drawing/2014/main" id="{D6BF324A-50A9-473F-9F67-66A3D8558CA4}"/>
+                <a16:creationId xmlns:a16="http://schemas.microsoft.com/office/drawing/2014/main" id="{C479838E-48ED-4298-96E3-50CB8F81DCA7}"/>
               </a:ext>
             </a:extLst>
           </p:cNvPr>
@@ -1321,7 +1321,7 @@
           <p:cNvPr id="6" name="1-Introdução-box">
             <a:extLst xmlns:a="http://schemas.openxmlformats.org/drawingml/2006/main">
               <a:ext uri="{FF2B5EF4-FFF2-40B4-BE49-F238E27FC236}">
-                <a16:creationId xmlns:a16="http://schemas.microsoft.com/office/drawing/2014/main" id="{9C2BC44B-1BBB-4577-A536-8397C7631360}"/>
+                <a16:creationId xmlns:a16="http://schemas.microsoft.com/office/drawing/2014/main" id="{68FF23A6-60E1-4E08-A053-C7311630117F}"/>
               </a:ext>
             </a:extLst>
           </p:cNvPr>
@@ -1354,7 +1354,7 @@
           <p:cNvPr id="7" name="1-Introdução-head">
             <a:extLst xmlns:a="http://schemas.openxmlformats.org/drawingml/2006/main">
               <a:ext uri="{FF2B5EF4-FFF2-40B4-BE49-F238E27FC236}">
-                <a16:creationId xmlns:a16="http://schemas.microsoft.com/office/drawing/2014/main" id="{217AFD17-B33E-4378-85C9-5B2A73539A82}"/>
+                <a16:creationId xmlns:a16="http://schemas.microsoft.com/office/drawing/2014/main" id="{814A221B-5282-41F0-894B-CF495B21C979}"/>
               </a:ext>
             </a:extLst>
           </p:cNvPr>
@@ -1387,7 +1387,7 @@
           <p:cNvPr id="8" name="1-Introdução-title">
             <a:extLst xmlns:a="http://schemas.openxmlformats.org/drawingml/2006/main">
               <a:ext uri="{FF2B5EF4-FFF2-40B4-BE49-F238E27FC236}">
-                <a16:creationId xmlns:a16="http://schemas.microsoft.com/office/drawing/2014/main" id="{91F82BF8-69B1-4CD0-88F1-555AF639FA53}"/>
+                <a16:creationId xmlns:a16="http://schemas.microsoft.com/office/drawing/2014/main" id="{81971622-6A6E-4373-84A3-C60159EBAE26}"/>
               </a:ext>
             </a:extLst>
           </p:cNvPr>
@@ -1437,7 +1437,7 @@
           <p:cNvPr id="9" name="1-Introdução-body">
             <a:extLst xmlns:a="http://schemas.openxmlformats.org/drawingml/2006/main">
               <a:ext uri="{FF2B5EF4-FFF2-40B4-BE49-F238E27FC236}">
-                <a16:creationId xmlns:a16="http://schemas.microsoft.com/office/drawing/2014/main" id="{5062CD32-8255-4D7C-9FC5-A5E04C40A7B0}"/>
+                <a16:creationId xmlns:a16="http://schemas.microsoft.com/office/drawing/2014/main" id="{CDFEEE0F-92BB-4491-9BAE-34065CF98E35}"/>
               </a:ext>
             </a:extLst>
           </p:cNvPr>
@@ -1521,7 +1521,7 @@
           <p:cNvPr id="10" name="2-Objetivos-box">
             <a:extLst xmlns:a="http://schemas.openxmlformats.org/drawingml/2006/main">
               <a:ext uri="{FF2B5EF4-FFF2-40B4-BE49-F238E27FC236}">
-                <a16:creationId xmlns:a16="http://schemas.microsoft.com/office/drawing/2014/main" id="{C68948FE-B8EF-409C-98EB-75036E7DD066}"/>
+                <a16:creationId xmlns:a16="http://schemas.microsoft.com/office/drawing/2014/main" id="{0F72E840-E4E5-4792-873D-23568BDFA01E}"/>
               </a:ext>
             </a:extLst>
           </p:cNvPr>
@@ -1554,7 +1554,7 @@
           <p:cNvPr id="11" name="2-Objetivos-head">
             <a:extLst xmlns:a="http://schemas.openxmlformats.org/drawingml/2006/main">
               <a:ext uri="{FF2B5EF4-FFF2-40B4-BE49-F238E27FC236}">
-                <a16:creationId xmlns:a16="http://schemas.microsoft.com/office/drawing/2014/main" id="{3D43581C-90A6-4C2D-8777-9972A8479877}"/>
+                <a16:creationId xmlns:a16="http://schemas.microsoft.com/office/drawing/2014/main" id="{55F9FEB7-F11F-48D8-91CB-AEAC788F9267}"/>
               </a:ext>
             </a:extLst>
           </p:cNvPr>
@@ -1587,7 +1587,7 @@
           <p:cNvPr id="12" name="2-Objetivos-title">
             <a:extLst xmlns:a="http://schemas.openxmlformats.org/drawingml/2006/main">
               <a:ext uri="{FF2B5EF4-FFF2-40B4-BE49-F238E27FC236}">
-                <a16:creationId xmlns:a16="http://schemas.microsoft.com/office/drawing/2014/main" id="{F4ABF4C4-1B4E-4E13-A553-1CD8D6F4CCCA}"/>
+                <a16:creationId xmlns:a16="http://schemas.microsoft.com/office/drawing/2014/main" id="{59EEF8F1-32D4-467C-A241-7C88ACE9A1F1}"/>
               </a:ext>
             </a:extLst>
           </p:cNvPr>
@@ -1637,7 +1637,7 @@
           <p:cNvPr id="13" name="2-Objetivos-body">
             <a:extLst xmlns:a="http://schemas.openxmlformats.org/drawingml/2006/main">
               <a:ext uri="{FF2B5EF4-FFF2-40B4-BE49-F238E27FC236}">
-                <a16:creationId xmlns:a16="http://schemas.microsoft.com/office/drawing/2014/main" id="{FFE57C59-11C9-4E31-A53B-B7A642C74664}"/>
+                <a16:creationId xmlns:a16="http://schemas.microsoft.com/office/drawing/2014/main" id="{74D7BCF3-B06D-4B79-92E5-1A1C8694B079}"/>
               </a:ext>
             </a:extLst>
           </p:cNvPr>
@@ -1721,7 +1721,7 @@
           <p:cNvPr id="14" name="3-Dados e indicadores-box">
             <a:extLst xmlns:a="http://schemas.openxmlformats.org/drawingml/2006/main">
               <a:ext uri="{FF2B5EF4-FFF2-40B4-BE49-F238E27FC236}">
-                <a16:creationId xmlns:a16="http://schemas.microsoft.com/office/drawing/2014/main" id="{77D73195-2BEC-4576-BEE0-B1F2A85766B4}"/>
+                <a16:creationId xmlns:a16="http://schemas.microsoft.com/office/drawing/2014/main" id="{A018F41C-C178-4B08-98A1-86325AC42CBB}"/>
               </a:ext>
             </a:extLst>
           </p:cNvPr>
@@ -1754,7 +1754,7 @@
           <p:cNvPr id="15" name="3-Dados e indicadores-head">
             <a:extLst xmlns:a="http://schemas.openxmlformats.org/drawingml/2006/main">
               <a:ext uri="{FF2B5EF4-FFF2-40B4-BE49-F238E27FC236}">
-                <a16:creationId xmlns:a16="http://schemas.microsoft.com/office/drawing/2014/main" id="{4A70F7FC-9F23-4500-8DBC-761BB991D756}"/>
+                <a16:creationId xmlns:a16="http://schemas.microsoft.com/office/drawing/2014/main" id="{FFD3FEF2-0213-4EE9-88BD-42871114588F}"/>
               </a:ext>
             </a:extLst>
           </p:cNvPr>
@@ -1787,7 +1787,7 @@
           <p:cNvPr id="16" name="3-Dados e indicadores-title">
             <a:extLst xmlns:a="http://schemas.openxmlformats.org/drawingml/2006/main">
               <a:ext uri="{FF2B5EF4-FFF2-40B4-BE49-F238E27FC236}">
-                <a16:creationId xmlns:a16="http://schemas.microsoft.com/office/drawing/2014/main" id="{6AA92D8A-B0E6-4C95-8CFF-37EB147147B1}"/>
+                <a16:creationId xmlns:a16="http://schemas.microsoft.com/office/drawing/2014/main" id="{545207E1-0541-4A64-8D8D-365A7017E010}"/>
               </a:ext>
             </a:extLst>
           </p:cNvPr>
@@ -1837,7 +1837,7 @@
           <p:cNvPr id="17" name="3-Dados e indicadores-body">
             <a:extLst xmlns:a="http://schemas.openxmlformats.org/drawingml/2006/main">
               <a:ext uri="{FF2B5EF4-FFF2-40B4-BE49-F238E27FC236}">
-                <a16:creationId xmlns:a16="http://schemas.microsoft.com/office/drawing/2014/main" id="{017FA7DC-1FEE-4613-B6C8-CA44802745D2}"/>
+                <a16:creationId xmlns:a16="http://schemas.microsoft.com/office/drawing/2014/main" id="{6B4B3DC6-CB0A-4D05-88A4-ED57ED552214}"/>
               </a:ext>
             </a:extLst>
           </p:cNvPr>
@@ -1921,7 +1921,7 @@
           <p:cNvPr id="18" name="4-Plano amostral-box">
             <a:extLst xmlns:a="http://schemas.openxmlformats.org/drawingml/2006/main">
               <a:ext uri="{FF2B5EF4-FFF2-40B4-BE49-F238E27FC236}">
-                <a16:creationId xmlns:a16="http://schemas.microsoft.com/office/drawing/2014/main" id="{5EB14AB3-063E-4025-865C-9ACAE88904D8}"/>
+                <a16:creationId xmlns:a16="http://schemas.microsoft.com/office/drawing/2014/main" id="{B9A7B30D-D41E-4938-A79D-E92DFB66BC48}"/>
               </a:ext>
             </a:extLst>
           </p:cNvPr>
@@ -1954,7 +1954,7 @@
           <p:cNvPr id="19" name="4-Plano amostral-head">
             <a:extLst xmlns:a="http://schemas.openxmlformats.org/drawingml/2006/main">
               <a:ext uri="{FF2B5EF4-FFF2-40B4-BE49-F238E27FC236}">
-                <a16:creationId xmlns:a16="http://schemas.microsoft.com/office/drawing/2014/main" id="{0DF884EA-09DE-4F17-883D-3AA211634E7F}"/>
+                <a16:creationId xmlns:a16="http://schemas.microsoft.com/office/drawing/2014/main" id="{89FA2FF0-136D-4B91-BE2C-7FB9194D5E42}"/>
               </a:ext>
             </a:extLst>
           </p:cNvPr>
@@ -1987,7 +1987,7 @@
           <p:cNvPr id="20" name="4-Plano amostral-title">
             <a:extLst xmlns:a="http://schemas.openxmlformats.org/drawingml/2006/main">
               <a:ext uri="{FF2B5EF4-FFF2-40B4-BE49-F238E27FC236}">
-                <a16:creationId xmlns:a16="http://schemas.microsoft.com/office/drawing/2014/main" id="{9FFAECF5-03A2-426B-95AC-F9AFEF611F71}"/>
+                <a16:creationId xmlns:a16="http://schemas.microsoft.com/office/drawing/2014/main" id="{1D80A735-7B9E-46DD-A9AC-089E189FFBF7}"/>
               </a:ext>
             </a:extLst>
           </p:cNvPr>
@@ -2037,7 +2037,7 @@
           <p:cNvPr id="21" name="4-Plano amostral-body">
             <a:extLst xmlns:a="http://schemas.openxmlformats.org/drawingml/2006/main">
               <a:ext uri="{FF2B5EF4-FFF2-40B4-BE49-F238E27FC236}">
-                <a16:creationId xmlns:a16="http://schemas.microsoft.com/office/drawing/2014/main" id="{030F4884-0678-446A-B716-24E39DCA680F}"/>
+                <a16:creationId xmlns:a16="http://schemas.microsoft.com/office/drawing/2014/main" id="{E8471387-014F-4284-B200-317B47B09DBE}"/>
               </a:ext>
             </a:extLst>
           </p:cNvPr>
@@ -2138,7 +2138,7 @@
           <p:cNvPr id="22" name="classic-formula-box">
             <a:extLst xmlns:a="http://schemas.openxmlformats.org/drawingml/2006/main">
               <a:ext uri="{FF2B5EF4-FFF2-40B4-BE49-F238E27FC236}">
-                <a16:creationId xmlns:a16="http://schemas.microsoft.com/office/drawing/2014/main" id="{9D5CB3A3-5E7E-4318-BDF2-9340AD58EDEE}"/>
+                <a16:creationId xmlns:a16="http://schemas.microsoft.com/office/drawing/2014/main" id="{73C71D1E-E51C-4F73-A76F-D3E45B88690E}"/>
               </a:ext>
             </a:extLst>
           </p:cNvPr>
@@ -2171,7 +2171,7 @@
           <p:cNvPr id="23" name="classic-formula-title">
             <a:extLst xmlns:a="http://schemas.openxmlformats.org/drawingml/2006/main">
               <a:ext uri="{FF2B5EF4-FFF2-40B4-BE49-F238E27FC236}">
-                <a16:creationId xmlns:a16="http://schemas.microsoft.com/office/drawing/2014/main" id="{558DF772-C461-4967-B9AD-08136A3F1E8D}"/>
+                <a16:creationId xmlns:a16="http://schemas.microsoft.com/office/drawing/2014/main" id="{10807F33-C053-4BBB-A1BB-B2DE8FFE3046}"/>
               </a:ext>
             </a:extLst>
           </p:cNvPr>
@@ -2221,7 +2221,7 @@
           <p:cNvPr id="24" name="classic-formula">
             <a:extLst xmlns:a="http://schemas.openxmlformats.org/drawingml/2006/main">
               <a:ext uri="{FF2B5EF4-FFF2-40B4-BE49-F238E27FC236}">
-                <a16:creationId xmlns:a16="http://schemas.microsoft.com/office/drawing/2014/main" id="{C2B4039A-8F4B-4D7C-99B1-5B5E3E0257CF}"/>
+                <a16:creationId xmlns:a16="http://schemas.microsoft.com/office/drawing/2014/main" id="{335F50E0-FA21-4D7B-8411-5C6CD04407B7}"/>
               </a:ext>
             </a:extLst>
           </p:cNvPr>
@@ -2339,7 +2339,7 @@
           <p:cNvPr id="25" name="prev-metric">
             <a:extLst xmlns:a="http://schemas.openxmlformats.org/drawingml/2006/main">
               <a:ext uri="{FF2B5EF4-FFF2-40B4-BE49-F238E27FC236}">
-                <a16:creationId xmlns:a16="http://schemas.microsoft.com/office/drawing/2014/main" id="{B97D082B-AECB-410F-BF18-4D1F2D2230FB}"/>
+                <a16:creationId xmlns:a16="http://schemas.microsoft.com/office/drawing/2014/main" id="{265610DF-C256-45CA-BEE9-48E291640173}"/>
               </a:ext>
             </a:extLst>
           </p:cNvPr>
@@ -2372,7 +2372,7 @@
           <p:cNvPr id="26" name="prev-metric-title">
             <a:extLst xmlns:a="http://schemas.openxmlformats.org/drawingml/2006/main">
               <a:ext uri="{FF2B5EF4-FFF2-40B4-BE49-F238E27FC236}">
-                <a16:creationId xmlns:a16="http://schemas.microsoft.com/office/drawing/2014/main" id="{C27F82D4-F8FF-4B4B-88A6-FEA3310781D0}"/>
+                <a16:creationId xmlns:a16="http://schemas.microsoft.com/office/drawing/2014/main" id="{7C50B553-4E82-45ED-A8AD-8CDA844B587A}"/>
               </a:ext>
             </a:extLst>
           </p:cNvPr>
@@ -2412,7 +2412,7 @@
                   <a:srgbClr val="153F59"/>
                 </a:solidFill>
               </a:rPr>
-              <a:t>Prevalência nacional</a:t>
+              <a:t>Brasil: diagnóstico</a:t>
             </a:r>
           </a:p>
         </p:txBody>
@@ -2422,7 +2422,7 @@
           <p:cNvPr id="27" name="prev-metric-value">
             <a:extLst xmlns:a="http://schemas.openxmlformats.org/drawingml/2006/main">
               <a:ext uri="{FF2B5EF4-FFF2-40B4-BE49-F238E27FC236}">
-                <a16:creationId xmlns:a16="http://schemas.microsoft.com/office/drawing/2014/main" id="{E7933279-3272-43A8-A90E-86AC2D1C8385}"/>
+                <a16:creationId xmlns:a16="http://schemas.microsoft.com/office/drawing/2014/main" id="{86AFDD2E-5819-40F6-A1A8-0E1AA464DD63}"/>
               </a:ext>
             </a:extLst>
           </p:cNvPr>
@@ -2472,7 +2472,7 @@
           <p:cNvPr id="28" name="prev-metric-note">
             <a:extLst xmlns:a="http://schemas.openxmlformats.org/drawingml/2006/main">
               <a:ext uri="{FF2B5EF4-FFF2-40B4-BE49-F238E27FC236}">
-                <a16:creationId xmlns:a16="http://schemas.microsoft.com/office/drawing/2014/main" id="{D06F52B2-7C64-4123-8EB6-5271CC1F0981}"/>
+                <a16:creationId xmlns:a16="http://schemas.microsoft.com/office/drawing/2014/main" id="{3B72C22F-2352-4AB2-83AD-F9D188BF8C31}"/>
               </a:ext>
             </a:extLst>
           </p:cNvPr>
@@ -2512,7 +2512,7 @@
                   <a:srgbClr val="102536"/>
                 </a:solidFill>
               </a:rPr>
-              <a:t>Diagnóstico médico de asma aumentou com IC95% sem sobreposição.</a:t>
+              <a:t>Aumento do diagnóstico médico de asma, com IC95% sem sobreposição.</a:t>
             </a:r>
           </a:p>
         </p:txBody>
@@ -2522,7 +2522,7 @@
           <p:cNvPr id="29" name="crisis-metric">
             <a:extLst xmlns:a="http://schemas.openxmlformats.org/drawingml/2006/main">
               <a:ext uri="{FF2B5EF4-FFF2-40B4-BE49-F238E27FC236}">
-                <a16:creationId xmlns:a16="http://schemas.microsoft.com/office/drawing/2014/main" id="{BA5609E1-0910-4DC7-A620-8AE0A00A987B}"/>
+                <a16:creationId xmlns:a16="http://schemas.microsoft.com/office/drawing/2014/main" id="{3B298C39-E2C1-490A-B3F3-AA936F0A38BF}"/>
               </a:ext>
             </a:extLst>
           </p:cNvPr>
@@ -2555,7 +2555,7 @@
           <p:cNvPr id="30" name="crisis-metric-title">
             <a:extLst xmlns:a="http://schemas.openxmlformats.org/drawingml/2006/main">
               <a:ext uri="{FF2B5EF4-FFF2-40B4-BE49-F238E27FC236}">
-                <a16:creationId xmlns:a16="http://schemas.microsoft.com/office/drawing/2014/main" id="{9BB48FAC-A5D3-4468-B303-8353D9301AB1}"/>
+                <a16:creationId xmlns:a16="http://schemas.microsoft.com/office/drawing/2014/main" id="{3C7B6991-CAED-4608-B631-ED6CB608BAD1}"/>
               </a:ext>
             </a:extLst>
           </p:cNvPr>
@@ -2595,7 +2595,7 @@
                   <a:srgbClr val="153F59"/>
                 </a:solidFill>
               </a:rPr>
-              <a:t>Crises em 12 meses</a:t>
+              <a:t>Brasil: crises</a:t>
             </a:r>
           </a:p>
         </p:txBody>
@@ -2605,7 +2605,7 @@
           <p:cNvPr id="31" name="crisis-metric-value">
             <a:extLst xmlns:a="http://schemas.openxmlformats.org/drawingml/2006/main">
               <a:ext uri="{FF2B5EF4-FFF2-40B4-BE49-F238E27FC236}">
-                <a16:creationId xmlns:a16="http://schemas.microsoft.com/office/drawing/2014/main" id="{DB76F699-65E3-47F8-AE4E-13FCF63B2F90}"/>
+                <a16:creationId xmlns:a16="http://schemas.microsoft.com/office/drawing/2014/main" id="{90A023EB-6E3C-49B4-92D5-81FA92A300C0}"/>
               </a:ext>
             </a:extLst>
           </p:cNvPr>
@@ -2655,7 +2655,7 @@
           <p:cNvPr id="32" name="crisis-metric-note">
             <a:extLst xmlns:a="http://schemas.openxmlformats.org/drawingml/2006/main">
               <a:ext uri="{FF2B5EF4-FFF2-40B4-BE49-F238E27FC236}">
-                <a16:creationId xmlns:a16="http://schemas.microsoft.com/office/drawing/2014/main" id="{B0829431-037E-4FA6-8881-568B0AE21F88}"/>
+                <a16:creationId xmlns:a16="http://schemas.microsoft.com/office/drawing/2014/main" id="{F58ABBE4-D649-45FE-B013-6866BED249F2}"/>
               </a:ext>
             </a:extLst>
           </p:cNvPr>
@@ -2695,7 +2695,7 @@
                   <a:srgbClr val="102536"/>
                 </a:solidFill>
               </a:rPr>
-              <a:t>Estabilidade aproximada, sugerindo controle clínico insuficiente.</a:t>
+              <a:t>Crises em 12 meses ficaram estáveis; controle não melhorou na mesma proporção.</a:t>
             </a:r>
           </a:p>
         </p:txBody>
@@ -2705,7 +2705,7 @@
           <p:cNvPr id="33" name="chart-prev-caption">
             <a:extLst xmlns:a="http://schemas.openxmlformats.org/drawingml/2006/main">
               <a:ext uri="{FF2B5EF4-FFF2-40B4-BE49-F238E27FC236}">
-                <a16:creationId xmlns:a16="http://schemas.microsoft.com/office/drawing/2014/main" id="{2A2F889D-AAC1-464A-8521-A652C787EE24}"/>
+                <a16:creationId xmlns:a16="http://schemas.microsoft.com/office/drawing/2014/main" id="{36F5C73B-A8A7-4D24-82FA-F2F115A2B637}"/>
               </a:ext>
             </a:extLst>
           </p:cNvPr>
@@ -2755,7 +2755,7 @@
           <p:cNvPr id="34" name="chart-prev-frame">
             <a:extLst xmlns:a="http://schemas.openxmlformats.org/drawingml/2006/main">
               <a:ext uri="{FF2B5EF4-FFF2-40B4-BE49-F238E27FC236}">
-                <a16:creationId xmlns:a16="http://schemas.microsoft.com/office/drawing/2014/main" id="{074FCE56-0C6F-4FBA-A4D6-9CB3C630BE65}"/>
+                <a16:creationId xmlns:a16="http://schemas.microsoft.com/office/drawing/2014/main" id="{1679B1DF-3CBE-4386-A6AB-0DF77DA3D4E3}"/>
               </a:ext>
             </a:extLst>
           </p:cNvPr>
@@ -2792,7 +2792,7 @@
           <p:nvPr/>
         </p:nvPicPr>
         <p:blipFill>
-          <a:blip xmlns:r="http://schemas.openxmlformats.org/officeDocument/2006/relationships" xmlns:a="http://schemas.openxmlformats.org/drawingml/2006/main" r:embed="Rd002a5dbc0124d50"/>
+          <a:blip xmlns:r="http://schemas.openxmlformats.org/officeDocument/2006/relationships" xmlns:a="http://schemas.openxmlformats.org/drawingml/2006/main" r:embed="Rc351e320ed104b9f"/>
           <a:stretch xmlns:a="http://schemas.openxmlformats.org/drawingml/2006/main"/>
         </p:blipFill>
         <p:spPr>
@@ -2810,7 +2810,7 @@
           <p:cNvPr id="36" name="chart-crisis-caption">
             <a:extLst xmlns:a="http://schemas.openxmlformats.org/drawingml/2006/main">
               <a:ext uri="{FF2B5EF4-FFF2-40B4-BE49-F238E27FC236}">
-                <a16:creationId xmlns:a16="http://schemas.microsoft.com/office/drawing/2014/main" id="{DC7372DC-A4E1-4898-A481-B4D2275098F9}"/>
+                <a16:creationId xmlns:a16="http://schemas.microsoft.com/office/drawing/2014/main" id="{B425D553-108C-4D9F-92D8-3D94DA428826}"/>
               </a:ext>
             </a:extLst>
           </p:cNvPr>
@@ -2860,7 +2860,7 @@
           <p:cNvPr id="37" name="chart-crisis-frame">
             <a:extLst xmlns:a="http://schemas.openxmlformats.org/drawingml/2006/main">
               <a:ext uri="{FF2B5EF4-FFF2-40B4-BE49-F238E27FC236}">
-                <a16:creationId xmlns:a16="http://schemas.microsoft.com/office/drawing/2014/main" id="{5F1C9EE0-3C84-4639-97F6-A440EAE52EC7}"/>
+                <a16:creationId xmlns:a16="http://schemas.microsoft.com/office/drawing/2014/main" id="{D7A8E6BB-C2C9-4D84-BB04-FAB6B1F602CB}"/>
               </a:ext>
             </a:extLst>
           </p:cNvPr>
@@ -2897,7 +2897,7 @@
           <p:nvPr/>
         </p:nvPicPr>
         <p:blipFill>
-          <a:blip xmlns:r="http://schemas.openxmlformats.org/officeDocument/2006/relationships" xmlns:a="http://schemas.openxmlformats.org/drawingml/2006/main" r:embed="R9e9ebe5e615a4793"/>
+          <a:blip xmlns:r="http://schemas.openxmlformats.org/officeDocument/2006/relationships" xmlns:a="http://schemas.openxmlformats.org/drawingml/2006/main" r:embed="R6eb66648237c43de"/>
           <a:stretch xmlns:a="http://schemas.openxmlformats.org/drawingml/2006/main"/>
         </p:blipFill>
         <p:spPr>
@@ -2915,7 +2915,7 @@
           <p:cNvPr id="39" name="5-Resultados e interpretação-box">
             <a:extLst xmlns:a="http://schemas.openxmlformats.org/drawingml/2006/main">
               <a:ext uri="{FF2B5EF4-FFF2-40B4-BE49-F238E27FC236}">
-                <a16:creationId xmlns:a16="http://schemas.microsoft.com/office/drawing/2014/main" id="{E814F3F1-FB89-4F6F-9F3F-1CAFDB7323EA}"/>
+                <a16:creationId xmlns:a16="http://schemas.microsoft.com/office/drawing/2014/main" id="{5CE7E6A1-689C-4CBC-AB3E-102560D21BCF}"/>
               </a:ext>
             </a:extLst>
           </p:cNvPr>
@@ -2948,7 +2948,7 @@
           <p:cNvPr id="40" name="5-Resultados e interpretação-head">
             <a:extLst xmlns:a="http://schemas.openxmlformats.org/drawingml/2006/main">
               <a:ext uri="{FF2B5EF4-FFF2-40B4-BE49-F238E27FC236}">
-                <a16:creationId xmlns:a16="http://schemas.microsoft.com/office/drawing/2014/main" id="{A624F017-CB90-47BB-9565-B1C87F24C3E6}"/>
+                <a16:creationId xmlns:a16="http://schemas.microsoft.com/office/drawing/2014/main" id="{46D6E1AF-B05F-4039-8213-D519E9D06A1C}"/>
               </a:ext>
             </a:extLst>
           </p:cNvPr>
@@ -2981,7 +2981,7 @@
           <p:cNvPr id="41" name="5-Resultados e interpretação-title">
             <a:extLst xmlns:a="http://schemas.openxmlformats.org/drawingml/2006/main">
               <a:ext uri="{FF2B5EF4-FFF2-40B4-BE49-F238E27FC236}">
-                <a16:creationId xmlns:a16="http://schemas.microsoft.com/office/drawing/2014/main" id="{B547C739-CD8C-4BB4-BDD6-3C64A2BEE2DF}"/>
+                <a16:creationId xmlns:a16="http://schemas.microsoft.com/office/drawing/2014/main" id="{09CEAE7C-5961-4654-8D09-71CE4BC60E33}"/>
               </a:ext>
             </a:extLst>
           </p:cNvPr>
@@ -3031,7 +3031,7 @@
           <p:cNvPr id="42" name="5-Resultados e interpretação-body">
             <a:extLst xmlns:a="http://schemas.openxmlformats.org/drawingml/2006/main">
               <a:ext uri="{FF2B5EF4-FFF2-40B4-BE49-F238E27FC236}">
-                <a16:creationId xmlns:a16="http://schemas.microsoft.com/office/drawing/2014/main" id="{018B92E1-1A48-4C5E-A29C-50A1B31A0784}"/>
+                <a16:creationId xmlns:a16="http://schemas.microsoft.com/office/drawing/2014/main" id="{00FCF87B-EDE6-4505-8BEF-06A74CBC59F3}"/>
               </a:ext>
             </a:extLst>
           </p:cNvPr>
@@ -3071,7 +3071,7 @@
                   <a:srgbClr val="102536"/>
                 </a:solidFill>
               </a:rPr>
-              <a:t>• Diagnóstico médico de asma: 4,41% em 2013 para 5,40% em 2019, com ICs sem sobreposição.</a:t>
+              <a:t>• Brasil: diagnóstico médico de asma aumentou de 4,41% em 2013 para 5,40% em 2019, com IC95% sem sobreposição.</a:t>
             </a:r>
           </a:p>
           <a:p xmlns:a="http://schemas.openxmlformats.org/drawingml/2006/main">
@@ -3088,7 +3088,7 @@
                   <a:srgbClr val="102536"/>
                 </a:solidFill>
               </a:rPr>
-              <a:t>• Crises nos últimos 12 meses: 38,3% para 37,7%, indicando estabilidade aproximada.</a:t>
+              <a:t>• Brasil: crises nos últimos 12 meses ficaram estáveis, de 38,3% para 37,7%.</a:t>
             </a:r>
           </a:p>
           <a:p xmlns:a="http://schemas.openxmlformats.org/drawingml/2006/main">
@@ -3105,7 +3105,7 @@
                   <a:srgbClr val="102536"/>
                 </a:solidFill>
               </a:rPr>
-              <a:t>• Uso de medicamento oral/bombinha entre asmáticos: 81,5% para 64,4%; leitura exige cautela por denominador e IC95%.</a:t>
+              <a:t>• Brasil: uso de medicamento oral/bombinha entre pessoas com asma passou de 81,5% para 64,4%; a leitura deve considerar IC95%, perfil dos diagnosticados e taxa populacional.</a:t>
             </a:r>
           </a:p>
           <a:p xmlns:a="http://schemas.openxmlformats.org/drawingml/2006/main">
@@ -3132,7 +3132,7 @@
           <p:cNvPr id="43" name="meds-metric">
             <a:extLst xmlns:a="http://schemas.openxmlformats.org/drawingml/2006/main">
               <a:ext uri="{FF2B5EF4-FFF2-40B4-BE49-F238E27FC236}">
-                <a16:creationId xmlns:a16="http://schemas.microsoft.com/office/drawing/2014/main" id="{93298F9D-063A-4993-BFE3-FCA42EB7BF41}"/>
+                <a16:creationId xmlns:a16="http://schemas.microsoft.com/office/drawing/2014/main" id="{D1A97E95-4EF9-43FE-B084-15B5616C4729}"/>
               </a:ext>
             </a:extLst>
           </p:cNvPr>
@@ -3165,7 +3165,7 @@
           <p:cNvPr id="44" name="meds-metric-title">
             <a:extLst xmlns:a="http://schemas.openxmlformats.org/drawingml/2006/main">
               <a:ext uri="{FF2B5EF4-FFF2-40B4-BE49-F238E27FC236}">
-                <a16:creationId xmlns:a16="http://schemas.microsoft.com/office/drawing/2014/main" id="{9F2BC737-D9E4-4B9A-A20E-3B56B8136ADF}"/>
+                <a16:creationId xmlns:a16="http://schemas.microsoft.com/office/drawing/2014/main" id="{3801DEC5-D033-45AB-ACD3-CB55B67FCC9B}"/>
               </a:ext>
             </a:extLst>
           </p:cNvPr>
@@ -3205,7 +3205,7 @@
                   <a:srgbClr val="153F59"/>
                 </a:solidFill>
               </a:rPr>
-              <a:t>Medicamentos</a:t>
+              <a:t>Brasil: medicamentos</a:t>
             </a:r>
           </a:p>
         </p:txBody>
@@ -3215,7 +3215,7 @@
           <p:cNvPr id="45" name="meds-metric-value">
             <a:extLst xmlns:a="http://schemas.openxmlformats.org/drawingml/2006/main">
               <a:ext uri="{FF2B5EF4-FFF2-40B4-BE49-F238E27FC236}">
-                <a16:creationId xmlns:a16="http://schemas.microsoft.com/office/drawing/2014/main" id="{ED0F78A5-1977-408A-918D-17D3147786C1}"/>
+                <a16:creationId xmlns:a16="http://schemas.microsoft.com/office/drawing/2014/main" id="{83E182D6-A78B-410C-A9E1-FA62E9CB53E6}"/>
               </a:ext>
             </a:extLst>
           </p:cNvPr>
@@ -3265,7 +3265,7 @@
           <p:cNvPr id="46" name="meds-metric-note">
             <a:extLst xmlns:a="http://schemas.openxmlformats.org/drawingml/2006/main">
               <a:ext uri="{FF2B5EF4-FFF2-40B4-BE49-F238E27FC236}">
-                <a16:creationId xmlns:a16="http://schemas.microsoft.com/office/drawing/2014/main" id="{FFAFDD47-C328-43E4-B06C-F8136D66C264}"/>
+                <a16:creationId xmlns:a16="http://schemas.microsoft.com/office/drawing/2014/main" id="{8EF8D409-777D-4590-AAFF-52EDEA11900F}"/>
               </a:ext>
             </a:extLst>
           </p:cNvPr>
@@ -3305,7 +3305,7 @@
                   <a:srgbClr val="102536"/>
                 </a:solidFill>
               </a:rPr>
-              <a:t>Queda percentual entre asmáticos; inferência depende do IC95% e denominador.</a:t>
+              <a:t>Menor proporção de uso entre asmáticos; interpretar com IC95% e perfil dos diagnosticados.</a:t>
             </a:r>
           </a:p>
         </p:txBody>
@@ -3315,7 +3315,7 @@
           <p:cNvPr id="47" name="chart-meds-caption">
             <a:extLst xmlns:a="http://schemas.openxmlformats.org/drawingml/2006/main">
               <a:ext uri="{FF2B5EF4-FFF2-40B4-BE49-F238E27FC236}">
-                <a16:creationId xmlns:a16="http://schemas.microsoft.com/office/drawing/2014/main" id="{C85E6E46-7B91-46D4-AC1F-DC8CBAA3D7C6}"/>
+                <a16:creationId xmlns:a16="http://schemas.microsoft.com/office/drawing/2014/main" id="{787B92F2-3198-4F58-BEA9-066F51A5131E}"/>
               </a:ext>
             </a:extLst>
           </p:cNvPr>
@@ -3365,7 +3365,7 @@
           <p:cNvPr id="48" name="chart-meds-frame">
             <a:extLst xmlns:a="http://schemas.openxmlformats.org/drawingml/2006/main">
               <a:ext uri="{FF2B5EF4-FFF2-40B4-BE49-F238E27FC236}">
-                <a16:creationId xmlns:a16="http://schemas.microsoft.com/office/drawing/2014/main" id="{ED7C7E40-590A-44B8-B9E0-195C07027A48}"/>
+                <a16:creationId xmlns:a16="http://schemas.microsoft.com/office/drawing/2014/main" id="{C8F3F114-DB69-488A-B671-C7369B035D72}"/>
               </a:ext>
             </a:extLst>
           </p:cNvPr>
@@ -3402,7 +3402,7 @@
           <p:nvPr/>
         </p:nvPicPr>
         <p:blipFill>
-          <a:blip xmlns:r="http://schemas.openxmlformats.org/officeDocument/2006/relationships" xmlns:a="http://schemas.openxmlformats.org/drawingml/2006/main" r:embed="R8485dd780b75493f"/>
+          <a:blip xmlns:r="http://schemas.openxmlformats.org/officeDocument/2006/relationships" xmlns:a="http://schemas.openxmlformats.org/drawingml/2006/main" r:embed="R47ecfd9f85894d2a"/>
           <a:stretch xmlns:a="http://schemas.openxmlformats.org/drawingml/2006/main"/>
         </p:blipFill>
         <p:spPr>
@@ -3420,7 +3420,7 @@
           <p:cNvPr id="50" name="chart-smoke-caption">
             <a:extLst xmlns:a="http://schemas.openxmlformats.org/drawingml/2006/main">
               <a:ext uri="{FF2B5EF4-FFF2-40B4-BE49-F238E27FC236}">
-                <a16:creationId xmlns:a16="http://schemas.microsoft.com/office/drawing/2014/main" id="{C0E9C70C-BCF3-4616-90E8-EDFF942B1710}"/>
+                <a16:creationId xmlns:a16="http://schemas.microsoft.com/office/drawing/2014/main" id="{36272DF9-0156-4A46-8B51-EA01EF3B50DC}"/>
               </a:ext>
             </a:extLst>
           </p:cNvPr>
@@ -3470,7 +3470,7 @@
           <p:cNvPr id="51" name="chart-smoke-frame">
             <a:extLst xmlns:a="http://schemas.openxmlformats.org/drawingml/2006/main">
               <a:ext uri="{FF2B5EF4-FFF2-40B4-BE49-F238E27FC236}">
-                <a16:creationId xmlns:a16="http://schemas.microsoft.com/office/drawing/2014/main" id="{AC8FBB02-1DD1-4A67-A10D-99424466E1A0}"/>
+                <a16:creationId xmlns:a16="http://schemas.microsoft.com/office/drawing/2014/main" id="{19DA7A4D-DDCB-4AFA-8758-06B6CA154CA8}"/>
               </a:ext>
             </a:extLst>
           </p:cNvPr>
@@ -3507,7 +3507,7 @@
           <p:nvPr/>
         </p:nvPicPr>
         <p:blipFill>
-          <a:blip xmlns:r="http://schemas.openxmlformats.org/officeDocument/2006/relationships" xmlns:a="http://schemas.openxmlformats.org/drawingml/2006/main" r:embed="R2f573fb99fd94b20"/>
+          <a:blip xmlns:r="http://schemas.openxmlformats.org/officeDocument/2006/relationships" xmlns:a="http://schemas.openxmlformats.org/drawingml/2006/main" r:embed="R7b25a0da41204c87"/>
           <a:stretch xmlns:a="http://schemas.openxmlformats.org/drawingml/2006/main"/>
         </p:blipFill>
         <p:spPr>
@@ -3525,7 +3525,7 @@
           <p:cNvPr id="53" name="6-IC beta e leitura dos gráficos-box">
             <a:extLst xmlns:a="http://schemas.openxmlformats.org/drawingml/2006/main">
               <a:ext uri="{FF2B5EF4-FFF2-40B4-BE49-F238E27FC236}">
-                <a16:creationId xmlns:a16="http://schemas.microsoft.com/office/drawing/2014/main" id="{2579545C-F0ED-41D6-8D9F-31BDA194B2EE}"/>
+                <a16:creationId xmlns:a16="http://schemas.microsoft.com/office/drawing/2014/main" id="{18A6F073-3A0C-4CB9-B9C2-36D986863E4A}"/>
               </a:ext>
             </a:extLst>
           </p:cNvPr>
@@ -3558,7 +3558,7 @@
           <p:cNvPr id="54" name="6-IC beta e leitura dos gráficos-head">
             <a:extLst xmlns:a="http://schemas.openxmlformats.org/drawingml/2006/main">
               <a:ext uri="{FF2B5EF4-FFF2-40B4-BE49-F238E27FC236}">
-                <a16:creationId xmlns:a16="http://schemas.microsoft.com/office/drawing/2014/main" id="{5322A895-244F-4416-8A72-AED948E3D051}"/>
+                <a16:creationId xmlns:a16="http://schemas.microsoft.com/office/drawing/2014/main" id="{EDC81BB3-3044-4C52-9D9E-EB379B6DB2FC}"/>
               </a:ext>
             </a:extLst>
           </p:cNvPr>
@@ -3591,7 +3591,7 @@
           <p:cNvPr id="55" name="6-IC beta e leitura dos gráficos-title">
             <a:extLst xmlns:a="http://schemas.openxmlformats.org/drawingml/2006/main">
               <a:ext uri="{FF2B5EF4-FFF2-40B4-BE49-F238E27FC236}">
-                <a16:creationId xmlns:a16="http://schemas.microsoft.com/office/drawing/2014/main" id="{2108266F-B4C0-402C-9988-C5C371D5C89E}"/>
+                <a16:creationId xmlns:a16="http://schemas.microsoft.com/office/drawing/2014/main" id="{CF7705EB-2FC6-425F-B71A-31F3253995A7}"/>
               </a:ext>
             </a:extLst>
           </p:cNvPr>
@@ -3641,7 +3641,7 @@
           <p:cNvPr id="56" name="6-IC beta e leitura dos gráficos-body">
             <a:extLst xmlns:a="http://schemas.openxmlformats.org/drawingml/2006/main">
               <a:ext uri="{FF2B5EF4-FFF2-40B4-BE49-F238E27FC236}">
-                <a16:creationId xmlns:a16="http://schemas.microsoft.com/office/drawing/2014/main" id="{912D0E11-1652-4743-BA66-F502B3E50A8B}"/>
+                <a16:creationId xmlns:a16="http://schemas.microsoft.com/office/drawing/2014/main" id="{BF1BFCE6-CB5F-418A-9EC4-3106C47A1555}"/>
               </a:ext>
             </a:extLst>
           </p:cNvPr>
@@ -3725,7 +3725,7 @@
           <p:cNvPr id="57" name="7-Discussão e implicações-box">
             <a:extLst xmlns:a="http://schemas.openxmlformats.org/drawingml/2006/main">
               <a:ext uri="{FF2B5EF4-FFF2-40B4-BE49-F238E27FC236}">
-                <a16:creationId xmlns:a16="http://schemas.microsoft.com/office/drawing/2014/main" id="{0AB1B157-21D8-4522-81B6-59F0AF8FD5DA}"/>
+                <a16:creationId xmlns:a16="http://schemas.microsoft.com/office/drawing/2014/main" id="{896309AC-0AFC-49EC-89C9-EC6E643170D0}"/>
               </a:ext>
             </a:extLst>
           </p:cNvPr>
@@ -3758,7 +3758,7 @@
           <p:cNvPr id="58" name="7-Discussão e implicações-head">
             <a:extLst xmlns:a="http://schemas.openxmlformats.org/drawingml/2006/main">
               <a:ext uri="{FF2B5EF4-FFF2-40B4-BE49-F238E27FC236}">
-                <a16:creationId xmlns:a16="http://schemas.microsoft.com/office/drawing/2014/main" id="{D5921DB7-1BB3-42CF-91F4-1DF9AD140320}"/>
+                <a16:creationId xmlns:a16="http://schemas.microsoft.com/office/drawing/2014/main" id="{5609ED91-CAAE-4538-B00C-E3854E8538FD}"/>
               </a:ext>
             </a:extLst>
           </p:cNvPr>
@@ -3791,7 +3791,7 @@
           <p:cNvPr id="59" name="7-Discussão e implicações-title">
             <a:extLst xmlns:a="http://schemas.openxmlformats.org/drawingml/2006/main">
               <a:ext uri="{FF2B5EF4-FFF2-40B4-BE49-F238E27FC236}">
-                <a16:creationId xmlns:a16="http://schemas.microsoft.com/office/drawing/2014/main" id="{F21B05A7-CBEE-461A-9219-E4A9298EEB51}"/>
+                <a16:creationId xmlns:a16="http://schemas.microsoft.com/office/drawing/2014/main" id="{C4F73AED-522A-427F-8999-8D7A0D4863C5}"/>
               </a:ext>
             </a:extLst>
           </p:cNvPr>
@@ -3841,7 +3841,7 @@
           <p:cNvPr id="60" name="7-Discussão e implicações-body">
             <a:extLst xmlns:a="http://schemas.openxmlformats.org/drawingml/2006/main">
               <a:ext uri="{FF2B5EF4-FFF2-40B4-BE49-F238E27FC236}">
-                <a16:creationId xmlns:a16="http://schemas.microsoft.com/office/drawing/2014/main" id="{0C1A4329-D237-4544-A771-D837945D322C}"/>
+                <a16:creationId xmlns:a16="http://schemas.microsoft.com/office/drawing/2014/main" id="{16EF75B4-E464-4AE5-B31B-799E2230FFED}"/>
               </a:ext>
             </a:extLst>
           </p:cNvPr>
@@ -3881,6 +3881,23 @@
                   <a:srgbClr val="102536"/>
                 </a:solidFill>
               </a:rPr>
+              <a:t>• A combinação diagnóstico↑, crises≈ e uso de medicamentos↓ sugere expansão do reconhecimento da asma sem melhora proporcional no controle.</a:t>
+            </a:r>
+          </a:p>
+          <a:p xmlns:a="http://schemas.openxmlformats.org/drawingml/2006/main">
+            <a:pPr algn="l">
+              <a:defRPr sz="578" b="0">
+                <a:solidFill>
+                  <a:srgbClr val="102536"/>
+                </a:solidFill>
+              </a:defRPr>
+            </a:pPr>
+            <a:r>
+              <a:rPr sz="578" b="0">
+                <a:solidFill>
+                  <a:srgbClr val="102536"/>
+                </a:solidFill>
+              </a:rPr>
               <a:t>• O aumento do diagnóstico pode refletir maior ocorrência, melhor acesso ao diagnóstico ou ambos.</a:t>
             </a:r>
           </a:p>
@@ -3898,23 +3915,6 @@
                   <a:srgbClr val="102536"/>
                 </a:solidFill>
               </a:rPr>
-              <a:t>• A estabilidade das crises sugere que o manejo clínico não melhorou na mesma proporção.</a:t>
-            </a:r>
-          </a:p>
-          <a:p xmlns:a="http://schemas.openxmlformats.org/drawingml/2006/main">
-            <a:pPr algn="l">
-              <a:defRPr sz="578" b="0">
-                <a:solidFill>
-                  <a:srgbClr val="102536"/>
-                </a:solidFill>
-              </a:defRPr>
-            </a:pPr>
-            <a:r>
-              <a:rPr sz="578" b="0">
-                <a:solidFill>
-                  <a:srgbClr val="102536"/>
-                </a:solidFill>
-              </a:rPr>
               <a:t>• O controle da asma depende de acesso farmacológico, seguimento clínico, educação, controle de exposições e intervenções não farmacológicas.</a:t>
             </a:r>
           </a:p>
@@ -3925,7 +3925,7 @@
           <p:cNvPr id="61" name="8-ETL, OMOP e OHDSI-box">
             <a:extLst xmlns:a="http://schemas.openxmlformats.org/drawingml/2006/main">
               <a:ext uri="{FF2B5EF4-FFF2-40B4-BE49-F238E27FC236}">
-                <a16:creationId xmlns:a16="http://schemas.microsoft.com/office/drawing/2014/main" id="{B76C75BA-8031-440C-A5ED-2D686C49C956}"/>
+                <a16:creationId xmlns:a16="http://schemas.microsoft.com/office/drawing/2014/main" id="{EE993A2D-7F58-4041-B872-5FC2A11814FA}"/>
               </a:ext>
             </a:extLst>
           </p:cNvPr>
@@ -3958,7 +3958,7 @@
           <p:cNvPr id="62" name="8-ETL, OMOP e OHDSI-head">
             <a:extLst xmlns:a="http://schemas.openxmlformats.org/drawingml/2006/main">
               <a:ext uri="{FF2B5EF4-FFF2-40B4-BE49-F238E27FC236}">
-                <a16:creationId xmlns:a16="http://schemas.microsoft.com/office/drawing/2014/main" id="{4F242274-4B32-4FAC-9700-0A57778B1F2B}"/>
+                <a16:creationId xmlns:a16="http://schemas.microsoft.com/office/drawing/2014/main" id="{04E3D744-8C65-4345-8688-BE11BF44F252}"/>
               </a:ext>
             </a:extLst>
           </p:cNvPr>
@@ -3991,7 +3991,7 @@
           <p:cNvPr id="63" name="8-ETL, OMOP e OHDSI-title">
             <a:extLst xmlns:a="http://schemas.openxmlformats.org/drawingml/2006/main">
               <a:ext uri="{FF2B5EF4-FFF2-40B4-BE49-F238E27FC236}">
-                <a16:creationId xmlns:a16="http://schemas.microsoft.com/office/drawing/2014/main" id="{47F2A48E-5E0F-407B-84FB-251E1DA631EE}"/>
+                <a16:creationId xmlns:a16="http://schemas.microsoft.com/office/drawing/2014/main" id="{965AE57A-28F8-4BBC-B2D4-21D61A1F9246}"/>
               </a:ext>
             </a:extLst>
           </p:cNvPr>
@@ -4041,7 +4041,7 @@
           <p:cNvPr id="64" name="8-ETL, OMOP e OHDSI-body">
             <a:extLst xmlns:a="http://schemas.openxmlformats.org/drawingml/2006/main">
               <a:ext uri="{FF2B5EF4-FFF2-40B4-BE49-F238E27FC236}">
-                <a16:creationId xmlns:a16="http://schemas.microsoft.com/office/drawing/2014/main" id="{E7CBF768-E47D-47BB-955A-91BF55742861}"/>
+                <a16:creationId xmlns:a16="http://schemas.microsoft.com/office/drawing/2014/main" id="{E1D8EB9D-81B1-41F6-A754-58C219405B13}"/>
               </a:ext>
             </a:extLst>
           </p:cNvPr>
@@ -4125,7 +4125,7 @@
           <p:cNvPr id="65" name="9-Conclusões-box">
             <a:extLst xmlns:a="http://schemas.openxmlformats.org/drawingml/2006/main">
               <a:ext uri="{FF2B5EF4-FFF2-40B4-BE49-F238E27FC236}">
-                <a16:creationId xmlns:a16="http://schemas.microsoft.com/office/drawing/2014/main" id="{8B02537B-7BEE-4BEE-9C2E-805736CE792D}"/>
+                <a16:creationId xmlns:a16="http://schemas.microsoft.com/office/drawing/2014/main" id="{45DD230E-B581-4D17-928A-00EE3EFCD1BE}"/>
               </a:ext>
             </a:extLst>
           </p:cNvPr>
@@ -4158,7 +4158,7 @@
           <p:cNvPr id="66" name="9-Conclusões-head">
             <a:extLst xmlns:a="http://schemas.openxmlformats.org/drawingml/2006/main">
               <a:ext uri="{FF2B5EF4-FFF2-40B4-BE49-F238E27FC236}">
-                <a16:creationId xmlns:a16="http://schemas.microsoft.com/office/drawing/2014/main" id="{9A71E3DD-C8F9-4726-8AFD-C5509F56BE37}"/>
+                <a16:creationId xmlns:a16="http://schemas.microsoft.com/office/drawing/2014/main" id="{D947E601-701E-4D2F-839F-8E4F2090ED13}"/>
               </a:ext>
             </a:extLst>
           </p:cNvPr>
@@ -4191,7 +4191,7 @@
           <p:cNvPr id="67" name="9-Conclusões-title">
             <a:extLst xmlns:a="http://schemas.openxmlformats.org/drawingml/2006/main">
               <a:ext uri="{FF2B5EF4-FFF2-40B4-BE49-F238E27FC236}">
-                <a16:creationId xmlns:a16="http://schemas.microsoft.com/office/drawing/2014/main" id="{DA5979E4-E141-45C5-BEAE-CA5F4CC7FD56}"/>
+                <a16:creationId xmlns:a16="http://schemas.microsoft.com/office/drawing/2014/main" id="{A3E759BD-D2F2-41FD-AA35-77308AC5127E}"/>
               </a:ext>
             </a:extLst>
           </p:cNvPr>
@@ -4241,7 +4241,7 @@
           <p:cNvPr id="68" name="9-Conclusões-body">
             <a:extLst xmlns:a="http://schemas.openxmlformats.org/drawingml/2006/main">
               <a:ext uri="{FF2B5EF4-FFF2-40B4-BE49-F238E27FC236}">
-                <a16:creationId xmlns:a16="http://schemas.microsoft.com/office/drawing/2014/main" id="{C303E395-7D49-47DC-A303-7D6F8D835EDB}"/>
+                <a16:creationId xmlns:a16="http://schemas.microsoft.com/office/drawing/2014/main" id="{C011EFC5-97CE-4246-A9A5-D5BBA44BED7D}"/>
               </a:ext>
             </a:extLst>
           </p:cNvPr>
@@ -4325,7 +4325,7 @@
           <p:cNvPr id="69" name="references-box">
             <a:extLst xmlns:a="http://schemas.openxmlformats.org/drawingml/2006/main">
               <a:ext uri="{FF2B5EF4-FFF2-40B4-BE49-F238E27FC236}">
-                <a16:creationId xmlns:a16="http://schemas.microsoft.com/office/drawing/2014/main" id="{2F66C23F-6D00-48B7-865F-AE29E0FF84C6}"/>
+                <a16:creationId xmlns:a16="http://schemas.microsoft.com/office/drawing/2014/main" id="{07952E55-254D-4467-967B-EBF81019CE53}"/>
               </a:ext>
             </a:extLst>
           </p:cNvPr>
@@ -4358,7 +4358,7 @@
           <p:cNvPr id="70" name="references-title">
             <a:extLst xmlns:a="http://schemas.openxmlformats.org/drawingml/2006/main">
               <a:ext uri="{FF2B5EF4-FFF2-40B4-BE49-F238E27FC236}">
-                <a16:creationId xmlns:a16="http://schemas.microsoft.com/office/drawing/2014/main" id="{FAAD0526-B5DF-47EF-A0A3-600FE2361A11}"/>
+                <a16:creationId xmlns:a16="http://schemas.microsoft.com/office/drawing/2014/main" id="{6C5B2E12-EA82-40E2-A904-4DC30019F4B5}"/>
               </a:ext>
             </a:extLst>
           </p:cNvPr>
@@ -4408,7 +4408,7 @@
           <p:cNvPr id="71" name="references-body">
             <a:extLst xmlns:a="http://schemas.openxmlformats.org/drawingml/2006/main">
               <a:ext uri="{FF2B5EF4-FFF2-40B4-BE49-F238E27FC236}">
-                <a16:creationId xmlns:a16="http://schemas.microsoft.com/office/drawing/2014/main" id="{423E4F03-22A9-4156-A057-D16B0CB1B367}"/>
+                <a16:creationId xmlns:a16="http://schemas.microsoft.com/office/drawing/2014/main" id="{B952D2F7-F345-4975-B623-13A257996039}"/>
               </a:ext>
             </a:extLst>
           </p:cNvPr>
@@ -4662,7 +4662,7 @@
           <p:cNvPr id="72" name="qr-box">
             <a:extLst xmlns:a="http://schemas.openxmlformats.org/drawingml/2006/main">
               <a:ext uri="{FF2B5EF4-FFF2-40B4-BE49-F238E27FC236}">
-                <a16:creationId xmlns:a16="http://schemas.microsoft.com/office/drawing/2014/main" id="{DA1DA441-E317-4981-AC67-770D93BF3981}"/>
+                <a16:creationId xmlns:a16="http://schemas.microsoft.com/office/drawing/2014/main" id="{7DAB4EDE-9DD0-414B-816E-0EB39AA504C0}"/>
               </a:ext>
             </a:extLst>
           </p:cNvPr>
@@ -4699,7 +4699,7 @@
           <p:nvPr/>
         </p:nvPicPr>
         <p:blipFill>
-          <a:blip xmlns:r="http://schemas.openxmlformats.org/officeDocument/2006/relationships" xmlns:a="http://schemas.openxmlformats.org/drawingml/2006/main" r:embed="R4d6b61fe35544142"/>
+          <a:blip xmlns:r="http://schemas.openxmlformats.org/officeDocument/2006/relationships" xmlns:a="http://schemas.openxmlformats.org/drawingml/2006/main" r:embed="Raa0ffdd4df364cd1"/>
           <a:stretch xmlns:a="http://schemas.openxmlformats.org/drawingml/2006/main"/>
         </p:blipFill>
         <p:spPr>
@@ -4717,7 +4717,7 @@
           <p:cNvPr id="74" name="qr-label">
             <a:extLst xmlns:a="http://schemas.openxmlformats.org/drawingml/2006/main">
               <a:ext uri="{FF2B5EF4-FFF2-40B4-BE49-F238E27FC236}">
-                <a16:creationId xmlns:a16="http://schemas.microsoft.com/office/drawing/2014/main" id="{72641250-725E-4502-AC69-5B5FE7C7B8CD}"/>
+                <a16:creationId xmlns:a16="http://schemas.microsoft.com/office/drawing/2014/main" id="{A06FF839-4A0B-4482-A6BA-91EB4EF31F23}"/>
               </a:ext>
             </a:extLst>
           </p:cNvPr>
@@ -4782,7 +4782,7 @@
     </p:spTree>
     <p:extLst>
       <p:ext uri="{BB962C8B-B14F-4D97-AF65-F5344CB8AC3E}">
-        <p14:creationId xmlns:p14="http://schemas.microsoft.com/office/powerpoint/2010/main" val="1743834920"/>
+        <p14:creationId xmlns:p14="http://schemas.microsoft.com/office/powerpoint/2010/main" val="422322086"/>
       </p:ext>
     </p:extLst>
   </p:cSld>

--- a/outputs/posters/poster_pns_asma_classico_pt.pptx
+++ b/outputs/posters/poster_pns_asma_classico_pt.pptx
@@ -2,13 +2,13 @@
 <file path=ppt/presentation.xml><?xml version="1.0" encoding="utf-8"?>
 <p:presentation xmlns:p="http://schemas.openxmlformats.org/presentationml/2006/main">
   <p:sldMasterIdLst>
-    <p:sldMasterId xmlns:r="http://schemas.openxmlformats.org/officeDocument/2006/relationships" id="2147483648" r:id="R37e5801caac14353"/>
+    <p:sldMasterId xmlns:r="http://schemas.openxmlformats.org/officeDocument/2006/relationships" id="2147483648" r:id="Rc35274431c494d40"/>
   </p:sldMasterIdLst>
   <p:notesMasterIdLst>
-    <p:notesMasterId xmlns:r="http://schemas.openxmlformats.org/officeDocument/2006/relationships" r:id="R6ed3a468bc234179"/>
+    <p:notesMasterId xmlns:r="http://schemas.openxmlformats.org/officeDocument/2006/relationships" r:id="R26c75ca183c34e9d"/>
   </p:notesMasterIdLst>
   <p:sldIdLst>
-    <p:sldId xmlns:r="http://schemas.openxmlformats.org/officeDocument/2006/relationships" id="256" r:id="R28c1de09df1b454a"/>
+    <p:sldId xmlns:r="http://schemas.openxmlformats.org/officeDocument/2006/relationships" id="256" r:id="Rbe39bd60b6184c7c"/>
   </p:sldIdLst>
   <p:sldSz cx="9525000" cy="13468350"/>
   <p:notesSz cx="6858000" cy="9144000"/>
@@ -601,7 +601,7 @@
   </p:cSld>
   <p:clrMap bg1="lt1" tx1="dk1" bg2="lt2" tx2="dk2" accent1="accent1" accent2="accent2" accent3="accent3" accent4="accent4" accent5="accent5" accent6="accent6" hlink="hlink" folHlink="folHlink"/>
   <p:sldLayoutIdLst>
-    <p:sldLayoutId xmlns:r="http://schemas.openxmlformats.org/officeDocument/2006/relationships" id="2147483649" r:id="R1f8fc130e83a4983"/>
+    <p:sldLayoutId xmlns:r="http://schemas.openxmlformats.org/officeDocument/2006/relationships" id="2147483649" r:id="R4dcbbb19f3f44c31"/>
   </p:sldLayoutIdLst>
   <p:txStyles>
     <p:titleStyle>
@@ -1156,7 +1156,7 @@
           <p:nvPr/>
         </p:nvPicPr>
         <p:blipFill>
-          <a:blip xmlns:r="http://schemas.openxmlformats.org/officeDocument/2006/relationships" xmlns:a="http://schemas.openxmlformats.org/drawingml/2006/main" r:embed="R116fa79ff7c84d7c"/>
+          <a:blip xmlns:r="http://schemas.openxmlformats.org/officeDocument/2006/relationships" xmlns:a="http://schemas.openxmlformats.org/drawingml/2006/main" r:embed="R1429425cb2d1409d"/>
           <a:srcRect xmlns:a="http://schemas.openxmlformats.org/drawingml/2006/main" l="0" t="38622" r="0" b="38622"/>
           <a:stretch xmlns:a="http://schemas.openxmlformats.org/drawingml/2006/main">
             <a:fillRect l="0" t="0" r="0" b="0"/>
@@ -1181,7 +1181,7 @@
           <p:nvPr/>
         </p:nvPicPr>
         <p:blipFill>
-          <a:blip xmlns:r="http://schemas.openxmlformats.org/officeDocument/2006/relationships" xmlns:a="http://schemas.openxmlformats.org/drawingml/2006/main" r:embed="R4d3c42a07f1e4f33"/>
+          <a:blip xmlns:r="http://schemas.openxmlformats.org/officeDocument/2006/relationships" xmlns:a="http://schemas.openxmlformats.org/drawingml/2006/main" r:embed="Rcc4cd98013f04969"/>
           <a:stretch xmlns:a="http://schemas.openxmlformats.org/drawingml/2006/main"/>
         </p:blipFill>
         <p:spPr>
@@ -1203,7 +1203,7 @@
           <p:nvPr/>
         </p:nvPicPr>
         <p:blipFill>
-          <a:blip xmlns:r="http://schemas.openxmlformats.org/officeDocument/2006/relationships" xmlns:a="http://schemas.openxmlformats.org/drawingml/2006/main" r:embed="Reca477d14fad4d9e"/>
+          <a:blip xmlns:r="http://schemas.openxmlformats.org/officeDocument/2006/relationships" xmlns:a="http://schemas.openxmlformats.org/drawingml/2006/main" r:embed="Rc5ee106bdc8840a7"/>
           <a:stretch xmlns:a="http://schemas.openxmlformats.org/drawingml/2006/main"/>
         </p:blipFill>
         <p:spPr>
@@ -1221,7 +1221,7 @@
           <p:cNvPr id="4" name="classic-title">
             <a:extLst xmlns:a="http://schemas.openxmlformats.org/drawingml/2006/main">
               <a:ext uri="{FF2B5EF4-FFF2-40B4-BE49-F238E27FC236}">
-                <a16:creationId xmlns:a16="http://schemas.microsoft.com/office/drawing/2014/main" id="{34059B0E-1D44-4C05-9DB2-660637571447}"/>
+                <a16:creationId xmlns:a16="http://schemas.microsoft.com/office/drawing/2014/main" id="{71E95C51-1CB0-47AF-9B54-551E6AB11555}"/>
               </a:ext>
             </a:extLst>
           </p:cNvPr>
@@ -1271,7 +1271,7 @@
           <p:cNvPr id="5" name="classic-authors">
             <a:extLst xmlns:a="http://schemas.openxmlformats.org/drawingml/2006/main">
               <a:ext uri="{FF2B5EF4-FFF2-40B4-BE49-F238E27FC236}">
-                <a16:creationId xmlns:a16="http://schemas.microsoft.com/office/drawing/2014/main" id="{C479838E-48ED-4298-96E3-50CB8F81DCA7}"/>
+                <a16:creationId xmlns:a16="http://schemas.microsoft.com/office/drawing/2014/main" id="{6D68FC52-34CA-45B9-8257-378AF730193F}"/>
               </a:ext>
             </a:extLst>
           </p:cNvPr>
@@ -1321,7 +1321,7 @@
           <p:cNvPr id="6" name="1-Introdução-box">
             <a:extLst xmlns:a="http://schemas.openxmlformats.org/drawingml/2006/main">
               <a:ext uri="{FF2B5EF4-FFF2-40B4-BE49-F238E27FC236}">
-                <a16:creationId xmlns:a16="http://schemas.microsoft.com/office/drawing/2014/main" id="{68FF23A6-60E1-4E08-A053-C7311630117F}"/>
+                <a16:creationId xmlns:a16="http://schemas.microsoft.com/office/drawing/2014/main" id="{AB2C4DBD-71F6-45D9-A1ED-EB1BE3E9BE01}"/>
               </a:ext>
             </a:extLst>
           </p:cNvPr>
@@ -1354,7 +1354,7 @@
           <p:cNvPr id="7" name="1-Introdução-head">
             <a:extLst xmlns:a="http://schemas.openxmlformats.org/drawingml/2006/main">
               <a:ext uri="{FF2B5EF4-FFF2-40B4-BE49-F238E27FC236}">
-                <a16:creationId xmlns:a16="http://schemas.microsoft.com/office/drawing/2014/main" id="{814A221B-5282-41F0-894B-CF495B21C979}"/>
+                <a16:creationId xmlns:a16="http://schemas.microsoft.com/office/drawing/2014/main" id="{3E27B655-2DC9-42BD-AD61-DA92239BAC3A}"/>
               </a:ext>
             </a:extLst>
           </p:cNvPr>
@@ -1387,7 +1387,7 @@
           <p:cNvPr id="8" name="1-Introdução-title">
             <a:extLst xmlns:a="http://schemas.openxmlformats.org/drawingml/2006/main">
               <a:ext uri="{FF2B5EF4-FFF2-40B4-BE49-F238E27FC236}">
-                <a16:creationId xmlns:a16="http://schemas.microsoft.com/office/drawing/2014/main" id="{81971622-6A6E-4373-84A3-C60159EBAE26}"/>
+                <a16:creationId xmlns:a16="http://schemas.microsoft.com/office/drawing/2014/main" id="{E624A60D-8158-4323-9485-9025557AC176}"/>
               </a:ext>
             </a:extLst>
           </p:cNvPr>
@@ -1437,7 +1437,7 @@
           <p:cNvPr id="9" name="1-Introdução-body">
             <a:extLst xmlns:a="http://schemas.openxmlformats.org/drawingml/2006/main">
               <a:ext uri="{FF2B5EF4-FFF2-40B4-BE49-F238E27FC236}">
-                <a16:creationId xmlns:a16="http://schemas.microsoft.com/office/drawing/2014/main" id="{CDFEEE0F-92BB-4491-9BAE-34065CF98E35}"/>
+                <a16:creationId xmlns:a16="http://schemas.microsoft.com/office/drawing/2014/main" id="{7EEAE0D2-17C7-427C-9EBE-529F70D7E945}"/>
               </a:ext>
             </a:extLst>
           </p:cNvPr>
@@ -1494,7 +1494,7 @@
                   <a:srgbClr val="102536"/>
                 </a:solidFill>
               </a:rPr>
-              <a:t>• Na asma, prevalência, crises, uso de medicamentos e tabagismo ajudam a distinguir carga da doença, acesso diagnóstico, manejo clínico e fatores de risco.</a:t>
+              <a:t>• Na asma, prevalência, uso de medicamentos, absenteísmo e dias perdidos ajudam a distinguir carga clínica, manejo e efeitos sobre trabalho.</a:t>
             </a:r>
           </a:p>
           <a:p xmlns:a="http://schemas.openxmlformats.org/drawingml/2006/main">
@@ -1521,7 +1521,7 @@
           <p:cNvPr id="10" name="2-Objetivos-box">
             <a:extLst xmlns:a="http://schemas.openxmlformats.org/drawingml/2006/main">
               <a:ext uri="{FF2B5EF4-FFF2-40B4-BE49-F238E27FC236}">
-                <a16:creationId xmlns:a16="http://schemas.microsoft.com/office/drawing/2014/main" id="{0F72E840-E4E5-4792-873D-23568BDFA01E}"/>
+                <a16:creationId xmlns:a16="http://schemas.microsoft.com/office/drawing/2014/main" id="{984379F4-B829-4837-A5FD-8154337DFDF0}"/>
               </a:ext>
             </a:extLst>
           </p:cNvPr>
@@ -1554,7 +1554,7 @@
           <p:cNvPr id="11" name="2-Objetivos-head">
             <a:extLst xmlns:a="http://schemas.openxmlformats.org/drawingml/2006/main">
               <a:ext uri="{FF2B5EF4-FFF2-40B4-BE49-F238E27FC236}">
-                <a16:creationId xmlns:a16="http://schemas.microsoft.com/office/drawing/2014/main" id="{55F9FEB7-F11F-48D8-91CB-AEAC788F9267}"/>
+                <a16:creationId xmlns:a16="http://schemas.microsoft.com/office/drawing/2014/main" id="{7305C25D-31CC-49FC-BE26-6CAC513807AA}"/>
               </a:ext>
             </a:extLst>
           </p:cNvPr>
@@ -1587,7 +1587,7 @@
           <p:cNvPr id="12" name="2-Objetivos-title">
             <a:extLst xmlns:a="http://schemas.openxmlformats.org/drawingml/2006/main">
               <a:ext uri="{FF2B5EF4-FFF2-40B4-BE49-F238E27FC236}">
-                <a16:creationId xmlns:a16="http://schemas.microsoft.com/office/drawing/2014/main" id="{59EEF8F1-32D4-467C-A241-7C88ACE9A1F1}"/>
+                <a16:creationId xmlns:a16="http://schemas.microsoft.com/office/drawing/2014/main" id="{78DBD1C5-621C-4D27-BE1A-0DE4AB984E21}"/>
               </a:ext>
             </a:extLst>
           </p:cNvPr>
@@ -1637,7 +1637,7 @@
           <p:cNvPr id="13" name="2-Objetivos-body">
             <a:extLst xmlns:a="http://schemas.openxmlformats.org/drawingml/2006/main">
               <a:ext uri="{FF2B5EF4-FFF2-40B4-BE49-F238E27FC236}">
-                <a16:creationId xmlns:a16="http://schemas.microsoft.com/office/drawing/2014/main" id="{74D7BCF3-B06D-4B79-92E5-1A1C8694B079}"/>
+                <a16:creationId xmlns:a16="http://schemas.microsoft.com/office/drawing/2014/main" id="{BB6FC541-32AD-4972-98C4-ED3B2475EC67}"/>
               </a:ext>
             </a:extLst>
           </p:cNvPr>
@@ -1721,7 +1721,7 @@
           <p:cNvPr id="14" name="3-Dados e indicadores-box">
             <a:extLst xmlns:a="http://schemas.openxmlformats.org/drawingml/2006/main">
               <a:ext uri="{FF2B5EF4-FFF2-40B4-BE49-F238E27FC236}">
-                <a16:creationId xmlns:a16="http://schemas.microsoft.com/office/drawing/2014/main" id="{A018F41C-C178-4B08-98A1-86325AC42CBB}"/>
+                <a16:creationId xmlns:a16="http://schemas.microsoft.com/office/drawing/2014/main" id="{89937819-C93E-486C-B51E-5F8AC13F1E70}"/>
               </a:ext>
             </a:extLst>
           </p:cNvPr>
@@ -1754,7 +1754,7 @@
           <p:cNvPr id="15" name="3-Dados e indicadores-head">
             <a:extLst xmlns:a="http://schemas.openxmlformats.org/drawingml/2006/main">
               <a:ext uri="{FF2B5EF4-FFF2-40B4-BE49-F238E27FC236}">
-                <a16:creationId xmlns:a16="http://schemas.microsoft.com/office/drawing/2014/main" id="{FFD3FEF2-0213-4EE9-88BD-42871114588F}"/>
+                <a16:creationId xmlns:a16="http://schemas.microsoft.com/office/drawing/2014/main" id="{C8DE8867-E8F3-45C7-9B13-1BDB36218D1D}"/>
               </a:ext>
             </a:extLst>
           </p:cNvPr>
@@ -1787,7 +1787,7 @@
           <p:cNvPr id="16" name="3-Dados e indicadores-title">
             <a:extLst xmlns:a="http://schemas.openxmlformats.org/drawingml/2006/main">
               <a:ext uri="{FF2B5EF4-FFF2-40B4-BE49-F238E27FC236}">
-                <a16:creationId xmlns:a16="http://schemas.microsoft.com/office/drawing/2014/main" id="{545207E1-0541-4A64-8D8D-365A7017E010}"/>
+                <a16:creationId xmlns:a16="http://schemas.microsoft.com/office/drawing/2014/main" id="{B0A35ED4-4E34-4A3F-9B32-4B538F9F8B41}"/>
               </a:ext>
             </a:extLst>
           </p:cNvPr>
@@ -1837,7 +1837,7 @@
           <p:cNvPr id="17" name="3-Dados e indicadores-body">
             <a:extLst xmlns:a="http://schemas.openxmlformats.org/drawingml/2006/main">
               <a:ext uri="{FF2B5EF4-FFF2-40B4-BE49-F238E27FC236}">
-                <a16:creationId xmlns:a16="http://schemas.microsoft.com/office/drawing/2014/main" id="{6B4B3DC6-CB0A-4D05-88A4-ED57ED552214}"/>
+                <a16:creationId xmlns:a16="http://schemas.microsoft.com/office/drawing/2014/main" id="{0E12E79B-0DF7-4D81-B35B-AF15CAB6CB08}"/>
               </a:ext>
             </a:extLst>
           </p:cNvPr>
@@ -1921,7 +1921,7 @@
           <p:cNvPr id="18" name="4-Plano amostral-box">
             <a:extLst xmlns:a="http://schemas.openxmlformats.org/drawingml/2006/main">
               <a:ext uri="{FF2B5EF4-FFF2-40B4-BE49-F238E27FC236}">
-                <a16:creationId xmlns:a16="http://schemas.microsoft.com/office/drawing/2014/main" id="{B9A7B30D-D41E-4938-A79D-E92DFB66BC48}"/>
+                <a16:creationId xmlns:a16="http://schemas.microsoft.com/office/drawing/2014/main" id="{63FA882C-B879-41F0-B8EF-EC5F86EC3510}"/>
               </a:ext>
             </a:extLst>
           </p:cNvPr>
@@ -1954,7 +1954,7 @@
           <p:cNvPr id="19" name="4-Plano amostral-head">
             <a:extLst xmlns:a="http://schemas.openxmlformats.org/drawingml/2006/main">
               <a:ext uri="{FF2B5EF4-FFF2-40B4-BE49-F238E27FC236}">
-                <a16:creationId xmlns:a16="http://schemas.microsoft.com/office/drawing/2014/main" id="{89FA2FF0-136D-4B91-BE2C-7FB9194D5E42}"/>
+                <a16:creationId xmlns:a16="http://schemas.microsoft.com/office/drawing/2014/main" id="{A148F3DC-D063-4E2D-822B-1C31E04399E3}"/>
               </a:ext>
             </a:extLst>
           </p:cNvPr>
@@ -1987,7 +1987,7 @@
           <p:cNvPr id="20" name="4-Plano amostral-title">
             <a:extLst xmlns:a="http://schemas.openxmlformats.org/drawingml/2006/main">
               <a:ext uri="{FF2B5EF4-FFF2-40B4-BE49-F238E27FC236}">
-                <a16:creationId xmlns:a16="http://schemas.microsoft.com/office/drawing/2014/main" id="{1D80A735-7B9E-46DD-A9AC-089E189FFBF7}"/>
+                <a16:creationId xmlns:a16="http://schemas.microsoft.com/office/drawing/2014/main" id="{53C63CE1-6CE7-4846-A80B-AEC81A5BE9AF}"/>
               </a:ext>
             </a:extLst>
           </p:cNvPr>
@@ -2037,7 +2037,7 @@
           <p:cNvPr id="21" name="4-Plano amostral-body">
             <a:extLst xmlns:a="http://schemas.openxmlformats.org/drawingml/2006/main">
               <a:ext uri="{FF2B5EF4-FFF2-40B4-BE49-F238E27FC236}">
-                <a16:creationId xmlns:a16="http://schemas.microsoft.com/office/drawing/2014/main" id="{E8471387-014F-4284-B200-317B47B09DBE}"/>
+                <a16:creationId xmlns:a16="http://schemas.microsoft.com/office/drawing/2014/main" id="{F2D1E69E-AB1C-4832-814F-FDCF2F47BBD7}"/>
               </a:ext>
             </a:extLst>
           </p:cNvPr>
@@ -2138,7 +2138,7 @@
           <p:cNvPr id="22" name="classic-formula-box">
             <a:extLst xmlns:a="http://schemas.openxmlformats.org/drawingml/2006/main">
               <a:ext uri="{FF2B5EF4-FFF2-40B4-BE49-F238E27FC236}">
-                <a16:creationId xmlns:a16="http://schemas.microsoft.com/office/drawing/2014/main" id="{73C71D1E-E51C-4F73-A76F-D3E45B88690E}"/>
+                <a16:creationId xmlns:a16="http://schemas.microsoft.com/office/drawing/2014/main" id="{57D05FFB-7DD6-421E-AFC0-09D9719F9898}"/>
               </a:ext>
             </a:extLst>
           </p:cNvPr>
@@ -2171,7 +2171,7 @@
           <p:cNvPr id="23" name="classic-formula-title">
             <a:extLst xmlns:a="http://schemas.openxmlformats.org/drawingml/2006/main">
               <a:ext uri="{FF2B5EF4-FFF2-40B4-BE49-F238E27FC236}">
-                <a16:creationId xmlns:a16="http://schemas.microsoft.com/office/drawing/2014/main" id="{10807F33-C053-4BBB-A1BB-B2DE8FFE3046}"/>
+                <a16:creationId xmlns:a16="http://schemas.microsoft.com/office/drawing/2014/main" id="{DE134DC2-49C3-485E-BCEA-55C2DABF1936}"/>
               </a:ext>
             </a:extLst>
           </p:cNvPr>
@@ -2221,7 +2221,7 @@
           <p:cNvPr id="24" name="classic-formula">
             <a:extLst xmlns:a="http://schemas.openxmlformats.org/drawingml/2006/main">
               <a:ext uri="{FF2B5EF4-FFF2-40B4-BE49-F238E27FC236}">
-                <a16:creationId xmlns:a16="http://schemas.microsoft.com/office/drawing/2014/main" id="{335F50E0-FA21-4D7B-8411-5C6CD04407B7}"/>
+                <a16:creationId xmlns:a16="http://schemas.microsoft.com/office/drawing/2014/main" id="{C1614553-3B11-4814-B400-18043FB0DEBD}"/>
               </a:ext>
             </a:extLst>
           </p:cNvPr>
@@ -2339,7 +2339,7 @@
           <p:cNvPr id="25" name="prev-metric">
             <a:extLst xmlns:a="http://schemas.openxmlformats.org/drawingml/2006/main">
               <a:ext uri="{FF2B5EF4-FFF2-40B4-BE49-F238E27FC236}">
-                <a16:creationId xmlns:a16="http://schemas.microsoft.com/office/drawing/2014/main" id="{265610DF-C256-45CA-BEE9-48E291640173}"/>
+                <a16:creationId xmlns:a16="http://schemas.microsoft.com/office/drawing/2014/main" id="{255A12DF-D79F-4387-8813-036C2B7A6416}"/>
               </a:ext>
             </a:extLst>
           </p:cNvPr>
@@ -2372,7 +2372,7 @@
           <p:cNvPr id="26" name="prev-metric-title">
             <a:extLst xmlns:a="http://schemas.openxmlformats.org/drawingml/2006/main">
               <a:ext uri="{FF2B5EF4-FFF2-40B4-BE49-F238E27FC236}">
-                <a16:creationId xmlns:a16="http://schemas.microsoft.com/office/drawing/2014/main" id="{7C50B553-4E82-45ED-A8AD-8CDA844B587A}"/>
+                <a16:creationId xmlns:a16="http://schemas.microsoft.com/office/drawing/2014/main" id="{4EA40E9A-925E-426B-940F-5F4E007A8002}"/>
               </a:ext>
             </a:extLst>
           </p:cNvPr>
@@ -2422,7 +2422,7 @@
           <p:cNvPr id="27" name="prev-metric-value">
             <a:extLst xmlns:a="http://schemas.openxmlformats.org/drawingml/2006/main">
               <a:ext uri="{FF2B5EF4-FFF2-40B4-BE49-F238E27FC236}">
-                <a16:creationId xmlns:a16="http://schemas.microsoft.com/office/drawing/2014/main" id="{86AFDD2E-5819-40F6-A1A8-0E1AA464DD63}"/>
+                <a16:creationId xmlns:a16="http://schemas.microsoft.com/office/drawing/2014/main" id="{8ABB9010-5E87-4FDD-9865-CC11225063C8}"/>
               </a:ext>
             </a:extLst>
           </p:cNvPr>
@@ -2472,7 +2472,7 @@
           <p:cNvPr id="28" name="prev-metric-note">
             <a:extLst xmlns:a="http://schemas.openxmlformats.org/drawingml/2006/main">
               <a:ext uri="{FF2B5EF4-FFF2-40B4-BE49-F238E27FC236}">
-                <a16:creationId xmlns:a16="http://schemas.microsoft.com/office/drawing/2014/main" id="{3B72C22F-2352-4AB2-83AD-F9D188BF8C31}"/>
+                <a16:creationId xmlns:a16="http://schemas.microsoft.com/office/drawing/2014/main" id="{E3A82923-55FD-45A9-914D-1C44D341EC21}"/>
               </a:ext>
             </a:extLst>
           </p:cNvPr>
@@ -2522,7 +2522,7 @@
           <p:cNvPr id="29" name="crisis-metric">
             <a:extLst xmlns:a="http://schemas.openxmlformats.org/drawingml/2006/main">
               <a:ext uri="{FF2B5EF4-FFF2-40B4-BE49-F238E27FC236}">
-                <a16:creationId xmlns:a16="http://schemas.microsoft.com/office/drawing/2014/main" id="{3B298C39-E2C1-490A-B3F3-AA936F0A38BF}"/>
+                <a16:creationId xmlns:a16="http://schemas.microsoft.com/office/drawing/2014/main" id="{9AC74D9B-B790-4765-BD2E-ECD21DB8519C}"/>
               </a:ext>
             </a:extLst>
           </p:cNvPr>
@@ -2555,7 +2555,7 @@
           <p:cNvPr id="30" name="crisis-metric-title">
             <a:extLst xmlns:a="http://schemas.openxmlformats.org/drawingml/2006/main">
               <a:ext uri="{FF2B5EF4-FFF2-40B4-BE49-F238E27FC236}">
-                <a16:creationId xmlns:a16="http://schemas.microsoft.com/office/drawing/2014/main" id="{3C7B6991-CAED-4608-B631-ED6CB608BAD1}"/>
+                <a16:creationId xmlns:a16="http://schemas.microsoft.com/office/drawing/2014/main" id="{83348651-6D61-4937-925A-D8AF6A1ABD51}"/>
               </a:ext>
             </a:extLst>
           </p:cNvPr>
@@ -2595,7 +2595,7 @@
                   <a:srgbClr val="153F59"/>
                 </a:solidFill>
               </a:rPr>
-              <a:t>Brasil: crises</a:t>
+              <a:t>Brasil: trabalho</a:t>
             </a:r>
           </a:p>
         </p:txBody>
@@ -2605,7 +2605,7 @@
           <p:cNvPr id="31" name="crisis-metric-value">
             <a:extLst xmlns:a="http://schemas.openxmlformats.org/drawingml/2006/main">
               <a:ext uri="{FF2B5EF4-FFF2-40B4-BE49-F238E27FC236}">
-                <a16:creationId xmlns:a16="http://schemas.microsoft.com/office/drawing/2014/main" id="{90A023EB-6E3C-49B4-92D5-81FA92A300C0}"/>
+                <a16:creationId xmlns:a16="http://schemas.microsoft.com/office/drawing/2014/main" id="{E9A59CC7-68C8-4963-80BA-D770372A71F3}"/>
               </a:ext>
             </a:extLst>
           </p:cNvPr>
@@ -2645,7 +2645,7 @@
                   <a:srgbClr val="153F59"/>
                 </a:solidFill>
               </a:rPr>
-              <a:t>38,3%→37,7%</a:t>
+              <a:t>15,2%; 4,8 dias</a:t>
             </a:r>
           </a:p>
         </p:txBody>
@@ -2655,7 +2655,7 @@
           <p:cNvPr id="32" name="crisis-metric-note">
             <a:extLst xmlns:a="http://schemas.openxmlformats.org/drawingml/2006/main">
               <a:ext uri="{FF2B5EF4-FFF2-40B4-BE49-F238E27FC236}">
-                <a16:creationId xmlns:a16="http://schemas.microsoft.com/office/drawing/2014/main" id="{F58ABBE4-D649-45FE-B013-6866BED249F2}"/>
+                <a16:creationId xmlns:a16="http://schemas.microsoft.com/office/drawing/2014/main" id="{F896AE32-B596-481B-9D97-7D7A28001E3B}"/>
               </a:ext>
             </a:extLst>
           </p:cNvPr>
@@ -2695,7 +2695,7 @@
                   <a:srgbClr val="102536"/>
                 </a:solidFill>
               </a:rPr>
-              <a:t>Crises em 12 meses ficaram estáveis; controle não melhorou na mesma proporção.</a:t>
+              <a:t>Motivos respiratórios: absenteísmo e perda média de dias úteis.</a:t>
             </a:r>
           </a:p>
         </p:txBody>
@@ -2705,7 +2705,7 @@
           <p:cNvPr id="33" name="chart-prev-caption">
             <a:extLst xmlns:a="http://schemas.openxmlformats.org/drawingml/2006/main">
               <a:ext uri="{FF2B5EF4-FFF2-40B4-BE49-F238E27FC236}">
-                <a16:creationId xmlns:a16="http://schemas.microsoft.com/office/drawing/2014/main" id="{36F5C73B-A8A7-4D24-82FA-F2F115A2B637}"/>
+                <a16:creationId xmlns:a16="http://schemas.microsoft.com/office/drawing/2014/main" id="{154A5B43-2E9D-4FF0-9DF1-C9C7DE5A85BC}"/>
               </a:ext>
             </a:extLst>
           </p:cNvPr>
@@ -2755,7 +2755,7 @@
           <p:cNvPr id="34" name="chart-prev-frame">
             <a:extLst xmlns:a="http://schemas.openxmlformats.org/drawingml/2006/main">
               <a:ext uri="{FF2B5EF4-FFF2-40B4-BE49-F238E27FC236}">
-                <a16:creationId xmlns:a16="http://schemas.microsoft.com/office/drawing/2014/main" id="{1679B1DF-3CBE-4386-A6AB-0DF77DA3D4E3}"/>
+                <a16:creationId xmlns:a16="http://schemas.microsoft.com/office/drawing/2014/main" id="{12906E0D-247E-49BF-89C3-81C1D3178E41}"/>
               </a:ext>
             </a:extLst>
           </p:cNvPr>
@@ -2792,7 +2792,7 @@
           <p:nvPr/>
         </p:nvPicPr>
         <p:blipFill>
-          <a:blip xmlns:r="http://schemas.openxmlformats.org/officeDocument/2006/relationships" xmlns:a="http://schemas.openxmlformats.org/drawingml/2006/main" r:embed="Rc351e320ed104b9f"/>
+          <a:blip xmlns:r="http://schemas.openxmlformats.org/officeDocument/2006/relationships" xmlns:a="http://schemas.openxmlformats.org/drawingml/2006/main" r:embed="Ra921f0394562494d"/>
           <a:stretch xmlns:a="http://schemas.openxmlformats.org/drawingml/2006/main"/>
         </p:blipFill>
         <p:spPr>
@@ -2810,7 +2810,7 @@
           <p:cNvPr id="36" name="chart-crisis-caption">
             <a:extLst xmlns:a="http://schemas.openxmlformats.org/drawingml/2006/main">
               <a:ext uri="{FF2B5EF4-FFF2-40B4-BE49-F238E27FC236}">
-                <a16:creationId xmlns:a16="http://schemas.microsoft.com/office/drawing/2014/main" id="{B425D553-108C-4D9F-92D8-3D94DA428826}"/>
+                <a16:creationId xmlns:a16="http://schemas.microsoft.com/office/drawing/2014/main" id="{06DE07B8-2C3F-4F74-96A0-0B7E6845A949}"/>
               </a:ext>
             </a:extLst>
           </p:cNvPr>
@@ -2850,7 +2850,7 @@
                   <a:srgbClr val="153F59"/>
                 </a:solidFill>
               </a:rPr>
-              <a:t>Figura 2: Prevalência (%) de crise de asma nos últimos 12 meses por UF e Brasil, PNS 2013 e 2019.</a:t>
+              <a:t>Figura 2: Absenteísmo por motivo de saúde no Brasil, com destaque para causas respiratórias, PNS 2019.</a:t>
             </a:r>
           </a:p>
         </p:txBody>
@@ -2860,7 +2860,7 @@
           <p:cNvPr id="37" name="chart-crisis-frame">
             <a:extLst xmlns:a="http://schemas.openxmlformats.org/drawingml/2006/main">
               <a:ext uri="{FF2B5EF4-FFF2-40B4-BE49-F238E27FC236}">
-                <a16:creationId xmlns:a16="http://schemas.microsoft.com/office/drawing/2014/main" id="{D7A8E6BB-C2C9-4D84-BB04-FAB6B1F602CB}"/>
+                <a16:creationId xmlns:a16="http://schemas.microsoft.com/office/drawing/2014/main" id="{50DD855C-F825-449B-95A8-48E75BCC13AC}"/>
               </a:ext>
             </a:extLst>
           </p:cNvPr>
@@ -2897,7 +2897,7 @@
           <p:nvPr/>
         </p:nvPicPr>
         <p:blipFill>
-          <a:blip xmlns:r="http://schemas.openxmlformats.org/officeDocument/2006/relationships" xmlns:a="http://schemas.openxmlformats.org/drawingml/2006/main" r:embed="R6eb66648237c43de"/>
+          <a:blip xmlns:r="http://schemas.openxmlformats.org/officeDocument/2006/relationships" xmlns:a="http://schemas.openxmlformats.org/drawingml/2006/main" r:embed="Rb9ee1f8a78ad4467"/>
           <a:stretch xmlns:a="http://schemas.openxmlformats.org/drawingml/2006/main"/>
         </p:blipFill>
         <p:spPr>
@@ -2912,10 +2912,10 @@
       </p:pic>
       <p:sp>
         <p:nvSpPr>
-          <p:cNvPr id="39" name="5-Resultados e interpretação-box">
-            <a:extLst xmlns:a="http://schemas.openxmlformats.org/drawingml/2006/main">
-              <a:ext uri="{FF2B5EF4-FFF2-40B4-BE49-F238E27FC236}">
-                <a16:creationId xmlns:a16="http://schemas.microsoft.com/office/drawing/2014/main" id="{5CE7E6A1-689C-4CBC-AB3E-102560D21BCF}"/>
+          <p:cNvPr id="39" name="5-Discussão-box">
+            <a:extLst xmlns:a="http://schemas.openxmlformats.org/drawingml/2006/main">
+              <a:ext uri="{FF2B5EF4-FFF2-40B4-BE49-F238E27FC236}">
+                <a16:creationId xmlns:a16="http://schemas.microsoft.com/office/drawing/2014/main" id="{C3BEC3C5-4D8E-4F22-8F22-23AAE5825CB1}"/>
               </a:ext>
             </a:extLst>
           </p:cNvPr>
@@ -2927,7 +2927,7 @@
         <p:spPr>
           <a:xfrm xmlns:a="http://schemas.openxmlformats.org/drawingml/2006/main">
             <a:off x="3327400" y="9372600"/>
-            <a:ext cx="2870200" cy="1962150"/>
+            <a:ext cx="2870200" cy="1066800"/>
           </a:xfrm>
           <a:prstGeom xmlns:a="http://schemas.openxmlformats.org/drawingml/2006/main" prst="rect">
             <a:avLst/>
@@ -2945,10 +2945,10 @@
       </p:sp>
       <p:sp>
         <p:nvSpPr>
-          <p:cNvPr id="40" name="5-Resultados e interpretação-head">
-            <a:extLst xmlns:a="http://schemas.openxmlformats.org/drawingml/2006/main">
-              <a:ext uri="{FF2B5EF4-FFF2-40B4-BE49-F238E27FC236}">
-                <a16:creationId xmlns:a16="http://schemas.microsoft.com/office/drawing/2014/main" id="{46D6E1AF-B05F-4039-8213-D519E9D06A1C}"/>
+          <p:cNvPr id="40" name="5-Discussão-head">
+            <a:extLst xmlns:a="http://schemas.openxmlformats.org/drawingml/2006/main">
+              <a:ext uri="{FF2B5EF4-FFF2-40B4-BE49-F238E27FC236}">
+                <a16:creationId xmlns:a16="http://schemas.microsoft.com/office/drawing/2014/main" id="{051903AE-0955-448C-AC6B-E4B32661A599}"/>
               </a:ext>
             </a:extLst>
           </p:cNvPr>
@@ -2978,10 +2978,10 @@
       </p:sp>
       <p:sp>
         <p:nvSpPr>
-          <p:cNvPr id="41" name="5-Resultados e interpretação-title">
-            <a:extLst xmlns:a="http://schemas.openxmlformats.org/drawingml/2006/main">
-              <a:ext uri="{FF2B5EF4-FFF2-40B4-BE49-F238E27FC236}">
-                <a16:creationId xmlns:a16="http://schemas.microsoft.com/office/drawing/2014/main" id="{09CEAE7C-5961-4654-8D09-71CE4BC60E33}"/>
+          <p:cNvPr id="41" name="5-Discussão-title">
+            <a:extLst xmlns:a="http://schemas.openxmlformats.org/drawingml/2006/main">
+              <a:ext uri="{FF2B5EF4-FFF2-40B4-BE49-F238E27FC236}">
+                <a16:creationId xmlns:a16="http://schemas.microsoft.com/office/drawing/2014/main" id="{6CF9E2FB-C577-4574-94FF-43A651055E92}"/>
               </a:ext>
             </a:extLst>
           </p:cNvPr>
@@ -3021,17 +3021,17 @@
                   <a:srgbClr val="FFFFFF"/>
                 </a:solidFill>
               </a:rPr>
-              <a:t>5. Resultados e interpretação</a:t>
+              <a:t>5. Discussão</a:t>
             </a:r>
           </a:p>
         </p:txBody>
       </p:sp>
       <p:sp>
         <p:nvSpPr>
-          <p:cNvPr id="42" name="5-Resultados e interpretação-body">
-            <a:extLst xmlns:a="http://schemas.openxmlformats.org/drawingml/2006/main">
-              <a:ext uri="{FF2B5EF4-FFF2-40B4-BE49-F238E27FC236}">
-                <a16:creationId xmlns:a16="http://schemas.microsoft.com/office/drawing/2014/main" id="{00FCF87B-EDE6-4505-8BEF-06A74CBC59F3}"/>
+          <p:cNvPr id="42" name="5-Discussão-body">
+            <a:extLst xmlns:a="http://schemas.openxmlformats.org/drawingml/2006/main">
+              <a:ext uri="{FF2B5EF4-FFF2-40B4-BE49-F238E27FC236}">
+                <a16:creationId xmlns:a16="http://schemas.microsoft.com/office/drawing/2014/main" id="{4A217904-FC2C-4B02-A9D7-5439EAA0A660}"/>
               </a:ext>
             </a:extLst>
           </p:cNvPr>
@@ -3043,7 +3043,7 @@
         <p:spPr>
           <a:xfrm xmlns:a="http://schemas.openxmlformats.org/drawingml/2006/main">
             <a:off x="3422650" y="9715500"/>
-            <a:ext cx="2679700" cy="1562100"/>
+            <a:ext cx="2679700" cy="666750"/>
           </a:xfrm>
           <a:prstGeom xmlns:a="http://schemas.openxmlformats.org/drawingml/2006/main" prst="rect">
             <a:avLst/>
@@ -3059,70 +3059,53 @@
           <a:lstStyle xmlns:a="http://schemas.openxmlformats.org/drawingml/2006/main"/>
           <a:p xmlns:a="http://schemas.openxmlformats.org/drawingml/2006/main">
             <a:pPr algn="l">
-              <a:defRPr sz="555" b="0">
-                <a:solidFill>
-                  <a:srgbClr val="102536"/>
-                </a:solidFill>
-              </a:defRPr>
-            </a:pPr>
-            <a:r>
-              <a:rPr sz="555" b="0">
-                <a:solidFill>
-                  <a:srgbClr val="102536"/>
-                </a:solidFill>
-              </a:rPr>
-              <a:t>• Brasil: diagnóstico médico de asma aumentou de 4,41% em 2013 para 5,40% em 2019, com IC95% sem sobreposição.</a:t>
-            </a:r>
-          </a:p>
-          <a:p xmlns:a="http://schemas.openxmlformats.org/drawingml/2006/main">
-            <a:pPr algn="l">
-              <a:defRPr sz="555" b="0">
-                <a:solidFill>
-                  <a:srgbClr val="102536"/>
-                </a:solidFill>
-              </a:defRPr>
-            </a:pPr>
-            <a:r>
-              <a:rPr sz="555" b="0">
-                <a:solidFill>
-                  <a:srgbClr val="102536"/>
-                </a:solidFill>
-              </a:rPr>
-              <a:t>• Brasil: crises nos últimos 12 meses ficaram estáveis, de 38,3% para 37,7%.</a:t>
-            </a:r>
-          </a:p>
-          <a:p xmlns:a="http://schemas.openxmlformats.org/drawingml/2006/main">
-            <a:pPr algn="l">
-              <a:defRPr sz="555" b="0">
-                <a:solidFill>
-                  <a:srgbClr val="102536"/>
-                </a:solidFill>
-              </a:defRPr>
-            </a:pPr>
-            <a:r>
-              <a:rPr sz="555" b="0">
-                <a:solidFill>
-                  <a:srgbClr val="102536"/>
-                </a:solidFill>
-              </a:rPr>
-              <a:t>• Brasil: uso de medicamento oral/bombinha entre pessoas com asma passou de 81,5% para 64,4%; a leitura deve considerar IC95%, perfil dos diagnosticados e taxa populacional.</a:t>
-            </a:r>
-          </a:p>
-          <a:p xmlns:a="http://schemas.openxmlformats.org/drawingml/2006/main">
-            <a:pPr algn="l">
-              <a:defRPr sz="555" b="0">
-                <a:solidFill>
-                  <a:srgbClr val="102536"/>
-                </a:solidFill>
-              </a:defRPr>
-            </a:pPr>
-            <a:r>
-              <a:rPr sz="555" b="0">
-                <a:solidFill>
-                  <a:srgbClr val="102536"/>
-                </a:solidFill>
-              </a:rPr>
-              <a:t>• Tabagismo caiu em várias UFs; a taxa nacional citada foi de 14.650 para 12.151 por 100 mil.</a:t>
+              <a:defRPr sz="472" b="0">
+                <a:solidFill>
+                  <a:srgbClr val="102536"/>
+                </a:solidFill>
+              </a:defRPr>
+            </a:pPr>
+            <a:r>
+              <a:rPr sz="472" b="0">
+                <a:solidFill>
+                  <a:srgbClr val="102536"/>
+                </a:solidFill>
+              </a:rPr>
+              <a:t>• Diagnóstico de asma aumentou no Brasil; motivos respiratórios somam 15,2% do absenteísmo por saúde.</a:t>
+            </a:r>
+          </a:p>
+          <a:p xmlns:a="http://schemas.openxmlformats.org/drawingml/2006/main">
+            <a:pPr algn="l">
+              <a:defRPr sz="472" b="0">
+                <a:solidFill>
+                  <a:srgbClr val="102536"/>
+                </a:solidFill>
+              </a:defRPr>
+            </a:pPr>
+            <a:r>
+              <a:rPr sz="472" b="0">
+                <a:solidFill>
+                  <a:srgbClr val="102536"/>
+                </a:solidFill>
+              </a:rPr>
+              <a:t>• A perda média respiratória foi 4,8 dias, sinalizando custo potencial para produtividade e renda.</a:t>
+            </a:r>
+          </a:p>
+          <a:p xmlns:a="http://schemas.openxmlformats.org/drawingml/2006/main">
+            <a:pPr algn="l">
+              <a:defRPr sz="472" b="0">
+                <a:solidFill>
+                  <a:srgbClr val="102536"/>
+                </a:solidFill>
+              </a:defRPr>
+            </a:pPr>
+            <a:r>
+              <a:rPr sz="472" b="0">
+                <a:solidFill>
+                  <a:srgbClr val="102536"/>
+                </a:solidFill>
+              </a:rPr>
+              <a:t>• Melhor controle pode reduzir faltas, dias perdidos e demanda por cuidado agudo.</a:t>
             </a:r>
           </a:p>
         </p:txBody>
@@ -3132,7 +3115,7 @@
           <p:cNvPr id="43" name="meds-metric">
             <a:extLst xmlns:a="http://schemas.openxmlformats.org/drawingml/2006/main">
               <a:ext uri="{FF2B5EF4-FFF2-40B4-BE49-F238E27FC236}">
-                <a16:creationId xmlns:a16="http://schemas.microsoft.com/office/drawing/2014/main" id="{D1A97E95-4EF9-43FE-B084-15B5616C4729}"/>
+                <a16:creationId xmlns:a16="http://schemas.microsoft.com/office/drawing/2014/main" id="{24C12171-7D5E-4F29-BAA4-1989626D23E5}"/>
               </a:ext>
             </a:extLst>
           </p:cNvPr>
@@ -3165,7 +3148,7 @@
           <p:cNvPr id="44" name="meds-metric-title">
             <a:extLst xmlns:a="http://schemas.openxmlformats.org/drawingml/2006/main">
               <a:ext uri="{FF2B5EF4-FFF2-40B4-BE49-F238E27FC236}">
-                <a16:creationId xmlns:a16="http://schemas.microsoft.com/office/drawing/2014/main" id="{3801DEC5-D033-45AB-ACD3-CB55B67FCC9B}"/>
+                <a16:creationId xmlns:a16="http://schemas.microsoft.com/office/drawing/2014/main" id="{B69764B6-C1B9-4D3E-9AE9-E6440687EE49}"/>
               </a:ext>
             </a:extLst>
           </p:cNvPr>
@@ -3215,7 +3198,7 @@
           <p:cNvPr id="45" name="meds-metric-value">
             <a:extLst xmlns:a="http://schemas.openxmlformats.org/drawingml/2006/main">
               <a:ext uri="{FF2B5EF4-FFF2-40B4-BE49-F238E27FC236}">
-                <a16:creationId xmlns:a16="http://schemas.microsoft.com/office/drawing/2014/main" id="{83E182D6-A78B-410C-A9E1-FA62E9CB53E6}"/>
+                <a16:creationId xmlns:a16="http://schemas.microsoft.com/office/drawing/2014/main" id="{C3A3CA06-D144-48C5-8ED8-A8F1581F8B59}"/>
               </a:ext>
             </a:extLst>
           </p:cNvPr>
@@ -3265,7 +3248,7 @@
           <p:cNvPr id="46" name="meds-metric-note">
             <a:extLst xmlns:a="http://schemas.openxmlformats.org/drawingml/2006/main">
               <a:ext uri="{FF2B5EF4-FFF2-40B4-BE49-F238E27FC236}">
-                <a16:creationId xmlns:a16="http://schemas.microsoft.com/office/drawing/2014/main" id="{8EF8D409-777D-4590-AAFF-52EDEA11900F}"/>
+                <a16:creationId xmlns:a16="http://schemas.microsoft.com/office/drawing/2014/main" id="{56183BB9-F937-4B0C-ABD5-52FAF6C10C67}"/>
               </a:ext>
             </a:extLst>
           </p:cNvPr>
@@ -3315,7 +3298,7 @@
           <p:cNvPr id="47" name="chart-meds-caption">
             <a:extLst xmlns:a="http://schemas.openxmlformats.org/drawingml/2006/main">
               <a:ext uri="{FF2B5EF4-FFF2-40B4-BE49-F238E27FC236}">
-                <a16:creationId xmlns:a16="http://schemas.microsoft.com/office/drawing/2014/main" id="{787B92F2-3198-4F58-BEA9-066F51A5131E}"/>
+                <a16:creationId xmlns:a16="http://schemas.microsoft.com/office/drawing/2014/main" id="{B8470D87-A1D0-4545-83E4-17E7568DC92A}"/>
               </a:ext>
             </a:extLst>
           </p:cNvPr>
@@ -3365,7 +3348,7 @@
           <p:cNvPr id="48" name="chart-meds-frame">
             <a:extLst xmlns:a="http://schemas.openxmlformats.org/drawingml/2006/main">
               <a:ext uri="{FF2B5EF4-FFF2-40B4-BE49-F238E27FC236}">
-                <a16:creationId xmlns:a16="http://schemas.microsoft.com/office/drawing/2014/main" id="{C8F3F114-DB69-488A-B671-C7369B035D72}"/>
+                <a16:creationId xmlns:a16="http://schemas.microsoft.com/office/drawing/2014/main" id="{776DA4F3-0F6F-4482-BD16-6E3AC6456AAD}"/>
               </a:ext>
             </a:extLst>
           </p:cNvPr>
@@ -3402,7 +3385,7 @@
           <p:nvPr/>
         </p:nvPicPr>
         <p:blipFill>
-          <a:blip xmlns:r="http://schemas.openxmlformats.org/officeDocument/2006/relationships" xmlns:a="http://schemas.openxmlformats.org/drawingml/2006/main" r:embed="R47ecfd9f85894d2a"/>
+          <a:blip xmlns:r="http://schemas.openxmlformats.org/officeDocument/2006/relationships" xmlns:a="http://schemas.openxmlformats.org/drawingml/2006/main" r:embed="R366cd52e6f0447dc"/>
           <a:stretch xmlns:a="http://schemas.openxmlformats.org/drawingml/2006/main"/>
         </p:blipFill>
         <p:spPr>
@@ -3420,7 +3403,7 @@
           <p:cNvPr id="50" name="chart-smoke-caption">
             <a:extLst xmlns:a="http://schemas.openxmlformats.org/drawingml/2006/main">
               <a:ext uri="{FF2B5EF4-FFF2-40B4-BE49-F238E27FC236}">
-                <a16:creationId xmlns:a16="http://schemas.microsoft.com/office/drawing/2014/main" id="{36272DF9-0156-4A46-8B51-EA01EF3B50DC}"/>
+                <a16:creationId xmlns:a16="http://schemas.microsoft.com/office/drawing/2014/main" id="{CA25F033-7968-4767-8959-6DAD89917E02}"/>
               </a:ext>
             </a:extLst>
           </p:cNvPr>
@@ -3460,7 +3443,7 @@
                   <a:srgbClr val="153F59"/>
                 </a:solidFill>
               </a:rPr>
-              <a:t>Figura 4: Taxa de fumantes ativos por 100 mil habitantes por UF, PNS 2013 e 2019.</a:t>
+              <a:t>Figura 4: Média de dias perdidos por motivo de saúde no Brasil, com destaque para causas respiratórias, PNS 2019.</a:t>
             </a:r>
           </a:p>
         </p:txBody>
@@ -3470,7 +3453,7 @@
           <p:cNvPr id="51" name="chart-smoke-frame">
             <a:extLst xmlns:a="http://schemas.openxmlformats.org/drawingml/2006/main">
               <a:ext uri="{FF2B5EF4-FFF2-40B4-BE49-F238E27FC236}">
-                <a16:creationId xmlns:a16="http://schemas.microsoft.com/office/drawing/2014/main" id="{19DA7A4D-DDCB-4AFA-8758-06B6CA154CA8}"/>
+                <a16:creationId xmlns:a16="http://schemas.microsoft.com/office/drawing/2014/main" id="{F9F2BA56-05AA-457F-88D8-3608889EADC4}"/>
               </a:ext>
             </a:extLst>
           </p:cNvPr>
@@ -3507,7 +3490,7 @@
           <p:nvPr/>
         </p:nvPicPr>
         <p:blipFill>
-          <a:blip xmlns:r="http://schemas.openxmlformats.org/officeDocument/2006/relationships" xmlns:a="http://schemas.openxmlformats.org/drawingml/2006/main" r:embed="R7b25a0da41204c87"/>
+          <a:blip xmlns:r="http://schemas.openxmlformats.org/officeDocument/2006/relationships" xmlns:a="http://schemas.openxmlformats.org/drawingml/2006/main" r:embed="R3d0a40feb29b41c2"/>
           <a:stretch xmlns:a="http://schemas.openxmlformats.org/drawingml/2006/main"/>
         </p:blipFill>
         <p:spPr>
@@ -3525,7 +3508,7 @@
           <p:cNvPr id="53" name="6-IC beta e leitura dos gráficos-box">
             <a:extLst xmlns:a="http://schemas.openxmlformats.org/drawingml/2006/main">
               <a:ext uri="{FF2B5EF4-FFF2-40B4-BE49-F238E27FC236}">
-                <a16:creationId xmlns:a16="http://schemas.microsoft.com/office/drawing/2014/main" id="{18A6F073-3A0C-4CB9-B9C2-36D986863E4A}"/>
+                <a16:creationId xmlns:a16="http://schemas.microsoft.com/office/drawing/2014/main" id="{F71F85BE-6170-4850-89EE-55A6E7FFB509}"/>
               </a:ext>
             </a:extLst>
           </p:cNvPr>
@@ -3558,7 +3541,7 @@
           <p:cNvPr id="54" name="6-IC beta e leitura dos gráficos-head">
             <a:extLst xmlns:a="http://schemas.openxmlformats.org/drawingml/2006/main">
               <a:ext uri="{FF2B5EF4-FFF2-40B4-BE49-F238E27FC236}">
-                <a16:creationId xmlns:a16="http://schemas.microsoft.com/office/drawing/2014/main" id="{EDC81BB3-3044-4C52-9D9E-EB379B6DB2FC}"/>
+                <a16:creationId xmlns:a16="http://schemas.microsoft.com/office/drawing/2014/main" id="{7407054B-2A06-488E-A9D4-C763E816C854}"/>
               </a:ext>
             </a:extLst>
           </p:cNvPr>
@@ -3591,7 +3574,7 @@
           <p:cNvPr id="55" name="6-IC beta e leitura dos gráficos-title">
             <a:extLst xmlns:a="http://schemas.openxmlformats.org/drawingml/2006/main">
               <a:ext uri="{FF2B5EF4-FFF2-40B4-BE49-F238E27FC236}">
-                <a16:creationId xmlns:a16="http://schemas.microsoft.com/office/drawing/2014/main" id="{CF7705EB-2FC6-425F-B71A-31F3253995A7}"/>
+                <a16:creationId xmlns:a16="http://schemas.microsoft.com/office/drawing/2014/main" id="{6F9B3CB1-8D40-4B23-91B9-92AAC75C9297}"/>
               </a:ext>
             </a:extLst>
           </p:cNvPr>
@@ -3641,7 +3624,7 @@
           <p:cNvPr id="56" name="6-IC beta e leitura dos gráficos-body">
             <a:extLst xmlns:a="http://schemas.openxmlformats.org/drawingml/2006/main">
               <a:ext uri="{FF2B5EF4-FFF2-40B4-BE49-F238E27FC236}">
-                <a16:creationId xmlns:a16="http://schemas.microsoft.com/office/drawing/2014/main" id="{BF1BFCE6-CB5F-418A-9EC4-3106C47A1555}"/>
+                <a16:creationId xmlns:a16="http://schemas.microsoft.com/office/drawing/2014/main" id="{52A87A28-79CD-4D23-9F2E-28D8477826A9}"/>
               </a:ext>
             </a:extLst>
           </p:cNvPr>
@@ -3722,10 +3705,10 @@
       </p:sp>
       <p:sp>
         <p:nvSpPr>
-          <p:cNvPr id="57" name="7-Discussão e implicações-box">
-            <a:extLst xmlns:a="http://schemas.openxmlformats.org/drawingml/2006/main">
-              <a:ext uri="{FF2B5EF4-FFF2-40B4-BE49-F238E27FC236}">
-                <a16:creationId xmlns:a16="http://schemas.microsoft.com/office/drawing/2014/main" id="{896309AC-0AFC-49EC-89C9-EC6E643170D0}"/>
+          <p:cNvPr id="57" name="7-Impacto econômico-box">
+            <a:extLst xmlns:a="http://schemas.openxmlformats.org/drawingml/2006/main">
+              <a:ext uri="{FF2B5EF4-FFF2-40B4-BE49-F238E27FC236}">
+                <a16:creationId xmlns:a16="http://schemas.microsoft.com/office/drawing/2014/main" id="{46BFBD7A-D5C7-4BC6-9DF7-157923B1F69D}"/>
               </a:ext>
             </a:extLst>
           </p:cNvPr>
@@ -3755,10 +3738,10 @@
       </p:sp>
       <p:sp>
         <p:nvSpPr>
-          <p:cNvPr id="58" name="7-Discussão e implicações-head">
-            <a:extLst xmlns:a="http://schemas.openxmlformats.org/drawingml/2006/main">
-              <a:ext uri="{FF2B5EF4-FFF2-40B4-BE49-F238E27FC236}">
-                <a16:creationId xmlns:a16="http://schemas.microsoft.com/office/drawing/2014/main" id="{5609ED91-CAAE-4538-B00C-E3854E8538FD}"/>
+          <p:cNvPr id="58" name="7-Impacto econômico-head">
+            <a:extLst xmlns:a="http://schemas.openxmlformats.org/drawingml/2006/main">
+              <a:ext uri="{FF2B5EF4-FFF2-40B4-BE49-F238E27FC236}">
+                <a16:creationId xmlns:a16="http://schemas.microsoft.com/office/drawing/2014/main" id="{1B85F1C8-8E60-401C-9429-32A1D2E8A39D}"/>
               </a:ext>
             </a:extLst>
           </p:cNvPr>
@@ -3788,10 +3771,10 @@
       </p:sp>
       <p:sp>
         <p:nvSpPr>
-          <p:cNvPr id="59" name="7-Discussão e implicações-title">
-            <a:extLst xmlns:a="http://schemas.openxmlformats.org/drawingml/2006/main">
-              <a:ext uri="{FF2B5EF4-FFF2-40B4-BE49-F238E27FC236}">
-                <a16:creationId xmlns:a16="http://schemas.microsoft.com/office/drawing/2014/main" id="{C4F73AED-522A-427F-8999-8D7A0D4863C5}"/>
+          <p:cNvPr id="59" name="7-Impacto econômico-title">
+            <a:extLst xmlns:a="http://schemas.openxmlformats.org/drawingml/2006/main">
+              <a:ext uri="{FF2B5EF4-FFF2-40B4-BE49-F238E27FC236}">
+                <a16:creationId xmlns:a16="http://schemas.microsoft.com/office/drawing/2014/main" id="{74BACE42-DC1D-4149-8F4A-1C8583059103}"/>
               </a:ext>
             </a:extLst>
           </p:cNvPr>
@@ -3831,17 +3814,17 @@
                   <a:srgbClr val="FFFFFF"/>
                 </a:solidFill>
               </a:rPr>
-              <a:t>7. Discussão e implicações</a:t>
+              <a:t>7. Impacto econômico</a:t>
             </a:r>
           </a:p>
         </p:txBody>
       </p:sp>
       <p:sp>
         <p:nvSpPr>
-          <p:cNvPr id="60" name="7-Discussão e implicações-body">
-            <a:extLst xmlns:a="http://schemas.openxmlformats.org/drawingml/2006/main">
-              <a:ext uri="{FF2B5EF4-FFF2-40B4-BE49-F238E27FC236}">
-                <a16:creationId xmlns:a16="http://schemas.microsoft.com/office/drawing/2014/main" id="{16EF75B4-E464-4AE5-B31B-799E2230FFED}"/>
+          <p:cNvPr id="60" name="7-Impacto econômico-body">
+            <a:extLst xmlns:a="http://schemas.openxmlformats.org/drawingml/2006/main">
+              <a:ext uri="{FF2B5EF4-FFF2-40B4-BE49-F238E27FC236}">
+                <a16:creationId xmlns:a16="http://schemas.microsoft.com/office/drawing/2014/main" id="{5008D7FB-55D8-4AD9-8A68-89A076F63622}"/>
               </a:ext>
             </a:extLst>
           </p:cNvPr>
@@ -3869,53 +3852,36 @@
           <a:lstStyle xmlns:a="http://schemas.openxmlformats.org/drawingml/2006/main"/>
           <a:p xmlns:a="http://schemas.openxmlformats.org/drawingml/2006/main">
             <a:pPr algn="l">
-              <a:defRPr sz="578" b="0">
-                <a:solidFill>
-                  <a:srgbClr val="102536"/>
-                </a:solidFill>
-              </a:defRPr>
-            </a:pPr>
-            <a:r>
-              <a:rPr sz="578" b="0">
-                <a:solidFill>
-                  <a:srgbClr val="102536"/>
-                </a:solidFill>
-              </a:rPr>
-              <a:t>• A combinação diagnóstico↑, crises≈ e uso de medicamentos↓ sugere expansão do reconhecimento da asma sem melhora proporcional no controle.</a:t>
-            </a:r>
-          </a:p>
-          <a:p xmlns:a="http://schemas.openxmlformats.org/drawingml/2006/main">
-            <a:pPr algn="l">
-              <a:defRPr sz="578" b="0">
-                <a:solidFill>
-                  <a:srgbClr val="102536"/>
-                </a:solidFill>
-              </a:defRPr>
-            </a:pPr>
-            <a:r>
-              <a:rPr sz="578" b="0">
-                <a:solidFill>
-                  <a:srgbClr val="102536"/>
-                </a:solidFill>
-              </a:rPr>
-              <a:t>• O aumento do diagnóstico pode refletir maior ocorrência, melhor acesso ao diagnóstico ou ambos.</a:t>
-            </a:r>
-          </a:p>
-          <a:p xmlns:a="http://schemas.openxmlformats.org/drawingml/2006/main">
-            <a:pPr algn="l">
-              <a:defRPr sz="578" b="0">
-                <a:solidFill>
-                  <a:srgbClr val="102536"/>
-                </a:solidFill>
-              </a:defRPr>
-            </a:pPr>
-            <a:r>
-              <a:rPr sz="578" b="0">
-                <a:solidFill>
-                  <a:srgbClr val="102536"/>
-                </a:solidFill>
-              </a:rPr>
-              <a:t>• O controle da asma depende de acesso farmacológico, seguimento clínico, educação, controle de exposições e intervenções não farmacológicas.</a:t>
+              <a:defRPr sz="544" b="0">
+                <a:solidFill>
+                  <a:srgbClr val="102536"/>
+                </a:solidFill>
+              </a:defRPr>
+            </a:pPr>
+            <a:r>
+              <a:rPr sz="544" b="0">
+                <a:solidFill>
+                  <a:srgbClr val="102536"/>
+                </a:solidFill>
+              </a:rPr>
+              <a:t>• A asma mal controlada pode reduzir produtividade por faltas, limitação funcional e demanda por cuidado agudo.</a:t>
+            </a:r>
+          </a:p>
+          <a:p xmlns:a="http://schemas.openxmlformats.org/drawingml/2006/main">
+            <a:pPr algn="l">
+              <a:defRPr sz="544" b="0">
+                <a:solidFill>
+                  <a:srgbClr val="102536"/>
+                </a:solidFill>
+              </a:defRPr>
+            </a:pPr>
+            <a:r>
+              <a:rPr sz="544" b="0">
+                <a:solidFill>
+                  <a:srgbClr val="102536"/>
+                </a:solidFill>
+              </a:rPr>
+              <a:t>• A leitura econômica reforça políticas de diagnóstico, acesso a medicamentos e acompanhamento clínico.</a:t>
             </a:r>
           </a:p>
         </p:txBody>
@@ -3925,7 +3891,7 @@
           <p:cNvPr id="61" name="8-ETL, OMOP e OHDSI-box">
             <a:extLst xmlns:a="http://schemas.openxmlformats.org/drawingml/2006/main">
               <a:ext uri="{FF2B5EF4-FFF2-40B4-BE49-F238E27FC236}">
-                <a16:creationId xmlns:a16="http://schemas.microsoft.com/office/drawing/2014/main" id="{EE993A2D-7F58-4041-B872-5FC2A11814FA}"/>
+                <a16:creationId xmlns:a16="http://schemas.microsoft.com/office/drawing/2014/main" id="{62E1B3D4-7ECC-46D3-8DC4-DE4B66F6A3A1}"/>
               </a:ext>
             </a:extLst>
           </p:cNvPr>
@@ -3958,7 +3924,7 @@
           <p:cNvPr id="62" name="8-ETL, OMOP e OHDSI-head">
             <a:extLst xmlns:a="http://schemas.openxmlformats.org/drawingml/2006/main">
               <a:ext uri="{FF2B5EF4-FFF2-40B4-BE49-F238E27FC236}">
-                <a16:creationId xmlns:a16="http://schemas.microsoft.com/office/drawing/2014/main" id="{04E3D744-8C65-4345-8688-BE11BF44F252}"/>
+                <a16:creationId xmlns:a16="http://schemas.microsoft.com/office/drawing/2014/main" id="{ACB1ACDB-7C7C-4F39-81D1-E5A16C6F8826}"/>
               </a:ext>
             </a:extLst>
           </p:cNvPr>
@@ -3991,7 +3957,7 @@
           <p:cNvPr id="63" name="8-ETL, OMOP e OHDSI-title">
             <a:extLst xmlns:a="http://schemas.openxmlformats.org/drawingml/2006/main">
               <a:ext uri="{FF2B5EF4-FFF2-40B4-BE49-F238E27FC236}">
-                <a16:creationId xmlns:a16="http://schemas.microsoft.com/office/drawing/2014/main" id="{965AE57A-28F8-4BBC-B2D4-21D61A1F9246}"/>
+                <a16:creationId xmlns:a16="http://schemas.microsoft.com/office/drawing/2014/main" id="{A47C1FA1-41AD-47A6-90BA-A1F47869E205}"/>
               </a:ext>
             </a:extLst>
           </p:cNvPr>
@@ -4041,7 +4007,7 @@
           <p:cNvPr id="64" name="8-ETL, OMOP e OHDSI-body">
             <a:extLst xmlns:a="http://schemas.openxmlformats.org/drawingml/2006/main">
               <a:ext uri="{FF2B5EF4-FFF2-40B4-BE49-F238E27FC236}">
-                <a16:creationId xmlns:a16="http://schemas.microsoft.com/office/drawing/2014/main" id="{E1D8EB9D-81B1-41F6-A754-58C219405B13}"/>
+                <a16:creationId xmlns:a16="http://schemas.microsoft.com/office/drawing/2014/main" id="{5AB6D578-9ADA-42B3-B88E-D6596A7CF48E}"/>
               </a:ext>
             </a:extLst>
           </p:cNvPr>
@@ -4125,7 +4091,7 @@
           <p:cNvPr id="65" name="9-Conclusões-box">
             <a:extLst xmlns:a="http://schemas.openxmlformats.org/drawingml/2006/main">
               <a:ext uri="{FF2B5EF4-FFF2-40B4-BE49-F238E27FC236}">
-                <a16:creationId xmlns:a16="http://schemas.microsoft.com/office/drawing/2014/main" id="{45DD230E-B581-4D17-928A-00EE3EFCD1BE}"/>
+                <a16:creationId xmlns:a16="http://schemas.microsoft.com/office/drawing/2014/main" id="{D98745C6-26F7-4923-BA1C-0962196A1E20}"/>
               </a:ext>
             </a:extLst>
           </p:cNvPr>
@@ -4158,7 +4124,7 @@
           <p:cNvPr id="66" name="9-Conclusões-head">
             <a:extLst xmlns:a="http://schemas.openxmlformats.org/drawingml/2006/main">
               <a:ext uri="{FF2B5EF4-FFF2-40B4-BE49-F238E27FC236}">
-                <a16:creationId xmlns:a16="http://schemas.microsoft.com/office/drawing/2014/main" id="{D947E601-701E-4D2F-839F-8E4F2090ED13}"/>
+                <a16:creationId xmlns:a16="http://schemas.microsoft.com/office/drawing/2014/main" id="{D0A74FA3-7EEE-440F-8775-EC90A12A5717}"/>
               </a:ext>
             </a:extLst>
           </p:cNvPr>
@@ -4191,7 +4157,7 @@
           <p:cNvPr id="67" name="9-Conclusões-title">
             <a:extLst xmlns:a="http://schemas.openxmlformats.org/drawingml/2006/main">
               <a:ext uri="{FF2B5EF4-FFF2-40B4-BE49-F238E27FC236}">
-                <a16:creationId xmlns:a16="http://schemas.microsoft.com/office/drawing/2014/main" id="{A3E759BD-D2F2-41FD-AA35-77308AC5127E}"/>
+                <a16:creationId xmlns:a16="http://schemas.microsoft.com/office/drawing/2014/main" id="{9FFC5BF5-059E-4DE8-AF7A-846D0713C48C}"/>
               </a:ext>
             </a:extLst>
           </p:cNvPr>
@@ -4241,7 +4207,7 @@
           <p:cNvPr id="68" name="9-Conclusões-body">
             <a:extLst xmlns:a="http://schemas.openxmlformats.org/drawingml/2006/main">
               <a:ext uri="{FF2B5EF4-FFF2-40B4-BE49-F238E27FC236}">
-                <a16:creationId xmlns:a16="http://schemas.microsoft.com/office/drawing/2014/main" id="{C011EFC5-97CE-4246-A9A5-D5BBA44BED7D}"/>
+                <a16:creationId xmlns:a16="http://schemas.microsoft.com/office/drawing/2014/main" id="{81755CEB-67EE-44B8-B567-C7371A54FBF1}"/>
               </a:ext>
             </a:extLst>
           </p:cNvPr>
@@ -4298,7 +4264,7 @@
                   <a:srgbClr val="102536"/>
                 </a:solidFill>
               </a:rPr>
-              <a:t>• O Brasil apresentou aumento de diagnóstico, mas não evidência equivalente de melhora no controle.</a:t>
+              <a:t>• A asma deve ser tratada como problema clínico e econômico, pois pode afetar produtividade, renda e força de trabalho.</a:t>
             </a:r>
           </a:p>
           <a:p xmlns:a="http://schemas.openxmlformats.org/drawingml/2006/main">
@@ -4315,7 +4281,7 @@
                   <a:srgbClr val="102536"/>
                 </a:solidFill>
               </a:rPr>
-              <a:t>• Os gráficos por UF devem ser lidos com IC95%, pois várias comparações têm intervalos sobrepostos.</a:t>
+              <a:t>• Os resultados de absenteísmo são respiratórios agregados; não devem ser lidos como estimativa isolada de asma.</a:t>
             </a:r>
           </a:p>
         </p:txBody>
@@ -4325,7 +4291,7 @@
           <p:cNvPr id="69" name="references-box">
             <a:extLst xmlns:a="http://schemas.openxmlformats.org/drawingml/2006/main">
               <a:ext uri="{FF2B5EF4-FFF2-40B4-BE49-F238E27FC236}">
-                <a16:creationId xmlns:a16="http://schemas.microsoft.com/office/drawing/2014/main" id="{07952E55-254D-4467-967B-EBF81019CE53}"/>
+                <a16:creationId xmlns:a16="http://schemas.microsoft.com/office/drawing/2014/main" id="{A360AE3D-4455-47B0-9324-B930CB505F91}"/>
               </a:ext>
             </a:extLst>
           </p:cNvPr>
@@ -4358,7 +4324,7 @@
           <p:cNvPr id="70" name="references-title">
             <a:extLst xmlns:a="http://schemas.openxmlformats.org/drawingml/2006/main">
               <a:ext uri="{FF2B5EF4-FFF2-40B4-BE49-F238E27FC236}">
-                <a16:creationId xmlns:a16="http://schemas.microsoft.com/office/drawing/2014/main" id="{6C5B2E12-EA82-40E2-A904-4DC30019F4B5}"/>
+                <a16:creationId xmlns:a16="http://schemas.microsoft.com/office/drawing/2014/main" id="{C8894CE8-DDFC-4240-8113-B47EE3DE844C}"/>
               </a:ext>
             </a:extLst>
           </p:cNvPr>
@@ -4408,7 +4374,7 @@
           <p:cNvPr id="71" name="references-body">
             <a:extLst xmlns:a="http://schemas.openxmlformats.org/drawingml/2006/main">
               <a:ext uri="{FF2B5EF4-FFF2-40B4-BE49-F238E27FC236}">
-                <a16:creationId xmlns:a16="http://schemas.microsoft.com/office/drawing/2014/main" id="{B952D2F7-F345-4975-B623-13A257996039}"/>
+                <a16:creationId xmlns:a16="http://schemas.microsoft.com/office/drawing/2014/main" id="{CACC05A6-FC0C-4B7D-883E-58707F9ACC9B}"/>
               </a:ext>
             </a:extLst>
           </p:cNvPr>
@@ -4662,7 +4628,7 @@
           <p:cNvPr id="72" name="qr-box">
             <a:extLst xmlns:a="http://schemas.openxmlformats.org/drawingml/2006/main">
               <a:ext uri="{FF2B5EF4-FFF2-40B4-BE49-F238E27FC236}">
-                <a16:creationId xmlns:a16="http://schemas.microsoft.com/office/drawing/2014/main" id="{7DAB4EDE-9DD0-414B-816E-0EB39AA504C0}"/>
+                <a16:creationId xmlns:a16="http://schemas.microsoft.com/office/drawing/2014/main" id="{7B140C84-DD46-40CF-BF09-F3B28E2D9B26}"/>
               </a:ext>
             </a:extLst>
           </p:cNvPr>
@@ -4699,7 +4665,7 @@
           <p:nvPr/>
         </p:nvPicPr>
         <p:blipFill>
-          <a:blip xmlns:r="http://schemas.openxmlformats.org/officeDocument/2006/relationships" xmlns:a="http://schemas.openxmlformats.org/drawingml/2006/main" r:embed="Raa0ffdd4df364cd1"/>
+          <a:blip xmlns:r="http://schemas.openxmlformats.org/officeDocument/2006/relationships" xmlns:a="http://schemas.openxmlformats.org/drawingml/2006/main" r:embed="Raaf4693416e241bd"/>
           <a:stretch xmlns:a="http://schemas.openxmlformats.org/drawingml/2006/main"/>
         </p:blipFill>
         <p:spPr>
@@ -4717,7 +4683,7 @@
           <p:cNvPr id="74" name="qr-label">
             <a:extLst xmlns:a="http://schemas.openxmlformats.org/drawingml/2006/main">
               <a:ext uri="{FF2B5EF4-FFF2-40B4-BE49-F238E27FC236}">
-                <a16:creationId xmlns:a16="http://schemas.microsoft.com/office/drawing/2014/main" id="{A06FF839-4A0B-4482-A6BA-91EB4EF31F23}"/>
+                <a16:creationId xmlns:a16="http://schemas.microsoft.com/office/drawing/2014/main" id="{96F46899-06C1-4543-A8D6-973D233792E7}"/>
               </a:ext>
             </a:extLst>
           </p:cNvPr>
@@ -4782,7 +4748,7 @@
     </p:spTree>
     <p:extLst>
       <p:ext uri="{BB962C8B-B14F-4D97-AF65-F5344CB8AC3E}">
-        <p14:creationId xmlns:p14="http://schemas.microsoft.com/office/powerpoint/2010/main" val="422322086"/>
+        <p14:creationId xmlns:p14="http://schemas.microsoft.com/office/powerpoint/2010/main" val="1374996243"/>
       </p:ext>
     </p:extLst>
   </p:cSld>

--- a/outputs/posters/poster_pns_asma_classico_pt.pptx
+++ b/outputs/posters/poster_pns_asma_classico_pt.pptx
@@ -2,13 +2,13 @@
 <file path=ppt/presentation.xml><?xml version="1.0" encoding="utf-8"?>
 <p:presentation xmlns:p="http://schemas.openxmlformats.org/presentationml/2006/main">
   <p:sldMasterIdLst>
-    <p:sldMasterId xmlns:r="http://schemas.openxmlformats.org/officeDocument/2006/relationships" id="2147483648" r:id="Rc35274431c494d40"/>
+    <p:sldMasterId xmlns:r="http://schemas.openxmlformats.org/officeDocument/2006/relationships" id="2147483648" r:id="Raf72ca2fbc2347ff"/>
   </p:sldMasterIdLst>
   <p:notesMasterIdLst>
-    <p:notesMasterId xmlns:r="http://schemas.openxmlformats.org/officeDocument/2006/relationships" r:id="R26c75ca183c34e9d"/>
+    <p:notesMasterId xmlns:r="http://schemas.openxmlformats.org/officeDocument/2006/relationships" r:id="R3392e50be2e84633"/>
   </p:notesMasterIdLst>
   <p:sldIdLst>
-    <p:sldId xmlns:r="http://schemas.openxmlformats.org/officeDocument/2006/relationships" id="256" r:id="Rbe39bd60b6184c7c"/>
+    <p:sldId xmlns:r="http://schemas.openxmlformats.org/officeDocument/2006/relationships" id="256" r:id="Rde6ea29e60934dfa"/>
   </p:sldIdLst>
   <p:sldSz cx="9525000" cy="13468350"/>
   <p:notesSz cx="6858000" cy="9144000"/>
@@ -601,7 +601,7 @@
   </p:cSld>
   <p:clrMap bg1="lt1" tx1="dk1" bg2="lt2" tx2="dk2" accent1="accent1" accent2="accent2" accent3="accent3" accent4="accent4" accent5="accent5" accent6="accent6" hlink="hlink" folHlink="folHlink"/>
   <p:sldLayoutIdLst>
-    <p:sldLayoutId xmlns:r="http://schemas.openxmlformats.org/officeDocument/2006/relationships" id="2147483649" r:id="R4dcbbb19f3f44c31"/>
+    <p:sldLayoutId xmlns:r="http://schemas.openxmlformats.org/officeDocument/2006/relationships" id="2147483649" r:id="R4bd543a402074763"/>
   </p:sldLayoutIdLst>
   <p:txStyles>
     <p:titleStyle>
@@ -1156,7 +1156,7 @@
           <p:nvPr/>
         </p:nvPicPr>
         <p:blipFill>
-          <a:blip xmlns:r="http://schemas.openxmlformats.org/officeDocument/2006/relationships" xmlns:a="http://schemas.openxmlformats.org/drawingml/2006/main" r:embed="R1429425cb2d1409d"/>
+          <a:blip xmlns:r="http://schemas.openxmlformats.org/officeDocument/2006/relationships" xmlns:a="http://schemas.openxmlformats.org/drawingml/2006/main" r:embed="R86c214d87641435b"/>
           <a:srcRect xmlns:a="http://schemas.openxmlformats.org/drawingml/2006/main" l="0" t="38622" r="0" b="38622"/>
           <a:stretch xmlns:a="http://schemas.openxmlformats.org/drawingml/2006/main">
             <a:fillRect l="0" t="0" r="0" b="0"/>
@@ -1181,7 +1181,7 @@
           <p:nvPr/>
         </p:nvPicPr>
         <p:blipFill>
-          <a:blip xmlns:r="http://schemas.openxmlformats.org/officeDocument/2006/relationships" xmlns:a="http://schemas.openxmlformats.org/drawingml/2006/main" r:embed="Rcc4cd98013f04969"/>
+          <a:blip xmlns:r="http://schemas.openxmlformats.org/officeDocument/2006/relationships" xmlns:a="http://schemas.openxmlformats.org/drawingml/2006/main" r:embed="R740e3c8d444d40d9"/>
           <a:stretch xmlns:a="http://schemas.openxmlformats.org/drawingml/2006/main"/>
         </p:blipFill>
         <p:spPr>
@@ -1203,7 +1203,7 @@
           <p:nvPr/>
         </p:nvPicPr>
         <p:blipFill>
-          <a:blip xmlns:r="http://schemas.openxmlformats.org/officeDocument/2006/relationships" xmlns:a="http://schemas.openxmlformats.org/drawingml/2006/main" r:embed="Rc5ee106bdc8840a7"/>
+          <a:blip xmlns:r="http://schemas.openxmlformats.org/officeDocument/2006/relationships" xmlns:a="http://schemas.openxmlformats.org/drawingml/2006/main" r:embed="R22cfbc16cdf64861"/>
           <a:stretch xmlns:a="http://schemas.openxmlformats.org/drawingml/2006/main"/>
         </p:blipFill>
         <p:spPr>
@@ -1221,7 +1221,7 @@
           <p:cNvPr id="4" name="classic-title">
             <a:extLst xmlns:a="http://schemas.openxmlformats.org/drawingml/2006/main">
               <a:ext uri="{FF2B5EF4-FFF2-40B4-BE49-F238E27FC236}">
-                <a16:creationId xmlns:a16="http://schemas.microsoft.com/office/drawing/2014/main" id="{71E95C51-1CB0-47AF-9B54-551E6AB11555}"/>
+                <a16:creationId xmlns:a16="http://schemas.microsoft.com/office/drawing/2014/main" id="{6BFBF493-02CB-43A7-81DE-FCEE9CFE2672}"/>
               </a:ext>
             </a:extLst>
           </p:cNvPr>
@@ -1271,7 +1271,7 @@
           <p:cNvPr id="5" name="classic-authors">
             <a:extLst xmlns:a="http://schemas.openxmlformats.org/drawingml/2006/main">
               <a:ext uri="{FF2B5EF4-FFF2-40B4-BE49-F238E27FC236}">
-                <a16:creationId xmlns:a16="http://schemas.microsoft.com/office/drawing/2014/main" id="{6D68FC52-34CA-45B9-8257-378AF730193F}"/>
+                <a16:creationId xmlns:a16="http://schemas.microsoft.com/office/drawing/2014/main" id="{B8E0B3DC-6084-408D-899A-08A88BE28307}"/>
               </a:ext>
             </a:extLst>
           </p:cNvPr>
@@ -1321,7 +1321,7 @@
           <p:cNvPr id="6" name="1-Introdução-box">
             <a:extLst xmlns:a="http://schemas.openxmlformats.org/drawingml/2006/main">
               <a:ext uri="{FF2B5EF4-FFF2-40B4-BE49-F238E27FC236}">
-                <a16:creationId xmlns:a16="http://schemas.microsoft.com/office/drawing/2014/main" id="{AB2C4DBD-71F6-45D9-A1ED-EB1BE3E9BE01}"/>
+                <a16:creationId xmlns:a16="http://schemas.microsoft.com/office/drawing/2014/main" id="{5A7BBF9B-18CB-426F-83E4-9CBBB51243AC}"/>
               </a:ext>
             </a:extLst>
           </p:cNvPr>
@@ -1354,7 +1354,7 @@
           <p:cNvPr id="7" name="1-Introdução-head">
             <a:extLst xmlns:a="http://schemas.openxmlformats.org/drawingml/2006/main">
               <a:ext uri="{FF2B5EF4-FFF2-40B4-BE49-F238E27FC236}">
-                <a16:creationId xmlns:a16="http://schemas.microsoft.com/office/drawing/2014/main" id="{3E27B655-2DC9-42BD-AD61-DA92239BAC3A}"/>
+                <a16:creationId xmlns:a16="http://schemas.microsoft.com/office/drawing/2014/main" id="{BC6B1F3C-4C21-40F6-9C55-046C8D4974E9}"/>
               </a:ext>
             </a:extLst>
           </p:cNvPr>
@@ -1387,7 +1387,7 @@
           <p:cNvPr id="8" name="1-Introdução-title">
             <a:extLst xmlns:a="http://schemas.openxmlformats.org/drawingml/2006/main">
               <a:ext uri="{FF2B5EF4-FFF2-40B4-BE49-F238E27FC236}">
-                <a16:creationId xmlns:a16="http://schemas.microsoft.com/office/drawing/2014/main" id="{E624A60D-8158-4323-9485-9025557AC176}"/>
+                <a16:creationId xmlns:a16="http://schemas.microsoft.com/office/drawing/2014/main" id="{4F51C6A3-076C-44D5-905C-EE805AF4F148}"/>
               </a:ext>
             </a:extLst>
           </p:cNvPr>
@@ -1437,7 +1437,7 @@
           <p:cNvPr id="9" name="1-Introdução-body">
             <a:extLst xmlns:a="http://schemas.openxmlformats.org/drawingml/2006/main">
               <a:ext uri="{FF2B5EF4-FFF2-40B4-BE49-F238E27FC236}">
-                <a16:creationId xmlns:a16="http://schemas.microsoft.com/office/drawing/2014/main" id="{7EEAE0D2-17C7-427C-9EBE-529F70D7E945}"/>
+                <a16:creationId xmlns:a16="http://schemas.microsoft.com/office/drawing/2014/main" id="{66B011B6-F27B-45FF-AAFC-E0304C92C95F}"/>
               </a:ext>
             </a:extLst>
           </p:cNvPr>
@@ -1521,7 +1521,7 @@
           <p:cNvPr id="10" name="2-Objetivos-box">
             <a:extLst xmlns:a="http://schemas.openxmlformats.org/drawingml/2006/main">
               <a:ext uri="{FF2B5EF4-FFF2-40B4-BE49-F238E27FC236}">
-                <a16:creationId xmlns:a16="http://schemas.microsoft.com/office/drawing/2014/main" id="{984379F4-B829-4837-A5FD-8154337DFDF0}"/>
+                <a16:creationId xmlns:a16="http://schemas.microsoft.com/office/drawing/2014/main" id="{384A8EEC-5EA4-4981-8326-0C99F33E6BDC}"/>
               </a:ext>
             </a:extLst>
           </p:cNvPr>
@@ -1554,7 +1554,7 @@
           <p:cNvPr id="11" name="2-Objetivos-head">
             <a:extLst xmlns:a="http://schemas.openxmlformats.org/drawingml/2006/main">
               <a:ext uri="{FF2B5EF4-FFF2-40B4-BE49-F238E27FC236}">
-                <a16:creationId xmlns:a16="http://schemas.microsoft.com/office/drawing/2014/main" id="{7305C25D-31CC-49FC-BE26-6CAC513807AA}"/>
+                <a16:creationId xmlns:a16="http://schemas.microsoft.com/office/drawing/2014/main" id="{296F6E8F-C2F5-49EA-A214-11D5BBB9812D}"/>
               </a:ext>
             </a:extLst>
           </p:cNvPr>
@@ -1587,7 +1587,7 @@
           <p:cNvPr id="12" name="2-Objetivos-title">
             <a:extLst xmlns:a="http://schemas.openxmlformats.org/drawingml/2006/main">
               <a:ext uri="{FF2B5EF4-FFF2-40B4-BE49-F238E27FC236}">
-                <a16:creationId xmlns:a16="http://schemas.microsoft.com/office/drawing/2014/main" id="{78DBD1C5-621C-4D27-BE1A-0DE4AB984E21}"/>
+                <a16:creationId xmlns:a16="http://schemas.microsoft.com/office/drawing/2014/main" id="{D34ACA97-174C-4145-A995-E62FDA6384B2}"/>
               </a:ext>
             </a:extLst>
           </p:cNvPr>
@@ -1637,7 +1637,7 @@
           <p:cNvPr id="13" name="2-Objetivos-body">
             <a:extLst xmlns:a="http://schemas.openxmlformats.org/drawingml/2006/main">
               <a:ext uri="{FF2B5EF4-FFF2-40B4-BE49-F238E27FC236}">
-                <a16:creationId xmlns:a16="http://schemas.microsoft.com/office/drawing/2014/main" id="{BB6FC541-32AD-4972-98C4-ED3B2475EC67}"/>
+                <a16:creationId xmlns:a16="http://schemas.microsoft.com/office/drawing/2014/main" id="{7E18A482-57A4-4190-A054-168B9FD01A1F}"/>
               </a:ext>
             </a:extLst>
           </p:cNvPr>
@@ -1721,7 +1721,7 @@
           <p:cNvPr id="14" name="3-Dados e indicadores-box">
             <a:extLst xmlns:a="http://schemas.openxmlformats.org/drawingml/2006/main">
               <a:ext uri="{FF2B5EF4-FFF2-40B4-BE49-F238E27FC236}">
-                <a16:creationId xmlns:a16="http://schemas.microsoft.com/office/drawing/2014/main" id="{89937819-C93E-486C-B51E-5F8AC13F1E70}"/>
+                <a16:creationId xmlns:a16="http://schemas.microsoft.com/office/drawing/2014/main" id="{01B24235-C246-40FC-AC1C-9C55B78BBB71}"/>
               </a:ext>
             </a:extLst>
           </p:cNvPr>
@@ -1754,7 +1754,7 @@
           <p:cNvPr id="15" name="3-Dados e indicadores-head">
             <a:extLst xmlns:a="http://schemas.openxmlformats.org/drawingml/2006/main">
               <a:ext uri="{FF2B5EF4-FFF2-40B4-BE49-F238E27FC236}">
-                <a16:creationId xmlns:a16="http://schemas.microsoft.com/office/drawing/2014/main" id="{C8DE8867-E8F3-45C7-9B13-1BDB36218D1D}"/>
+                <a16:creationId xmlns:a16="http://schemas.microsoft.com/office/drawing/2014/main" id="{5D920994-E62E-4EA9-8183-6499321EC68E}"/>
               </a:ext>
             </a:extLst>
           </p:cNvPr>
@@ -1787,7 +1787,7 @@
           <p:cNvPr id="16" name="3-Dados e indicadores-title">
             <a:extLst xmlns:a="http://schemas.openxmlformats.org/drawingml/2006/main">
               <a:ext uri="{FF2B5EF4-FFF2-40B4-BE49-F238E27FC236}">
-                <a16:creationId xmlns:a16="http://schemas.microsoft.com/office/drawing/2014/main" id="{B0A35ED4-4E34-4A3F-9B32-4B538F9F8B41}"/>
+                <a16:creationId xmlns:a16="http://schemas.microsoft.com/office/drawing/2014/main" id="{523DCF95-C6D0-4CDB-B94C-323E327C02AB}"/>
               </a:ext>
             </a:extLst>
           </p:cNvPr>
@@ -1837,7 +1837,7 @@
           <p:cNvPr id="17" name="3-Dados e indicadores-body">
             <a:extLst xmlns:a="http://schemas.openxmlformats.org/drawingml/2006/main">
               <a:ext uri="{FF2B5EF4-FFF2-40B4-BE49-F238E27FC236}">
-                <a16:creationId xmlns:a16="http://schemas.microsoft.com/office/drawing/2014/main" id="{0E12E79B-0DF7-4D81-B35B-AF15CAB6CB08}"/>
+                <a16:creationId xmlns:a16="http://schemas.microsoft.com/office/drawing/2014/main" id="{76CDC2D2-32ED-4D06-81C5-5E5527502CC6}"/>
               </a:ext>
             </a:extLst>
           </p:cNvPr>
@@ -1921,7 +1921,7 @@
           <p:cNvPr id="18" name="4-Plano amostral-box">
             <a:extLst xmlns:a="http://schemas.openxmlformats.org/drawingml/2006/main">
               <a:ext uri="{FF2B5EF4-FFF2-40B4-BE49-F238E27FC236}">
-                <a16:creationId xmlns:a16="http://schemas.microsoft.com/office/drawing/2014/main" id="{63FA882C-B879-41F0-B8EF-EC5F86EC3510}"/>
+                <a16:creationId xmlns:a16="http://schemas.microsoft.com/office/drawing/2014/main" id="{B616CBDD-EA79-4C6A-9B11-2CDB6A0954E4}"/>
               </a:ext>
             </a:extLst>
           </p:cNvPr>
@@ -1954,7 +1954,7 @@
           <p:cNvPr id="19" name="4-Plano amostral-head">
             <a:extLst xmlns:a="http://schemas.openxmlformats.org/drawingml/2006/main">
               <a:ext uri="{FF2B5EF4-FFF2-40B4-BE49-F238E27FC236}">
-                <a16:creationId xmlns:a16="http://schemas.microsoft.com/office/drawing/2014/main" id="{A148F3DC-D063-4E2D-822B-1C31E04399E3}"/>
+                <a16:creationId xmlns:a16="http://schemas.microsoft.com/office/drawing/2014/main" id="{F01C5A2E-17D7-4B08-A7B2-56277281F0BA}"/>
               </a:ext>
             </a:extLst>
           </p:cNvPr>
@@ -1987,7 +1987,7 @@
           <p:cNvPr id="20" name="4-Plano amostral-title">
             <a:extLst xmlns:a="http://schemas.openxmlformats.org/drawingml/2006/main">
               <a:ext uri="{FF2B5EF4-FFF2-40B4-BE49-F238E27FC236}">
-                <a16:creationId xmlns:a16="http://schemas.microsoft.com/office/drawing/2014/main" id="{53C63CE1-6CE7-4846-A80B-AEC81A5BE9AF}"/>
+                <a16:creationId xmlns:a16="http://schemas.microsoft.com/office/drawing/2014/main" id="{AA84CD32-4AA3-4D90-B3AA-6FBB137E5EC2}"/>
               </a:ext>
             </a:extLst>
           </p:cNvPr>
@@ -2037,7 +2037,7 @@
           <p:cNvPr id="21" name="4-Plano amostral-body">
             <a:extLst xmlns:a="http://schemas.openxmlformats.org/drawingml/2006/main">
               <a:ext uri="{FF2B5EF4-FFF2-40B4-BE49-F238E27FC236}">
-                <a16:creationId xmlns:a16="http://schemas.microsoft.com/office/drawing/2014/main" id="{F2D1E69E-AB1C-4832-814F-FDCF2F47BBD7}"/>
+                <a16:creationId xmlns:a16="http://schemas.microsoft.com/office/drawing/2014/main" id="{943DA42C-8B4C-469A-991B-A9C3846ED1A5}"/>
               </a:ext>
             </a:extLst>
           </p:cNvPr>
@@ -2138,7 +2138,7 @@
           <p:cNvPr id="22" name="classic-formula-box">
             <a:extLst xmlns:a="http://schemas.openxmlformats.org/drawingml/2006/main">
               <a:ext uri="{FF2B5EF4-FFF2-40B4-BE49-F238E27FC236}">
-                <a16:creationId xmlns:a16="http://schemas.microsoft.com/office/drawing/2014/main" id="{57D05FFB-7DD6-421E-AFC0-09D9719F9898}"/>
+                <a16:creationId xmlns:a16="http://schemas.microsoft.com/office/drawing/2014/main" id="{F05DB279-3730-44BD-810C-A3D2AD9BA18F}"/>
               </a:ext>
             </a:extLst>
           </p:cNvPr>
@@ -2171,7 +2171,7 @@
           <p:cNvPr id="23" name="classic-formula-title">
             <a:extLst xmlns:a="http://schemas.openxmlformats.org/drawingml/2006/main">
               <a:ext uri="{FF2B5EF4-FFF2-40B4-BE49-F238E27FC236}">
-                <a16:creationId xmlns:a16="http://schemas.microsoft.com/office/drawing/2014/main" id="{DE134DC2-49C3-485E-BCEA-55C2DABF1936}"/>
+                <a16:creationId xmlns:a16="http://schemas.microsoft.com/office/drawing/2014/main" id="{3B77EBDF-C95B-4D7D-9695-C06D597314B7}"/>
               </a:ext>
             </a:extLst>
           </p:cNvPr>
@@ -2221,7 +2221,7 @@
           <p:cNvPr id="24" name="classic-formula">
             <a:extLst xmlns:a="http://schemas.openxmlformats.org/drawingml/2006/main">
               <a:ext uri="{FF2B5EF4-FFF2-40B4-BE49-F238E27FC236}">
-                <a16:creationId xmlns:a16="http://schemas.microsoft.com/office/drawing/2014/main" id="{C1614553-3B11-4814-B400-18043FB0DEBD}"/>
+                <a16:creationId xmlns:a16="http://schemas.microsoft.com/office/drawing/2014/main" id="{397CB9EF-4BCD-44E4-9FE7-1A584647A544}"/>
               </a:ext>
             </a:extLst>
           </p:cNvPr>
@@ -2339,7 +2339,7 @@
           <p:cNvPr id="25" name="prev-metric">
             <a:extLst xmlns:a="http://schemas.openxmlformats.org/drawingml/2006/main">
               <a:ext uri="{FF2B5EF4-FFF2-40B4-BE49-F238E27FC236}">
-                <a16:creationId xmlns:a16="http://schemas.microsoft.com/office/drawing/2014/main" id="{255A12DF-D79F-4387-8813-036C2B7A6416}"/>
+                <a16:creationId xmlns:a16="http://schemas.microsoft.com/office/drawing/2014/main" id="{07C51561-AF44-4DBF-A48B-571CEDF657AB}"/>
               </a:ext>
             </a:extLst>
           </p:cNvPr>
@@ -2372,7 +2372,7 @@
           <p:cNvPr id="26" name="prev-metric-title">
             <a:extLst xmlns:a="http://schemas.openxmlformats.org/drawingml/2006/main">
               <a:ext uri="{FF2B5EF4-FFF2-40B4-BE49-F238E27FC236}">
-                <a16:creationId xmlns:a16="http://schemas.microsoft.com/office/drawing/2014/main" id="{4EA40E9A-925E-426B-940F-5F4E007A8002}"/>
+                <a16:creationId xmlns:a16="http://schemas.microsoft.com/office/drawing/2014/main" id="{3CD6FF19-F38C-476D-AF1E-33FC32C9ED58}"/>
               </a:ext>
             </a:extLst>
           </p:cNvPr>
@@ -2422,7 +2422,7 @@
           <p:cNvPr id="27" name="prev-metric-value">
             <a:extLst xmlns:a="http://schemas.openxmlformats.org/drawingml/2006/main">
               <a:ext uri="{FF2B5EF4-FFF2-40B4-BE49-F238E27FC236}">
-                <a16:creationId xmlns:a16="http://schemas.microsoft.com/office/drawing/2014/main" id="{8ABB9010-5E87-4FDD-9865-CC11225063C8}"/>
+                <a16:creationId xmlns:a16="http://schemas.microsoft.com/office/drawing/2014/main" id="{0B3C72C4-776A-4CA2-94ED-64E4B71CF318}"/>
               </a:ext>
             </a:extLst>
           </p:cNvPr>
@@ -2472,7 +2472,7 @@
           <p:cNvPr id="28" name="prev-metric-note">
             <a:extLst xmlns:a="http://schemas.openxmlformats.org/drawingml/2006/main">
               <a:ext uri="{FF2B5EF4-FFF2-40B4-BE49-F238E27FC236}">
-                <a16:creationId xmlns:a16="http://schemas.microsoft.com/office/drawing/2014/main" id="{E3A82923-55FD-45A9-914D-1C44D341EC21}"/>
+                <a16:creationId xmlns:a16="http://schemas.microsoft.com/office/drawing/2014/main" id="{FD26ACB1-7E04-4739-AD23-46A8ED4B2AAE}"/>
               </a:ext>
             </a:extLst>
           </p:cNvPr>
@@ -2522,7 +2522,7 @@
           <p:cNvPr id="29" name="crisis-metric">
             <a:extLst xmlns:a="http://schemas.openxmlformats.org/drawingml/2006/main">
               <a:ext uri="{FF2B5EF4-FFF2-40B4-BE49-F238E27FC236}">
-                <a16:creationId xmlns:a16="http://schemas.microsoft.com/office/drawing/2014/main" id="{9AC74D9B-B790-4765-BD2E-ECD21DB8519C}"/>
+                <a16:creationId xmlns:a16="http://schemas.microsoft.com/office/drawing/2014/main" id="{14C6EB8A-DDF6-4E62-88BB-B86F52281BAD}"/>
               </a:ext>
             </a:extLst>
           </p:cNvPr>
@@ -2555,7 +2555,7 @@
           <p:cNvPr id="30" name="crisis-metric-title">
             <a:extLst xmlns:a="http://schemas.openxmlformats.org/drawingml/2006/main">
               <a:ext uri="{FF2B5EF4-FFF2-40B4-BE49-F238E27FC236}">
-                <a16:creationId xmlns:a16="http://schemas.microsoft.com/office/drawing/2014/main" id="{83348651-6D61-4937-925A-D8AF6A1ABD51}"/>
+                <a16:creationId xmlns:a16="http://schemas.microsoft.com/office/drawing/2014/main" id="{7EDB4949-1587-43A1-88B5-9D6DFBE7B169}"/>
               </a:ext>
             </a:extLst>
           </p:cNvPr>
@@ -2605,7 +2605,7 @@
           <p:cNvPr id="31" name="crisis-metric-value">
             <a:extLst xmlns:a="http://schemas.openxmlformats.org/drawingml/2006/main">
               <a:ext uri="{FF2B5EF4-FFF2-40B4-BE49-F238E27FC236}">
-                <a16:creationId xmlns:a16="http://schemas.microsoft.com/office/drawing/2014/main" id="{E9A59CC7-68C8-4963-80BA-D770372A71F3}"/>
+                <a16:creationId xmlns:a16="http://schemas.microsoft.com/office/drawing/2014/main" id="{7500F16E-B017-403D-AD38-C1CC8EB6D805}"/>
               </a:ext>
             </a:extLst>
           </p:cNvPr>
@@ -2655,7 +2655,7 @@
           <p:cNvPr id="32" name="crisis-metric-note">
             <a:extLst xmlns:a="http://schemas.openxmlformats.org/drawingml/2006/main">
               <a:ext uri="{FF2B5EF4-FFF2-40B4-BE49-F238E27FC236}">
-                <a16:creationId xmlns:a16="http://schemas.microsoft.com/office/drawing/2014/main" id="{F896AE32-B596-481B-9D97-7D7A28001E3B}"/>
+                <a16:creationId xmlns:a16="http://schemas.microsoft.com/office/drawing/2014/main" id="{5151B75D-C88B-4B08-99E0-1E47ACB5830B}"/>
               </a:ext>
             </a:extLst>
           </p:cNvPr>
@@ -2705,7 +2705,7 @@
           <p:cNvPr id="33" name="chart-prev-caption">
             <a:extLst xmlns:a="http://schemas.openxmlformats.org/drawingml/2006/main">
               <a:ext uri="{FF2B5EF4-FFF2-40B4-BE49-F238E27FC236}">
-                <a16:creationId xmlns:a16="http://schemas.microsoft.com/office/drawing/2014/main" id="{154A5B43-2E9D-4FF0-9DF1-C9C7DE5A85BC}"/>
+                <a16:creationId xmlns:a16="http://schemas.microsoft.com/office/drawing/2014/main" id="{743F2ACD-5B9B-466F-9F64-B08E790BFF90}"/>
               </a:ext>
             </a:extLst>
           </p:cNvPr>
@@ -2755,7 +2755,7 @@
           <p:cNvPr id="34" name="chart-prev-frame">
             <a:extLst xmlns:a="http://schemas.openxmlformats.org/drawingml/2006/main">
               <a:ext uri="{FF2B5EF4-FFF2-40B4-BE49-F238E27FC236}">
-                <a16:creationId xmlns:a16="http://schemas.microsoft.com/office/drawing/2014/main" id="{12906E0D-247E-49BF-89C3-81C1D3178E41}"/>
+                <a16:creationId xmlns:a16="http://schemas.microsoft.com/office/drawing/2014/main" id="{3CE9CC30-2DA7-49CC-BDAC-B566C18B2B85}"/>
               </a:ext>
             </a:extLst>
           </p:cNvPr>
@@ -2792,7 +2792,7 @@
           <p:nvPr/>
         </p:nvPicPr>
         <p:blipFill>
-          <a:blip xmlns:r="http://schemas.openxmlformats.org/officeDocument/2006/relationships" xmlns:a="http://schemas.openxmlformats.org/drawingml/2006/main" r:embed="Ra921f0394562494d"/>
+          <a:blip xmlns:r="http://schemas.openxmlformats.org/officeDocument/2006/relationships" xmlns:a="http://schemas.openxmlformats.org/drawingml/2006/main" r:embed="R5f68bf29912840af"/>
           <a:stretch xmlns:a="http://schemas.openxmlformats.org/drawingml/2006/main"/>
         </p:blipFill>
         <p:spPr>
@@ -2810,7 +2810,7 @@
           <p:cNvPr id="36" name="chart-crisis-caption">
             <a:extLst xmlns:a="http://schemas.openxmlformats.org/drawingml/2006/main">
               <a:ext uri="{FF2B5EF4-FFF2-40B4-BE49-F238E27FC236}">
-                <a16:creationId xmlns:a16="http://schemas.microsoft.com/office/drawing/2014/main" id="{06DE07B8-2C3F-4F74-96A0-0B7E6845A949}"/>
+                <a16:creationId xmlns:a16="http://schemas.microsoft.com/office/drawing/2014/main" id="{38B578AA-1702-4443-9E2D-8941D9B406D0}"/>
               </a:ext>
             </a:extLst>
           </p:cNvPr>
@@ -2860,7 +2860,7 @@
           <p:cNvPr id="37" name="chart-crisis-frame">
             <a:extLst xmlns:a="http://schemas.openxmlformats.org/drawingml/2006/main">
               <a:ext uri="{FF2B5EF4-FFF2-40B4-BE49-F238E27FC236}">
-                <a16:creationId xmlns:a16="http://schemas.microsoft.com/office/drawing/2014/main" id="{50DD855C-F825-449B-95A8-48E75BCC13AC}"/>
+                <a16:creationId xmlns:a16="http://schemas.microsoft.com/office/drawing/2014/main" id="{D2A65015-D607-4CD6-9B41-579C96CDC012}"/>
               </a:ext>
             </a:extLst>
           </p:cNvPr>
@@ -2897,7 +2897,7 @@
           <p:nvPr/>
         </p:nvPicPr>
         <p:blipFill>
-          <a:blip xmlns:r="http://schemas.openxmlformats.org/officeDocument/2006/relationships" xmlns:a="http://schemas.openxmlformats.org/drawingml/2006/main" r:embed="Rb9ee1f8a78ad4467"/>
+          <a:blip xmlns:r="http://schemas.openxmlformats.org/officeDocument/2006/relationships" xmlns:a="http://schemas.openxmlformats.org/drawingml/2006/main" r:embed="R11b3c868e4374742"/>
           <a:stretch xmlns:a="http://schemas.openxmlformats.org/drawingml/2006/main"/>
         </p:blipFill>
         <p:spPr>
@@ -2915,7 +2915,7 @@
           <p:cNvPr id="39" name="5-Discussão-box">
             <a:extLst xmlns:a="http://schemas.openxmlformats.org/drawingml/2006/main">
               <a:ext uri="{FF2B5EF4-FFF2-40B4-BE49-F238E27FC236}">
-                <a16:creationId xmlns:a16="http://schemas.microsoft.com/office/drawing/2014/main" id="{C3BEC3C5-4D8E-4F22-8F22-23AAE5825CB1}"/>
+                <a16:creationId xmlns:a16="http://schemas.microsoft.com/office/drawing/2014/main" id="{FD430BD8-4BF9-4F36-B5BB-D6D71FBCEB2A}"/>
               </a:ext>
             </a:extLst>
           </p:cNvPr>
@@ -2948,7 +2948,7 @@
           <p:cNvPr id="40" name="5-Discussão-head">
             <a:extLst xmlns:a="http://schemas.openxmlformats.org/drawingml/2006/main">
               <a:ext uri="{FF2B5EF4-FFF2-40B4-BE49-F238E27FC236}">
-                <a16:creationId xmlns:a16="http://schemas.microsoft.com/office/drawing/2014/main" id="{051903AE-0955-448C-AC6B-E4B32661A599}"/>
+                <a16:creationId xmlns:a16="http://schemas.microsoft.com/office/drawing/2014/main" id="{01637222-F4C3-46C2-BFE2-88A62E79F618}"/>
               </a:ext>
             </a:extLst>
           </p:cNvPr>
@@ -2981,7 +2981,7 @@
           <p:cNvPr id="41" name="5-Discussão-title">
             <a:extLst xmlns:a="http://schemas.openxmlformats.org/drawingml/2006/main">
               <a:ext uri="{FF2B5EF4-FFF2-40B4-BE49-F238E27FC236}">
-                <a16:creationId xmlns:a16="http://schemas.microsoft.com/office/drawing/2014/main" id="{6CF9E2FB-C577-4574-94FF-43A651055E92}"/>
+                <a16:creationId xmlns:a16="http://schemas.microsoft.com/office/drawing/2014/main" id="{72FDF235-01D2-4D91-943A-325A31D25C47}"/>
               </a:ext>
             </a:extLst>
           </p:cNvPr>
@@ -3031,7 +3031,7 @@
           <p:cNvPr id="42" name="5-Discussão-body">
             <a:extLst xmlns:a="http://schemas.openxmlformats.org/drawingml/2006/main">
               <a:ext uri="{FF2B5EF4-FFF2-40B4-BE49-F238E27FC236}">
-                <a16:creationId xmlns:a16="http://schemas.microsoft.com/office/drawing/2014/main" id="{4A217904-FC2C-4B02-A9D7-5439EAA0A660}"/>
+                <a16:creationId xmlns:a16="http://schemas.microsoft.com/office/drawing/2014/main" id="{C9C43F36-B855-4E4B-B156-BA2B4FB782DC}"/>
               </a:ext>
             </a:extLst>
           </p:cNvPr>
@@ -3115,7 +3115,7 @@
           <p:cNvPr id="43" name="meds-metric">
             <a:extLst xmlns:a="http://schemas.openxmlformats.org/drawingml/2006/main">
               <a:ext uri="{FF2B5EF4-FFF2-40B4-BE49-F238E27FC236}">
-                <a16:creationId xmlns:a16="http://schemas.microsoft.com/office/drawing/2014/main" id="{24C12171-7D5E-4F29-BAA4-1989626D23E5}"/>
+                <a16:creationId xmlns:a16="http://schemas.microsoft.com/office/drawing/2014/main" id="{0A775D22-414E-452E-9461-064E8EEF0746}"/>
               </a:ext>
             </a:extLst>
           </p:cNvPr>
@@ -3148,7 +3148,7 @@
           <p:cNvPr id="44" name="meds-metric-title">
             <a:extLst xmlns:a="http://schemas.openxmlformats.org/drawingml/2006/main">
               <a:ext uri="{FF2B5EF4-FFF2-40B4-BE49-F238E27FC236}">
-                <a16:creationId xmlns:a16="http://schemas.microsoft.com/office/drawing/2014/main" id="{B69764B6-C1B9-4D3E-9AE9-E6440687EE49}"/>
+                <a16:creationId xmlns:a16="http://schemas.microsoft.com/office/drawing/2014/main" id="{C939AEF3-384B-4DC7-8CC0-B0090089C947}"/>
               </a:ext>
             </a:extLst>
           </p:cNvPr>
@@ -3198,7 +3198,7 @@
           <p:cNvPr id="45" name="meds-metric-value">
             <a:extLst xmlns:a="http://schemas.openxmlformats.org/drawingml/2006/main">
               <a:ext uri="{FF2B5EF4-FFF2-40B4-BE49-F238E27FC236}">
-                <a16:creationId xmlns:a16="http://schemas.microsoft.com/office/drawing/2014/main" id="{C3A3CA06-D144-48C5-8ED8-A8F1581F8B59}"/>
+                <a16:creationId xmlns:a16="http://schemas.microsoft.com/office/drawing/2014/main" id="{AB3098A7-0EF0-4EC6-BFC2-E6A96935597B}"/>
               </a:ext>
             </a:extLst>
           </p:cNvPr>
@@ -3248,7 +3248,7 @@
           <p:cNvPr id="46" name="meds-metric-note">
             <a:extLst xmlns:a="http://schemas.openxmlformats.org/drawingml/2006/main">
               <a:ext uri="{FF2B5EF4-FFF2-40B4-BE49-F238E27FC236}">
-                <a16:creationId xmlns:a16="http://schemas.microsoft.com/office/drawing/2014/main" id="{56183BB9-F937-4B0C-ABD5-52FAF6C10C67}"/>
+                <a16:creationId xmlns:a16="http://schemas.microsoft.com/office/drawing/2014/main" id="{1686A08A-57C1-436E-8514-B6766F467ACB}"/>
               </a:ext>
             </a:extLst>
           </p:cNvPr>
@@ -3298,7 +3298,7 @@
           <p:cNvPr id="47" name="chart-meds-caption">
             <a:extLst xmlns:a="http://schemas.openxmlformats.org/drawingml/2006/main">
               <a:ext uri="{FF2B5EF4-FFF2-40B4-BE49-F238E27FC236}">
-                <a16:creationId xmlns:a16="http://schemas.microsoft.com/office/drawing/2014/main" id="{B8470D87-A1D0-4545-83E4-17E7568DC92A}"/>
+                <a16:creationId xmlns:a16="http://schemas.microsoft.com/office/drawing/2014/main" id="{AAF83D9E-412E-4220-A492-4D415D6D8C53}"/>
               </a:ext>
             </a:extLst>
           </p:cNvPr>
@@ -3348,7 +3348,7 @@
           <p:cNvPr id="48" name="chart-meds-frame">
             <a:extLst xmlns:a="http://schemas.openxmlformats.org/drawingml/2006/main">
               <a:ext uri="{FF2B5EF4-FFF2-40B4-BE49-F238E27FC236}">
-                <a16:creationId xmlns:a16="http://schemas.microsoft.com/office/drawing/2014/main" id="{776DA4F3-0F6F-4482-BD16-6E3AC6456AAD}"/>
+                <a16:creationId xmlns:a16="http://schemas.microsoft.com/office/drawing/2014/main" id="{8567D0DB-02BE-4D05-AC5C-27B1558CBA71}"/>
               </a:ext>
             </a:extLst>
           </p:cNvPr>
@@ -3385,13 +3385,13 @@
           <p:nvPr/>
         </p:nvPicPr>
         <p:blipFill>
-          <a:blip xmlns:r="http://schemas.openxmlformats.org/officeDocument/2006/relationships" xmlns:a="http://schemas.openxmlformats.org/drawingml/2006/main" r:embed="R366cd52e6f0447dc"/>
+          <a:blip xmlns:r="http://schemas.openxmlformats.org/officeDocument/2006/relationships" xmlns:a="http://schemas.openxmlformats.org/drawingml/2006/main" r:embed="R6d52b9f75aa94281"/>
           <a:stretch xmlns:a="http://schemas.openxmlformats.org/drawingml/2006/main"/>
         </p:blipFill>
         <p:spPr>
           <a:xfrm xmlns:a="http://schemas.openxmlformats.org/drawingml/2006/main">
-            <a:off x="6410390" y="3676650"/>
-            <a:ext cx="2749420" cy="1981200"/>
+            <a:off x="6407150" y="3684712"/>
+            <a:ext cx="2755900" cy="1965077"/>
           </a:xfrm>
           <a:prstGeom xmlns:a="http://schemas.openxmlformats.org/drawingml/2006/main" prst="rect">
             <a:avLst/>
@@ -3403,7 +3403,7 @@
           <p:cNvPr id="50" name="chart-smoke-caption">
             <a:extLst xmlns:a="http://schemas.openxmlformats.org/drawingml/2006/main">
               <a:ext uri="{FF2B5EF4-FFF2-40B4-BE49-F238E27FC236}">
-                <a16:creationId xmlns:a16="http://schemas.microsoft.com/office/drawing/2014/main" id="{CA25F033-7968-4767-8959-6DAD89917E02}"/>
+                <a16:creationId xmlns:a16="http://schemas.microsoft.com/office/drawing/2014/main" id="{28493A06-057A-471C-908C-313742BC044B}"/>
               </a:ext>
             </a:extLst>
           </p:cNvPr>
@@ -3453,7 +3453,7 @@
           <p:cNvPr id="51" name="chart-smoke-frame">
             <a:extLst xmlns:a="http://schemas.openxmlformats.org/drawingml/2006/main">
               <a:ext uri="{FF2B5EF4-FFF2-40B4-BE49-F238E27FC236}">
-                <a16:creationId xmlns:a16="http://schemas.microsoft.com/office/drawing/2014/main" id="{F9F2BA56-05AA-457F-88D8-3608889EADC4}"/>
+                <a16:creationId xmlns:a16="http://schemas.microsoft.com/office/drawing/2014/main" id="{66628A65-CDD6-40BB-B284-243A502FD504}"/>
               </a:ext>
             </a:extLst>
           </p:cNvPr>
@@ -3490,7 +3490,7 @@
           <p:nvPr/>
         </p:nvPicPr>
         <p:blipFill>
-          <a:blip xmlns:r="http://schemas.openxmlformats.org/officeDocument/2006/relationships" xmlns:a="http://schemas.openxmlformats.org/drawingml/2006/main" r:embed="R3d0a40feb29b41c2"/>
+          <a:blip xmlns:r="http://schemas.openxmlformats.org/officeDocument/2006/relationships" xmlns:a="http://schemas.openxmlformats.org/drawingml/2006/main" r:embed="R48fca81eec4d417b"/>
           <a:stretch xmlns:a="http://schemas.openxmlformats.org/drawingml/2006/main"/>
         </p:blipFill>
         <p:spPr>
@@ -3508,7 +3508,7 @@
           <p:cNvPr id="53" name="6-IC beta e leitura dos gráficos-box">
             <a:extLst xmlns:a="http://schemas.openxmlformats.org/drawingml/2006/main">
               <a:ext uri="{FF2B5EF4-FFF2-40B4-BE49-F238E27FC236}">
-                <a16:creationId xmlns:a16="http://schemas.microsoft.com/office/drawing/2014/main" id="{F71F85BE-6170-4850-89EE-55A6E7FFB509}"/>
+                <a16:creationId xmlns:a16="http://schemas.microsoft.com/office/drawing/2014/main" id="{CE0C7DAB-755B-415B-8188-D7E2FE8FAE6F}"/>
               </a:ext>
             </a:extLst>
           </p:cNvPr>
@@ -3541,7 +3541,7 @@
           <p:cNvPr id="54" name="6-IC beta e leitura dos gráficos-head">
             <a:extLst xmlns:a="http://schemas.openxmlformats.org/drawingml/2006/main">
               <a:ext uri="{FF2B5EF4-FFF2-40B4-BE49-F238E27FC236}">
-                <a16:creationId xmlns:a16="http://schemas.microsoft.com/office/drawing/2014/main" id="{7407054B-2A06-488E-A9D4-C763E816C854}"/>
+                <a16:creationId xmlns:a16="http://schemas.microsoft.com/office/drawing/2014/main" id="{CA4BD9E2-7B76-4D98-9B89-EA47F9B52F9F}"/>
               </a:ext>
             </a:extLst>
           </p:cNvPr>
@@ -3574,7 +3574,7 @@
           <p:cNvPr id="55" name="6-IC beta e leitura dos gráficos-title">
             <a:extLst xmlns:a="http://schemas.openxmlformats.org/drawingml/2006/main">
               <a:ext uri="{FF2B5EF4-FFF2-40B4-BE49-F238E27FC236}">
-                <a16:creationId xmlns:a16="http://schemas.microsoft.com/office/drawing/2014/main" id="{6F9B3CB1-8D40-4B23-91B9-92AAC75C9297}"/>
+                <a16:creationId xmlns:a16="http://schemas.microsoft.com/office/drawing/2014/main" id="{27353677-76CF-4260-AEEA-D2262E6F8413}"/>
               </a:ext>
             </a:extLst>
           </p:cNvPr>
@@ -3624,7 +3624,7 @@
           <p:cNvPr id="56" name="6-IC beta e leitura dos gráficos-body">
             <a:extLst xmlns:a="http://schemas.openxmlformats.org/drawingml/2006/main">
               <a:ext uri="{FF2B5EF4-FFF2-40B4-BE49-F238E27FC236}">
-                <a16:creationId xmlns:a16="http://schemas.microsoft.com/office/drawing/2014/main" id="{52A87A28-79CD-4D23-9F2E-28D8477826A9}"/>
+                <a16:creationId xmlns:a16="http://schemas.microsoft.com/office/drawing/2014/main" id="{0CB93CCB-8D1D-4A6E-A1E2-480481EFCE91}"/>
               </a:ext>
             </a:extLst>
           </p:cNvPr>
@@ -3708,7 +3708,7 @@
           <p:cNvPr id="57" name="7-Impacto econômico-box">
             <a:extLst xmlns:a="http://schemas.openxmlformats.org/drawingml/2006/main">
               <a:ext uri="{FF2B5EF4-FFF2-40B4-BE49-F238E27FC236}">
-                <a16:creationId xmlns:a16="http://schemas.microsoft.com/office/drawing/2014/main" id="{46BFBD7A-D5C7-4BC6-9DF7-157923B1F69D}"/>
+                <a16:creationId xmlns:a16="http://schemas.microsoft.com/office/drawing/2014/main" id="{80E3AD67-DC80-4DD7-BEC0-EED92F922084}"/>
               </a:ext>
             </a:extLst>
           </p:cNvPr>
@@ -3741,7 +3741,7 @@
           <p:cNvPr id="58" name="7-Impacto econômico-head">
             <a:extLst xmlns:a="http://schemas.openxmlformats.org/drawingml/2006/main">
               <a:ext uri="{FF2B5EF4-FFF2-40B4-BE49-F238E27FC236}">
-                <a16:creationId xmlns:a16="http://schemas.microsoft.com/office/drawing/2014/main" id="{1B85F1C8-8E60-401C-9429-32A1D2E8A39D}"/>
+                <a16:creationId xmlns:a16="http://schemas.microsoft.com/office/drawing/2014/main" id="{53D237FE-3E87-4C2E-96D3-855A125EA7F7}"/>
               </a:ext>
             </a:extLst>
           </p:cNvPr>
@@ -3774,7 +3774,7 @@
           <p:cNvPr id="59" name="7-Impacto econômico-title">
             <a:extLst xmlns:a="http://schemas.openxmlformats.org/drawingml/2006/main">
               <a:ext uri="{FF2B5EF4-FFF2-40B4-BE49-F238E27FC236}">
-                <a16:creationId xmlns:a16="http://schemas.microsoft.com/office/drawing/2014/main" id="{74BACE42-DC1D-4149-8F4A-1C8583059103}"/>
+                <a16:creationId xmlns:a16="http://schemas.microsoft.com/office/drawing/2014/main" id="{B5C4B0B1-401A-480F-A810-AE2983B0C8E4}"/>
               </a:ext>
             </a:extLst>
           </p:cNvPr>
@@ -3824,7 +3824,7 @@
           <p:cNvPr id="60" name="7-Impacto econômico-body">
             <a:extLst xmlns:a="http://schemas.openxmlformats.org/drawingml/2006/main">
               <a:ext uri="{FF2B5EF4-FFF2-40B4-BE49-F238E27FC236}">
-                <a16:creationId xmlns:a16="http://schemas.microsoft.com/office/drawing/2014/main" id="{5008D7FB-55D8-4AD9-8A68-89A076F63622}"/>
+                <a16:creationId xmlns:a16="http://schemas.microsoft.com/office/drawing/2014/main" id="{7616BC5A-FC4B-44E4-A3F5-655724E28B5E}"/>
               </a:ext>
             </a:extLst>
           </p:cNvPr>
@@ -3891,7 +3891,7 @@
           <p:cNvPr id="61" name="8-ETL, OMOP e OHDSI-box">
             <a:extLst xmlns:a="http://schemas.openxmlformats.org/drawingml/2006/main">
               <a:ext uri="{FF2B5EF4-FFF2-40B4-BE49-F238E27FC236}">
-                <a16:creationId xmlns:a16="http://schemas.microsoft.com/office/drawing/2014/main" id="{62E1B3D4-7ECC-46D3-8DC4-DE4B66F6A3A1}"/>
+                <a16:creationId xmlns:a16="http://schemas.microsoft.com/office/drawing/2014/main" id="{D87689DA-4AAE-48B9-AF9F-05A5D88EB974}"/>
               </a:ext>
             </a:extLst>
           </p:cNvPr>
@@ -3924,7 +3924,7 @@
           <p:cNvPr id="62" name="8-ETL, OMOP e OHDSI-head">
             <a:extLst xmlns:a="http://schemas.openxmlformats.org/drawingml/2006/main">
               <a:ext uri="{FF2B5EF4-FFF2-40B4-BE49-F238E27FC236}">
-                <a16:creationId xmlns:a16="http://schemas.microsoft.com/office/drawing/2014/main" id="{ACB1ACDB-7C7C-4F39-81D1-E5A16C6F8826}"/>
+                <a16:creationId xmlns:a16="http://schemas.microsoft.com/office/drawing/2014/main" id="{B765065A-A61E-43F8-91CC-C1F1B9EAF2BE}"/>
               </a:ext>
             </a:extLst>
           </p:cNvPr>
@@ -3957,7 +3957,7 @@
           <p:cNvPr id="63" name="8-ETL, OMOP e OHDSI-title">
             <a:extLst xmlns:a="http://schemas.openxmlformats.org/drawingml/2006/main">
               <a:ext uri="{FF2B5EF4-FFF2-40B4-BE49-F238E27FC236}">
-                <a16:creationId xmlns:a16="http://schemas.microsoft.com/office/drawing/2014/main" id="{A47C1FA1-41AD-47A6-90BA-A1F47869E205}"/>
+                <a16:creationId xmlns:a16="http://schemas.microsoft.com/office/drawing/2014/main" id="{B71C3D13-7137-4F39-9F07-9CDF44BBD5EC}"/>
               </a:ext>
             </a:extLst>
           </p:cNvPr>
@@ -4007,7 +4007,7 @@
           <p:cNvPr id="64" name="8-ETL, OMOP e OHDSI-body">
             <a:extLst xmlns:a="http://schemas.openxmlformats.org/drawingml/2006/main">
               <a:ext uri="{FF2B5EF4-FFF2-40B4-BE49-F238E27FC236}">
-                <a16:creationId xmlns:a16="http://schemas.microsoft.com/office/drawing/2014/main" id="{5AB6D578-9ADA-42B3-B88E-D6596A7CF48E}"/>
+                <a16:creationId xmlns:a16="http://schemas.microsoft.com/office/drawing/2014/main" id="{5FC3409E-C53B-4C4C-88B6-AFBC2A25E678}"/>
               </a:ext>
             </a:extLst>
           </p:cNvPr>
@@ -4091,7 +4091,7 @@
           <p:cNvPr id="65" name="9-Conclusões-box">
             <a:extLst xmlns:a="http://schemas.openxmlformats.org/drawingml/2006/main">
               <a:ext uri="{FF2B5EF4-FFF2-40B4-BE49-F238E27FC236}">
-                <a16:creationId xmlns:a16="http://schemas.microsoft.com/office/drawing/2014/main" id="{D98745C6-26F7-4923-BA1C-0962196A1E20}"/>
+                <a16:creationId xmlns:a16="http://schemas.microsoft.com/office/drawing/2014/main" id="{382E1D33-47E0-4AC5-BEEF-22690E3E7BA4}"/>
               </a:ext>
             </a:extLst>
           </p:cNvPr>
@@ -4124,7 +4124,7 @@
           <p:cNvPr id="66" name="9-Conclusões-head">
             <a:extLst xmlns:a="http://schemas.openxmlformats.org/drawingml/2006/main">
               <a:ext uri="{FF2B5EF4-FFF2-40B4-BE49-F238E27FC236}">
-                <a16:creationId xmlns:a16="http://schemas.microsoft.com/office/drawing/2014/main" id="{D0A74FA3-7EEE-440F-8775-EC90A12A5717}"/>
+                <a16:creationId xmlns:a16="http://schemas.microsoft.com/office/drawing/2014/main" id="{ED5D4A24-0ACD-4CEB-8C62-E03F6DFBE0E3}"/>
               </a:ext>
             </a:extLst>
           </p:cNvPr>
@@ -4157,7 +4157,7 @@
           <p:cNvPr id="67" name="9-Conclusões-title">
             <a:extLst xmlns:a="http://schemas.openxmlformats.org/drawingml/2006/main">
               <a:ext uri="{FF2B5EF4-FFF2-40B4-BE49-F238E27FC236}">
-                <a16:creationId xmlns:a16="http://schemas.microsoft.com/office/drawing/2014/main" id="{9FFC5BF5-059E-4DE8-AF7A-846D0713C48C}"/>
+                <a16:creationId xmlns:a16="http://schemas.microsoft.com/office/drawing/2014/main" id="{BCD0D1D5-BEAF-441D-94F0-1BEC22CC0177}"/>
               </a:ext>
             </a:extLst>
           </p:cNvPr>
@@ -4207,7 +4207,7 @@
           <p:cNvPr id="68" name="9-Conclusões-body">
             <a:extLst xmlns:a="http://schemas.openxmlformats.org/drawingml/2006/main">
               <a:ext uri="{FF2B5EF4-FFF2-40B4-BE49-F238E27FC236}">
-                <a16:creationId xmlns:a16="http://schemas.microsoft.com/office/drawing/2014/main" id="{81755CEB-67EE-44B8-B567-C7371A54FBF1}"/>
+                <a16:creationId xmlns:a16="http://schemas.microsoft.com/office/drawing/2014/main" id="{60C2C45D-677E-4237-B040-94EE3AEB3B6D}"/>
               </a:ext>
             </a:extLst>
           </p:cNvPr>
@@ -4291,7 +4291,7 @@
           <p:cNvPr id="69" name="references-box">
             <a:extLst xmlns:a="http://schemas.openxmlformats.org/drawingml/2006/main">
               <a:ext uri="{FF2B5EF4-FFF2-40B4-BE49-F238E27FC236}">
-                <a16:creationId xmlns:a16="http://schemas.microsoft.com/office/drawing/2014/main" id="{A360AE3D-4455-47B0-9324-B930CB505F91}"/>
+                <a16:creationId xmlns:a16="http://schemas.microsoft.com/office/drawing/2014/main" id="{6CADF53F-807C-4683-87E2-B621983B2BFA}"/>
               </a:ext>
             </a:extLst>
           </p:cNvPr>
@@ -4324,7 +4324,7 @@
           <p:cNvPr id="70" name="references-title">
             <a:extLst xmlns:a="http://schemas.openxmlformats.org/drawingml/2006/main">
               <a:ext uri="{FF2B5EF4-FFF2-40B4-BE49-F238E27FC236}">
-                <a16:creationId xmlns:a16="http://schemas.microsoft.com/office/drawing/2014/main" id="{C8894CE8-DDFC-4240-8113-B47EE3DE844C}"/>
+                <a16:creationId xmlns:a16="http://schemas.microsoft.com/office/drawing/2014/main" id="{A57348DC-C009-4724-B9BF-87EBB145DBFE}"/>
               </a:ext>
             </a:extLst>
           </p:cNvPr>
@@ -4374,7 +4374,7 @@
           <p:cNvPr id="71" name="references-body">
             <a:extLst xmlns:a="http://schemas.openxmlformats.org/drawingml/2006/main">
               <a:ext uri="{FF2B5EF4-FFF2-40B4-BE49-F238E27FC236}">
-                <a16:creationId xmlns:a16="http://schemas.microsoft.com/office/drawing/2014/main" id="{CACC05A6-FC0C-4B7D-883E-58707F9ACC9B}"/>
+                <a16:creationId xmlns:a16="http://schemas.microsoft.com/office/drawing/2014/main" id="{2ABDB9A8-5065-405E-BBA7-2F3C076D3F7C}"/>
               </a:ext>
             </a:extLst>
           </p:cNvPr>
@@ -4628,7 +4628,7 @@
           <p:cNvPr id="72" name="qr-box">
             <a:extLst xmlns:a="http://schemas.openxmlformats.org/drawingml/2006/main">
               <a:ext uri="{FF2B5EF4-FFF2-40B4-BE49-F238E27FC236}">
-                <a16:creationId xmlns:a16="http://schemas.microsoft.com/office/drawing/2014/main" id="{7B140C84-DD46-40CF-BF09-F3B28E2D9B26}"/>
+                <a16:creationId xmlns:a16="http://schemas.microsoft.com/office/drawing/2014/main" id="{F3322DAE-A3BE-4302-B201-DBB3D4E1B0E6}"/>
               </a:ext>
             </a:extLst>
           </p:cNvPr>
@@ -4665,7 +4665,7 @@
           <p:nvPr/>
         </p:nvPicPr>
         <p:blipFill>
-          <a:blip xmlns:r="http://schemas.openxmlformats.org/officeDocument/2006/relationships" xmlns:a="http://schemas.openxmlformats.org/drawingml/2006/main" r:embed="Raaf4693416e241bd"/>
+          <a:blip xmlns:r="http://schemas.openxmlformats.org/officeDocument/2006/relationships" xmlns:a="http://schemas.openxmlformats.org/drawingml/2006/main" r:embed="Ref5c5ab6bca14edf"/>
           <a:stretch xmlns:a="http://schemas.openxmlformats.org/drawingml/2006/main"/>
         </p:blipFill>
         <p:spPr>
@@ -4683,7 +4683,7 @@
           <p:cNvPr id="74" name="qr-label">
             <a:extLst xmlns:a="http://schemas.openxmlformats.org/drawingml/2006/main">
               <a:ext uri="{FF2B5EF4-FFF2-40B4-BE49-F238E27FC236}">
-                <a16:creationId xmlns:a16="http://schemas.microsoft.com/office/drawing/2014/main" id="{96F46899-06C1-4543-A8D6-973D233792E7}"/>
+                <a16:creationId xmlns:a16="http://schemas.microsoft.com/office/drawing/2014/main" id="{F383FF64-8206-44D2-BAFA-E7FD0C93BEFD}"/>
               </a:ext>
             </a:extLst>
           </p:cNvPr>
@@ -4748,7 +4748,7 @@
     </p:spTree>
     <p:extLst>
       <p:ext uri="{BB962C8B-B14F-4D97-AF65-F5344CB8AC3E}">
-        <p14:creationId xmlns:p14="http://schemas.microsoft.com/office/powerpoint/2010/main" val="1374996243"/>
+        <p14:creationId xmlns:p14="http://schemas.microsoft.com/office/powerpoint/2010/main" val="294589800"/>
       </p:ext>
     </p:extLst>
   </p:cSld>
